--- a/slides/session-01/session-01.pptx
+++ b/slides/session-01/session-01.pptx
@@ -31,6 +31,7 @@
     <p:sldId id="279" r:id="rId29"/>
     <p:sldId id="280" r:id="rId30"/>
     <p:sldId id="281" r:id="rId31"/>
+    <p:sldId id="282" r:id="rId32"/>
   </p:sldIdLst>
   <p:sldSz cx="12192000" cy="6858000"/>
   <p:notesSz cx="6858000" cy="9144000"/>
@@ -24617,7 +24618,7 @@
         <p:spPr>
           <a:xfrm>
             <a:off x="731520" y="3794760"/>
-            <a:ext cx="3657600" cy="2560320"/>
+            <a:ext cx="3657600" cy="2011680"/>
           </a:xfrm>
           <a:prstGeom prst="rect">
             <a:avLst/>
@@ -24698,7 +24699,7 @@
         <p:spPr>
           <a:xfrm>
             <a:off x="4114800" y="3794760"/>
-            <a:ext cx="6400800" cy="2560320"/>
+            <a:ext cx="6400800" cy="2011680"/>
           </a:xfrm>
           <a:prstGeom prst="rect">
             <a:avLst/>
@@ -25698,7 +25699,7 @@
         <p:spPr>
           <a:xfrm>
             <a:off x="731520" y="1463040"/>
-            <a:ext cx="5029200" cy="2560320"/>
+            <a:ext cx="5029200" cy="2011680"/>
           </a:xfrm>
           <a:prstGeom prst="rect">
             <a:avLst/>
@@ -25743,7 +25744,7 @@
         <p:spPr>
           <a:xfrm>
             <a:off x="841248" y="1536192"/>
-            <a:ext cx="4809744" cy="2414016"/>
+            <a:ext cx="4809744" cy="1865376"/>
           </a:xfrm>
           <a:prstGeom prst="rect">
             <a:avLst/>
@@ -25968,7 +25969,7 @@
         <p:spPr>
           <a:xfrm>
             <a:off x="5669280" y="1463040"/>
-            <a:ext cx="4846320" cy="2560320"/>
+            <a:ext cx="4846320" cy="2011680"/>
           </a:xfrm>
           <a:prstGeom prst="rect">
             <a:avLst/>
@@ -26013,7 +26014,7 @@
         <p:spPr>
           <a:xfrm>
             <a:off x="5779008" y="1536192"/>
-            <a:ext cx="4626864" cy="2414016"/>
+            <a:ext cx="4626864" cy="1865376"/>
           </a:xfrm>
           <a:prstGeom prst="rect">
             <a:avLst/>
@@ -26224,7 +26225,7 @@
         </p:nvSpPr>
         <p:spPr>
           <a:xfrm>
-            <a:off x="731520" y="4389120"/>
+            <a:off x="731520" y="3840480"/>
             <a:ext cx="10698480" cy="36576"/>
           </a:xfrm>
           <a:prstGeom prst="rect">
@@ -26267,7 +26268,7 @@
         </p:nvSpPr>
         <p:spPr>
           <a:xfrm>
-            <a:off x="731520" y="4572000"/>
+            <a:off x="731520" y="4023360"/>
             <a:ext cx="10515600" cy="365760"/>
           </a:xfrm>
           <a:prstGeom prst="rect">
@@ -26303,7 +26304,7 @@
         </p:nvSpPr>
         <p:spPr>
           <a:xfrm>
-            <a:off x="731520" y="5029200"/>
+            <a:off x="731520" y="4480560"/>
             <a:ext cx="10515600" cy="1097280"/>
           </a:xfrm>
           <a:prstGeom prst="rect">
@@ -27376,7 +27377,7 @@
         <p:spPr>
           <a:xfrm>
             <a:off x="5669280" y="4343400"/>
-            <a:ext cx="4846320" cy="1554480"/>
+            <a:ext cx="4846320" cy="1828800"/>
           </a:xfrm>
           <a:prstGeom prst="rect">
             <a:avLst/>
@@ -27421,7 +27422,7 @@
         <p:spPr>
           <a:xfrm>
             <a:off x="5779008" y="4416552"/>
-            <a:ext cx="4626864" cy="1408176"/>
+            <a:ext cx="4626864" cy="1682496"/>
           </a:xfrm>
           <a:prstGeom prst="rect">
             <a:avLst/>
@@ -27715,7 +27716,7 @@
         <p:spPr>
           <a:xfrm>
             <a:off x="731520" y="1554480"/>
-            <a:ext cx="5029200" cy="2743200"/>
+            <a:ext cx="5029200" cy="2377440"/>
           </a:xfrm>
           <a:prstGeom prst="rect">
             <a:avLst/>
@@ -27760,7 +27761,7 @@
         <p:spPr>
           <a:xfrm>
             <a:off x="841248" y="1627632"/>
-            <a:ext cx="4809744" cy="2596896"/>
+            <a:ext cx="4809744" cy="2231136"/>
           </a:xfrm>
           <a:prstGeom prst="rect">
             <a:avLst/>
@@ -27958,148 +27959,7 @@
               </a:defRPr>
             </a:pPr>
             <a:r>
-              <a:t>ORDER BY totale_skill DESC</a:t>
-            </a:r>
-          </a:p>
-          <a:p>
-            <a:pPr>
-              <a:spcAft>
-                <a:spcPts val="100"/>
-              </a:spcAft>
-              <a:defRPr sz="1000">
-                <a:solidFill>
-                  <a:srgbClr val="7EC68E"/>
-                </a:solidFill>
-                <a:latin typeface="Consolas"/>
-              </a:defRPr>
-            </a:pPr>
-            <a:r>
-              <a:t>LIMIT 5;</a:t>
-            </a:r>
-          </a:p>
-          <a:p>
-            <a:pPr>
-              <a:spcAft>
-                <a:spcPts val="100"/>
-              </a:spcAft>
-              <a:defRPr sz="1000">
-                <a:solidFill>
-                  <a:srgbClr val="7EC68E"/>
-                </a:solidFill>
-                <a:latin typeface="Consolas"/>
-              </a:defRPr>
-            </a:pPr>
-          </a:p>
-          <a:p>
-            <a:pPr>
-              <a:spcAft>
-                <a:spcPts val="100"/>
-              </a:spcAft>
-              <a:defRPr sz="1000">
-                <a:solidFill>
-                  <a:srgbClr val="7EC68E"/>
-                </a:solidFill>
-                <a:latin typeface="Consolas"/>
-              </a:defRPr>
-            </a:pPr>
-            <a:r>
-              <a:t>// AVG + round: media proficiency per skill:</a:t>
-            </a:r>
-          </a:p>
-          <a:p>
-            <a:pPr>
-              <a:spcAft>
-                <a:spcPts val="100"/>
-              </a:spcAft>
-              <a:defRPr sz="1000">
-                <a:solidFill>
-                  <a:srgbClr val="7EC68E"/>
-                </a:solidFill>
-                <a:latin typeface="Consolas"/>
-              </a:defRPr>
-            </a:pPr>
-            <a:r>
-              <a:t>MATCH (p:Person)-[h:HAS_SKILL]-&gt;(s:Skill)</a:t>
-            </a:r>
-          </a:p>
-          <a:p>
-            <a:pPr>
-              <a:spcAft>
-                <a:spcPts val="100"/>
-              </a:spcAft>
-              <a:defRPr sz="1000">
-                <a:solidFill>
-                  <a:srgbClr val="7EC68E"/>
-                </a:solidFill>
-                <a:latin typeface="Consolas"/>
-              </a:defRPr>
-            </a:pPr>
-            <a:r>
-              <a:t>RETURN s.name AS skill,</a:t>
-            </a:r>
-          </a:p>
-          <a:p>
-            <a:pPr>
-              <a:spcAft>
-                <a:spcPts val="100"/>
-              </a:spcAft>
-              <a:defRPr sz="1000">
-                <a:solidFill>
-                  <a:srgbClr val="7EC68E"/>
-                </a:solidFill>
-                <a:latin typeface="Consolas"/>
-              </a:defRPr>
-            </a:pPr>
-            <a:r>
-              <a:t>       round(avg(h.proficiency), 1) AS media,</a:t>
-            </a:r>
-          </a:p>
-          <a:p>
-            <a:pPr>
-              <a:spcAft>
-                <a:spcPts val="100"/>
-              </a:spcAft>
-              <a:defRPr sz="1000">
-                <a:solidFill>
-                  <a:srgbClr val="7EC68E"/>
-                </a:solidFill>
-                <a:latin typeface="Consolas"/>
-              </a:defRPr>
-            </a:pPr>
-            <a:r>
-              <a:t>       count(p) AS persone</a:t>
-            </a:r>
-          </a:p>
-          <a:p>
-            <a:pPr>
-              <a:spcAft>
-                <a:spcPts val="100"/>
-              </a:spcAft>
-              <a:defRPr sz="1000">
-                <a:solidFill>
-                  <a:srgbClr val="7EC68E"/>
-                </a:solidFill>
-                <a:latin typeface="Consolas"/>
-              </a:defRPr>
-            </a:pPr>
-            <a:r>
-              <a:t>ORDER BY media DESC</a:t>
-            </a:r>
-          </a:p>
-          <a:p>
-            <a:pPr>
-              <a:spcAft>
-                <a:spcPts val="100"/>
-              </a:spcAft>
-              <a:defRPr sz="1000">
-                <a:solidFill>
-                  <a:srgbClr val="7EC68E"/>
-                </a:solidFill>
-                <a:latin typeface="Consolas"/>
-              </a:defRPr>
-            </a:pPr>
-            <a:r>
-              <a:t>LIMIT 10;</a:t>
+              <a:t>ORDER BY totale_skill DESC LIMIT 5;</a:t>
             </a:r>
           </a:p>
         </p:txBody>
@@ -28113,7 +27973,7 @@
         <p:spPr>
           <a:xfrm>
             <a:off x="5669280" y="1554480"/>
-            <a:ext cx="4846320" cy="2743200"/>
+            <a:ext cx="4846320" cy="2377440"/>
           </a:xfrm>
           <a:prstGeom prst="rect">
             <a:avLst/>
@@ -28762,7 +28622,7 @@
         <p:spPr>
           <a:xfrm>
             <a:off x="5669280" y="1828800"/>
-            <a:ext cx="4846320" cy="4023360"/>
+            <a:ext cx="4846320" cy="3200400"/>
           </a:xfrm>
           <a:prstGeom prst="rect">
             <a:avLst/>
@@ -28807,7 +28667,7 @@
         <p:spPr>
           <a:xfrm>
             <a:off x="5779008" y="1901952"/>
-            <a:ext cx="4626864" cy="3877056"/>
+            <a:ext cx="4626864" cy="3054096"/>
           </a:xfrm>
           <a:prstGeom prst="rect">
             <a:avLst/>
@@ -28848,7 +28708,7 @@
               </a:defRPr>
             </a:pPr>
             <a:r>
-              <a:t>// o ne aggiunge di nuove:</a:t>
+              <a:t>MATCH (p:Person {employee_id: 1})</a:t>
             </a:r>
           </a:p>
           <a:p>
@@ -28864,7 +28724,7 @@
               </a:defRPr>
             </a:pPr>
             <a:r>
-              <a:t>MATCH (p:Person {employee_id: 1})</a:t>
+              <a:t>SET p.email = "mario.rossi@azienda.com";</a:t>
             </a:r>
           </a:p>
           <a:p>
@@ -28879,9 +28739,6 @@
                 <a:latin typeface="Consolas"/>
               </a:defRPr>
             </a:pPr>
-            <a:r>
-              <a:t>SET p.email = "mario.rossi@azienda.com";</a:t>
-            </a:r>
           </a:p>
           <a:p>
             <a:pPr>
@@ -28895,6 +28752,9 @@
                 <a:latin typeface="Consolas"/>
               </a:defRPr>
             </a:pPr>
+            <a:r>
+              <a:t>// SET += unisce props (merge safe):</a:t>
+            </a:r>
           </a:p>
           <a:p>
             <a:pPr>
@@ -28909,7 +28769,7 @@
               </a:defRPr>
             </a:pPr>
             <a:r>
-              <a:t>// SET += unisce props (merge safe):</a:t>
+              <a:t>SET p += {email: "mario@co.com",</a:t>
             </a:r>
           </a:p>
           <a:p>
@@ -28925,7 +28785,7 @@
               </a:defRPr>
             </a:pPr>
             <a:r>
-              <a:t>SET p += {email: "mario@co.com",</a:t>
+              <a:t>         phone: "+39 333 1234567"};</a:t>
             </a:r>
           </a:p>
           <a:p>
@@ -28940,9 +28800,6 @@
                 <a:latin typeface="Consolas"/>
               </a:defRPr>
             </a:pPr>
-            <a:r>
-              <a:t>         phone: "+39 333 1234567"};</a:t>
-            </a:r>
           </a:p>
           <a:p>
             <a:pPr>
@@ -28956,6 +28813,9 @@
                 <a:latin typeface="Consolas"/>
               </a:defRPr>
             </a:pPr>
+            <a:r>
+              <a:t>// ON CREATE / ON MATCH con MERGE:</a:t>
+            </a:r>
           </a:p>
           <a:p>
             <a:pPr>
@@ -28970,7 +28830,7 @@
               </a:defRPr>
             </a:pPr>
             <a:r>
-              <a:t>// ON CREATE / ON MATCH con MERGE:</a:t>
+              <a:t>MERGE (p:Person {employee_id: 999})</a:t>
             </a:r>
           </a:p>
           <a:p>
@@ -28986,7 +28846,7 @@
               </a:defRPr>
             </a:pPr>
             <a:r>
-              <a:t>MERGE (p:Person {employee_id: 999})</a:t>
+              <a:t>  ON CREATE SET p.created = date()</a:t>
             </a:r>
           </a:p>
           <a:p>
@@ -29002,7 +28862,7 @@
               </a:defRPr>
             </a:pPr>
             <a:r>
-              <a:t>  ON CREATE SET p.created = date()</a:t>
+              <a:t>  ON MATCH  SET p.updated = date();</a:t>
             </a:r>
           </a:p>
           <a:p>
@@ -29017,9 +28877,6 @@
                 <a:latin typeface="Consolas"/>
               </a:defRPr>
             </a:pPr>
-            <a:r>
-              <a:t>  ON MATCH  SET p.updated = date();</a:t>
-            </a:r>
           </a:p>
           <a:p>
             <a:pPr>
@@ -29033,6 +28890,9 @@
                 <a:latin typeface="Consolas"/>
               </a:defRPr>
             </a:pPr>
+            <a:r>
+              <a:t>// DELETE (DETACH per nodi con relazioni):</a:t>
+            </a:r>
           </a:p>
           <a:p>
             <a:pPr>
@@ -29047,7 +28907,7 @@
               </a:defRPr>
             </a:pPr>
             <a:r>
-              <a:t>// DELETE (DETACH per nodi con relazioni):</a:t>
+              <a:t>MATCH (p:Person {employee_id: 999})</a:t>
             </a:r>
           </a:p>
           <a:p>
@@ -29063,84 +28923,7 @@
               </a:defRPr>
             </a:pPr>
             <a:r>
-              <a:t>MATCH (p:Person {employee_id: 999})</a:t>
-            </a:r>
-          </a:p>
-          <a:p>
-            <a:pPr>
-              <a:spcAft>
-                <a:spcPts val="100"/>
-              </a:spcAft>
-              <a:defRPr sz="1000">
-                <a:solidFill>
-                  <a:srgbClr val="7EC68E"/>
-                </a:solidFill>
-                <a:latin typeface="Consolas"/>
-              </a:defRPr>
-            </a:pPr>
-            <a:r>
               <a:t>DETACH DELETE p;</a:t>
-            </a:r>
-          </a:p>
-          <a:p>
-            <a:pPr>
-              <a:spcAft>
-                <a:spcPts val="100"/>
-              </a:spcAft>
-              <a:defRPr sz="1000">
-                <a:solidFill>
-                  <a:srgbClr val="7EC68E"/>
-                </a:solidFill>
-                <a:latin typeface="Consolas"/>
-              </a:defRPr>
-            </a:pPr>
-          </a:p>
-          <a:p>
-            <a:pPr>
-              <a:spcAft>
-                <a:spcPts val="100"/>
-              </a:spcAft>
-              <a:defRPr sz="1000">
-                <a:solidFill>
-                  <a:srgbClr val="7EC68E"/>
-                </a:solidFill>
-                <a:latin typeface="Consolas"/>
-              </a:defRPr>
-            </a:pPr>
-            <a:r>
-              <a:t>// DETACH DELETE toglie TUTTE le relazioni</a:t>
-            </a:r>
-          </a:p>
-          <a:p>
-            <a:pPr>
-              <a:spcAft>
-                <a:spcPts val="100"/>
-              </a:spcAft>
-              <a:defRPr sz="1000">
-                <a:solidFill>
-                  <a:srgbClr val="7EC68E"/>
-                </a:solidFill>
-                <a:latin typeface="Consolas"/>
-              </a:defRPr>
-            </a:pPr>
-            <a:r>
-              <a:t>// poi cancella il nodo. Senza DETACH,</a:t>
-            </a:r>
-          </a:p>
-          <a:p>
-            <a:pPr>
-              <a:spcAft>
-                <a:spcPts val="100"/>
-              </a:spcAft>
-              <a:defRPr sz="1000">
-                <a:solidFill>
-                  <a:srgbClr val="7EC68E"/>
-                </a:solidFill>
-                <a:latin typeface="Consolas"/>
-              </a:defRPr>
-            </a:pPr>
-            <a:r>
-              <a:t>// DELETE fallisce se il nodo ha relazioni.</a:t>
             </a:r>
           </a:p>
         </p:txBody>
@@ -30711,7 +30494,7 @@
         <p:spPr>
           <a:xfrm>
             <a:off x="5669280" y="4297680"/>
-            <a:ext cx="4846320" cy="1645920"/>
+            <a:ext cx="4846320" cy="1920240"/>
           </a:xfrm>
           <a:prstGeom prst="rect">
             <a:avLst/>
@@ -30756,7 +30539,7 @@
         <p:spPr>
           <a:xfrm>
             <a:off x="5779008" y="4370832"/>
-            <a:ext cx="4626864" cy="1499616"/>
+            <a:ext cx="4626864" cy="1773936"/>
           </a:xfrm>
           <a:prstGeom prst="rect">
             <a:avLst/>
@@ -31483,7 +31266,7 @@
         <p:spPr>
           <a:xfrm>
             <a:off x="731520" y="4023360"/>
-            <a:ext cx="5029200" cy="2286000"/>
+            <a:ext cx="5029200" cy="1828800"/>
           </a:xfrm>
           <a:prstGeom prst="rect">
             <a:avLst/>
@@ -31552,7 +31335,7 @@
         <p:spPr>
           <a:xfrm>
             <a:off x="5669280" y="4023360"/>
-            <a:ext cx="4846320" cy="2286000"/>
+            <a:ext cx="4846320" cy="1828800"/>
           </a:xfrm>
           <a:prstGeom prst="rect">
             <a:avLst/>
@@ -31682,7 +31465,7 @@
               </a:defRPr>
             </a:pPr>
             <a:r>
-              <a:t>Visualizzare il Grafo</a:t>
+              <a:t>Visualizzare il Grafo: Browser &amp; Bloom</a:t>
             </a:r>
           </a:p>
         </p:txBody>
@@ -31833,37 +31616,166 @@
               </a:defRPr>
             </a:pPr>
             <a:r>
-              <a:t>•  Python networkx + matplotlib — grafi statici</a:t>
-            </a:r>
-          </a:p>
-          <a:p>
-            <a:pPr algn="l">
-              <a:spcAft>
-                <a:spcPts val="0"/>
-              </a:spcAft>
-              <a:defRPr sz="1200">
-                <a:solidFill>
-                  <a:srgbClr val="FFFFFF"/>
-                </a:solidFill>
-                <a:latin typeface="Calibri"/>
-              </a:defRPr>
-            </a:pPr>
-            <a:r>
-              <a:t>•  Python pyvis — grafi interattivi HTML</a:t>
+              <a:t>•  Neo4j Workspace — modellazione grafica collaborativa</a:t>
             </a:r>
           </a:p>
         </p:txBody>
       </p:sp>
       <p:sp>
         <p:nvSpPr>
-          <p:cNvPr id="4" name="Rectangle 3"/>
+          <p:cNvPr id="4" name="TextBox 3"/>
+          <p:cNvSpPr txBox="1"/>
+          <p:nvPr/>
+        </p:nvSpPr>
+        <p:spPr>
+          <a:xfrm>
+            <a:off x="5669280" y="1051560"/>
+            <a:ext cx="4846320" cy="411480"/>
+          </a:xfrm>
+          <a:prstGeom prst="rect">
+            <a:avLst/>
+          </a:prstGeom>
+          <a:noFill/>
+        </p:spPr>
+        <p:txBody>
+          <a:bodyPr wrap="square">
+            <a:spAutoFit/>
+          </a:bodyPr>
+          <a:lstStyle/>
+          <a:p>
+            <a:pPr algn="l">
+              <a:defRPr sz="1600" b="1">
+                <a:solidFill>
+                  <a:srgbClr val="F08040"/>
+                </a:solidFill>
+                <a:latin typeface="Calibri"/>
+              </a:defRPr>
+            </a:pPr>
+            <a:r>
+              <a:t>Suggerimenti Browser</a:t>
+            </a:r>
+          </a:p>
+        </p:txBody>
+      </p:sp>
+      <p:sp>
+        <p:nvSpPr>
+          <p:cNvPr id="5" name="TextBox 4"/>
+          <p:cNvSpPr txBox="1"/>
+          <p:nvPr/>
+        </p:nvSpPr>
+        <p:spPr>
+          <a:xfrm>
+            <a:off x="5669280" y="1508760"/>
+            <a:ext cx="4846320" cy="1828800"/>
+          </a:xfrm>
+          <a:prstGeom prst="rect">
+            <a:avLst/>
+          </a:prstGeom>
+          <a:noFill/>
+        </p:spPr>
+        <p:txBody>
+          <a:bodyPr wrap="square">
+            <a:spAutoFit/>
+          </a:bodyPr>
+          <a:lstStyle/>
+          <a:p>
+            <a:pPr algn="l">
+              <a:defRPr sz="1200" b="0">
+                <a:solidFill>
+                  <a:srgbClr val="CCCCCC"/>
+                </a:solidFill>
+                <a:latin typeface="Calibri"/>
+              </a:defRPr>
+            </a:pPr>
+            <a:r>
+              <a:t>• I nodi sono cerchi colorati per label</a:t>
+            </a:r>
+            <a:br/>
+            <a:r>
+              <a:t>• Le frecce sono le relazioni</a:t>
+            </a:r>
+            <a:br/>
+            <a:r>
+              <a:t>• Clicca su un nodo per vedere le props</a:t>
+            </a:r>
+            <a:br/>
+            <a:r>
+              <a:t>• Trascina i nodi per riorganizzare</a:t>
+            </a:r>
+            <a:br/>
+            <a:r>
+              <a:t>• Usa la lente di ingrandimento</a:t>
+            </a:r>
+            <a:br/>
+            <a:r>
+              <a:t>• Il pulsante full-screen è in alto</a:t>
+            </a:r>
+            <a:br/>
+            <a:r>
+              <a:t>• Esporta come PNG con la fotocamera</a:t>
+            </a:r>
+            <a:br/>
+            <a:br/>
+            <a:r>
+              <a:t>Per dataset grandi usare LIMIT:</a:t>
+            </a:r>
+            <a:br/>
+            <a:r>
+              <a:t>MATCH (n) RETURN n LIMIT 100</a:t>
+            </a:r>
+            <a:br/>
+            <a:r>
+              <a:t>altrimenti il Browser si blocca.</a:t>
+            </a:r>
+          </a:p>
+        </p:txBody>
+      </p:sp>
+      <p:sp>
+        <p:nvSpPr>
+          <p:cNvPr id="6" name="TextBox 5"/>
+          <p:cNvSpPr txBox="1"/>
+          <p:nvPr/>
+        </p:nvSpPr>
+        <p:spPr>
+          <a:xfrm>
+            <a:off x="731520" y="3108960"/>
+            <a:ext cx="10515600" cy="411480"/>
+          </a:xfrm>
+          <a:prstGeom prst="rect">
+            <a:avLst/>
+          </a:prstGeom>
+          <a:noFill/>
+        </p:spPr>
+        <p:txBody>
+          <a:bodyPr wrap="square">
+            <a:spAutoFit/>
+          </a:bodyPr>
+          <a:lstStyle/>
+          <a:p>
+            <a:pPr algn="l">
+              <a:defRPr sz="1600" b="1">
+                <a:solidFill>
+                  <a:srgbClr val="F08040"/>
+                </a:solidFill>
+                <a:latin typeface="Calibri"/>
+              </a:defRPr>
+            </a:pPr>
+            <a:r>
+              <a:t>Comandi utili nel Browser</a:t>
+            </a:r>
+          </a:p>
+        </p:txBody>
+      </p:sp>
+      <p:sp>
+        <p:nvSpPr>
+          <p:cNvPr id="7" name="Rectangle 6"/>
           <p:cNvSpPr/>
           <p:nvPr/>
         </p:nvSpPr>
         <p:spPr>
           <a:xfrm>
-            <a:off x="5669280" y="1051560"/>
-            <a:ext cx="4846320" cy="1645920"/>
+            <a:off x="731520" y="3566160"/>
+            <a:ext cx="5029200" cy="2286000"/>
           </a:xfrm>
           <a:prstGeom prst="rect">
             <a:avLst/>
@@ -31901,14 +31813,14 @@
       </p:sp>
       <p:sp>
         <p:nvSpPr>
-          <p:cNvPr id="5" name="TextBox 4"/>
+          <p:cNvPr id="8" name="TextBox 7"/>
           <p:cNvSpPr txBox="1"/>
           <p:nvPr/>
         </p:nvSpPr>
         <p:spPr>
           <a:xfrm>
-            <a:off x="5779008" y="1124712"/>
-            <a:ext cx="4626864" cy="1499616"/>
+            <a:off x="841248" y="3639312"/>
+            <a:ext cx="4809744" cy="2139696"/>
           </a:xfrm>
           <a:prstGeom prst="rect">
             <a:avLst/>
@@ -31925,7 +31837,7 @@
               <a:spcAft>
                 <a:spcPts val="100"/>
               </a:spcAft>
-              <a:defRPr sz="900">
+              <a:defRPr sz="1000">
                 <a:solidFill>
                   <a:srgbClr val="7EC68E"/>
                 </a:solidFill>
@@ -31933,7 +31845,7 @@
               </a:defRPr>
             </a:pPr>
             <a:r>
-              <a:t># Grafo statico con networkx + matplotlib:</a:t>
+              <a:t>:help cypher   // guida Cypher</a:t>
             </a:r>
           </a:p>
           <a:p>
@@ -31941,7 +31853,7 @@
               <a:spcAft>
                 <a:spcPts val="100"/>
               </a:spcAft>
-              <a:defRPr sz="900">
+              <a:defRPr sz="1000">
                 <a:solidFill>
                   <a:srgbClr val="7EC68E"/>
                 </a:solidFill>
@@ -31949,7 +31861,7 @@
               </a:defRPr>
             </a:pPr>
             <a:r>
-              <a:t>import networkx as nx</a:t>
+              <a:t>:play movie-graph  // tutorial</a:t>
             </a:r>
           </a:p>
           <a:p>
@@ -31957,7 +31869,7 @@
               <a:spcAft>
                 <a:spcPts val="100"/>
               </a:spcAft>
-              <a:defRPr sz="900">
+              <a:defRPr sz="1000">
                 <a:solidFill>
                   <a:srgbClr val="7EC68E"/>
                 </a:solidFill>
@@ -31965,7 +31877,7 @@
               </a:defRPr>
             </a:pPr>
             <a:r>
-              <a:t>import matplotlib.pyplot as plt</a:t>
+              <a:t>:schema        // mostra il modello</a:t>
             </a:r>
           </a:p>
           <a:p>
@@ -31973,20 +31885,23 @@
               <a:spcAft>
                 <a:spcPts val="100"/>
               </a:spcAft>
-              <a:defRPr sz="900">
+              <a:defRPr sz="1000">
                 <a:solidFill>
                   <a:srgbClr val="7EC68E"/>
                 </a:solidFill>
                 <a:latin typeface="Consolas"/>
               </a:defRPr>
             </a:pPr>
+            <a:r>
+              <a:t>SHOW CONSTRAINTS;  // vincoli attivi</a:t>
+            </a:r>
           </a:p>
           <a:p>
             <a:pPr>
               <a:spcAft>
                 <a:spcPts val="100"/>
               </a:spcAft>
-              <a:defRPr sz="900">
+              <a:defRPr sz="1000">
                 <a:solidFill>
                   <a:srgbClr val="7EC68E"/>
                 </a:solidFill>
@@ -31994,7 +31909,7 @@
               </a:defRPr>
             </a:pPr>
             <a:r>
-              <a:t>G = nx.Graph()</a:t>
+              <a:t>SHOW INDEXES;      // indici</a:t>
             </a:r>
           </a:p>
           <a:p>
@@ -32002,23 +31917,20 @@
               <a:spcAft>
                 <a:spcPts val="100"/>
               </a:spcAft>
-              <a:defRPr sz="900">
+              <a:defRPr sz="1000">
                 <a:solidFill>
                   <a:srgbClr val="7EC68E"/>
                 </a:solidFill>
                 <a:latin typeface="Consolas"/>
               </a:defRPr>
             </a:pPr>
-            <a:r>
-              <a:t>G.add_edge("Alice", "Python",</a:t>
-            </a:r>
           </a:p>
           <a:p>
             <a:pPr>
               <a:spcAft>
                 <a:spcPts val="100"/>
               </a:spcAft>
-              <a:defRPr sz="900">
+              <a:defRPr sz="1000">
                 <a:solidFill>
                   <a:srgbClr val="7EC68E"/>
                 </a:solidFill>
@@ -32026,7 +31938,7 @@
               </a:defRPr>
             </a:pPr>
             <a:r>
-              <a:t>           relation="HAS_SKILL")</a:t>
+              <a:t>// Aprire Browser:</a:t>
             </a:r>
           </a:p>
           <a:p>
@@ -32034,7 +31946,7 @@
               <a:spcAft>
                 <a:spcPts val="100"/>
               </a:spcAft>
-              <a:defRPr sz="900">
+              <a:defRPr sz="1000">
                 <a:solidFill>
                   <a:srgbClr val="7EC68E"/>
                 </a:solidFill>
@@ -32042,7 +31954,7 @@
               </a:defRPr>
             </a:pPr>
             <a:r>
-              <a:t>G.add_edge("Bob", "Python",</a:t>
+              <a:t>// Locale: http://localhost:7474</a:t>
             </a:r>
           </a:p>
           <a:p>
@@ -32050,7 +31962,7 @@
               <a:spcAft>
                 <a:spcPts val="100"/>
               </a:spcAft>
-              <a:defRPr sz="900">
+              <a:defRPr sz="1000">
                 <a:solidFill>
                   <a:srgbClr val="7EC68E"/>
                 </a:solidFill>
@@ -32058,7 +31970,7 @@
               </a:defRPr>
             </a:pPr>
             <a:r>
-              <a:t>           relation="HAS_SKILL")</a:t>
+              <a:t>// Cloud: workspace.neo4j.io</a:t>
             </a:r>
           </a:p>
           <a:p>
@@ -32066,23 +31978,20 @@
               <a:spcAft>
                 <a:spcPts val="100"/>
               </a:spcAft>
-              <a:defRPr sz="900">
+              <a:defRPr sz="1000">
                 <a:solidFill>
                   <a:srgbClr val="7EC68E"/>
                 </a:solidFill>
                 <a:latin typeface="Consolas"/>
               </a:defRPr>
             </a:pPr>
-            <a:r>
-              <a:t>nx.draw(G, with_labels=True)</a:t>
-            </a:r>
           </a:p>
           <a:p>
             <a:pPr>
               <a:spcAft>
                 <a:spcPts val="100"/>
               </a:spcAft>
-              <a:defRPr sz="900">
+              <a:defRPr sz="1000">
                 <a:solidFill>
                   <a:srgbClr val="7EC68E"/>
                 </a:solidFill>
@@ -32090,7 +31999,7 @@
               </a:defRPr>
             </a:pPr>
             <a:r>
-              <a:t>plt.show()</a:t>
+              <a:t>// Eseguire query:</a:t>
             </a:r>
           </a:p>
           <a:p>
@@ -32098,20 +32007,23 @@
               <a:spcAft>
                 <a:spcPts val="100"/>
               </a:spcAft>
-              <a:defRPr sz="900">
+              <a:defRPr sz="1000">
                 <a:solidFill>
                   <a:srgbClr val="7EC68E"/>
                 </a:solidFill>
                 <a:latin typeface="Consolas"/>
               </a:defRPr>
             </a:pPr>
+            <a:r>
+              <a:t>MATCH (n) RETURN n LIMIT 25</a:t>
+            </a:r>
           </a:p>
           <a:p>
             <a:pPr>
               <a:spcAft>
                 <a:spcPts val="100"/>
               </a:spcAft>
-              <a:defRPr sz="900">
+              <a:defRPr sz="1000">
                 <a:solidFill>
                   <a:srgbClr val="7EC68E"/>
                 </a:solidFill>
@@ -32119,117 +32031,21 @@
               </a:defRPr>
             </a:pPr>
             <a:r>
-              <a:t># pyvis per grafo interattivo:</a:t>
-            </a:r>
-          </a:p>
-          <a:p>
-            <a:pPr>
-              <a:spcAft>
-                <a:spcPts val="100"/>
-              </a:spcAft>
-              <a:defRPr sz="900">
-                <a:solidFill>
-                  <a:srgbClr val="7EC68E"/>
-                </a:solidFill>
-                <a:latin typeface="Consolas"/>
-              </a:defRPr>
-            </a:pPr>
-            <a:r>
-              <a:t># pip install pyvis</a:t>
-            </a:r>
-          </a:p>
-          <a:p>
-            <a:pPr>
-              <a:spcAft>
-                <a:spcPts val="100"/>
-              </a:spcAft>
-              <a:defRPr sz="900">
-                <a:solidFill>
-                  <a:srgbClr val="7EC68E"/>
-                </a:solidFill>
-                <a:latin typeface="Consolas"/>
-              </a:defRPr>
-            </a:pPr>
-            <a:r>
-              <a:t>from pyvis.network import Network</a:t>
-            </a:r>
-          </a:p>
-          <a:p>
-            <a:pPr>
-              <a:spcAft>
-                <a:spcPts val="100"/>
-              </a:spcAft>
-              <a:defRPr sz="900">
-                <a:solidFill>
-                  <a:srgbClr val="7EC68E"/>
-                </a:solidFill>
-                <a:latin typeface="Consolas"/>
-              </a:defRPr>
-            </a:pPr>
-            <a:r>
-              <a:t>net = Network()</a:t>
-            </a:r>
-          </a:p>
-          <a:p>
-            <a:pPr>
-              <a:spcAft>
-                <a:spcPts val="100"/>
-              </a:spcAft>
-              <a:defRPr sz="900">
-                <a:solidFill>
-                  <a:srgbClr val="7EC68E"/>
-                </a:solidFill>
-                <a:latin typeface="Consolas"/>
-              </a:defRPr>
-            </a:pPr>
-            <a:r>
-              <a:t>net.add_nodes(["Alice", "Bob", "Python"])</a:t>
-            </a:r>
-          </a:p>
-          <a:p>
-            <a:pPr>
-              <a:spcAft>
-                <a:spcPts val="100"/>
-              </a:spcAft>
-              <a:defRPr sz="900">
-                <a:solidFill>
-                  <a:srgbClr val="7EC68E"/>
-                </a:solidFill>
-                <a:latin typeface="Consolas"/>
-              </a:defRPr>
-            </a:pPr>
-            <a:r>
-              <a:t>net.add_edge("Alice", "Python")</a:t>
-            </a:r>
-          </a:p>
-          <a:p>
-            <a:pPr>
-              <a:spcAft>
-                <a:spcPts val="100"/>
-              </a:spcAft>
-              <a:defRPr sz="900">
-                <a:solidFill>
-                  <a:srgbClr val="7EC68E"/>
-                </a:solidFill>
-                <a:latin typeface="Consolas"/>
-              </a:defRPr>
-            </a:pPr>
-            <a:r>
-              <a:t>net.show("grafo.html")</a:t>
+              <a:t>// Cliccare su "Graph" per vedere il grafo</a:t>
             </a:r>
           </a:p>
         </p:txBody>
       </p:sp>
       <p:sp>
         <p:nvSpPr>
-          <p:cNvPr id="6" name="TextBox 5"/>
+          <p:cNvPr id="9" name="TextBox 8"/>
           <p:cNvSpPr txBox="1"/>
           <p:nvPr/>
         </p:nvSpPr>
         <p:spPr>
           <a:xfrm>
-            <a:off x="731520" y="3108960"/>
-            <a:ext cx="10515600" cy="411480"/>
+            <a:off x="5669280" y="3566160"/>
+            <a:ext cx="4846320" cy="1371600"/>
           </a:xfrm>
           <a:prstGeom prst="rect">
             <a:avLst/>
@@ -32243,297 +32059,19 @@
           <a:lstStyle/>
           <a:p>
             <a:pPr algn="l">
-              <a:defRPr sz="1600" b="1">
-                <a:solidFill>
-                  <a:srgbClr val="F08040"/>
+              <a:defRPr sz="1200" b="0">
+                <a:solidFill>
+                  <a:srgbClr val="CCCCCC"/>
                 </a:solidFill>
                 <a:latin typeface="Calibri"/>
               </a:defRPr>
             </a:pPr>
             <a:r>
-              <a:t>Browser: eseguire Cypher e vedere il grafo</a:t>
-            </a:r>
-          </a:p>
-        </p:txBody>
-      </p:sp>
-      <p:sp>
-        <p:nvSpPr>
-          <p:cNvPr id="7" name="TextBox 6"/>
-          <p:cNvSpPr txBox="1"/>
-          <p:nvPr/>
-        </p:nvSpPr>
-        <p:spPr>
-          <a:xfrm>
-            <a:off x="731520" y="3566160"/>
-            <a:ext cx="5029200" cy="548640"/>
-          </a:xfrm>
-          <a:prstGeom prst="rect">
-            <a:avLst/>
-          </a:prstGeom>
-          <a:noFill/>
-        </p:spPr>
-        <p:txBody>
-          <a:bodyPr wrap="square">
-            <a:spAutoFit/>
-          </a:bodyPr>
-          <a:lstStyle/>
-          <a:p>
-            <a:pPr algn="l">
-              <a:defRPr sz="1200" b="0">
-                <a:solidFill>
-                  <a:srgbClr val="CCCCCC"/>
-                </a:solidFill>
-                <a:latin typeface="Calibri"/>
-              </a:defRPr>
-            </a:pPr>
-            <a:r>
-              <a:t>Aprire http://localhost:7474 (locale) o workspace.neo4j.io (cloud).</a:t>
+              <a:t>Il Browser è lo strumento principale per esplorare</a:t>
             </a:r>
             <a:br/>
             <a:r>
-              <a:t>Eseguire: MATCH (n) RETURN n LIMIT 25 → cliccare su "Graph" per la visualizzazione.</a:t>
-            </a:r>
-          </a:p>
-        </p:txBody>
-      </p:sp>
-      <p:sp>
-        <p:nvSpPr>
-          <p:cNvPr id="8" name="Rectangle 7"/>
-          <p:cNvSpPr/>
-          <p:nvPr/>
-        </p:nvSpPr>
-        <p:spPr>
-          <a:xfrm>
-            <a:off x="731520" y="4206240"/>
-            <a:ext cx="5029200" cy="1645920"/>
-          </a:xfrm>
-          <a:prstGeom prst="rect">
-            <a:avLst/>
-          </a:prstGeom>
-          <a:solidFill>
-            <a:srgbClr val="1B2A4A"/>
-          </a:solidFill>
-          <a:ln w="12700">
-            <a:solidFill>
-              <a:srgbClr val="2D4F7A"/>
-            </a:solidFill>
-          </a:ln>
-        </p:spPr>
-        <p:style>
-          <a:lnRef idx="1">
-            <a:schemeClr val="accent1"/>
-          </a:lnRef>
-          <a:fillRef idx="3">
-            <a:schemeClr val="accent1"/>
-          </a:fillRef>
-          <a:effectRef idx="2">
-            <a:schemeClr val="accent1"/>
-          </a:effectRef>
-          <a:fontRef idx="minor">
-            <a:schemeClr val="lt1"/>
-          </a:fontRef>
-        </p:style>
-        <p:txBody>
-          <a:bodyPr rtlCol="0" anchor="ctr"/>
-          <a:lstStyle/>
-          <a:p>
-            <a:pPr algn="ctr"/>
-          </a:p>
-        </p:txBody>
-      </p:sp>
-      <p:sp>
-        <p:nvSpPr>
-          <p:cNvPr id="9" name="TextBox 8"/>
-          <p:cNvSpPr txBox="1"/>
-          <p:nvPr/>
-        </p:nvSpPr>
-        <p:spPr>
-          <a:xfrm>
-            <a:off x="841248" y="4279392"/>
-            <a:ext cx="4809744" cy="1499616"/>
-          </a:xfrm>
-          <a:prstGeom prst="rect">
-            <a:avLst/>
-          </a:prstGeom>
-          <a:noFill/>
-        </p:spPr>
-        <p:txBody>
-          <a:bodyPr wrap="square">
-            <a:spAutoFit/>
-          </a:bodyPr>
-          <a:lstStyle/>
-          <a:p>
-            <a:pPr>
-              <a:spcAft>
-                <a:spcPts val="100"/>
-              </a:spcAft>
-              <a:defRPr sz="1000">
-                <a:solidFill>
-                  <a:srgbClr val="7EC68E"/>
-                </a:solidFill>
-                <a:latin typeface="Consolas"/>
-              </a:defRPr>
-            </a:pPr>
-            <a:r>
-              <a:t>// Comandi utili nel Browser:</a:t>
-            </a:r>
-          </a:p>
-          <a:p>
-            <a:pPr>
-              <a:spcAft>
-                <a:spcPts val="100"/>
-              </a:spcAft>
-              <a:defRPr sz="1000">
-                <a:solidFill>
-                  <a:srgbClr val="7EC68E"/>
-                </a:solidFill>
-                <a:latin typeface="Consolas"/>
-              </a:defRPr>
-            </a:pPr>
-            <a:r>
-              <a:t>:help cypher   // guida Cypher</a:t>
-            </a:r>
-          </a:p>
-          <a:p>
-            <a:pPr>
-              <a:spcAft>
-                <a:spcPts val="100"/>
-              </a:spcAft>
-              <a:defRPr sz="1000">
-                <a:solidFill>
-                  <a:srgbClr val="7EC68E"/>
-                </a:solidFill>
-                <a:latin typeface="Consolas"/>
-              </a:defRPr>
-            </a:pPr>
-            <a:r>
-              <a:t>:play movie-graph  // tutorial</a:t>
-            </a:r>
-          </a:p>
-          <a:p>
-            <a:pPr>
-              <a:spcAft>
-                <a:spcPts val="100"/>
-              </a:spcAft>
-              <a:defRPr sz="1000">
-                <a:solidFill>
-                  <a:srgbClr val="7EC68E"/>
-                </a:solidFill>
-                <a:latin typeface="Consolas"/>
-              </a:defRPr>
-            </a:pPr>
-            <a:r>
-              <a:t>:schema        // mostra il modello</a:t>
-            </a:r>
-          </a:p>
-          <a:p>
-            <a:pPr>
-              <a:spcAft>
-                <a:spcPts val="100"/>
-              </a:spcAft>
-              <a:defRPr sz="1000">
-                <a:solidFill>
-                  <a:srgbClr val="7EC68E"/>
-                </a:solidFill>
-                <a:latin typeface="Consolas"/>
-              </a:defRPr>
-            </a:pPr>
-            <a:r>
-              <a:t>SHOW CONSTRAINTS;  // vincoli attivi</a:t>
-            </a:r>
-          </a:p>
-          <a:p>
-            <a:pPr>
-              <a:spcAft>
-                <a:spcPts val="100"/>
-              </a:spcAft>
-              <a:defRPr sz="1000">
-                <a:solidFill>
-                  <a:srgbClr val="7EC68E"/>
-                </a:solidFill>
-                <a:latin typeface="Consolas"/>
-              </a:defRPr>
-            </a:pPr>
-            <a:r>
-              <a:t>SHOW INDEXES;      // indici</a:t>
-            </a:r>
-          </a:p>
-        </p:txBody>
-      </p:sp>
-      <p:sp>
-        <p:nvSpPr>
-          <p:cNvPr id="10" name="TextBox 9"/>
-          <p:cNvSpPr txBox="1"/>
-          <p:nvPr/>
-        </p:nvSpPr>
-        <p:spPr>
-          <a:xfrm>
-            <a:off x="5669280" y="3566160"/>
-            <a:ext cx="4846320" cy="2286000"/>
-          </a:xfrm>
-          <a:prstGeom prst="rect">
-            <a:avLst/>
-          </a:prstGeom>
-          <a:noFill/>
-        </p:spPr>
-        <p:txBody>
-          <a:bodyPr wrap="square">
-            <a:spAutoFit/>
-          </a:bodyPr>
-          <a:lstStyle/>
-          <a:p>
-            <a:pPr algn="l">
-              <a:defRPr sz="1200" b="0">
-                <a:solidFill>
-                  <a:srgbClr val="CCCCCC"/>
-                </a:solidFill>
-                <a:latin typeface="Calibri"/>
-              </a:defRPr>
-            </a:pPr>
-            <a:r>
-              <a:t>Suggerimenti per il Browser:</a:t>
-            </a:r>
-            <a:br/>
-            <a:br/>
-            <a:r>
-              <a:t>• I nodi sono cerchi colorati per label</a:t>
-            </a:r>
-            <a:br/>
-            <a:r>
-              <a:t>• Le frecce sono le relazioni</a:t>
-            </a:r>
-            <a:br/>
-            <a:r>
-              <a:t>• Clicca su un nodo per vedere le props</a:t>
-            </a:r>
-            <a:br/>
-            <a:r>
-              <a:t>• Trascina i nodi per riorganizzare</a:t>
-            </a:r>
-            <a:br/>
-            <a:r>
-              <a:t>• Usa la lente di ingrandimento</a:t>
-            </a:r>
-            <a:br/>
-            <a:r>
-              <a:t>• Il pulsante full-screen è in alto</a:t>
-            </a:r>
-            <a:br/>
-            <a:r>
-              <a:t>• Esporta come PNG con la fotocamera</a:t>
-            </a:r>
-            <a:br/>
-            <a:br/>
-            <a:r>
-              <a:t>Per dataset grandi usare LIMIT:</a:t>
-            </a:r>
-            <a:br/>
-            <a:r>
-              <a:t>MATCH (n) RETURN n LIMIT 100</a:t>
-            </a:r>
-            <a:br/>
-            <a:r>
-              <a:t>altrimenti il Browser si blocca.</a:t>
+              <a:t>il grafo e testare query Cypher durante il corso.</a:t>
             </a:r>
           </a:p>
         </p:txBody>
@@ -32967,7 +32505,7 @@
               </a:defRPr>
             </a:pPr>
             <a:r>
-              <a:t>Org Graph: Il Nostro Dataset</a:t>
+              <a:t>Visualizzare il Grafo: Python</a:t>
             </a:r>
           </a:p>
         </p:txBody>
@@ -32980,8 +32518,8 @@
         </p:nvSpPr>
         <p:spPr>
           <a:xfrm>
-            <a:off x="731520" y="914400"/>
-            <a:ext cx="10515600" cy="457200"/>
+            <a:off x="731520" y="1051560"/>
+            <a:ext cx="5029200" cy="1371600"/>
           </a:xfrm>
           <a:prstGeom prst="rect">
             <a:avLst/>
@@ -32995,29 +32533,109 @@
           <a:lstStyle/>
           <a:p>
             <a:pPr algn="l">
-              <a:defRPr sz="1500" b="0">
-                <a:solidFill>
-                  <a:srgbClr val="CCCCCC"/>
+              <a:spcAft>
+                <a:spcPts val="700"/>
+              </a:spcAft>
+              <a:defRPr sz="1300">
+                <a:solidFill>
+                  <a:srgbClr val="FFFFFF"/>
                 </a:solidFill>
                 <a:latin typeface="Calibri"/>
               </a:defRPr>
             </a:pPr>
             <a:r>
-              <a:t>Un grafo aziendale reale che useremo per tutto il corso. Anonimizzato da dati HR reali.</a:t>
+              <a:t>•  networkx + matplotlib — grafi statici (buono per analisi)</a:t>
+            </a:r>
+          </a:p>
+          <a:p>
+            <a:pPr algn="l">
+              <a:spcAft>
+                <a:spcPts val="700"/>
+              </a:spcAft>
+              <a:defRPr sz="1300">
+                <a:solidFill>
+                  <a:srgbClr val="FFFFFF"/>
+                </a:solidFill>
+                <a:latin typeface="Calibri"/>
+              </a:defRPr>
+            </a:pPr>
+            <a:r>
+              <a:t>•  pyvis — grafi interattivi HTML (buono per presentazioni)</a:t>
+            </a:r>
+          </a:p>
+          <a:p>
+            <a:pPr algn="l">
+              <a:spcAft>
+                <a:spcPts val="700"/>
+              </a:spcAft>
+              <a:defRPr sz="1300">
+                <a:solidFill>
+                  <a:srgbClr val="FFFFFF"/>
+                </a:solidFill>
+                <a:latin typeface="Calibri"/>
+              </a:defRPr>
+            </a:pPr>
+            <a:r>
+              <a:t>•  Entrambi leggono i dati dal driver Neo4j</a:t>
             </a:r>
           </a:p>
         </p:txBody>
       </p:sp>
       <p:sp>
         <p:nvSpPr>
-          <p:cNvPr id="4" name="TextBox 3"/>
+          <p:cNvPr id="4" name="Rectangle 3"/>
+          <p:cNvSpPr/>
+          <p:nvPr/>
+        </p:nvSpPr>
+        <p:spPr>
+          <a:xfrm>
+            <a:off x="731520" y="2560320"/>
+            <a:ext cx="5029200" cy="2743200"/>
+          </a:xfrm>
+          <a:prstGeom prst="rect">
+            <a:avLst/>
+          </a:prstGeom>
+          <a:solidFill>
+            <a:srgbClr val="1B2A4A"/>
+          </a:solidFill>
+          <a:ln w="12700">
+            <a:solidFill>
+              <a:srgbClr val="2D4F7A"/>
+            </a:solidFill>
+          </a:ln>
+        </p:spPr>
+        <p:style>
+          <a:lnRef idx="1">
+            <a:schemeClr val="accent1"/>
+          </a:lnRef>
+          <a:fillRef idx="3">
+            <a:schemeClr val="accent1"/>
+          </a:fillRef>
+          <a:effectRef idx="2">
+            <a:schemeClr val="accent1"/>
+          </a:effectRef>
+          <a:fontRef idx="minor">
+            <a:schemeClr val="lt1"/>
+          </a:fontRef>
+        </p:style>
+        <p:txBody>
+          <a:bodyPr rtlCol="0" anchor="ctr"/>
+          <a:lstStyle/>
+          <a:p>
+            <a:pPr algn="ctr"/>
+          </a:p>
+        </p:txBody>
+      </p:sp>
+      <p:sp>
+        <p:nvSpPr>
+          <p:cNvPr id="5" name="TextBox 4"/>
           <p:cNvSpPr txBox="1"/>
           <p:nvPr/>
         </p:nvSpPr>
         <p:spPr>
           <a:xfrm>
-            <a:off x="731520" y="1463040"/>
-            <a:ext cx="5029200" cy="3200400"/>
+            <a:off x="841248" y="2633472"/>
+            <a:ext cx="4809744" cy="2596896"/>
           </a:xfrm>
           <a:prstGeom prst="rect">
             <a:avLst/>
@@ -33030,177 +32648,328 @@
           </a:bodyPr>
           <a:lstStyle/>
           <a:p>
-            <a:pPr algn="l">
-              <a:spcAft>
-                <a:spcPts val="0"/>
-              </a:spcAft>
-              <a:defRPr sz="1200">
-                <a:solidFill>
-                  <a:srgbClr val="FFFFFF"/>
-                </a:solidFill>
-                <a:latin typeface="Calibri"/>
-              </a:defRPr>
-            </a:pPr>
-            <a:r>
-              <a:t>•  238 persone (consulenti, manager, tecnici)</a:t>
-            </a:r>
-          </a:p>
-          <a:p>
-            <a:pPr algn="l">
-              <a:spcAft>
-                <a:spcPts val="0"/>
-              </a:spcAft>
-              <a:defRPr sz="1200">
-                <a:solidFill>
-                  <a:srgbClr val="FFFFFF"/>
-                </a:solidFill>
-                <a:latin typeface="Calibri"/>
-              </a:defRPr>
-            </a:pPr>
-            <a:r>
-              <a:t>•  93 progetti seguiti dalle persone</a:t>
-            </a:r>
-          </a:p>
-          <a:p>
-            <a:pPr algn="l">
-              <a:spcAft>
-                <a:spcPts val="0"/>
-              </a:spcAft>
-              <a:defRPr sz="1200">
-                <a:solidFill>
-                  <a:srgbClr val="FFFFFF"/>
-                </a:solidFill>
-                <a:latin typeface="Calibri"/>
-              </a:defRPr>
-            </a:pPr>
-            <a:r>
-              <a:t>•  55 skill certificate (tecnologiche e trasversali)</a:t>
-            </a:r>
-          </a:p>
-          <a:p>
-            <a:pPr algn="l">
-              <a:spcAft>
-                <a:spcPts val="0"/>
-              </a:spcAft>
-              <a:defRPr sz="1200">
-                <a:solidFill>
-                  <a:srgbClr val="FFFFFF"/>
-                </a:solidFill>
-                <a:latin typeface="Calibri"/>
-              </a:defRPr>
-            </a:pPr>
-            <a:r>
-              <a:t>•  2 supervisor (direttori di area)</a:t>
-            </a:r>
-          </a:p>
-          <a:p>
-            <a:pPr algn="l">
-              <a:spcAft>
-                <a:spcPts val="0"/>
-              </a:spcAft>
-              <a:defRPr sz="1200">
-                <a:solidFill>
-                  <a:srgbClr val="FFFFFF"/>
-                </a:solidFill>
-                <a:latin typeface="Calibri"/>
-              </a:defRPr>
-            </a:pPr>
-            <a:r>
-              <a:t>•  Relazioni:</a:t>
-            </a:r>
-          </a:p>
-          <a:p>
-            <a:pPr algn="l">
-              <a:spcAft>
-                <a:spcPts val="0"/>
-              </a:spcAft>
-              <a:defRPr sz="1200">
-                <a:solidFill>
-                  <a:srgbClr val="FFFFFF"/>
-                </a:solidFill>
-                <a:latin typeface="Calibri"/>
-              </a:defRPr>
-            </a:pPr>
-            <a:r>
-              <a:t>•    • HAS_SKILL {proficiency: 1-5}</a:t>
-            </a:r>
-          </a:p>
-          <a:p>
-            <a:pPr algn="l">
-              <a:spcAft>
-                <a:spcPts val="0"/>
-              </a:spcAft>
-              <a:defRPr sz="1200">
-                <a:solidFill>
-                  <a:srgbClr val="FFFFFF"/>
-                </a:solidFill>
-                <a:latin typeface="Calibri"/>
-              </a:defRPr>
-            </a:pPr>
-            <a:r>
-              <a:t>•    • WORKED_ON {role: Developer/Architect/etc.}</a:t>
-            </a:r>
-          </a:p>
-          <a:p>
-            <a:pPr algn="l">
-              <a:spcAft>
-                <a:spcPts val="0"/>
-              </a:spcAft>
-              <a:defRPr sz="1200">
-                <a:solidFill>
-                  <a:srgbClr val="FFFFFF"/>
-                </a:solidFill>
-                <a:latin typeface="Calibri"/>
-              </a:defRPr>
-            </a:pPr>
-            <a:r>
-              <a:t>•    • REPORTS_TO (Person → Supervisor)</a:t>
-            </a:r>
-          </a:p>
-          <a:p>
-            <a:pPr algn="l">
-              <a:spcAft>
-                <a:spcPts val="0"/>
-              </a:spcAft>
-              <a:defRPr sz="1200">
-                <a:solidFill>
-                  <a:srgbClr val="FFFFFF"/>
-                </a:solidFill>
-                <a:latin typeface="Calibri"/>
-              </a:defRPr>
-            </a:pPr>
-            <a:r>
-              <a:t>•  Dati anonimizzati da foglio Excel aziendale reale</a:t>
-            </a:r>
-          </a:p>
-          <a:p>
-            <a:pPr algn="l">
-              <a:spcAft>
-                <a:spcPts val="0"/>
-              </a:spcAft>
-              <a:defRPr sz="1200">
-                <a:solidFill>
-                  <a:srgbClr val="FFFFFF"/>
-                </a:solidFill>
-                <a:latin typeface="Calibri"/>
-              </a:defRPr>
-            </a:pPr>
-            <a:r>
-              <a:t>•  Ospitato su AuraDB Free Tier</a:t>
+            <a:pPr>
+              <a:spcAft>
+                <a:spcPts val="100"/>
+              </a:spcAft>
+              <a:defRPr sz="1000">
+                <a:solidFill>
+                  <a:srgbClr val="7EC68E"/>
+                </a:solidFill>
+                <a:latin typeface="Consolas"/>
+              </a:defRPr>
+            </a:pPr>
+            <a:r>
+              <a:t># Grafo statico con networkx + matplotlib:</a:t>
+            </a:r>
+          </a:p>
+          <a:p>
+            <a:pPr>
+              <a:spcAft>
+                <a:spcPts val="100"/>
+              </a:spcAft>
+              <a:defRPr sz="1000">
+                <a:solidFill>
+                  <a:srgbClr val="7EC68E"/>
+                </a:solidFill>
+                <a:latin typeface="Consolas"/>
+              </a:defRPr>
+            </a:pPr>
+            <a:r>
+              <a:t>import networkx as nx</a:t>
+            </a:r>
+          </a:p>
+          <a:p>
+            <a:pPr>
+              <a:spcAft>
+                <a:spcPts val="100"/>
+              </a:spcAft>
+              <a:defRPr sz="1000">
+                <a:solidFill>
+                  <a:srgbClr val="7EC68E"/>
+                </a:solidFill>
+                <a:latin typeface="Consolas"/>
+              </a:defRPr>
+            </a:pPr>
+            <a:r>
+              <a:t>import matplotlib.pyplot as plt</a:t>
+            </a:r>
+          </a:p>
+          <a:p>
+            <a:pPr>
+              <a:spcAft>
+                <a:spcPts val="100"/>
+              </a:spcAft>
+              <a:defRPr sz="1000">
+                <a:solidFill>
+                  <a:srgbClr val="7EC68E"/>
+                </a:solidFill>
+                <a:latin typeface="Consolas"/>
+              </a:defRPr>
+            </a:pPr>
+          </a:p>
+          <a:p>
+            <a:pPr>
+              <a:spcAft>
+                <a:spcPts val="100"/>
+              </a:spcAft>
+              <a:defRPr sz="1000">
+                <a:solidFill>
+                  <a:srgbClr val="7EC68E"/>
+                </a:solidFill>
+                <a:latin typeface="Consolas"/>
+              </a:defRPr>
+            </a:pPr>
+            <a:r>
+              <a:t>G = nx.Graph()</a:t>
+            </a:r>
+          </a:p>
+          <a:p>
+            <a:pPr>
+              <a:spcAft>
+                <a:spcPts val="100"/>
+              </a:spcAft>
+              <a:defRPr sz="1000">
+                <a:solidFill>
+                  <a:srgbClr val="7EC68E"/>
+                </a:solidFill>
+                <a:latin typeface="Consolas"/>
+              </a:defRPr>
+            </a:pPr>
+            <a:r>
+              <a:t>G.add_edge("Alice", "Python",</a:t>
+            </a:r>
+          </a:p>
+          <a:p>
+            <a:pPr>
+              <a:spcAft>
+                <a:spcPts val="100"/>
+              </a:spcAft>
+              <a:defRPr sz="1000">
+                <a:solidFill>
+                  <a:srgbClr val="7EC68E"/>
+                </a:solidFill>
+                <a:latin typeface="Consolas"/>
+              </a:defRPr>
+            </a:pPr>
+            <a:r>
+              <a:t>           relation="HAS_SKILL")</a:t>
+            </a:r>
+          </a:p>
+          <a:p>
+            <a:pPr>
+              <a:spcAft>
+                <a:spcPts val="100"/>
+              </a:spcAft>
+              <a:defRPr sz="1000">
+                <a:solidFill>
+                  <a:srgbClr val="7EC68E"/>
+                </a:solidFill>
+                <a:latin typeface="Consolas"/>
+              </a:defRPr>
+            </a:pPr>
+            <a:r>
+              <a:t>G.add_edge("Bob", "Python",</a:t>
+            </a:r>
+          </a:p>
+          <a:p>
+            <a:pPr>
+              <a:spcAft>
+                <a:spcPts val="100"/>
+              </a:spcAft>
+              <a:defRPr sz="1000">
+                <a:solidFill>
+                  <a:srgbClr val="7EC68E"/>
+                </a:solidFill>
+                <a:latin typeface="Consolas"/>
+              </a:defRPr>
+            </a:pPr>
+            <a:r>
+              <a:t>           relation="HAS_SKILL")</a:t>
+            </a:r>
+          </a:p>
+          <a:p>
+            <a:pPr>
+              <a:spcAft>
+                <a:spcPts val="100"/>
+              </a:spcAft>
+              <a:defRPr sz="1000">
+                <a:solidFill>
+                  <a:srgbClr val="7EC68E"/>
+                </a:solidFill>
+                <a:latin typeface="Consolas"/>
+              </a:defRPr>
+            </a:pPr>
+            <a:r>
+              <a:t>G.add_edge("Bob", "Java",</a:t>
+            </a:r>
+          </a:p>
+          <a:p>
+            <a:pPr>
+              <a:spcAft>
+                <a:spcPts val="100"/>
+              </a:spcAft>
+              <a:defRPr sz="1000">
+                <a:solidFill>
+                  <a:srgbClr val="7EC68E"/>
+                </a:solidFill>
+                <a:latin typeface="Consolas"/>
+              </a:defRPr>
+            </a:pPr>
+            <a:r>
+              <a:t>           relation="HAS_SKILL")</a:t>
+            </a:r>
+          </a:p>
+          <a:p>
+            <a:pPr>
+              <a:spcAft>
+                <a:spcPts val="100"/>
+              </a:spcAft>
+              <a:defRPr sz="1000">
+                <a:solidFill>
+                  <a:srgbClr val="7EC68E"/>
+                </a:solidFill>
+                <a:latin typeface="Consolas"/>
+              </a:defRPr>
+            </a:pPr>
+          </a:p>
+          <a:p>
+            <a:pPr>
+              <a:spcAft>
+                <a:spcPts val="100"/>
+              </a:spcAft>
+              <a:defRPr sz="1000">
+                <a:solidFill>
+                  <a:srgbClr val="7EC68E"/>
+                </a:solidFill>
+                <a:latin typeface="Consolas"/>
+              </a:defRPr>
+            </a:pPr>
+            <a:r>
+              <a:t>nx.draw(G, with_labels=True,</a:t>
+            </a:r>
+          </a:p>
+          <a:p>
+            <a:pPr>
+              <a:spcAft>
+                <a:spcPts val="100"/>
+              </a:spcAft>
+              <a:defRPr sz="1000">
+                <a:solidFill>
+                  <a:srgbClr val="7EC68E"/>
+                </a:solidFill>
+                <a:latin typeface="Consolas"/>
+              </a:defRPr>
+            </a:pPr>
+            <a:r>
+              <a:t>        node_color="lightblue",</a:t>
+            </a:r>
+          </a:p>
+          <a:p>
+            <a:pPr>
+              <a:spcAft>
+                <a:spcPts val="100"/>
+              </a:spcAft>
+              <a:defRPr sz="1000">
+                <a:solidFill>
+                  <a:srgbClr val="7EC68E"/>
+                </a:solidFill>
+                <a:latin typeface="Consolas"/>
+              </a:defRPr>
+            </a:pPr>
+            <a:r>
+              <a:t>        node_size=2000)</a:t>
+            </a:r>
+          </a:p>
+          <a:p>
+            <a:pPr>
+              <a:spcAft>
+                <a:spcPts val="100"/>
+              </a:spcAft>
+              <a:defRPr sz="1000">
+                <a:solidFill>
+                  <a:srgbClr val="7EC68E"/>
+                </a:solidFill>
+                <a:latin typeface="Consolas"/>
+              </a:defRPr>
+            </a:pPr>
+            <a:r>
+              <a:t>plt.title("Skill Graph")</a:t>
+            </a:r>
+          </a:p>
+          <a:p>
+            <a:pPr>
+              <a:spcAft>
+                <a:spcPts val="100"/>
+              </a:spcAft>
+              <a:defRPr sz="1000">
+                <a:solidFill>
+                  <a:srgbClr val="7EC68E"/>
+                </a:solidFill>
+                <a:latin typeface="Consolas"/>
+              </a:defRPr>
+            </a:pPr>
+            <a:r>
+              <a:t>plt.show()</a:t>
             </a:r>
           </a:p>
         </p:txBody>
       </p:sp>
       <p:sp>
         <p:nvSpPr>
-          <p:cNvPr id="5" name="TextBox 4"/>
+          <p:cNvPr id="6" name="Rectangle 5"/>
+          <p:cNvSpPr/>
+          <p:nvPr/>
+        </p:nvSpPr>
+        <p:spPr>
+          <a:xfrm>
+            <a:off x="5669280" y="2560320"/>
+            <a:ext cx="4846320" cy="2743200"/>
+          </a:xfrm>
+          <a:prstGeom prst="rect">
+            <a:avLst/>
+          </a:prstGeom>
+          <a:solidFill>
+            <a:srgbClr val="1B2A4A"/>
+          </a:solidFill>
+          <a:ln w="12700">
+            <a:solidFill>
+              <a:srgbClr val="2D4F7A"/>
+            </a:solidFill>
+          </a:ln>
+        </p:spPr>
+        <p:style>
+          <a:lnRef idx="1">
+            <a:schemeClr val="accent1"/>
+          </a:lnRef>
+          <a:fillRef idx="3">
+            <a:schemeClr val="accent1"/>
+          </a:fillRef>
+          <a:effectRef idx="2">
+            <a:schemeClr val="accent1"/>
+          </a:effectRef>
+          <a:fontRef idx="minor">
+            <a:schemeClr val="lt1"/>
+          </a:fontRef>
+        </p:style>
+        <p:txBody>
+          <a:bodyPr rtlCol="0" anchor="ctr"/>
+          <a:lstStyle/>
+          <a:p>
+            <a:pPr algn="ctr"/>
+          </a:p>
+        </p:txBody>
+      </p:sp>
+      <p:sp>
+        <p:nvSpPr>
+          <p:cNvPr id="7" name="TextBox 6"/>
           <p:cNvSpPr txBox="1"/>
           <p:nvPr/>
         </p:nvSpPr>
         <p:spPr>
           <a:xfrm>
-            <a:off x="5669280" y="1463040"/>
-            <a:ext cx="4846320" cy="1371600"/>
+            <a:off x="5779008" y="2633472"/>
+            <a:ext cx="4626864" cy="2596896"/>
           </a:xfrm>
           <a:prstGeom prst="rect">
             <a:avLst/>
@@ -33213,8 +32982,11 @@
           </a:bodyPr>
           <a:lstStyle/>
           <a:p>
-            <a:pPr algn="l">
-              <a:defRPr sz="1100" b="0">
+            <a:pPr>
+              <a:spcAft>
+                <a:spcPts val="100"/>
+              </a:spcAft>
+              <a:defRPr sz="1000">
                 <a:solidFill>
                   <a:srgbClr val="7EC68E"/>
                 </a:solidFill>
@@ -33222,74 +32994,292 @@
               </a:defRPr>
             </a:pPr>
             <a:r>
-              <a:t>Esempio di riga CSV:</a:t>
-            </a:r>
-            <a:br/>
-            <a:br/>
-            <a:r>
-              <a:t>employee_id | 1</a:t>
-            </a:r>
-            <a:br/>
-            <a:r>
-              <a:t>name        | Mario Rossi</a:t>
-            </a:r>
-            <a:br/>
-            <a:r>
-              <a:t>gender      | M</a:t>
-            </a:r>
-            <a:br/>
-            <a:r>
-              <a:t>discipline  | Technology</a:t>
-            </a:r>
-            <a:br/>
-            <a:r>
-              <a:t>department  | Digital</a:t>
-            </a:r>
-            <a:br/>
-            <a:r>
-              <a:t>code        | ITA-001</a:t>
-            </a:r>
-            <a:br/>
-            <a:r>
-              <a:t>location    | Roma</a:t>
-            </a:r>
-            <a:br/>
-            <a:r>
-              <a:t>title       | Senior Consultant</a:t>
-            </a:r>
-            <a:br/>
-            <a:r>
-              <a:t>supervisor_id | 200</a:t>
-            </a:r>
-            <a:br/>
-            <a:r>
-              <a:t>supervisor_name | Anna Bianchi</a:t>
-            </a:r>
-            <a:br/>
-            <a:r>
-              <a:t>project_id  | 10</a:t>
-            </a:r>
-            <a:br/>
-            <a:r>
-              <a:t>project_name | AI Platform</a:t>
-            </a:r>
-            <a:br/>
-            <a:r>
-              <a:t>role        | Developer</a:t>
+              <a:t># pyvis per grafo interattivo HTML:</a:t>
+            </a:r>
+          </a:p>
+          <a:p>
+            <a:pPr>
+              <a:spcAft>
+                <a:spcPts val="100"/>
+              </a:spcAft>
+              <a:defRPr sz="1000">
+                <a:solidFill>
+                  <a:srgbClr val="7EC68E"/>
+                </a:solidFill>
+                <a:latin typeface="Consolas"/>
+              </a:defRPr>
+            </a:pPr>
+            <a:r>
+              <a:t>from pyvis.network import Network</a:t>
+            </a:r>
+          </a:p>
+          <a:p>
+            <a:pPr>
+              <a:spcAft>
+                <a:spcPts val="100"/>
+              </a:spcAft>
+              <a:defRPr sz="1000">
+                <a:solidFill>
+                  <a:srgbClr val="7EC68E"/>
+                </a:solidFill>
+                <a:latin typeface="Consolas"/>
+              </a:defRPr>
+            </a:pPr>
+          </a:p>
+          <a:p>
+            <a:pPr>
+              <a:spcAft>
+                <a:spcPts val="100"/>
+              </a:spcAft>
+              <a:defRPr sz="1000">
+                <a:solidFill>
+                  <a:srgbClr val="7EC68E"/>
+                </a:solidFill>
+                <a:latin typeface="Consolas"/>
+              </a:defRPr>
+            </a:pPr>
+            <a:r>
+              <a:t>net = Network(height="500px", width="100%")</a:t>
+            </a:r>
+          </a:p>
+          <a:p>
+            <a:pPr>
+              <a:spcAft>
+                <a:spcPts val="100"/>
+              </a:spcAft>
+              <a:defRPr sz="1000">
+                <a:solidFill>
+                  <a:srgbClr val="7EC68E"/>
+                </a:solidFill>
+                <a:latin typeface="Consolas"/>
+              </a:defRPr>
+            </a:pPr>
+          </a:p>
+          <a:p>
+            <a:pPr>
+              <a:spcAft>
+                <a:spcPts val="100"/>
+              </a:spcAft>
+              <a:defRPr sz="1000">
+                <a:solidFill>
+                  <a:srgbClr val="7EC68E"/>
+                </a:solidFill>
+                <a:latin typeface="Consolas"/>
+              </a:defRPr>
+            </a:pPr>
+            <a:r>
+              <a:t># Aggiungi nodi con etichette:</a:t>
+            </a:r>
+          </a:p>
+          <a:p>
+            <a:pPr>
+              <a:spcAft>
+                <a:spcPts val="100"/>
+              </a:spcAft>
+              <a:defRPr sz="1000">
+                <a:solidFill>
+                  <a:srgbClr val="7EC68E"/>
+                </a:solidFill>
+                <a:latin typeface="Consolas"/>
+              </a:defRPr>
+            </a:pPr>
+            <a:r>
+              <a:t>net.add_node("Alice", label="Alice")</a:t>
+            </a:r>
+          </a:p>
+          <a:p>
+            <a:pPr>
+              <a:spcAft>
+                <a:spcPts val="100"/>
+              </a:spcAft>
+              <a:defRPr sz="1000">
+                <a:solidFill>
+                  <a:srgbClr val="7EC68E"/>
+                </a:solidFill>
+                <a:latin typeface="Consolas"/>
+              </a:defRPr>
+            </a:pPr>
+            <a:r>
+              <a:t>net.add_node("Python", label="Python")</a:t>
+            </a:r>
+          </a:p>
+          <a:p>
+            <a:pPr>
+              <a:spcAft>
+                <a:spcPts val="100"/>
+              </a:spcAft>
+              <a:defRPr sz="1000">
+                <a:solidFill>
+                  <a:srgbClr val="7EC68E"/>
+                </a:solidFill>
+                <a:latin typeface="Consolas"/>
+              </a:defRPr>
+            </a:pPr>
+            <a:r>
+              <a:t>net.add_node("Bob", label="Bob")</a:t>
+            </a:r>
+          </a:p>
+          <a:p>
+            <a:pPr>
+              <a:spcAft>
+                <a:spcPts val="100"/>
+              </a:spcAft>
+              <a:defRPr sz="1000">
+                <a:solidFill>
+                  <a:srgbClr val="7EC68E"/>
+                </a:solidFill>
+                <a:latin typeface="Consolas"/>
+              </a:defRPr>
+            </a:pPr>
+          </a:p>
+          <a:p>
+            <a:pPr>
+              <a:spcAft>
+                <a:spcPts val="100"/>
+              </a:spcAft>
+              <a:defRPr sz="1000">
+                <a:solidFill>
+                  <a:srgbClr val="7EC68E"/>
+                </a:solidFill>
+                <a:latin typeface="Consolas"/>
+              </a:defRPr>
+            </a:pPr>
+            <a:r>
+              <a:t># Aggiungi relazioni:</a:t>
+            </a:r>
+          </a:p>
+          <a:p>
+            <a:pPr>
+              <a:spcAft>
+                <a:spcPts val="100"/>
+              </a:spcAft>
+              <a:defRPr sz="1000">
+                <a:solidFill>
+                  <a:srgbClr val="7EC68E"/>
+                </a:solidFill>
+                <a:latin typeface="Consolas"/>
+              </a:defRPr>
+            </a:pPr>
+            <a:r>
+              <a:t>net.add_edge("Alice", "Python")</a:t>
+            </a:r>
+          </a:p>
+          <a:p>
+            <a:pPr>
+              <a:spcAft>
+                <a:spcPts val="100"/>
+              </a:spcAft>
+              <a:defRPr sz="1000">
+                <a:solidFill>
+                  <a:srgbClr val="7EC68E"/>
+                </a:solidFill>
+                <a:latin typeface="Consolas"/>
+              </a:defRPr>
+            </a:pPr>
+            <a:r>
+              <a:t>net.add_edge("Bob", "Python")</a:t>
+            </a:r>
+          </a:p>
+          <a:p>
+            <a:pPr>
+              <a:spcAft>
+                <a:spcPts val="100"/>
+              </a:spcAft>
+              <a:defRPr sz="1000">
+                <a:solidFill>
+                  <a:srgbClr val="7EC68E"/>
+                </a:solidFill>
+                <a:latin typeface="Consolas"/>
+              </a:defRPr>
+            </a:pPr>
+          </a:p>
+          <a:p>
+            <a:pPr>
+              <a:spcAft>
+                <a:spcPts val="100"/>
+              </a:spcAft>
+              <a:defRPr sz="1000">
+                <a:solidFill>
+                  <a:srgbClr val="7EC68E"/>
+                </a:solidFill>
+                <a:latin typeface="Consolas"/>
+              </a:defRPr>
+            </a:pPr>
+            <a:r>
+              <a:t># Salva come HTML e apri nel browser:</a:t>
+            </a:r>
+          </a:p>
+          <a:p>
+            <a:pPr>
+              <a:spcAft>
+                <a:spcPts val="100"/>
+              </a:spcAft>
+              <a:defRPr sz="1000">
+                <a:solidFill>
+                  <a:srgbClr val="7EC68E"/>
+                </a:solidFill>
+                <a:latin typeface="Consolas"/>
+              </a:defRPr>
+            </a:pPr>
+            <a:r>
+              <a:t>net.show("grafo.html")</a:t>
             </a:r>
           </a:p>
         </p:txBody>
       </p:sp>
       <p:sp>
         <p:nvSpPr>
-          <p:cNvPr id="6" name="TextBox 5"/>
+          <p:cNvPr id="8" name="Rectangle 7"/>
+          <p:cNvSpPr/>
+          <p:nvPr/>
+        </p:nvSpPr>
+        <p:spPr>
+          <a:xfrm>
+            <a:off x="731520" y="5486400"/>
+            <a:ext cx="10698480" cy="36576"/>
+          </a:xfrm>
+          <a:prstGeom prst="rect">
+            <a:avLst/>
+          </a:prstGeom>
+          <a:solidFill>
+            <a:srgbClr val="F0C040"/>
+          </a:solidFill>
+          <a:ln>
+            <a:noFill/>
+          </a:ln>
+        </p:spPr>
+        <p:style>
+          <a:lnRef idx="1">
+            <a:schemeClr val="accent1"/>
+          </a:lnRef>
+          <a:fillRef idx="3">
+            <a:schemeClr val="accent1"/>
+          </a:fillRef>
+          <a:effectRef idx="2">
+            <a:schemeClr val="accent1"/>
+          </a:effectRef>
+          <a:fontRef idx="minor">
+            <a:schemeClr val="lt1"/>
+          </a:fontRef>
+        </p:style>
+        <p:txBody>
+          <a:bodyPr rtlCol="0" anchor="ctr"/>
+          <a:lstStyle/>
+          <a:p>
+            <a:pPr algn="ctr"/>
+          </a:p>
+        </p:txBody>
+      </p:sp>
+      <p:sp>
+        <p:nvSpPr>
+          <p:cNvPr id="9" name="TextBox 8"/>
           <p:cNvSpPr txBox="1"/>
           <p:nvPr/>
         </p:nvSpPr>
         <p:spPr>
           <a:xfrm>
-            <a:off x="5669280" y="3108960"/>
-            <a:ext cx="4846320" cy="1554480"/>
+            <a:off x="731520" y="5669280"/>
+            <a:ext cx="10515600" cy="365760"/>
           </a:xfrm>
           <a:prstGeom prst="rect">
             <a:avLst/>
@@ -33303,45 +33293,15 @@
           <a:lstStyle/>
           <a:p>
             <a:pPr algn="l">
-              <a:defRPr sz="1200" b="0">
-                <a:solidFill>
-                  <a:srgbClr val="CCCCCC"/>
+              <a:defRPr sz="1300" b="0">
+                <a:solidFill>
+                  <a:srgbClr val="F0C040"/>
                 </a:solidFill>
                 <a:latin typeface="Calibri"/>
               </a:defRPr>
             </a:pPr>
             <a:r>
-              <a:t>Struttura dati:</a:t>
-            </a:r>
-            <a:br/>
-            <a:br/>
-            <a:r>
-              <a:t>Ogni riga CSV = una persona</a:t>
-            </a:r>
-            <a:br/>
-            <a:r>
-              <a:t>con le skill in colonne separate.</a:t>
-            </a:r>
-            <a:br/>
-            <a:r>
-              <a:t>Il caricamento UNWIND trasforma</a:t>
-            </a:r>
-            <a:br/>
-            <a:r>
-              <a:t>le righe in nodi e relazioni.</a:t>
-            </a:r>
-            <a:br/>
-            <a:br/>
-            <a:r>
-              <a:t>Nei prossimi esercizi esploreremo</a:t>
-            </a:r>
-            <a:br/>
-            <a:r>
-              <a:t>il dataset con Cypher dal Browser</a:t>
-            </a:r>
-            <a:br/>
-            <a:r>
-              <a:t>e dal notebook Python.</a:t>
+              <a:t>Entrambi gli strumenti leggono i dati dal driver Neo4j e li trasformano in un grafo visuale.</a:t>
             </a:r>
           </a:p>
         </p:txBody>
@@ -33403,7 +33363,7 @@
               </a:defRPr>
             </a:pPr>
             <a:r>
-              <a:t>Schema del Org Graph</a:t>
+              <a:t>Org Graph: Il Nostro Dataset</a:t>
             </a:r>
           </a:p>
         </p:txBody>
@@ -33417,7 +33377,7 @@
         <p:spPr>
           <a:xfrm>
             <a:off x="731520" y="914400"/>
-            <a:ext cx="10515600" cy="365760"/>
+            <a:ext cx="10515600" cy="457200"/>
           </a:xfrm>
           <a:prstGeom prst="rect">
             <a:avLst/>
@@ -33431,7 +33391,7 @@
           <a:lstStyle/>
           <a:p>
             <a:pPr algn="l">
-              <a:defRPr sz="1400" b="0">
+              <a:defRPr sz="1500" b="0">
                 <a:solidFill>
                   <a:srgbClr val="CCCCCC"/>
                 </a:solidFill>
@@ -33439,7 +33399,7 @@
               </a:defRPr>
             </a:pPr>
             <a:r>
-              <a:t>Il modello a grafo del nostro progetto: nodi, labels, relazioni e proprietà.</a:t>
+              <a:t>Un grafo aziendale reale che useremo per tutto il corso. Anonimizzato da dati HR reali.</a:t>
             </a:r>
           </a:p>
         </p:txBody>
@@ -33452,8 +33412,8 @@
         </p:nvSpPr>
         <p:spPr>
           <a:xfrm>
-            <a:off x="731520" y="1371600"/>
-            <a:ext cx="3200400" cy="365760"/>
+            <a:off x="731520" y="1463040"/>
+            <a:ext cx="5029200" cy="3200400"/>
           </a:xfrm>
           <a:prstGeom prst="rect">
             <a:avLst/>
@@ -33467,15 +33427,162 @@
           <a:lstStyle/>
           <a:p>
             <a:pPr algn="l">
-              <a:defRPr sz="1600" b="1">
-                <a:solidFill>
-                  <a:srgbClr val="F08040"/>
+              <a:spcAft>
+                <a:spcPts val="0"/>
+              </a:spcAft>
+              <a:defRPr sz="1200">
+                <a:solidFill>
+                  <a:srgbClr val="FFFFFF"/>
                 </a:solidFill>
                 <a:latin typeface="Calibri"/>
               </a:defRPr>
             </a:pPr>
             <a:r>
-              <a:t>(:Person)</a:t>
+              <a:t>•  238 persone (consulenti, manager, tecnici)</a:t>
+            </a:r>
+          </a:p>
+          <a:p>
+            <a:pPr algn="l">
+              <a:spcAft>
+                <a:spcPts val="0"/>
+              </a:spcAft>
+              <a:defRPr sz="1200">
+                <a:solidFill>
+                  <a:srgbClr val="FFFFFF"/>
+                </a:solidFill>
+                <a:latin typeface="Calibri"/>
+              </a:defRPr>
+            </a:pPr>
+            <a:r>
+              <a:t>•  93 progetti seguiti dalle persone</a:t>
+            </a:r>
+          </a:p>
+          <a:p>
+            <a:pPr algn="l">
+              <a:spcAft>
+                <a:spcPts val="0"/>
+              </a:spcAft>
+              <a:defRPr sz="1200">
+                <a:solidFill>
+                  <a:srgbClr val="FFFFFF"/>
+                </a:solidFill>
+                <a:latin typeface="Calibri"/>
+              </a:defRPr>
+            </a:pPr>
+            <a:r>
+              <a:t>•  55 skill certificate (tecnologiche e trasversali)</a:t>
+            </a:r>
+          </a:p>
+          <a:p>
+            <a:pPr algn="l">
+              <a:spcAft>
+                <a:spcPts val="0"/>
+              </a:spcAft>
+              <a:defRPr sz="1200">
+                <a:solidFill>
+                  <a:srgbClr val="FFFFFF"/>
+                </a:solidFill>
+                <a:latin typeface="Calibri"/>
+              </a:defRPr>
+            </a:pPr>
+            <a:r>
+              <a:t>•  2 supervisor (direttori di area)</a:t>
+            </a:r>
+          </a:p>
+          <a:p>
+            <a:pPr algn="l">
+              <a:spcAft>
+                <a:spcPts val="0"/>
+              </a:spcAft>
+              <a:defRPr sz="1200">
+                <a:solidFill>
+                  <a:srgbClr val="FFFFFF"/>
+                </a:solidFill>
+                <a:latin typeface="Calibri"/>
+              </a:defRPr>
+            </a:pPr>
+            <a:r>
+              <a:t>•  Relazioni:</a:t>
+            </a:r>
+          </a:p>
+          <a:p>
+            <a:pPr algn="l">
+              <a:spcAft>
+                <a:spcPts val="0"/>
+              </a:spcAft>
+              <a:defRPr sz="1200">
+                <a:solidFill>
+                  <a:srgbClr val="FFFFFF"/>
+                </a:solidFill>
+                <a:latin typeface="Calibri"/>
+              </a:defRPr>
+            </a:pPr>
+            <a:r>
+              <a:t>•    • HAS_SKILL {proficiency: 1-5}</a:t>
+            </a:r>
+          </a:p>
+          <a:p>
+            <a:pPr algn="l">
+              <a:spcAft>
+                <a:spcPts val="0"/>
+              </a:spcAft>
+              <a:defRPr sz="1200">
+                <a:solidFill>
+                  <a:srgbClr val="FFFFFF"/>
+                </a:solidFill>
+                <a:latin typeface="Calibri"/>
+              </a:defRPr>
+            </a:pPr>
+            <a:r>
+              <a:t>•    • WORKED_ON {role: Developer/Architect/etc.}</a:t>
+            </a:r>
+          </a:p>
+          <a:p>
+            <a:pPr algn="l">
+              <a:spcAft>
+                <a:spcPts val="0"/>
+              </a:spcAft>
+              <a:defRPr sz="1200">
+                <a:solidFill>
+                  <a:srgbClr val="FFFFFF"/>
+                </a:solidFill>
+                <a:latin typeface="Calibri"/>
+              </a:defRPr>
+            </a:pPr>
+            <a:r>
+              <a:t>•    • REPORTS_TO (Person → Supervisor)</a:t>
+            </a:r>
+          </a:p>
+          <a:p>
+            <a:pPr algn="l">
+              <a:spcAft>
+                <a:spcPts val="0"/>
+              </a:spcAft>
+              <a:defRPr sz="1200">
+                <a:solidFill>
+                  <a:srgbClr val="FFFFFF"/>
+                </a:solidFill>
+                <a:latin typeface="Calibri"/>
+              </a:defRPr>
+            </a:pPr>
+            <a:r>
+              <a:t>•  Dati anonimizzati da foglio Excel aziendale reale</a:t>
+            </a:r>
+          </a:p>
+          <a:p>
+            <a:pPr algn="l">
+              <a:spcAft>
+                <a:spcPts val="0"/>
+              </a:spcAft>
+              <a:defRPr sz="1200">
+                <a:solidFill>
+                  <a:srgbClr val="FFFFFF"/>
+                </a:solidFill>
+                <a:latin typeface="Calibri"/>
+              </a:defRPr>
+            </a:pPr>
+            <a:r>
+              <a:t>•  Ospitato su AuraDB Free Tier</a:t>
             </a:r>
           </a:p>
         </p:txBody>
@@ -33488,8 +33595,8 @@
         </p:nvSpPr>
         <p:spPr>
           <a:xfrm>
-            <a:off x="731520" y="1783080"/>
-            <a:ext cx="2286000" cy="1097280"/>
+            <a:off x="5669280" y="1463040"/>
+            <a:ext cx="4846320" cy="2011680"/>
           </a:xfrm>
           <a:prstGeom prst="rect">
             <a:avLst/>
@@ -33503,130 +33610,68 @@
           <a:lstStyle/>
           <a:p>
             <a:pPr algn="l">
-              <a:spcAft>
-                <a:spcPts val="0"/>
-              </a:spcAft>
-              <a:defRPr sz="1000">
+              <a:defRPr sz="1000" b="0">
                 <a:solidFill>
                   <a:srgbClr val="7EC68E"/>
                 </a:solidFill>
-                <a:latin typeface="Calibri"/>
-              </a:defRPr>
-            </a:pPr>
-            <a:r>
-              <a:t>•  employee_id</a:t>
-            </a:r>
-          </a:p>
-          <a:p>
-            <a:pPr algn="l">
-              <a:spcAft>
-                <a:spcPts val="0"/>
-              </a:spcAft>
-              <a:defRPr sz="1000">
-                <a:solidFill>
-                  <a:srgbClr val="7EC68E"/>
-                </a:solidFill>
-                <a:latin typeface="Calibri"/>
-              </a:defRPr>
-            </a:pPr>
-            <a:r>
-              <a:t>•  name</a:t>
-            </a:r>
-          </a:p>
-          <a:p>
-            <a:pPr algn="l">
-              <a:spcAft>
-                <a:spcPts val="0"/>
-              </a:spcAft>
-              <a:defRPr sz="1000">
-                <a:solidFill>
-                  <a:srgbClr val="7EC68E"/>
-                </a:solidFill>
-                <a:latin typeface="Calibri"/>
-              </a:defRPr>
-            </a:pPr>
-            <a:r>
-              <a:t>•  gender</a:t>
-            </a:r>
-          </a:p>
-          <a:p>
-            <a:pPr algn="l">
-              <a:spcAft>
-                <a:spcPts val="0"/>
-              </a:spcAft>
-              <a:defRPr sz="1000">
-                <a:solidFill>
-                  <a:srgbClr val="7EC68E"/>
-                </a:solidFill>
-                <a:latin typeface="Calibri"/>
-              </a:defRPr>
-            </a:pPr>
-            <a:r>
-              <a:t>•  discipline</a:t>
-            </a:r>
-          </a:p>
-          <a:p>
-            <a:pPr algn="l">
-              <a:spcAft>
-                <a:spcPts val="0"/>
-              </a:spcAft>
-              <a:defRPr sz="1000">
-                <a:solidFill>
-                  <a:srgbClr val="7EC68E"/>
-                </a:solidFill>
-                <a:latin typeface="Calibri"/>
-              </a:defRPr>
-            </a:pPr>
-            <a:r>
-              <a:t>•  department</a:t>
-            </a:r>
-          </a:p>
-          <a:p>
-            <a:pPr algn="l">
-              <a:spcAft>
-                <a:spcPts val="0"/>
-              </a:spcAft>
-              <a:defRPr sz="1000">
-                <a:solidFill>
-                  <a:srgbClr val="7EC68E"/>
-                </a:solidFill>
-                <a:latin typeface="Calibri"/>
-              </a:defRPr>
-            </a:pPr>
-            <a:r>
-              <a:t>•  code</a:t>
-            </a:r>
-          </a:p>
-          <a:p>
-            <a:pPr algn="l">
-              <a:spcAft>
-                <a:spcPts val="0"/>
-              </a:spcAft>
-              <a:defRPr sz="1000">
-                <a:solidFill>
-                  <a:srgbClr val="7EC68E"/>
-                </a:solidFill>
-                <a:latin typeface="Calibri"/>
-              </a:defRPr>
-            </a:pPr>
-            <a:r>
-              <a:t>•  location</a:t>
-            </a:r>
-          </a:p>
-          <a:p>
-            <a:pPr algn="l">
-              <a:spcAft>
-                <a:spcPts val="0"/>
-              </a:spcAft>
-              <a:defRPr sz="1000">
-                <a:solidFill>
-                  <a:srgbClr val="7EC68E"/>
-                </a:solidFill>
-                <a:latin typeface="Calibri"/>
-              </a:defRPr>
-            </a:pPr>
-            <a:r>
-              <a:t>•  title</a:t>
+                <a:latin typeface="Consolas"/>
+              </a:defRPr>
+            </a:pPr>
+            <a:r>
+              <a:t>Esempio di riga CSV:</a:t>
+            </a:r>
+            <a:br/>
+            <a:br/>
+            <a:r>
+              <a:t>employee_id | 1</a:t>
+            </a:r>
+            <a:br/>
+            <a:r>
+              <a:t>name        | Mario Rossi</a:t>
+            </a:r>
+            <a:br/>
+            <a:r>
+              <a:t>gender      | M</a:t>
+            </a:r>
+            <a:br/>
+            <a:r>
+              <a:t>discipline  | Technology</a:t>
+            </a:r>
+            <a:br/>
+            <a:r>
+              <a:t>department  | Digital</a:t>
+            </a:r>
+            <a:br/>
+            <a:r>
+              <a:t>code        | ITA-001</a:t>
+            </a:r>
+            <a:br/>
+            <a:r>
+              <a:t>location    | Roma</a:t>
+            </a:r>
+            <a:br/>
+            <a:r>
+              <a:t>title       | Senior Consultant</a:t>
+            </a:r>
+            <a:br/>
+            <a:r>
+              <a:t>supervisor_id | 200</a:t>
+            </a:r>
+            <a:br/>
+            <a:r>
+              <a:t>supervisor_name | Anna Bianchi</a:t>
+            </a:r>
+            <a:br/>
+            <a:r>
+              <a:t>project_id  | 10</a:t>
+            </a:r>
+            <a:br/>
+            <a:r>
+              <a:t>project_name | AI Platform</a:t>
+            </a:r>
+            <a:br/>
+            <a:r>
+              <a:t>role        | Developer</a:t>
             </a:r>
           </a:p>
         </p:txBody>
@@ -33639,8 +33684,8 @@
         </p:nvSpPr>
         <p:spPr>
           <a:xfrm>
-            <a:off x="3840480" y="1371600"/>
-            <a:ext cx="3200400" cy="365760"/>
+            <a:off x="5669280" y="3657600"/>
+            <a:ext cx="4846320" cy="1097280"/>
           </a:xfrm>
           <a:prstGeom prst="rect">
             <a:avLst/>
@@ -33654,593 +33699,45 @@
           <a:lstStyle/>
           <a:p>
             <a:pPr algn="l">
-              <a:defRPr sz="1600" b="1">
-                <a:solidFill>
-                  <a:srgbClr val="F08040"/>
+              <a:defRPr sz="1200" b="0">
+                <a:solidFill>
+                  <a:srgbClr val="CCCCCC"/>
                 </a:solidFill>
                 <a:latin typeface="Calibri"/>
               </a:defRPr>
             </a:pPr>
             <a:r>
-              <a:t>(:Skill)</a:t>
-            </a:r>
-          </a:p>
-        </p:txBody>
-      </p:sp>
-      <p:sp>
-        <p:nvSpPr>
-          <p:cNvPr id="7" name="TextBox 6"/>
-          <p:cNvSpPr txBox="1"/>
-          <p:nvPr/>
-        </p:nvSpPr>
-        <p:spPr>
-          <a:xfrm>
-            <a:off x="3840480" y="1783080"/>
-            <a:ext cx="2286000" cy="1097280"/>
-          </a:xfrm>
-          <a:prstGeom prst="rect">
-            <a:avLst/>
-          </a:prstGeom>
-          <a:noFill/>
-        </p:spPr>
-        <p:txBody>
-          <a:bodyPr wrap="square">
-            <a:spAutoFit/>
-          </a:bodyPr>
-          <a:lstStyle/>
-          <a:p>
-            <a:pPr algn="l">
-              <a:spcAft>
-                <a:spcPts val="0"/>
-              </a:spcAft>
-              <a:defRPr sz="1000">
-                <a:solidFill>
-                  <a:srgbClr val="7EC68E"/>
-                </a:solidFill>
-                <a:latin typeface="Calibri"/>
-              </a:defRPr>
-            </a:pPr>
-            <a:r>
-              <a:t>•  name</a:t>
-            </a:r>
-          </a:p>
-          <a:p>
-            <a:pPr algn="l">
-              <a:spcAft>
-                <a:spcPts val="0"/>
-              </a:spcAft>
-              <a:defRPr sz="1000">
-                <a:solidFill>
-                  <a:srgbClr val="7EC68E"/>
-                </a:solidFill>
-                <a:latin typeface="Calibri"/>
-              </a:defRPr>
-            </a:pPr>
-            <a:r>
-              <a:t>•  </a:t>
-            </a:r>
-          </a:p>
-        </p:txBody>
-      </p:sp>
-      <p:sp>
-        <p:nvSpPr>
-          <p:cNvPr id="8" name="TextBox 7"/>
-          <p:cNvSpPr txBox="1"/>
-          <p:nvPr/>
-        </p:nvSpPr>
-        <p:spPr>
-          <a:xfrm>
-            <a:off x="5943600" y="1371600"/>
-            <a:ext cx="3200400" cy="365760"/>
-          </a:xfrm>
-          <a:prstGeom prst="rect">
-            <a:avLst/>
-          </a:prstGeom>
-          <a:noFill/>
-        </p:spPr>
-        <p:txBody>
-          <a:bodyPr wrap="square">
-            <a:spAutoFit/>
-          </a:bodyPr>
-          <a:lstStyle/>
-          <a:p>
-            <a:pPr algn="l">
-              <a:defRPr sz="1600" b="1">
-                <a:solidFill>
-                  <a:srgbClr val="F08040"/>
-                </a:solidFill>
-                <a:latin typeface="Calibri"/>
-              </a:defRPr>
-            </a:pPr>
-            <a:r>
-              <a:t>(:Project)</a:t>
-            </a:r>
-          </a:p>
-        </p:txBody>
-      </p:sp>
-      <p:sp>
-        <p:nvSpPr>
-          <p:cNvPr id="9" name="TextBox 8"/>
-          <p:cNvSpPr txBox="1"/>
-          <p:nvPr/>
-        </p:nvSpPr>
-        <p:spPr>
-          <a:xfrm>
-            <a:off x="5943600" y="1783080"/>
-            <a:ext cx="2286000" cy="1097280"/>
-          </a:xfrm>
-          <a:prstGeom prst="rect">
-            <a:avLst/>
-          </a:prstGeom>
-          <a:noFill/>
-        </p:spPr>
-        <p:txBody>
-          <a:bodyPr wrap="square">
-            <a:spAutoFit/>
-          </a:bodyPr>
-          <a:lstStyle/>
-          <a:p>
-            <a:pPr algn="l">
-              <a:spcAft>
-                <a:spcPts val="0"/>
-              </a:spcAft>
-              <a:defRPr sz="1000">
-                <a:solidFill>
-                  <a:srgbClr val="7EC68E"/>
-                </a:solidFill>
-                <a:latin typeface="Calibri"/>
-              </a:defRPr>
-            </a:pPr>
-            <a:r>
-              <a:t>•  project_id</a:t>
-            </a:r>
-          </a:p>
-          <a:p>
-            <a:pPr algn="l">
-              <a:spcAft>
-                <a:spcPts val="0"/>
-              </a:spcAft>
-              <a:defRPr sz="1000">
-                <a:solidFill>
-                  <a:srgbClr val="7EC68E"/>
-                </a:solidFill>
-                <a:latin typeface="Calibri"/>
-              </a:defRPr>
-            </a:pPr>
-            <a:r>
-              <a:t>•  name</a:t>
-            </a:r>
-          </a:p>
-        </p:txBody>
-      </p:sp>
-      <p:sp>
-        <p:nvSpPr>
-          <p:cNvPr id="10" name="TextBox 9"/>
-          <p:cNvSpPr txBox="1"/>
-          <p:nvPr/>
-        </p:nvSpPr>
-        <p:spPr>
-          <a:xfrm>
-            <a:off x="7772400" y="1371600"/>
-            <a:ext cx="3200400" cy="365760"/>
-          </a:xfrm>
-          <a:prstGeom prst="rect">
-            <a:avLst/>
-          </a:prstGeom>
-          <a:noFill/>
-        </p:spPr>
-        <p:txBody>
-          <a:bodyPr wrap="square">
-            <a:spAutoFit/>
-          </a:bodyPr>
-          <a:lstStyle/>
-          <a:p>
-            <a:pPr algn="l">
-              <a:defRPr sz="1600" b="1">
-                <a:solidFill>
-                  <a:srgbClr val="F08040"/>
-                </a:solidFill>
-                <a:latin typeface="Calibri"/>
-              </a:defRPr>
-            </a:pPr>
-            <a:r>
-              <a:t>(:Supervisor)</a:t>
-            </a:r>
-          </a:p>
-        </p:txBody>
-      </p:sp>
-      <p:sp>
-        <p:nvSpPr>
-          <p:cNvPr id="11" name="TextBox 10"/>
-          <p:cNvSpPr txBox="1"/>
-          <p:nvPr/>
-        </p:nvSpPr>
-        <p:spPr>
-          <a:xfrm>
-            <a:off x="7772400" y="1783080"/>
-            <a:ext cx="2286000" cy="1097280"/>
-          </a:xfrm>
-          <a:prstGeom prst="rect">
-            <a:avLst/>
-          </a:prstGeom>
-          <a:noFill/>
-        </p:spPr>
-        <p:txBody>
-          <a:bodyPr wrap="square">
-            <a:spAutoFit/>
-          </a:bodyPr>
-          <a:lstStyle/>
-          <a:p>
-            <a:pPr algn="l">
-              <a:spcAft>
-                <a:spcPts val="0"/>
-              </a:spcAft>
-              <a:defRPr sz="1000">
-                <a:solidFill>
-                  <a:srgbClr val="7EC68E"/>
-                </a:solidFill>
-                <a:latin typeface="Calibri"/>
-              </a:defRPr>
-            </a:pPr>
-            <a:r>
-              <a:t>•  supervisor_id</a:t>
-            </a:r>
-          </a:p>
-          <a:p>
-            <a:pPr algn="l">
-              <a:spcAft>
-                <a:spcPts val="0"/>
-              </a:spcAft>
-              <a:defRPr sz="1000">
-                <a:solidFill>
-                  <a:srgbClr val="7EC68E"/>
-                </a:solidFill>
-                <a:latin typeface="Calibri"/>
-              </a:defRPr>
-            </a:pPr>
-            <a:r>
-              <a:t>•  name</a:t>
-            </a:r>
-          </a:p>
-        </p:txBody>
-      </p:sp>
-      <p:sp>
-        <p:nvSpPr>
-          <p:cNvPr id="12" name="Rectangle 11"/>
-          <p:cNvSpPr/>
-          <p:nvPr/>
-        </p:nvSpPr>
-        <p:spPr>
-          <a:xfrm>
-            <a:off x="731520" y="3291840"/>
-            <a:ext cx="10698480" cy="36576"/>
-          </a:xfrm>
-          <a:prstGeom prst="rect">
-            <a:avLst/>
-          </a:prstGeom>
-          <a:solidFill>
-            <a:srgbClr val="F0C040"/>
-          </a:solidFill>
-          <a:ln>
-            <a:noFill/>
-          </a:ln>
-        </p:spPr>
-        <p:style>
-          <a:lnRef idx="1">
-            <a:schemeClr val="accent1"/>
-          </a:lnRef>
-          <a:fillRef idx="3">
-            <a:schemeClr val="accent1"/>
-          </a:fillRef>
-          <a:effectRef idx="2">
-            <a:schemeClr val="accent1"/>
-          </a:effectRef>
-          <a:fontRef idx="minor">
-            <a:schemeClr val="lt1"/>
-          </a:fontRef>
-        </p:style>
-        <p:txBody>
-          <a:bodyPr rtlCol="0" anchor="ctr"/>
-          <a:lstStyle/>
-          <a:p>
-            <a:pPr algn="ctr"/>
-          </a:p>
-        </p:txBody>
-      </p:sp>
-      <p:sp>
-        <p:nvSpPr>
-          <p:cNvPr id="13" name="TextBox 12"/>
-          <p:cNvSpPr txBox="1"/>
-          <p:nvPr/>
-        </p:nvSpPr>
-        <p:spPr>
-          <a:xfrm>
-            <a:off x="731520" y="3520440"/>
-            <a:ext cx="10515600" cy="365760"/>
-          </a:xfrm>
-          <a:prstGeom prst="rect">
-            <a:avLst/>
-          </a:prstGeom>
-          <a:noFill/>
-        </p:spPr>
-        <p:txBody>
-          <a:bodyPr wrap="square">
-            <a:spAutoFit/>
-          </a:bodyPr>
-          <a:lstStyle/>
-          <a:p>
-            <a:pPr algn="l">
-              <a:defRPr sz="1500" b="1">
-                <a:solidFill>
-                  <a:srgbClr val="F0C040"/>
-                </a:solidFill>
-                <a:latin typeface="Calibri"/>
-              </a:defRPr>
-            </a:pPr>
-            <a:r>
-              <a:t>Relazioni:</a:t>
-            </a:r>
-          </a:p>
-        </p:txBody>
-      </p:sp>
-      <p:sp>
-        <p:nvSpPr>
-          <p:cNvPr id="14" name="Rectangle 13"/>
-          <p:cNvSpPr/>
-          <p:nvPr/>
-        </p:nvSpPr>
-        <p:spPr>
-          <a:xfrm>
-            <a:off x="731520" y="3931920"/>
-            <a:ext cx="10515600" cy="2011680"/>
-          </a:xfrm>
-          <a:prstGeom prst="rect">
-            <a:avLst/>
-          </a:prstGeom>
-          <a:solidFill>
-            <a:srgbClr val="1B2A4A"/>
-          </a:solidFill>
-          <a:ln w="12700">
-            <a:solidFill>
-              <a:srgbClr val="2D4F7A"/>
-            </a:solidFill>
-          </a:ln>
-        </p:spPr>
-        <p:style>
-          <a:lnRef idx="1">
-            <a:schemeClr val="accent1"/>
-          </a:lnRef>
-          <a:fillRef idx="3">
-            <a:schemeClr val="accent1"/>
-          </a:fillRef>
-          <a:effectRef idx="2">
-            <a:schemeClr val="accent1"/>
-          </a:effectRef>
-          <a:fontRef idx="minor">
-            <a:schemeClr val="lt1"/>
-          </a:fontRef>
-        </p:style>
-        <p:txBody>
-          <a:bodyPr rtlCol="0" anchor="ctr"/>
-          <a:lstStyle/>
-          <a:p>
-            <a:pPr algn="ctr"/>
-          </a:p>
-        </p:txBody>
-      </p:sp>
-      <p:sp>
-        <p:nvSpPr>
-          <p:cNvPr id="15" name="TextBox 14"/>
-          <p:cNvSpPr txBox="1"/>
-          <p:nvPr/>
-        </p:nvSpPr>
-        <p:spPr>
-          <a:xfrm>
-            <a:off x="841248" y="4005072"/>
-            <a:ext cx="10296144" cy="1865376"/>
-          </a:xfrm>
-          <a:prstGeom prst="rect">
-            <a:avLst/>
-          </a:prstGeom>
-          <a:noFill/>
-        </p:spPr>
-        <p:txBody>
-          <a:bodyPr wrap="square">
-            <a:spAutoFit/>
-          </a:bodyPr>
-          <a:lstStyle/>
-          <a:p>
-            <a:pPr>
-              <a:spcAft>
-                <a:spcPts val="100"/>
-              </a:spcAft>
-              <a:defRPr sz="1000">
-                <a:solidFill>
-                  <a:srgbClr val="7EC68E"/>
-                </a:solidFill>
-                <a:latin typeface="Consolas"/>
-              </a:defRPr>
-            </a:pPr>
-            <a:r>
-              <a:t>// HAS_SKILL: competenza di una persona</a:t>
-            </a:r>
-          </a:p>
-          <a:p>
-            <a:pPr>
-              <a:spcAft>
-                <a:spcPts val="100"/>
-              </a:spcAft>
-              <a:defRPr sz="1000">
-                <a:solidFill>
-                  <a:srgbClr val="7EC68E"/>
-                </a:solidFill>
-                <a:latin typeface="Consolas"/>
-              </a:defRPr>
-            </a:pPr>
-            <a:r>
-              <a:t>(p:Person)-[h:HAS_SKILL {proficiency: 1-5}]-&gt;(s:Skill)</a:t>
-            </a:r>
-          </a:p>
-          <a:p>
-            <a:pPr>
-              <a:spcAft>
-                <a:spcPts val="100"/>
-              </a:spcAft>
-              <a:defRPr sz="1000">
-                <a:solidFill>
-                  <a:srgbClr val="7EC68E"/>
-                </a:solidFill>
-                <a:latin typeface="Consolas"/>
-              </a:defRPr>
-            </a:pPr>
-          </a:p>
-          <a:p>
-            <a:pPr>
-              <a:spcAft>
-                <a:spcPts val="100"/>
-              </a:spcAft>
-              <a:defRPr sz="1000">
-                <a:solidFill>
-                  <a:srgbClr val="7EC68E"/>
-                </a:solidFill>
-                <a:latin typeface="Consolas"/>
-              </a:defRPr>
-            </a:pPr>
-            <a:r>
-              <a:t>// WORKED_ON: esperienza lavorativa su progetto</a:t>
-            </a:r>
-          </a:p>
-          <a:p>
-            <a:pPr>
-              <a:spcAft>
-                <a:spcPts val="100"/>
-              </a:spcAft>
-              <a:defRPr sz="1000">
-                <a:solidFill>
-                  <a:srgbClr val="7EC68E"/>
-                </a:solidFill>
-                <a:latin typeface="Consolas"/>
-              </a:defRPr>
-            </a:pPr>
-            <a:r>
-              <a:t>(p:Person)-[w:WORKED_ON {role: "Developer"}]-&gt;(proj:Project)</a:t>
-            </a:r>
-          </a:p>
-          <a:p>
-            <a:pPr>
-              <a:spcAft>
-                <a:spcPts val="100"/>
-              </a:spcAft>
-              <a:defRPr sz="1000">
-                <a:solidFill>
-                  <a:srgbClr val="7EC68E"/>
-                </a:solidFill>
-                <a:latin typeface="Consolas"/>
-              </a:defRPr>
-            </a:pPr>
-          </a:p>
-          <a:p>
-            <a:pPr>
-              <a:spcAft>
-                <a:spcPts val="100"/>
-              </a:spcAft>
-              <a:defRPr sz="1000">
-                <a:solidFill>
-                  <a:srgbClr val="7EC68E"/>
-                </a:solidFill>
-                <a:latin typeface="Consolas"/>
-              </a:defRPr>
-            </a:pPr>
-            <a:r>
-              <a:t>// REPORTS_TO: gerarchia organizzativa</a:t>
-            </a:r>
-          </a:p>
-          <a:p>
-            <a:pPr>
-              <a:spcAft>
-                <a:spcPts val="100"/>
-              </a:spcAft>
-              <a:defRPr sz="1000">
-                <a:solidFill>
-                  <a:srgbClr val="7EC68E"/>
-                </a:solidFill>
-                <a:latin typeface="Consolas"/>
-              </a:defRPr>
-            </a:pPr>
-            <a:r>
-              <a:t>(p:Person)-[:REPORTS_TO]-&gt;(sup:Supervisor)</a:t>
-            </a:r>
-          </a:p>
-        </p:txBody>
-      </p:sp>
-      <p:sp>
-        <p:nvSpPr>
-          <p:cNvPr id="16" name="TextBox 15"/>
-          <p:cNvSpPr txBox="1"/>
-          <p:nvPr/>
-        </p:nvSpPr>
-        <p:spPr>
-          <a:xfrm>
-            <a:off x="731520" y="6126480"/>
-            <a:ext cx="5029200" cy="365760"/>
-          </a:xfrm>
-          <a:prstGeom prst="rect">
-            <a:avLst/>
-          </a:prstGeom>
-          <a:noFill/>
-        </p:spPr>
-        <p:txBody>
-          <a:bodyPr wrap="square">
-            <a:spAutoFit/>
-          </a:bodyPr>
-          <a:lstStyle/>
-          <a:p>
-            <a:pPr algn="l">
-              <a:defRPr sz="1200" b="0">
-                <a:solidFill>
-                  <a:srgbClr val="CCCCCC"/>
-                </a:solidFill>
-                <a:latin typeface="Calibri"/>
-              </a:defRPr>
-            </a:pPr>
-            <a:r>
-              <a:t>Una persona PUÒ non avere skill, non avere progetti, o non riportare a nessuno.</a:t>
-            </a:r>
-          </a:p>
-        </p:txBody>
-      </p:sp>
-      <p:sp>
-        <p:nvSpPr>
-          <p:cNvPr id="17" name="TextBox 16"/>
-          <p:cNvSpPr txBox="1"/>
-          <p:nvPr/>
-        </p:nvSpPr>
-        <p:spPr>
-          <a:xfrm>
-            <a:off x="5669280" y="6126480"/>
-            <a:ext cx="4846320" cy="365760"/>
-          </a:xfrm>
-          <a:prstGeom prst="rect">
-            <a:avLst/>
-          </a:prstGeom>
-          <a:noFill/>
-        </p:spPr>
-        <p:txBody>
-          <a:bodyPr wrap="square">
-            <a:spAutoFit/>
-          </a:bodyPr>
-          <a:lstStyle/>
-          <a:p>
-            <a:pPr algn="l">
-              <a:defRPr sz="1200" b="0">
-                <a:solidFill>
-                  <a:srgbClr val="F0C040"/>
-                </a:solidFill>
-                <a:latin typeface="Calibri"/>
-              </a:defRPr>
-            </a:pPr>
-            <a:r>
-              <a:t>Tutte le proprietà sono in INGLESE (name, non nome).</a:t>
+              <a:t>Struttura dati:</a:t>
+            </a:r>
+            <a:br/>
+            <a:br/>
+            <a:r>
+              <a:t>Ogni riga CSV = una persona</a:t>
+            </a:r>
+            <a:br/>
+            <a:r>
+              <a:t>con le skill in colonne separate.</a:t>
+            </a:r>
+            <a:br/>
+            <a:r>
+              <a:t>Il caricamento UNWIND trasforma</a:t>
+            </a:r>
+            <a:br/>
+            <a:r>
+              <a:t>le righe in nodi e relazioni.</a:t>
+            </a:r>
+            <a:br/>
+            <a:br/>
+            <a:r>
+              <a:t>Nei prossimi esercizi esploreremo</a:t>
+            </a:r>
+            <a:br/>
+            <a:r>
+              <a:t>il dataset con Cypher dal Browser</a:t>
+            </a:r>
+            <a:br/>
+            <a:r>
+              <a:t>e dal notebook Python.</a:t>
             </a:r>
           </a:p>
         </p:txBody>
@@ -34302,7 +33799,7 @@
               </a:defRPr>
             </a:pPr>
             <a:r>
-              <a:t>Esempio Completo: Movie Graph</a:t>
+              <a:t>Schema del Org Graph</a:t>
             </a:r>
           </a:p>
         </p:txBody>
@@ -34338,21 +33835,560 @@
               </a:defRPr>
             </a:pPr>
             <a:r>
-              <a:t>Dataset incluso in Neo4j Browser con nodi Movie e Person (attori/registi). Attivare con :play movie-graph.</a:t>
+              <a:t>Il modello a grafo del nostro progetto: nodi, labels, relazioni e proprietà.</a:t>
             </a:r>
           </a:p>
         </p:txBody>
       </p:sp>
       <p:sp>
         <p:nvSpPr>
-          <p:cNvPr id="4" name="Rectangle 3"/>
+          <p:cNvPr id="4" name="TextBox 3"/>
+          <p:cNvSpPr txBox="1"/>
+          <p:nvPr/>
+        </p:nvSpPr>
+        <p:spPr>
+          <a:xfrm>
+            <a:off x="731520" y="1371600"/>
+            <a:ext cx="3200400" cy="365760"/>
+          </a:xfrm>
+          <a:prstGeom prst="rect">
+            <a:avLst/>
+          </a:prstGeom>
+          <a:noFill/>
+        </p:spPr>
+        <p:txBody>
+          <a:bodyPr wrap="square">
+            <a:spAutoFit/>
+          </a:bodyPr>
+          <a:lstStyle/>
+          <a:p>
+            <a:pPr algn="l">
+              <a:defRPr sz="1600" b="1">
+                <a:solidFill>
+                  <a:srgbClr val="F08040"/>
+                </a:solidFill>
+                <a:latin typeface="Calibri"/>
+              </a:defRPr>
+            </a:pPr>
+            <a:r>
+              <a:t>(:Person)</a:t>
+            </a:r>
+          </a:p>
+        </p:txBody>
+      </p:sp>
+      <p:sp>
+        <p:nvSpPr>
+          <p:cNvPr id="5" name="TextBox 4"/>
+          <p:cNvSpPr txBox="1"/>
+          <p:nvPr/>
+        </p:nvSpPr>
+        <p:spPr>
+          <a:xfrm>
+            <a:off x="731520" y="1783080"/>
+            <a:ext cx="2286000" cy="1097280"/>
+          </a:xfrm>
+          <a:prstGeom prst="rect">
+            <a:avLst/>
+          </a:prstGeom>
+          <a:noFill/>
+        </p:spPr>
+        <p:txBody>
+          <a:bodyPr wrap="square">
+            <a:spAutoFit/>
+          </a:bodyPr>
+          <a:lstStyle/>
+          <a:p>
+            <a:pPr algn="l">
+              <a:spcAft>
+                <a:spcPts val="0"/>
+              </a:spcAft>
+              <a:defRPr sz="1000">
+                <a:solidFill>
+                  <a:srgbClr val="7EC68E"/>
+                </a:solidFill>
+                <a:latin typeface="Calibri"/>
+              </a:defRPr>
+            </a:pPr>
+            <a:r>
+              <a:t>•  employee_id</a:t>
+            </a:r>
+          </a:p>
+          <a:p>
+            <a:pPr algn="l">
+              <a:spcAft>
+                <a:spcPts val="0"/>
+              </a:spcAft>
+              <a:defRPr sz="1000">
+                <a:solidFill>
+                  <a:srgbClr val="7EC68E"/>
+                </a:solidFill>
+                <a:latin typeface="Calibri"/>
+              </a:defRPr>
+            </a:pPr>
+            <a:r>
+              <a:t>•  name</a:t>
+            </a:r>
+          </a:p>
+          <a:p>
+            <a:pPr algn="l">
+              <a:spcAft>
+                <a:spcPts val="0"/>
+              </a:spcAft>
+              <a:defRPr sz="1000">
+                <a:solidFill>
+                  <a:srgbClr val="7EC68E"/>
+                </a:solidFill>
+                <a:latin typeface="Calibri"/>
+              </a:defRPr>
+            </a:pPr>
+            <a:r>
+              <a:t>•  gender</a:t>
+            </a:r>
+          </a:p>
+          <a:p>
+            <a:pPr algn="l">
+              <a:spcAft>
+                <a:spcPts val="0"/>
+              </a:spcAft>
+              <a:defRPr sz="1000">
+                <a:solidFill>
+                  <a:srgbClr val="7EC68E"/>
+                </a:solidFill>
+                <a:latin typeface="Calibri"/>
+              </a:defRPr>
+            </a:pPr>
+            <a:r>
+              <a:t>•  discipline</a:t>
+            </a:r>
+          </a:p>
+          <a:p>
+            <a:pPr algn="l">
+              <a:spcAft>
+                <a:spcPts val="0"/>
+              </a:spcAft>
+              <a:defRPr sz="1000">
+                <a:solidFill>
+                  <a:srgbClr val="7EC68E"/>
+                </a:solidFill>
+                <a:latin typeface="Calibri"/>
+              </a:defRPr>
+            </a:pPr>
+            <a:r>
+              <a:t>•  department</a:t>
+            </a:r>
+          </a:p>
+          <a:p>
+            <a:pPr algn="l">
+              <a:spcAft>
+                <a:spcPts val="0"/>
+              </a:spcAft>
+              <a:defRPr sz="1000">
+                <a:solidFill>
+                  <a:srgbClr val="7EC68E"/>
+                </a:solidFill>
+                <a:latin typeface="Calibri"/>
+              </a:defRPr>
+            </a:pPr>
+            <a:r>
+              <a:t>•  code</a:t>
+            </a:r>
+          </a:p>
+          <a:p>
+            <a:pPr algn="l">
+              <a:spcAft>
+                <a:spcPts val="0"/>
+              </a:spcAft>
+              <a:defRPr sz="1000">
+                <a:solidFill>
+                  <a:srgbClr val="7EC68E"/>
+                </a:solidFill>
+                <a:latin typeface="Calibri"/>
+              </a:defRPr>
+            </a:pPr>
+            <a:r>
+              <a:t>•  location</a:t>
+            </a:r>
+          </a:p>
+          <a:p>
+            <a:pPr algn="l">
+              <a:spcAft>
+                <a:spcPts val="0"/>
+              </a:spcAft>
+              <a:defRPr sz="1000">
+                <a:solidFill>
+                  <a:srgbClr val="7EC68E"/>
+                </a:solidFill>
+                <a:latin typeface="Calibri"/>
+              </a:defRPr>
+            </a:pPr>
+            <a:r>
+              <a:t>•  title</a:t>
+            </a:r>
+          </a:p>
+        </p:txBody>
+      </p:sp>
+      <p:sp>
+        <p:nvSpPr>
+          <p:cNvPr id="6" name="TextBox 5"/>
+          <p:cNvSpPr txBox="1"/>
+          <p:nvPr/>
+        </p:nvSpPr>
+        <p:spPr>
+          <a:xfrm>
+            <a:off x="3840480" y="1371600"/>
+            <a:ext cx="3200400" cy="365760"/>
+          </a:xfrm>
+          <a:prstGeom prst="rect">
+            <a:avLst/>
+          </a:prstGeom>
+          <a:noFill/>
+        </p:spPr>
+        <p:txBody>
+          <a:bodyPr wrap="square">
+            <a:spAutoFit/>
+          </a:bodyPr>
+          <a:lstStyle/>
+          <a:p>
+            <a:pPr algn="l">
+              <a:defRPr sz="1600" b="1">
+                <a:solidFill>
+                  <a:srgbClr val="F08040"/>
+                </a:solidFill>
+                <a:latin typeface="Calibri"/>
+              </a:defRPr>
+            </a:pPr>
+            <a:r>
+              <a:t>(:Skill)</a:t>
+            </a:r>
+          </a:p>
+        </p:txBody>
+      </p:sp>
+      <p:sp>
+        <p:nvSpPr>
+          <p:cNvPr id="7" name="TextBox 6"/>
+          <p:cNvSpPr txBox="1"/>
+          <p:nvPr/>
+        </p:nvSpPr>
+        <p:spPr>
+          <a:xfrm>
+            <a:off x="3840480" y="1783080"/>
+            <a:ext cx="2286000" cy="1097280"/>
+          </a:xfrm>
+          <a:prstGeom prst="rect">
+            <a:avLst/>
+          </a:prstGeom>
+          <a:noFill/>
+        </p:spPr>
+        <p:txBody>
+          <a:bodyPr wrap="square">
+            <a:spAutoFit/>
+          </a:bodyPr>
+          <a:lstStyle/>
+          <a:p>
+            <a:pPr algn="l">
+              <a:spcAft>
+                <a:spcPts val="0"/>
+              </a:spcAft>
+              <a:defRPr sz="1000">
+                <a:solidFill>
+                  <a:srgbClr val="7EC68E"/>
+                </a:solidFill>
+                <a:latin typeface="Calibri"/>
+              </a:defRPr>
+            </a:pPr>
+            <a:r>
+              <a:t>•  name</a:t>
+            </a:r>
+          </a:p>
+          <a:p>
+            <a:pPr algn="l">
+              <a:spcAft>
+                <a:spcPts val="0"/>
+              </a:spcAft>
+              <a:defRPr sz="1000">
+                <a:solidFill>
+                  <a:srgbClr val="7EC68E"/>
+                </a:solidFill>
+                <a:latin typeface="Calibri"/>
+              </a:defRPr>
+            </a:pPr>
+            <a:r>
+              <a:t>•  </a:t>
+            </a:r>
+          </a:p>
+        </p:txBody>
+      </p:sp>
+      <p:sp>
+        <p:nvSpPr>
+          <p:cNvPr id="8" name="TextBox 7"/>
+          <p:cNvSpPr txBox="1"/>
+          <p:nvPr/>
+        </p:nvSpPr>
+        <p:spPr>
+          <a:xfrm>
+            <a:off x="5943600" y="1371600"/>
+            <a:ext cx="3200400" cy="365760"/>
+          </a:xfrm>
+          <a:prstGeom prst="rect">
+            <a:avLst/>
+          </a:prstGeom>
+          <a:noFill/>
+        </p:spPr>
+        <p:txBody>
+          <a:bodyPr wrap="square">
+            <a:spAutoFit/>
+          </a:bodyPr>
+          <a:lstStyle/>
+          <a:p>
+            <a:pPr algn="l">
+              <a:defRPr sz="1600" b="1">
+                <a:solidFill>
+                  <a:srgbClr val="F08040"/>
+                </a:solidFill>
+                <a:latin typeface="Calibri"/>
+              </a:defRPr>
+            </a:pPr>
+            <a:r>
+              <a:t>(:Project)</a:t>
+            </a:r>
+          </a:p>
+        </p:txBody>
+      </p:sp>
+      <p:sp>
+        <p:nvSpPr>
+          <p:cNvPr id="9" name="TextBox 8"/>
+          <p:cNvSpPr txBox="1"/>
+          <p:nvPr/>
+        </p:nvSpPr>
+        <p:spPr>
+          <a:xfrm>
+            <a:off x="5943600" y="1783080"/>
+            <a:ext cx="2286000" cy="1097280"/>
+          </a:xfrm>
+          <a:prstGeom prst="rect">
+            <a:avLst/>
+          </a:prstGeom>
+          <a:noFill/>
+        </p:spPr>
+        <p:txBody>
+          <a:bodyPr wrap="square">
+            <a:spAutoFit/>
+          </a:bodyPr>
+          <a:lstStyle/>
+          <a:p>
+            <a:pPr algn="l">
+              <a:spcAft>
+                <a:spcPts val="0"/>
+              </a:spcAft>
+              <a:defRPr sz="1000">
+                <a:solidFill>
+                  <a:srgbClr val="7EC68E"/>
+                </a:solidFill>
+                <a:latin typeface="Calibri"/>
+              </a:defRPr>
+            </a:pPr>
+            <a:r>
+              <a:t>•  project_id</a:t>
+            </a:r>
+          </a:p>
+          <a:p>
+            <a:pPr algn="l">
+              <a:spcAft>
+                <a:spcPts val="0"/>
+              </a:spcAft>
+              <a:defRPr sz="1000">
+                <a:solidFill>
+                  <a:srgbClr val="7EC68E"/>
+                </a:solidFill>
+                <a:latin typeface="Calibri"/>
+              </a:defRPr>
+            </a:pPr>
+            <a:r>
+              <a:t>•  name</a:t>
+            </a:r>
+          </a:p>
+        </p:txBody>
+      </p:sp>
+      <p:sp>
+        <p:nvSpPr>
+          <p:cNvPr id="10" name="TextBox 9"/>
+          <p:cNvSpPr txBox="1"/>
+          <p:nvPr/>
+        </p:nvSpPr>
+        <p:spPr>
+          <a:xfrm>
+            <a:off x="7772400" y="1371600"/>
+            <a:ext cx="3200400" cy="365760"/>
+          </a:xfrm>
+          <a:prstGeom prst="rect">
+            <a:avLst/>
+          </a:prstGeom>
+          <a:noFill/>
+        </p:spPr>
+        <p:txBody>
+          <a:bodyPr wrap="square">
+            <a:spAutoFit/>
+          </a:bodyPr>
+          <a:lstStyle/>
+          <a:p>
+            <a:pPr algn="l">
+              <a:defRPr sz="1600" b="1">
+                <a:solidFill>
+                  <a:srgbClr val="F08040"/>
+                </a:solidFill>
+                <a:latin typeface="Calibri"/>
+              </a:defRPr>
+            </a:pPr>
+            <a:r>
+              <a:t>(:Supervisor)</a:t>
+            </a:r>
+          </a:p>
+        </p:txBody>
+      </p:sp>
+      <p:sp>
+        <p:nvSpPr>
+          <p:cNvPr id="11" name="TextBox 10"/>
+          <p:cNvSpPr txBox="1"/>
+          <p:nvPr/>
+        </p:nvSpPr>
+        <p:spPr>
+          <a:xfrm>
+            <a:off x="7772400" y="1783080"/>
+            <a:ext cx="2286000" cy="1097280"/>
+          </a:xfrm>
+          <a:prstGeom prst="rect">
+            <a:avLst/>
+          </a:prstGeom>
+          <a:noFill/>
+        </p:spPr>
+        <p:txBody>
+          <a:bodyPr wrap="square">
+            <a:spAutoFit/>
+          </a:bodyPr>
+          <a:lstStyle/>
+          <a:p>
+            <a:pPr algn="l">
+              <a:spcAft>
+                <a:spcPts val="0"/>
+              </a:spcAft>
+              <a:defRPr sz="1000">
+                <a:solidFill>
+                  <a:srgbClr val="7EC68E"/>
+                </a:solidFill>
+                <a:latin typeface="Calibri"/>
+              </a:defRPr>
+            </a:pPr>
+            <a:r>
+              <a:t>•  supervisor_id</a:t>
+            </a:r>
+          </a:p>
+          <a:p>
+            <a:pPr algn="l">
+              <a:spcAft>
+                <a:spcPts val="0"/>
+              </a:spcAft>
+              <a:defRPr sz="1000">
+                <a:solidFill>
+                  <a:srgbClr val="7EC68E"/>
+                </a:solidFill>
+                <a:latin typeface="Calibri"/>
+              </a:defRPr>
+            </a:pPr>
+            <a:r>
+              <a:t>•  name</a:t>
+            </a:r>
+          </a:p>
+        </p:txBody>
+      </p:sp>
+      <p:sp>
+        <p:nvSpPr>
+          <p:cNvPr id="12" name="Rectangle 11"/>
           <p:cNvSpPr/>
           <p:nvPr/>
         </p:nvSpPr>
         <p:spPr>
           <a:xfrm>
-            <a:off x="731520" y="1371600"/>
-            <a:ext cx="5029200" cy="2286000"/>
+            <a:off x="731520" y="3291840"/>
+            <a:ext cx="10698480" cy="36576"/>
+          </a:xfrm>
+          <a:prstGeom prst="rect">
+            <a:avLst/>
+          </a:prstGeom>
+          <a:solidFill>
+            <a:srgbClr val="F0C040"/>
+          </a:solidFill>
+          <a:ln>
+            <a:noFill/>
+          </a:ln>
+        </p:spPr>
+        <p:style>
+          <a:lnRef idx="1">
+            <a:schemeClr val="accent1"/>
+          </a:lnRef>
+          <a:fillRef idx="3">
+            <a:schemeClr val="accent1"/>
+          </a:fillRef>
+          <a:effectRef idx="2">
+            <a:schemeClr val="accent1"/>
+          </a:effectRef>
+          <a:fontRef idx="minor">
+            <a:schemeClr val="lt1"/>
+          </a:fontRef>
+        </p:style>
+        <p:txBody>
+          <a:bodyPr rtlCol="0" anchor="ctr"/>
+          <a:lstStyle/>
+          <a:p>
+            <a:pPr algn="ctr"/>
+          </a:p>
+        </p:txBody>
+      </p:sp>
+      <p:sp>
+        <p:nvSpPr>
+          <p:cNvPr id="13" name="TextBox 12"/>
+          <p:cNvSpPr txBox="1"/>
+          <p:nvPr/>
+        </p:nvSpPr>
+        <p:spPr>
+          <a:xfrm>
+            <a:off x="731520" y="3520440"/>
+            <a:ext cx="10515600" cy="365760"/>
+          </a:xfrm>
+          <a:prstGeom prst="rect">
+            <a:avLst/>
+          </a:prstGeom>
+          <a:noFill/>
+        </p:spPr>
+        <p:txBody>
+          <a:bodyPr wrap="square">
+            <a:spAutoFit/>
+          </a:bodyPr>
+          <a:lstStyle/>
+          <a:p>
+            <a:pPr algn="l">
+              <a:defRPr sz="1500" b="1">
+                <a:solidFill>
+                  <a:srgbClr val="F0C040"/>
+                </a:solidFill>
+                <a:latin typeface="Calibri"/>
+              </a:defRPr>
+            </a:pPr>
+            <a:r>
+              <a:t>Relazioni:</a:t>
+            </a:r>
+          </a:p>
+        </p:txBody>
+      </p:sp>
+      <p:sp>
+        <p:nvSpPr>
+          <p:cNvPr id="14" name="Rectangle 13"/>
+          <p:cNvSpPr/>
+          <p:nvPr/>
+        </p:nvSpPr>
+        <p:spPr>
+          <a:xfrm>
+            <a:off x="731520" y="3931920"/>
+            <a:ext cx="10515600" cy="1645920"/>
           </a:xfrm>
           <a:prstGeom prst="rect">
             <a:avLst/>
@@ -34390,14 +34426,14 @@
       </p:sp>
       <p:sp>
         <p:nvSpPr>
-          <p:cNvPr id="5" name="TextBox 4"/>
+          <p:cNvPr id="15" name="TextBox 14"/>
           <p:cNvSpPr txBox="1"/>
           <p:nvPr/>
         </p:nvSpPr>
         <p:spPr>
           <a:xfrm>
-            <a:off x="841248" y="1444752"/>
-            <a:ext cx="4809744" cy="2139696"/>
+            <a:off x="841248" y="4005072"/>
+            <a:ext cx="10296144" cy="1499616"/>
           </a:xfrm>
           <a:prstGeom prst="rect">
             <a:avLst/>
@@ -34422,7 +34458,7 @@
               </a:defRPr>
             </a:pPr>
             <a:r>
-              <a:t>// Attori di film usciti dopo il 2000:</a:t>
+              <a:t>// HAS_SKILL: competenza di una persona</a:t>
             </a:r>
           </a:p>
           <a:p>
@@ -34438,7 +34474,7 @@
               </a:defRPr>
             </a:pPr>
             <a:r>
-              <a:t>MATCH (p:Person)-[:ACTED_IN]-&gt;(m:Movie)</a:t>
+              <a:t>(p:Person)-[h:HAS_SKILL {proficiency: 1-5}]-&gt;(s:Skill)</a:t>
             </a:r>
           </a:p>
           <a:p>
@@ -34453,9 +34489,6 @@
                 <a:latin typeface="Consolas"/>
               </a:defRPr>
             </a:pPr>
-            <a:r>
-              <a:t>WHERE m.released &gt; 2000</a:t>
-            </a:r>
           </a:p>
           <a:p>
             <a:pPr>
@@ -34470,7 +34503,7 @@
               </a:defRPr>
             </a:pPr>
             <a:r>
-              <a:t>RETURN p.name, m.title, m.released</a:t>
+              <a:t>// WORKED_ON: esperienza lavorativa su progetto</a:t>
             </a:r>
           </a:p>
           <a:p>
@@ -34486,7 +34519,7 @@
               </a:defRPr>
             </a:pPr>
             <a:r>
-              <a:t>ORDER BY m.released DESC;</a:t>
+              <a:t>(p:Person)-[w:WORKED_ON {role: "Developer"}]-&gt;(proj:Project)</a:t>
             </a:r>
           </a:p>
           <a:p>
@@ -34515,7 +34548,7 @@
               </a:defRPr>
             </a:pPr>
             <a:r>
-              <a:t>// Output:</a:t>
+              <a:t>// REPORTS_TO: gerarchia organizzativa</a:t>
             </a:r>
           </a:p>
           <a:p>
@@ -34531,236 +34564,21 @@
               </a:defRPr>
             </a:pPr>
             <a:r>
-              <a:t>// Tom Hanks | Cloud Atlas | 2012</a:t>
-            </a:r>
-          </a:p>
-          <a:p>
-            <a:pPr>
-              <a:spcAft>
-                <a:spcPts val="100"/>
-              </a:spcAft>
-              <a:defRPr sz="1000">
-                <a:solidFill>
-                  <a:srgbClr val="7EC68E"/>
-                </a:solidFill>
-                <a:latin typeface="Consolas"/>
-              </a:defRPr>
-            </a:pPr>
-            <a:r>
-              <a:t>// Hugo Weaving | Cloud Atlas | 2012</a:t>
-            </a:r>
-          </a:p>
-          <a:p>
-            <a:pPr>
-              <a:spcAft>
-                <a:spcPts val="100"/>
-              </a:spcAft>
-              <a:defRPr sz="1000">
-                <a:solidFill>
-                  <a:srgbClr val="7EC68E"/>
-                </a:solidFill>
-                <a:latin typeface="Consolas"/>
-              </a:defRPr>
-            </a:pPr>
-          </a:p>
-          <a:p>
-            <a:pPr>
-              <a:spcAft>
-                <a:spcPts val="100"/>
-              </a:spcAft>
-              <a:defRPr sz="1000">
-                <a:solidFill>
-                  <a:srgbClr val="7EC68E"/>
-                </a:solidFill>
-                <a:latin typeface="Consolas"/>
-              </a:defRPr>
-            </a:pPr>
-            <a:r>
-              <a:t>// Co-protagonisti di Tom Hanks:</a:t>
-            </a:r>
-          </a:p>
-          <a:p>
-            <a:pPr>
-              <a:spcAft>
-                <a:spcPts val="100"/>
-              </a:spcAft>
-              <a:defRPr sz="1000">
-                <a:solidFill>
-                  <a:srgbClr val="7EC68E"/>
-                </a:solidFill>
-                <a:latin typeface="Consolas"/>
-              </a:defRPr>
-            </a:pPr>
-            <a:r>
-              <a:t>MATCH (tom:Person {name: "Tom Hanks"})</a:t>
-            </a:r>
-          </a:p>
-          <a:p>
-            <a:pPr>
-              <a:spcAft>
-                <a:spcPts val="100"/>
-              </a:spcAft>
-              <a:defRPr sz="1000">
-                <a:solidFill>
-                  <a:srgbClr val="7EC68E"/>
-                </a:solidFill>
-                <a:latin typeface="Consolas"/>
-              </a:defRPr>
-            </a:pPr>
-            <a:r>
-              <a:t>  -[:ACTED_IN]-&gt;(m:Movie)&lt;-[:ACTED_IN]-(co:Person)</a:t>
-            </a:r>
-          </a:p>
-          <a:p>
-            <a:pPr>
-              <a:spcAft>
-                <a:spcPts val="100"/>
-              </a:spcAft>
-              <a:defRPr sz="1000">
-                <a:solidFill>
-                  <a:srgbClr val="7EC68E"/>
-                </a:solidFill>
-                <a:latin typeface="Consolas"/>
-              </a:defRPr>
-            </a:pPr>
-            <a:r>
-              <a:t>RETURN co.name, m.title ORDER BY m.title;</a:t>
-            </a:r>
-          </a:p>
-          <a:p>
-            <a:pPr>
-              <a:spcAft>
-                <a:spcPts val="100"/>
-              </a:spcAft>
-              <a:defRPr sz="1000">
-                <a:solidFill>
-                  <a:srgbClr val="7EC68E"/>
-                </a:solidFill>
-                <a:latin typeface="Consolas"/>
-              </a:defRPr>
-            </a:pPr>
-          </a:p>
-          <a:p>
-            <a:pPr>
-              <a:spcAft>
-                <a:spcPts val="100"/>
-              </a:spcAft>
-              <a:defRPr sz="1000">
-                <a:solidFill>
-                  <a:srgbClr val="7EC68E"/>
-                </a:solidFill>
-                <a:latin typeface="Consolas"/>
-              </a:defRPr>
-            </a:pPr>
-            <a:r>
-              <a:t>// Output:</a:t>
-            </a:r>
-          </a:p>
-          <a:p>
-            <a:pPr>
-              <a:spcAft>
-                <a:spcPts val="100"/>
-              </a:spcAft>
-              <a:defRPr sz="1000">
-                <a:solidFill>
-                  <a:srgbClr val="7EC68E"/>
-                </a:solidFill>
-                <a:latin typeface="Consolas"/>
-              </a:defRPr>
-            </a:pPr>
-            <a:r>
-              <a:t>// Meg Ryan | Sleepless in Seattle</a:t>
-            </a:r>
-          </a:p>
-          <a:p>
-            <a:pPr>
-              <a:spcAft>
-                <a:spcPts val="100"/>
-              </a:spcAft>
-              <a:defRPr sz="1000">
-                <a:solidFill>
-                  <a:srgbClr val="7EC68E"/>
-                </a:solidFill>
-                <a:latin typeface="Consolas"/>
-              </a:defRPr>
-            </a:pPr>
-            <a:r>
-              <a:t>// Meg Ryan | You've Got Mail</a:t>
-            </a:r>
-          </a:p>
-          <a:p>
-            <a:pPr>
-              <a:spcAft>
-                <a:spcPts val="100"/>
-              </a:spcAft>
-              <a:defRPr sz="1000">
-                <a:solidFill>
-                  <a:srgbClr val="7EC68E"/>
-                </a:solidFill>
-                <a:latin typeface="Consolas"/>
-              </a:defRPr>
-            </a:pPr>
-            <a:r>
-              <a:t>// Bill Paxton | Apollo 13</a:t>
+              <a:t>(p:Person)-[:REPORTS_TO]-&gt;(sup:Supervisor)</a:t>
             </a:r>
           </a:p>
         </p:txBody>
       </p:sp>
       <p:sp>
         <p:nvSpPr>
-          <p:cNvPr id="6" name="Rectangle 5"/>
-          <p:cNvSpPr/>
-          <p:nvPr/>
-        </p:nvSpPr>
-        <p:spPr>
-          <a:xfrm>
-            <a:off x="5669280" y="1371600"/>
-            <a:ext cx="4846320" cy="2286000"/>
-          </a:xfrm>
-          <a:prstGeom prst="rect">
-            <a:avLst/>
-          </a:prstGeom>
-          <a:solidFill>
-            <a:srgbClr val="1B2A4A"/>
-          </a:solidFill>
-          <a:ln w="12700">
-            <a:solidFill>
-              <a:srgbClr val="2D4F7A"/>
-            </a:solidFill>
-          </a:ln>
-        </p:spPr>
-        <p:style>
-          <a:lnRef idx="1">
-            <a:schemeClr val="accent1"/>
-          </a:lnRef>
-          <a:fillRef idx="3">
-            <a:schemeClr val="accent1"/>
-          </a:fillRef>
-          <a:effectRef idx="2">
-            <a:schemeClr val="accent1"/>
-          </a:effectRef>
-          <a:fontRef idx="minor">
-            <a:schemeClr val="lt1"/>
-          </a:fontRef>
-        </p:style>
-        <p:txBody>
-          <a:bodyPr rtlCol="0" anchor="ctr"/>
-          <a:lstStyle/>
-          <a:p>
-            <a:pPr algn="ctr"/>
-          </a:p>
-        </p:txBody>
-      </p:sp>
-      <p:sp>
-        <p:nvSpPr>
-          <p:cNvPr id="7" name="TextBox 6"/>
+          <p:cNvPr id="16" name="TextBox 15"/>
           <p:cNvSpPr txBox="1"/>
           <p:nvPr/>
         </p:nvSpPr>
         <p:spPr>
           <a:xfrm>
-            <a:off x="5779008" y="1444752"/>
-            <a:ext cx="4626864" cy="2139696"/>
+            <a:off x="731520" y="5760720"/>
+            <a:ext cx="5029200" cy="365760"/>
           </a:xfrm>
           <a:prstGeom prst="rect">
             <a:avLst/>
@@ -34773,310 +34591,30 @@
           </a:bodyPr>
           <a:lstStyle/>
           <a:p>
-            <a:pPr>
-              <a:spcAft>
-                <a:spcPts val="100"/>
-              </a:spcAft>
-              <a:defRPr sz="1000">
-                <a:solidFill>
-                  <a:srgbClr val="7EC68E"/>
-                </a:solidFill>
-                <a:latin typeface="Consolas"/>
-              </a:defRPr>
-            </a:pPr>
-            <a:r>
-              <a:t>// Numero di film per attore:</a:t>
-            </a:r>
-          </a:p>
-          <a:p>
-            <a:pPr>
-              <a:spcAft>
-                <a:spcPts val="100"/>
-              </a:spcAft>
-              <a:defRPr sz="1000">
-                <a:solidFill>
-                  <a:srgbClr val="7EC68E"/>
-                </a:solidFill>
-                <a:latin typeface="Consolas"/>
-              </a:defRPr>
-            </a:pPr>
-            <a:r>
-              <a:t>MATCH (p:Person)-[:ACTED_IN]-&gt;(m:Movie)</a:t>
-            </a:r>
-          </a:p>
-          <a:p>
-            <a:pPr>
-              <a:spcAft>
-                <a:spcPts val="100"/>
-              </a:spcAft>
-              <a:defRPr sz="1000">
-                <a:solidFill>
-                  <a:srgbClr val="7EC68E"/>
-                </a:solidFill>
-                <a:latin typeface="Consolas"/>
-              </a:defRPr>
-            </a:pPr>
-            <a:r>
-              <a:t>RETURN p.name, count(m) AS film</a:t>
-            </a:r>
-          </a:p>
-          <a:p>
-            <a:pPr>
-              <a:spcAft>
-                <a:spcPts val="100"/>
-              </a:spcAft>
-              <a:defRPr sz="1000">
-                <a:solidFill>
-                  <a:srgbClr val="7EC68E"/>
-                </a:solidFill>
-                <a:latin typeface="Consolas"/>
-              </a:defRPr>
-            </a:pPr>
-            <a:r>
-              <a:t>ORDER BY film DESC LIMIT 10;</a:t>
-            </a:r>
-          </a:p>
-          <a:p>
-            <a:pPr>
-              <a:spcAft>
-                <a:spcPts val="100"/>
-              </a:spcAft>
-              <a:defRPr sz="1000">
-                <a:solidFill>
-                  <a:srgbClr val="7EC68E"/>
-                </a:solidFill>
-                <a:latin typeface="Consolas"/>
-              </a:defRPr>
-            </a:pPr>
-          </a:p>
-          <a:p>
-            <a:pPr>
-              <a:spcAft>
-                <a:spcPts val="100"/>
-              </a:spcAft>
-              <a:defRPr sz="1000">
-                <a:solidFill>
-                  <a:srgbClr val="7EC68E"/>
-                </a:solidFill>
-                <a:latin typeface="Consolas"/>
-              </a:defRPr>
-            </a:pPr>
-            <a:r>
-              <a:t>// Output:</a:t>
-            </a:r>
-          </a:p>
-          <a:p>
-            <a:pPr>
-              <a:spcAft>
-                <a:spcPts val="100"/>
-              </a:spcAft>
-              <a:defRPr sz="1000">
-                <a:solidFill>
-                  <a:srgbClr val="7EC68E"/>
-                </a:solidFill>
-                <a:latin typeface="Consolas"/>
-              </a:defRPr>
-            </a:pPr>
-            <a:r>
-              <a:t>// Tom Hanks | 12</a:t>
-            </a:r>
-          </a:p>
-          <a:p>
-            <a:pPr>
-              <a:spcAft>
-                <a:spcPts val="100"/>
-              </a:spcAft>
-              <a:defRPr sz="1000">
-                <a:solidFill>
-                  <a:srgbClr val="7EC68E"/>
-                </a:solidFill>
-                <a:latin typeface="Consolas"/>
-              </a:defRPr>
-            </a:pPr>
-            <a:r>
-              <a:t>// Keanu Reeves | 10</a:t>
-            </a:r>
-          </a:p>
-          <a:p>
-            <a:pPr>
-              <a:spcAft>
-                <a:spcPts val="100"/>
-              </a:spcAft>
-              <a:defRPr sz="1000">
-                <a:solidFill>
-                  <a:srgbClr val="7EC68E"/>
-                </a:solidFill>
-                <a:latin typeface="Consolas"/>
-              </a:defRPr>
-            </a:pPr>
-          </a:p>
-          <a:p>
-            <a:pPr>
-              <a:spcAft>
-                <a:spcPts val="100"/>
-              </a:spcAft>
-              <a:defRPr sz="1000">
-                <a:solidFill>
-                  <a:srgbClr val="7EC68E"/>
-                </a:solidFill>
-                <a:latin typeface="Consolas"/>
-              </a:defRPr>
-            </a:pPr>
-            <a:r>
-              <a:t>// Registi e i loro attori:</a:t>
-            </a:r>
-          </a:p>
-          <a:p>
-            <a:pPr>
-              <a:spcAft>
-                <a:spcPts val="100"/>
-              </a:spcAft>
-              <a:defRPr sz="1000">
-                <a:solidFill>
-                  <a:srgbClr val="7EC68E"/>
-                </a:solidFill>
-                <a:latin typeface="Consolas"/>
-              </a:defRPr>
-            </a:pPr>
-            <a:r>
-              <a:t>MATCH (d:Person)-[:DIRECTED]-&gt;(m:Movie)</a:t>
-            </a:r>
-          </a:p>
-          <a:p>
-            <a:pPr>
-              <a:spcAft>
-                <a:spcPts val="100"/>
-              </a:spcAft>
-              <a:defRPr sz="1000">
-                <a:solidFill>
-                  <a:srgbClr val="7EC68E"/>
-                </a:solidFill>
-                <a:latin typeface="Consolas"/>
-              </a:defRPr>
-            </a:pPr>
-            <a:r>
-              <a:t>  &lt;-[:ACTED_IN]-(a:Person)</a:t>
-            </a:r>
-          </a:p>
-          <a:p>
-            <a:pPr>
-              <a:spcAft>
-                <a:spcPts val="100"/>
-              </a:spcAft>
-              <a:defRPr sz="1000">
-                <a:solidFill>
-                  <a:srgbClr val="7EC68E"/>
-                </a:solidFill>
-                <a:latin typeface="Consolas"/>
-              </a:defRPr>
-            </a:pPr>
-            <a:r>
-              <a:t>RETURN d.name AS regista,</a:t>
-            </a:r>
-          </a:p>
-          <a:p>
-            <a:pPr>
-              <a:spcAft>
-                <a:spcPts val="100"/>
-              </a:spcAft>
-              <a:defRPr sz="1000">
-                <a:solidFill>
-                  <a:srgbClr val="7EC68E"/>
-                </a:solidFill>
-                <a:latin typeface="Consolas"/>
-              </a:defRPr>
-            </a:pPr>
-            <a:r>
-              <a:t>       collect(DISTINCT a.name) AS attori,</a:t>
-            </a:r>
-          </a:p>
-          <a:p>
-            <a:pPr>
-              <a:spcAft>
-                <a:spcPts val="100"/>
-              </a:spcAft>
-              <a:defRPr sz="1000">
-                <a:solidFill>
-                  <a:srgbClr val="7EC68E"/>
-                </a:solidFill>
-                <a:latin typeface="Consolas"/>
-              </a:defRPr>
-            </a:pPr>
-            <a:r>
-              <a:t>       count(DISTINCT a.name) AS num</a:t>
-            </a:r>
-          </a:p>
-          <a:p>
-            <a:pPr>
-              <a:spcAft>
-                <a:spcPts val="100"/>
-              </a:spcAft>
-              <a:defRPr sz="1000">
-                <a:solidFill>
-                  <a:srgbClr val="7EC68E"/>
-                </a:solidFill>
-                <a:latin typeface="Consolas"/>
-              </a:defRPr>
-            </a:pPr>
-            <a:r>
-              <a:t>ORDER BY num DESC LIMIT 5;</a:t>
+            <a:pPr algn="l">
+              <a:defRPr sz="1200" b="0">
+                <a:solidFill>
+                  <a:srgbClr val="CCCCCC"/>
+                </a:solidFill>
+                <a:latin typeface="Calibri"/>
+              </a:defRPr>
+            </a:pPr>
+            <a:r>
+              <a:t>Una persona PUÒ non avere skill, non avere progetti, o non riportare a nessuno.</a:t>
             </a:r>
           </a:p>
         </p:txBody>
       </p:sp>
       <p:sp>
         <p:nvSpPr>
-          <p:cNvPr id="8" name="Rectangle 7"/>
-          <p:cNvSpPr/>
-          <p:nvPr/>
-        </p:nvSpPr>
-        <p:spPr>
-          <a:xfrm>
-            <a:off x="731520" y="3931920"/>
-            <a:ext cx="10698480" cy="36576"/>
-          </a:xfrm>
-          <a:prstGeom prst="rect">
-            <a:avLst/>
-          </a:prstGeom>
-          <a:solidFill>
-            <a:srgbClr val="F0C040"/>
-          </a:solidFill>
-          <a:ln>
-            <a:noFill/>
-          </a:ln>
-        </p:spPr>
-        <p:style>
-          <a:lnRef idx="1">
-            <a:schemeClr val="accent1"/>
-          </a:lnRef>
-          <a:fillRef idx="3">
-            <a:schemeClr val="accent1"/>
-          </a:fillRef>
-          <a:effectRef idx="2">
-            <a:schemeClr val="accent1"/>
-          </a:effectRef>
-          <a:fontRef idx="minor">
-            <a:schemeClr val="lt1"/>
-          </a:fontRef>
-        </p:style>
-        <p:txBody>
-          <a:bodyPr rtlCol="0" anchor="ctr"/>
-          <a:lstStyle/>
-          <a:p>
-            <a:pPr algn="ctr"/>
-          </a:p>
-        </p:txBody>
-      </p:sp>
-      <p:sp>
-        <p:nvSpPr>
-          <p:cNvPr id="9" name="TextBox 8"/>
+          <p:cNvPr id="17" name="TextBox 16"/>
           <p:cNvSpPr txBox="1"/>
           <p:nvPr/>
         </p:nvSpPr>
         <p:spPr>
           <a:xfrm>
-            <a:off x="731520" y="4114800"/>
-            <a:ext cx="10515600" cy="365760"/>
+            <a:off x="5669280" y="5760720"/>
+            <a:ext cx="4846320" cy="365760"/>
           </a:xfrm>
           <a:prstGeom prst="rect">
             <a:avLst/>
@@ -35090,102 +34628,15 @@
           <a:lstStyle/>
           <a:p>
             <a:pPr algn="l">
-              <a:defRPr sz="1500" b="1">
-                <a:solidFill>
-                  <a:srgbClr val="F08040"/>
+              <a:defRPr sz="1200" b="0">
+                <a:solidFill>
+                  <a:srgbClr val="F0C040"/>
                 </a:solidFill>
                 <a:latin typeface="Calibri"/>
               </a:defRPr>
             </a:pPr>
             <a:r>
-              <a:t>Perché Movie Graph è un buon esempio didattico:</a:t>
-            </a:r>
-          </a:p>
-        </p:txBody>
-      </p:sp>
-      <p:sp>
-        <p:nvSpPr>
-          <p:cNvPr id="10" name="TextBox 9"/>
-          <p:cNvSpPr txBox="1"/>
-          <p:nvPr/>
-        </p:nvSpPr>
-        <p:spPr>
-          <a:xfrm>
-            <a:off x="731520" y="4572000"/>
-            <a:ext cx="10515600" cy="1371600"/>
-          </a:xfrm>
-          <a:prstGeom prst="rect">
-            <a:avLst/>
-          </a:prstGeom>
-          <a:noFill/>
-        </p:spPr>
-        <p:txBody>
-          <a:bodyPr wrap="square">
-            <a:spAutoFit/>
-          </a:bodyPr>
-          <a:lstStyle/>
-          <a:p>
-            <a:pPr algn="l">
-              <a:spcAft>
-                <a:spcPts val="300"/>
-              </a:spcAft>
-              <a:defRPr sz="1200">
-                <a:solidFill>
-                  <a:srgbClr val="FFFFFF"/>
-                </a:solidFill>
-                <a:latin typeface="Calibri"/>
-              </a:defRPr>
-            </a:pPr>
-            <a:r>
-              <a:t>•  Modello semplice: 2 labels (Movie, Person), 3 relazioni (ACTED_IN, DIRECTED, REVIEWED)</a:t>
-            </a:r>
-          </a:p>
-          <a:p>
-            <a:pPr algn="l">
-              <a:spcAft>
-                <a:spcPts val="300"/>
-              </a:spcAft>
-              <a:defRPr sz="1200">
-                <a:solidFill>
-                  <a:srgbClr val="FFFFFF"/>
-                </a:solidFill>
-                <a:latin typeface="Calibri"/>
-              </a:defRPr>
-            </a:pPr>
-            <a:r>
-              <a:t>•  Pattern matching immediato: "attori che hanno recitato con X"</a:t>
-            </a:r>
-          </a:p>
-          <a:p>
-            <a:pPr algn="l">
-              <a:spcAft>
-                <a:spcPts val="300"/>
-              </a:spcAft>
-              <a:defRPr sz="1200">
-                <a:solidFill>
-                  <a:srgbClr val="FFFFFF"/>
-                </a:solidFill>
-                <a:latin typeface="Calibri"/>
-              </a:defRPr>
-            </a:pPr>
-            <a:r>
-              <a:t>•  Aggregazioni naturali: film per attore, attori per regista</a:t>
-            </a:r>
-          </a:p>
-          <a:p>
-            <a:pPr algn="l">
-              <a:spcAft>
-                <a:spcPts val="300"/>
-              </a:spcAft>
-              <a:defRPr sz="1200">
-                <a:solidFill>
-                  <a:srgbClr val="FFFFFF"/>
-                </a:solidFill>
-                <a:latin typeface="Calibri"/>
-              </a:defRPr>
-            </a:pPr>
-            <a:r>
-              <a:t>•  ShortestPath: Bacon number (cammino minimo tra due attori)</a:t>
+              <a:t>Tutte le proprietà sono in INGLESE (name, non nome).</a:t>
             </a:r>
           </a:p>
         </p:txBody>
@@ -35247,7 +34698,7 @@
               </a:defRPr>
             </a:pPr>
             <a:r>
-              <a:t>Esercizi (1/2)</a:t>
+              <a:t>Esempio Completo: Movie Graph</a:t>
             </a:r>
           </a:p>
         </p:txBody>
@@ -35283,21 +34734,66 @@
               </a:defRPr>
             </a:pPr>
             <a:r>
-              <a:t>Esercizi sul dataset Org Graph. Le soluzioni sono nel notebook della Sessione 1.</a:t>
+              <a:t>Dataset incluso in Neo4j Browser con nodi Movie e Person (attori/registi). Attivare con :play movie-graph.</a:t>
             </a:r>
           </a:p>
         </p:txBody>
       </p:sp>
       <p:sp>
         <p:nvSpPr>
-          <p:cNvPr id="4" name="TextBox 3"/>
+          <p:cNvPr id="4" name="Rectangle 3"/>
+          <p:cNvSpPr/>
+          <p:nvPr/>
+        </p:nvSpPr>
+        <p:spPr>
+          <a:xfrm>
+            <a:off x="731520" y="1371600"/>
+            <a:ext cx="5029200" cy="2560320"/>
+          </a:xfrm>
+          <a:prstGeom prst="rect">
+            <a:avLst/>
+          </a:prstGeom>
+          <a:solidFill>
+            <a:srgbClr val="1B2A4A"/>
+          </a:solidFill>
+          <a:ln w="12700">
+            <a:solidFill>
+              <a:srgbClr val="2D4F7A"/>
+            </a:solidFill>
+          </a:ln>
+        </p:spPr>
+        <p:style>
+          <a:lnRef idx="1">
+            <a:schemeClr val="accent1"/>
+          </a:lnRef>
+          <a:fillRef idx="3">
+            <a:schemeClr val="accent1"/>
+          </a:fillRef>
+          <a:effectRef idx="2">
+            <a:schemeClr val="accent1"/>
+          </a:effectRef>
+          <a:fontRef idx="minor">
+            <a:schemeClr val="lt1"/>
+          </a:fontRef>
+        </p:style>
+        <p:txBody>
+          <a:bodyPr rtlCol="0" anchor="ctr"/>
+          <a:lstStyle/>
+          <a:p>
+            <a:pPr algn="ctr"/>
+          </a:p>
+        </p:txBody>
+      </p:sp>
+      <p:sp>
+        <p:nvSpPr>
+          <p:cNvPr id="5" name="TextBox 4"/>
           <p:cNvSpPr txBox="1"/>
           <p:nvPr/>
         </p:nvSpPr>
         <p:spPr>
           <a:xfrm>
-            <a:off x="731520" y="1371600"/>
-            <a:ext cx="5029200" cy="4114800"/>
+            <a:off x="841248" y="1444752"/>
+            <a:ext cx="4809744" cy="2414016"/>
           </a:xfrm>
           <a:prstGeom prst="rect">
             <a:avLst/>
@@ -35310,321 +34806,357 @@
           </a:bodyPr>
           <a:lstStyle/>
           <a:p>
-            <a:pPr algn="l">
-              <a:spcAft>
-                <a:spcPts val="0"/>
-              </a:spcAft>
-              <a:defRPr sz="1200">
-                <a:solidFill>
-                  <a:srgbClr val="FFFFFF"/>
-                </a:solidFill>
-                <a:latin typeface="Calibri"/>
-              </a:defRPr>
-            </a:pPr>
-            <a:r>
-              <a:t>•  1. Connettiti a Neo4j via Python driver</a:t>
-            </a:r>
-          </a:p>
-          <a:p>
-            <a:pPr algn="l">
-              <a:spcAft>
-                <a:spcPts val="0"/>
-              </a:spcAft>
-              <a:defRPr sz="1200">
-                <a:solidFill>
-                  <a:srgbClr val="FFFFFF"/>
-                </a:solidFill>
-                <a:latin typeface="Calibri"/>
-              </a:defRPr>
-            </a:pPr>
-            <a:r>
-              <a:t>•    driver = GraphDatabase.driver(URI, auth=(USER, PASS))</a:t>
-            </a:r>
-          </a:p>
-          <a:p>
-            <a:pPr algn="l">
-              <a:spcAft>
-                <a:spcPts val="0"/>
-              </a:spcAft>
-              <a:defRPr sz="1200">
-                <a:solidFill>
-                  <a:srgbClr val="FFFFFF"/>
-                </a:solidFill>
-                <a:latin typeface="Calibri"/>
-              </a:defRPr>
-            </a:pPr>
-            <a:r>
-              <a:t>•    Esegui: MATCH (n) RETURN n LIMIT 25</a:t>
-            </a:r>
-          </a:p>
-          <a:p>
-            <a:pPr algn="l">
-              <a:spcAft>
-                <a:spcPts val="0"/>
-              </a:spcAft>
-              <a:defRPr sz="1200">
-                <a:solidFill>
-                  <a:srgbClr val="FFFFFF"/>
-                </a:solidFill>
-                <a:latin typeface="Calibri"/>
-              </a:defRPr>
-            </a:pPr>
-            <a:r>
-              <a:t>•  </a:t>
-            </a:r>
-          </a:p>
-          <a:p>
-            <a:pPr algn="l">
-              <a:spcAft>
-                <a:spcPts val="0"/>
-              </a:spcAft>
-              <a:defRPr sz="1200">
-                <a:solidFill>
-                  <a:srgbClr val="FFFFFF"/>
-                </a:solidFill>
-                <a:latin typeface="Calibri"/>
-              </a:defRPr>
-            </a:pPr>
-            <a:r>
-              <a:t>•  2. Trova tutte le persone di Roma</a:t>
-            </a:r>
-          </a:p>
-          <a:p>
-            <a:pPr algn="l">
-              <a:spcAft>
-                <a:spcPts val="0"/>
-              </a:spcAft>
-              <a:defRPr sz="1200">
-                <a:solidFill>
-                  <a:srgbClr val="FFFFFF"/>
-                </a:solidFill>
-                <a:latin typeface="Calibri"/>
-              </a:defRPr>
-            </a:pPr>
-            <a:r>
-              <a:t>•    MATCH (p:Person) WHERE p.location = "Roma"</a:t>
-            </a:r>
-          </a:p>
-          <a:p>
-            <a:pPr algn="l">
-              <a:spcAft>
-                <a:spcPts val="0"/>
-              </a:spcAft>
-              <a:defRPr sz="1200">
-                <a:solidFill>
-                  <a:srgbClr val="FFFFFF"/>
-                </a:solidFill>
-                <a:latin typeface="Calibri"/>
-              </a:defRPr>
-            </a:pPr>
-            <a:r>
-              <a:t>•    RETURN p.name, p.title</a:t>
-            </a:r>
-          </a:p>
-          <a:p>
-            <a:pPr algn="l">
-              <a:spcAft>
-                <a:spcPts val="0"/>
-              </a:spcAft>
-              <a:defRPr sz="1200">
-                <a:solidFill>
-                  <a:srgbClr val="FFFFFF"/>
-                </a:solidFill>
-                <a:latin typeface="Calibri"/>
-              </a:defRPr>
-            </a:pPr>
-            <a:r>
-              <a:t>•  </a:t>
-            </a:r>
-          </a:p>
-          <a:p>
-            <a:pPr algn="l">
-              <a:spcAft>
-                <a:spcPts val="0"/>
-              </a:spcAft>
-              <a:defRPr sz="1200">
-                <a:solidFill>
-                  <a:srgbClr val="FFFFFF"/>
-                </a:solidFill>
-                <a:latin typeface="Calibri"/>
-              </a:defRPr>
-            </a:pPr>
-            <a:r>
-              <a:t>•  3. Quante persone per ogni location?</a:t>
-            </a:r>
-          </a:p>
-          <a:p>
-            <a:pPr algn="l">
-              <a:spcAft>
-                <a:spcPts val="0"/>
-              </a:spcAft>
-              <a:defRPr sz="1200">
-                <a:solidFill>
-                  <a:srgbClr val="FFFFFF"/>
-                </a:solidFill>
-                <a:latin typeface="Calibri"/>
-              </a:defRPr>
-            </a:pPr>
-            <a:r>
-              <a:t>•    MATCH (p:Person) RETURN p.location, count(*)</a:t>
-            </a:r>
-          </a:p>
-          <a:p>
-            <a:pPr algn="l">
-              <a:spcAft>
-                <a:spcPts val="0"/>
-              </a:spcAft>
-              <a:defRPr sz="1200">
-                <a:solidFill>
-                  <a:srgbClr val="FFFFFF"/>
-                </a:solidFill>
-                <a:latin typeface="Calibri"/>
-              </a:defRPr>
-            </a:pPr>
-            <a:r>
-              <a:t>•    ORDER BY count(*) DESC</a:t>
-            </a:r>
-          </a:p>
-          <a:p>
-            <a:pPr algn="l">
-              <a:spcAft>
-                <a:spcPts val="0"/>
-              </a:spcAft>
-              <a:defRPr sz="1200">
-                <a:solidFill>
-                  <a:srgbClr val="FFFFFF"/>
-                </a:solidFill>
-                <a:latin typeface="Calibri"/>
-              </a:defRPr>
-            </a:pPr>
-            <a:r>
-              <a:t>•  </a:t>
-            </a:r>
-          </a:p>
-          <a:p>
-            <a:pPr algn="l">
-              <a:spcAft>
-                <a:spcPts val="0"/>
-              </a:spcAft>
-              <a:defRPr sz="1200">
-                <a:solidFill>
-                  <a:srgbClr val="FFFFFF"/>
-                </a:solidFill>
-                <a:latin typeface="Calibri"/>
-              </a:defRPr>
-            </a:pPr>
-            <a:r>
-              <a:t>•  4. Trova tutte le skill di una persona specifica</a:t>
-            </a:r>
-          </a:p>
-          <a:p>
-            <a:pPr algn="l">
-              <a:spcAft>
-                <a:spcPts val="0"/>
-              </a:spcAft>
-              <a:defRPr sz="1200">
-                <a:solidFill>
-                  <a:srgbClr val="FFFFFF"/>
-                </a:solidFill>
-                <a:latin typeface="Calibri"/>
-              </a:defRPr>
-            </a:pPr>
-            <a:r>
-              <a:t>•    MATCH (p:Person {name: 'Mario Rossi'})</a:t>
-            </a:r>
-          </a:p>
-          <a:p>
-            <a:pPr algn="l">
-              <a:spcAft>
-                <a:spcPts val="0"/>
-              </a:spcAft>
-              <a:defRPr sz="1200">
-                <a:solidFill>
-                  <a:srgbClr val="FFFFFF"/>
-                </a:solidFill>
-                <a:latin typeface="Calibri"/>
-              </a:defRPr>
-            </a:pPr>
-            <a:r>
-              <a:t>•    -[:HAS_SKILL]-&gt;(s:Skill) RETURN s.name</a:t>
-            </a:r>
-          </a:p>
-          <a:p>
-            <a:pPr algn="l">
-              <a:spcAft>
-                <a:spcPts val="0"/>
-              </a:spcAft>
-              <a:defRPr sz="1200">
-                <a:solidFill>
-                  <a:srgbClr val="FFFFFF"/>
-                </a:solidFill>
-                <a:latin typeface="Calibri"/>
-              </a:defRPr>
-            </a:pPr>
-            <a:r>
-              <a:t>•  </a:t>
-            </a:r>
-          </a:p>
-          <a:p>
-            <a:pPr algn="l">
-              <a:spcAft>
-                <a:spcPts val="0"/>
-              </a:spcAft>
-              <a:defRPr sz="1200">
-                <a:solidFill>
-                  <a:srgbClr val="FFFFFF"/>
-                </a:solidFill>
-                <a:latin typeface="Calibri"/>
-              </a:defRPr>
-            </a:pPr>
-            <a:r>
-              <a:t>•  5. Persone che hanno Python come skill</a:t>
-            </a:r>
-          </a:p>
-          <a:p>
-            <a:pPr algn="l">
-              <a:spcAft>
-                <a:spcPts val="0"/>
-              </a:spcAft>
-              <a:defRPr sz="1200">
-                <a:solidFill>
-                  <a:srgbClr val="FFFFFF"/>
-                </a:solidFill>
-                <a:latin typeface="Calibri"/>
-              </a:defRPr>
-            </a:pPr>
-            <a:r>
-              <a:t>•    MATCH (p:Person)-[:HAS_SKILL]-&gt;(s:Skill {name: 'Python'})</a:t>
-            </a:r>
-          </a:p>
-          <a:p>
-            <a:pPr algn="l">
-              <a:spcAft>
-                <a:spcPts val="0"/>
-              </a:spcAft>
-              <a:defRPr sz="1200">
-                <a:solidFill>
-                  <a:srgbClr val="FFFFFF"/>
-                </a:solidFill>
-                <a:latin typeface="Calibri"/>
-              </a:defRPr>
-            </a:pPr>
-            <a:r>
-              <a:t>•    RETURN p.name ORDER BY p.name</a:t>
+            <a:pPr>
+              <a:spcAft>
+                <a:spcPts val="100"/>
+              </a:spcAft>
+              <a:defRPr sz="1000">
+                <a:solidFill>
+                  <a:srgbClr val="7EC68E"/>
+                </a:solidFill>
+                <a:latin typeface="Consolas"/>
+              </a:defRPr>
+            </a:pPr>
+            <a:r>
+              <a:t>// Attori di film usciti dopo il 2000:</a:t>
+            </a:r>
+          </a:p>
+          <a:p>
+            <a:pPr>
+              <a:spcAft>
+                <a:spcPts val="100"/>
+              </a:spcAft>
+              <a:defRPr sz="1000">
+                <a:solidFill>
+                  <a:srgbClr val="7EC68E"/>
+                </a:solidFill>
+                <a:latin typeface="Consolas"/>
+              </a:defRPr>
+            </a:pPr>
+            <a:r>
+              <a:t>MATCH (p:Person)-[:ACTED_IN]-&gt;(m:Movie)</a:t>
+            </a:r>
+          </a:p>
+          <a:p>
+            <a:pPr>
+              <a:spcAft>
+                <a:spcPts val="100"/>
+              </a:spcAft>
+              <a:defRPr sz="1000">
+                <a:solidFill>
+                  <a:srgbClr val="7EC68E"/>
+                </a:solidFill>
+                <a:latin typeface="Consolas"/>
+              </a:defRPr>
+            </a:pPr>
+            <a:r>
+              <a:t>WHERE m.released &gt; 2000</a:t>
+            </a:r>
+          </a:p>
+          <a:p>
+            <a:pPr>
+              <a:spcAft>
+                <a:spcPts val="100"/>
+              </a:spcAft>
+              <a:defRPr sz="1000">
+                <a:solidFill>
+                  <a:srgbClr val="7EC68E"/>
+                </a:solidFill>
+                <a:latin typeface="Consolas"/>
+              </a:defRPr>
+            </a:pPr>
+            <a:r>
+              <a:t>RETURN p.name, m.title, m.released</a:t>
+            </a:r>
+          </a:p>
+          <a:p>
+            <a:pPr>
+              <a:spcAft>
+                <a:spcPts val="100"/>
+              </a:spcAft>
+              <a:defRPr sz="1000">
+                <a:solidFill>
+                  <a:srgbClr val="7EC68E"/>
+                </a:solidFill>
+                <a:latin typeface="Consolas"/>
+              </a:defRPr>
+            </a:pPr>
+            <a:r>
+              <a:t>ORDER BY m.released DESC;</a:t>
+            </a:r>
+          </a:p>
+          <a:p>
+            <a:pPr>
+              <a:spcAft>
+                <a:spcPts val="100"/>
+              </a:spcAft>
+              <a:defRPr sz="1000">
+                <a:solidFill>
+                  <a:srgbClr val="7EC68E"/>
+                </a:solidFill>
+                <a:latin typeface="Consolas"/>
+              </a:defRPr>
+            </a:pPr>
+          </a:p>
+          <a:p>
+            <a:pPr>
+              <a:spcAft>
+                <a:spcPts val="100"/>
+              </a:spcAft>
+              <a:defRPr sz="1000">
+                <a:solidFill>
+                  <a:srgbClr val="7EC68E"/>
+                </a:solidFill>
+                <a:latin typeface="Consolas"/>
+              </a:defRPr>
+            </a:pPr>
+            <a:r>
+              <a:t>// Output:</a:t>
+            </a:r>
+          </a:p>
+          <a:p>
+            <a:pPr>
+              <a:spcAft>
+                <a:spcPts val="100"/>
+              </a:spcAft>
+              <a:defRPr sz="1000">
+                <a:solidFill>
+                  <a:srgbClr val="7EC68E"/>
+                </a:solidFill>
+                <a:latin typeface="Consolas"/>
+              </a:defRPr>
+            </a:pPr>
+            <a:r>
+              <a:t>// Tom Hanks | Cloud Atlas | 2012</a:t>
+            </a:r>
+          </a:p>
+          <a:p>
+            <a:pPr>
+              <a:spcAft>
+                <a:spcPts val="100"/>
+              </a:spcAft>
+              <a:defRPr sz="1000">
+                <a:solidFill>
+                  <a:srgbClr val="7EC68E"/>
+                </a:solidFill>
+                <a:latin typeface="Consolas"/>
+              </a:defRPr>
+            </a:pPr>
+            <a:r>
+              <a:t>// Hugo Weaving | Cloud Atlas | 2012</a:t>
+            </a:r>
+          </a:p>
+          <a:p>
+            <a:pPr>
+              <a:spcAft>
+                <a:spcPts val="100"/>
+              </a:spcAft>
+              <a:defRPr sz="1000">
+                <a:solidFill>
+                  <a:srgbClr val="7EC68E"/>
+                </a:solidFill>
+                <a:latin typeface="Consolas"/>
+              </a:defRPr>
+            </a:pPr>
+          </a:p>
+          <a:p>
+            <a:pPr>
+              <a:spcAft>
+                <a:spcPts val="100"/>
+              </a:spcAft>
+              <a:defRPr sz="1000">
+                <a:solidFill>
+                  <a:srgbClr val="7EC68E"/>
+                </a:solidFill>
+                <a:latin typeface="Consolas"/>
+              </a:defRPr>
+            </a:pPr>
+            <a:r>
+              <a:t>// Co-protagonisti di Tom Hanks:</a:t>
+            </a:r>
+          </a:p>
+          <a:p>
+            <a:pPr>
+              <a:spcAft>
+                <a:spcPts val="100"/>
+              </a:spcAft>
+              <a:defRPr sz="1000">
+                <a:solidFill>
+                  <a:srgbClr val="7EC68E"/>
+                </a:solidFill>
+                <a:latin typeface="Consolas"/>
+              </a:defRPr>
+            </a:pPr>
+            <a:r>
+              <a:t>MATCH (tom:Person {name: "Tom Hanks"})</a:t>
+            </a:r>
+          </a:p>
+          <a:p>
+            <a:pPr>
+              <a:spcAft>
+                <a:spcPts val="100"/>
+              </a:spcAft>
+              <a:defRPr sz="1000">
+                <a:solidFill>
+                  <a:srgbClr val="7EC68E"/>
+                </a:solidFill>
+                <a:latin typeface="Consolas"/>
+              </a:defRPr>
+            </a:pPr>
+            <a:r>
+              <a:t>  -[:ACTED_IN]-&gt;(m:Movie)&lt;-[:ACTED_IN]-(co:Person)</a:t>
+            </a:r>
+          </a:p>
+          <a:p>
+            <a:pPr>
+              <a:spcAft>
+                <a:spcPts val="100"/>
+              </a:spcAft>
+              <a:defRPr sz="1000">
+                <a:solidFill>
+                  <a:srgbClr val="7EC68E"/>
+                </a:solidFill>
+                <a:latin typeface="Consolas"/>
+              </a:defRPr>
+            </a:pPr>
+            <a:r>
+              <a:t>RETURN co.name, m.title ORDER BY m.title;</a:t>
+            </a:r>
+          </a:p>
+          <a:p>
+            <a:pPr>
+              <a:spcAft>
+                <a:spcPts val="100"/>
+              </a:spcAft>
+              <a:defRPr sz="1000">
+                <a:solidFill>
+                  <a:srgbClr val="7EC68E"/>
+                </a:solidFill>
+                <a:latin typeface="Consolas"/>
+              </a:defRPr>
+            </a:pPr>
+          </a:p>
+          <a:p>
+            <a:pPr>
+              <a:spcAft>
+                <a:spcPts val="100"/>
+              </a:spcAft>
+              <a:defRPr sz="1000">
+                <a:solidFill>
+                  <a:srgbClr val="7EC68E"/>
+                </a:solidFill>
+                <a:latin typeface="Consolas"/>
+              </a:defRPr>
+            </a:pPr>
+            <a:r>
+              <a:t>// Output:</a:t>
+            </a:r>
+          </a:p>
+          <a:p>
+            <a:pPr>
+              <a:spcAft>
+                <a:spcPts val="100"/>
+              </a:spcAft>
+              <a:defRPr sz="1000">
+                <a:solidFill>
+                  <a:srgbClr val="7EC68E"/>
+                </a:solidFill>
+                <a:latin typeface="Consolas"/>
+              </a:defRPr>
+            </a:pPr>
+            <a:r>
+              <a:t>// Meg Ryan | Sleepless in Seattle</a:t>
+            </a:r>
+          </a:p>
+          <a:p>
+            <a:pPr>
+              <a:spcAft>
+                <a:spcPts val="100"/>
+              </a:spcAft>
+              <a:defRPr sz="1000">
+                <a:solidFill>
+                  <a:srgbClr val="7EC68E"/>
+                </a:solidFill>
+                <a:latin typeface="Consolas"/>
+              </a:defRPr>
+            </a:pPr>
+            <a:r>
+              <a:t>// Meg Ryan | You've Got Mail</a:t>
+            </a:r>
+          </a:p>
+          <a:p>
+            <a:pPr>
+              <a:spcAft>
+                <a:spcPts val="100"/>
+              </a:spcAft>
+              <a:defRPr sz="1000">
+                <a:solidFill>
+                  <a:srgbClr val="7EC68E"/>
+                </a:solidFill>
+                <a:latin typeface="Consolas"/>
+              </a:defRPr>
+            </a:pPr>
+            <a:r>
+              <a:t>// Bill Paxton | Apollo 13</a:t>
             </a:r>
           </a:p>
         </p:txBody>
       </p:sp>
       <p:sp>
         <p:nvSpPr>
-          <p:cNvPr id="5" name="TextBox 4"/>
+          <p:cNvPr id="6" name="Rectangle 5"/>
+          <p:cNvSpPr/>
+          <p:nvPr/>
+        </p:nvSpPr>
+        <p:spPr>
+          <a:xfrm>
+            <a:off x="5669280" y="1371600"/>
+            <a:ext cx="4846320" cy="2560320"/>
+          </a:xfrm>
+          <a:prstGeom prst="rect">
+            <a:avLst/>
+          </a:prstGeom>
+          <a:solidFill>
+            <a:srgbClr val="1B2A4A"/>
+          </a:solidFill>
+          <a:ln w="12700">
+            <a:solidFill>
+              <a:srgbClr val="2D4F7A"/>
+            </a:solidFill>
+          </a:ln>
+        </p:spPr>
+        <p:style>
+          <a:lnRef idx="1">
+            <a:schemeClr val="accent1"/>
+          </a:lnRef>
+          <a:fillRef idx="3">
+            <a:schemeClr val="accent1"/>
+          </a:fillRef>
+          <a:effectRef idx="2">
+            <a:schemeClr val="accent1"/>
+          </a:effectRef>
+          <a:fontRef idx="minor">
+            <a:schemeClr val="lt1"/>
+          </a:fontRef>
+        </p:style>
+        <p:txBody>
+          <a:bodyPr rtlCol="0" anchor="ctr"/>
+          <a:lstStyle/>
+          <a:p>
+            <a:pPr algn="ctr"/>
+          </a:p>
+        </p:txBody>
+      </p:sp>
+      <p:sp>
+        <p:nvSpPr>
+          <p:cNvPr id="7" name="TextBox 6"/>
           <p:cNvSpPr txBox="1"/>
           <p:nvPr/>
         </p:nvSpPr>
         <p:spPr>
           <a:xfrm>
-            <a:off x="5669280" y="1371600"/>
-            <a:ext cx="4846320" cy="4114800"/>
+            <a:off x="5779008" y="1444752"/>
+            <a:ext cx="4626864" cy="2414016"/>
           </a:xfrm>
           <a:prstGeom prst="rect">
             <a:avLst/>
@@ -35637,60 +35169,419 @@
           </a:bodyPr>
           <a:lstStyle/>
           <a:p>
+            <a:pPr>
+              <a:spcAft>
+                <a:spcPts val="100"/>
+              </a:spcAft>
+              <a:defRPr sz="1000">
+                <a:solidFill>
+                  <a:srgbClr val="7EC68E"/>
+                </a:solidFill>
+                <a:latin typeface="Consolas"/>
+              </a:defRPr>
+            </a:pPr>
+            <a:r>
+              <a:t>// Numero di film per attore:</a:t>
+            </a:r>
+          </a:p>
+          <a:p>
+            <a:pPr>
+              <a:spcAft>
+                <a:spcPts val="100"/>
+              </a:spcAft>
+              <a:defRPr sz="1000">
+                <a:solidFill>
+                  <a:srgbClr val="7EC68E"/>
+                </a:solidFill>
+                <a:latin typeface="Consolas"/>
+              </a:defRPr>
+            </a:pPr>
+            <a:r>
+              <a:t>MATCH (p:Person)-[:ACTED_IN]-&gt;(m:Movie)</a:t>
+            </a:r>
+          </a:p>
+          <a:p>
+            <a:pPr>
+              <a:spcAft>
+                <a:spcPts val="100"/>
+              </a:spcAft>
+              <a:defRPr sz="1000">
+                <a:solidFill>
+                  <a:srgbClr val="7EC68E"/>
+                </a:solidFill>
+                <a:latin typeface="Consolas"/>
+              </a:defRPr>
+            </a:pPr>
+            <a:r>
+              <a:t>RETURN p.name, count(m) AS film</a:t>
+            </a:r>
+          </a:p>
+          <a:p>
+            <a:pPr>
+              <a:spcAft>
+                <a:spcPts val="100"/>
+              </a:spcAft>
+              <a:defRPr sz="1000">
+                <a:solidFill>
+                  <a:srgbClr val="7EC68E"/>
+                </a:solidFill>
+                <a:latin typeface="Consolas"/>
+              </a:defRPr>
+            </a:pPr>
+            <a:r>
+              <a:t>ORDER BY film DESC LIMIT 10;</a:t>
+            </a:r>
+          </a:p>
+          <a:p>
+            <a:pPr>
+              <a:spcAft>
+                <a:spcPts val="100"/>
+              </a:spcAft>
+              <a:defRPr sz="1000">
+                <a:solidFill>
+                  <a:srgbClr val="7EC68E"/>
+                </a:solidFill>
+                <a:latin typeface="Consolas"/>
+              </a:defRPr>
+            </a:pPr>
+          </a:p>
+          <a:p>
+            <a:pPr>
+              <a:spcAft>
+                <a:spcPts val="100"/>
+              </a:spcAft>
+              <a:defRPr sz="1000">
+                <a:solidFill>
+                  <a:srgbClr val="7EC68E"/>
+                </a:solidFill>
+                <a:latin typeface="Consolas"/>
+              </a:defRPr>
+            </a:pPr>
+            <a:r>
+              <a:t>// Output:</a:t>
+            </a:r>
+          </a:p>
+          <a:p>
+            <a:pPr>
+              <a:spcAft>
+                <a:spcPts val="100"/>
+              </a:spcAft>
+              <a:defRPr sz="1000">
+                <a:solidFill>
+                  <a:srgbClr val="7EC68E"/>
+                </a:solidFill>
+                <a:latin typeface="Consolas"/>
+              </a:defRPr>
+            </a:pPr>
+            <a:r>
+              <a:t>// Tom Hanks | 12</a:t>
+            </a:r>
+          </a:p>
+          <a:p>
+            <a:pPr>
+              <a:spcAft>
+                <a:spcPts val="100"/>
+              </a:spcAft>
+              <a:defRPr sz="1000">
+                <a:solidFill>
+                  <a:srgbClr val="7EC68E"/>
+                </a:solidFill>
+                <a:latin typeface="Consolas"/>
+              </a:defRPr>
+            </a:pPr>
+            <a:r>
+              <a:t>// Keanu Reeves | 10</a:t>
+            </a:r>
+          </a:p>
+          <a:p>
+            <a:pPr>
+              <a:spcAft>
+                <a:spcPts val="100"/>
+              </a:spcAft>
+              <a:defRPr sz="1000">
+                <a:solidFill>
+                  <a:srgbClr val="7EC68E"/>
+                </a:solidFill>
+                <a:latin typeface="Consolas"/>
+              </a:defRPr>
+            </a:pPr>
+          </a:p>
+          <a:p>
+            <a:pPr>
+              <a:spcAft>
+                <a:spcPts val="100"/>
+              </a:spcAft>
+              <a:defRPr sz="1000">
+                <a:solidFill>
+                  <a:srgbClr val="7EC68E"/>
+                </a:solidFill>
+                <a:latin typeface="Consolas"/>
+              </a:defRPr>
+            </a:pPr>
+            <a:r>
+              <a:t>// Registi e i loro attori:</a:t>
+            </a:r>
+          </a:p>
+          <a:p>
+            <a:pPr>
+              <a:spcAft>
+                <a:spcPts val="100"/>
+              </a:spcAft>
+              <a:defRPr sz="1000">
+                <a:solidFill>
+                  <a:srgbClr val="7EC68E"/>
+                </a:solidFill>
+                <a:latin typeface="Consolas"/>
+              </a:defRPr>
+            </a:pPr>
+            <a:r>
+              <a:t>MATCH (d:Person)-[:DIRECTED]-&gt;(m:Movie)</a:t>
+            </a:r>
+          </a:p>
+          <a:p>
+            <a:pPr>
+              <a:spcAft>
+                <a:spcPts val="100"/>
+              </a:spcAft>
+              <a:defRPr sz="1000">
+                <a:solidFill>
+                  <a:srgbClr val="7EC68E"/>
+                </a:solidFill>
+                <a:latin typeface="Consolas"/>
+              </a:defRPr>
+            </a:pPr>
+            <a:r>
+              <a:t>  &lt;-[:ACTED_IN]-(a:Person)</a:t>
+            </a:r>
+          </a:p>
+          <a:p>
+            <a:pPr>
+              <a:spcAft>
+                <a:spcPts val="100"/>
+              </a:spcAft>
+              <a:defRPr sz="1000">
+                <a:solidFill>
+                  <a:srgbClr val="7EC68E"/>
+                </a:solidFill>
+                <a:latin typeface="Consolas"/>
+              </a:defRPr>
+            </a:pPr>
+            <a:r>
+              <a:t>RETURN d.name AS regista,</a:t>
+            </a:r>
+          </a:p>
+          <a:p>
+            <a:pPr>
+              <a:spcAft>
+                <a:spcPts val="100"/>
+              </a:spcAft>
+              <a:defRPr sz="1000">
+                <a:solidFill>
+                  <a:srgbClr val="7EC68E"/>
+                </a:solidFill>
+                <a:latin typeface="Consolas"/>
+              </a:defRPr>
+            </a:pPr>
+            <a:r>
+              <a:t>       collect(DISTINCT a.name) AS attori,</a:t>
+            </a:r>
+          </a:p>
+          <a:p>
+            <a:pPr>
+              <a:spcAft>
+                <a:spcPts val="100"/>
+              </a:spcAft>
+              <a:defRPr sz="1000">
+                <a:solidFill>
+                  <a:srgbClr val="7EC68E"/>
+                </a:solidFill>
+                <a:latin typeface="Consolas"/>
+              </a:defRPr>
+            </a:pPr>
+            <a:r>
+              <a:t>       count(DISTINCT a.name) AS num</a:t>
+            </a:r>
+          </a:p>
+          <a:p>
+            <a:pPr>
+              <a:spcAft>
+                <a:spcPts val="100"/>
+              </a:spcAft>
+              <a:defRPr sz="1000">
+                <a:solidFill>
+                  <a:srgbClr val="7EC68E"/>
+                </a:solidFill>
+                <a:latin typeface="Consolas"/>
+              </a:defRPr>
+            </a:pPr>
+            <a:r>
+              <a:t>ORDER BY num DESC LIMIT 5;</a:t>
+            </a:r>
+          </a:p>
+        </p:txBody>
+      </p:sp>
+      <p:sp>
+        <p:nvSpPr>
+          <p:cNvPr id="8" name="Rectangle 7"/>
+          <p:cNvSpPr/>
+          <p:nvPr/>
+        </p:nvSpPr>
+        <p:spPr>
+          <a:xfrm>
+            <a:off x="731520" y="3931920"/>
+            <a:ext cx="10698480" cy="36576"/>
+          </a:xfrm>
+          <a:prstGeom prst="rect">
+            <a:avLst/>
+          </a:prstGeom>
+          <a:solidFill>
+            <a:srgbClr val="F0C040"/>
+          </a:solidFill>
+          <a:ln>
+            <a:noFill/>
+          </a:ln>
+        </p:spPr>
+        <p:style>
+          <a:lnRef idx="1">
+            <a:schemeClr val="accent1"/>
+          </a:lnRef>
+          <a:fillRef idx="3">
+            <a:schemeClr val="accent1"/>
+          </a:fillRef>
+          <a:effectRef idx="2">
+            <a:schemeClr val="accent1"/>
+          </a:effectRef>
+          <a:fontRef idx="minor">
+            <a:schemeClr val="lt1"/>
+          </a:fontRef>
+        </p:style>
+        <p:txBody>
+          <a:bodyPr rtlCol="0" anchor="ctr"/>
+          <a:lstStyle/>
+          <a:p>
+            <a:pPr algn="ctr"/>
+          </a:p>
+        </p:txBody>
+      </p:sp>
+      <p:sp>
+        <p:nvSpPr>
+          <p:cNvPr id="9" name="TextBox 8"/>
+          <p:cNvSpPr txBox="1"/>
+          <p:nvPr/>
+        </p:nvSpPr>
+        <p:spPr>
+          <a:xfrm>
+            <a:off x="731520" y="4114800"/>
+            <a:ext cx="10515600" cy="365760"/>
+          </a:xfrm>
+          <a:prstGeom prst="rect">
+            <a:avLst/>
+          </a:prstGeom>
+          <a:noFill/>
+        </p:spPr>
+        <p:txBody>
+          <a:bodyPr wrap="square">
+            <a:spAutoFit/>
+          </a:bodyPr>
+          <a:lstStyle/>
+          <a:p>
             <a:pPr algn="l">
-              <a:defRPr sz="1100" b="0">
-                <a:solidFill>
-                  <a:srgbClr val="7EC68E"/>
-                </a:solidFill>
-                <a:latin typeface="Consolas"/>
-              </a:defRPr>
-            </a:pPr>
-            <a:r>
-              <a:t>Suggerimenti:</a:t>
-            </a:r>
-            <a:br/>
-            <a:br/>
-            <a:r>
-              <a:t>Usa il notebook per eseguire le</a:t>
-            </a:r>
-            <a:br/>
-            <a:r>
-              <a:t>query con driver.execute_query()</a:t>
-            </a:r>
-            <a:br/>
-            <a:br/>
-            <a:r>
-              <a:t>Oppure apri Neo4j Browser e incolla</a:t>
-            </a:r>
-            <a:br/>
-            <a:r>
-              <a:t>direttamente il Cypher.</a:t>
-            </a:r>
-            <a:br/>
-            <a:br/>
-            <a:r>
-              <a:t>Tutte le proprietà sono in inglese:</a:t>
-            </a:r>
-            <a:br/>
-            <a:r>
-              <a:t>  name, employee_id, location,</a:t>
-            </a:r>
-            <a:br/>
-            <a:r>
-              <a:t>  title, department, gender.</a:t>
-            </a:r>
-            <a:br/>
-            <a:br/>
-            <a:r>
-              <a:t>Skill: HAS_SKILL {proficiency}</a:t>
-            </a:r>
-            <a:br/>
-            <a:r>
-              <a:t>Progetti: WORKED_ON {role}</a:t>
-            </a:r>
-            <a:br/>
-            <a:r>
-              <a:t>Riporti: REPORTS_TO</a:t>
+              <a:defRPr sz="1500" b="1">
+                <a:solidFill>
+                  <a:srgbClr val="F08040"/>
+                </a:solidFill>
+                <a:latin typeface="Calibri"/>
+              </a:defRPr>
+            </a:pPr>
+            <a:r>
+              <a:t>Perché Movie Graph è un buon esempio didattico:</a:t>
+            </a:r>
+          </a:p>
+        </p:txBody>
+      </p:sp>
+      <p:sp>
+        <p:nvSpPr>
+          <p:cNvPr id="10" name="TextBox 9"/>
+          <p:cNvSpPr txBox="1"/>
+          <p:nvPr/>
+        </p:nvSpPr>
+        <p:spPr>
+          <a:xfrm>
+            <a:off x="731520" y="4572000"/>
+            <a:ext cx="10515600" cy="1371600"/>
+          </a:xfrm>
+          <a:prstGeom prst="rect">
+            <a:avLst/>
+          </a:prstGeom>
+          <a:noFill/>
+        </p:spPr>
+        <p:txBody>
+          <a:bodyPr wrap="square">
+            <a:spAutoFit/>
+          </a:bodyPr>
+          <a:lstStyle/>
+          <a:p>
+            <a:pPr algn="l">
+              <a:spcAft>
+                <a:spcPts val="300"/>
+              </a:spcAft>
+              <a:defRPr sz="1200">
+                <a:solidFill>
+                  <a:srgbClr val="FFFFFF"/>
+                </a:solidFill>
+                <a:latin typeface="Calibri"/>
+              </a:defRPr>
+            </a:pPr>
+            <a:r>
+              <a:t>•  Modello semplice: 2 labels (Movie, Person), 3 relazioni (ACTED_IN, DIRECTED, REVIEWED)</a:t>
+            </a:r>
+          </a:p>
+          <a:p>
+            <a:pPr algn="l">
+              <a:spcAft>
+                <a:spcPts val="300"/>
+              </a:spcAft>
+              <a:defRPr sz="1200">
+                <a:solidFill>
+                  <a:srgbClr val="FFFFFF"/>
+                </a:solidFill>
+                <a:latin typeface="Calibri"/>
+              </a:defRPr>
+            </a:pPr>
+            <a:r>
+              <a:t>•  Pattern matching immediato: "attori che hanno recitato con X"</a:t>
+            </a:r>
+          </a:p>
+          <a:p>
+            <a:pPr algn="l">
+              <a:spcAft>
+                <a:spcPts val="300"/>
+              </a:spcAft>
+              <a:defRPr sz="1200">
+                <a:solidFill>
+                  <a:srgbClr val="FFFFFF"/>
+                </a:solidFill>
+                <a:latin typeface="Calibri"/>
+              </a:defRPr>
+            </a:pPr>
+            <a:r>
+              <a:t>•  Aggregazioni naturali: film per attore, attori per regista</a:t>
+            </a:r>
+          </a:p>
+          <a:p>
+            <a:pPr algn="l">
+              <a:spcAft>
+                <a:spcPts val="300"/>
+              </a:spcAft>
+              <a:defRPr sz="1200">
+                <a:solidFill>
+                  <a:srgbClr val="FFFFFF"/>
+                </a:solidFill>
+                <a:latin typeface="Calibri"/>
+              </a:defRPr>
+            </a:pPr>
+            <a:r>
+              <a:t>•  ShortestPath: Bacon number (cammino minimo tra due attori)</a:t>
             </a:r>
           </a:p>
         </p:txBody>
@@ -35752,7 +35643,7 @@
               </a:defRPr>
             </a:pPr>
             <a:r>
-              <a:t>Esercizi (2/2)</a:t>
+              <a:t>Esercizi (1/2)</a:t>
             </a:r>
           </a:p>
         </p:txBody>
@@ -35765,8 +35656,8 @@
         </p:nvSpPr>
         <p:spPr>
           <a:xfrm>
-            <a:off x="731520" y="1097280"/>
-            <a:ext cx="5029200" cy="4572000"/>
+            <a:off x="731520" y="914400"/>
+            <a:ext cx="10515600" cy="365760"/>
           </a:xfrm>
           <a:prstGeom prst="rect">
             <a:avLst/>
@@ -35780,322 +35671,15 @@
           <a:lstStyle/>
           <a:p>
             <a:pPr algn="l">
-              <a:spcAft>
-                <a:spcPts val="0"/>
-              </a:spcAft>
-              <a:defRPr sz="1100">
-                <a:solidFill>
-                  <a:srgbClr val="FFFFFF"/>
+              <a:defRPr sz="1400" b="0">
+                <a:solidFill>
+                  <a:srgbClr val="CCCCCC"/>
                 </a:solidFill>
                 <a:latin typeface="Calibri"/>
               </a:defRPr>
             </a:pPr>
             <a:r>
-              <a:t>•  6. Skill più diffuse (top 5)</a:t>
-            </a:r>
-          </a:p>
-          <a:p>
-            <a:pPr algn="l">
-              <a:spcAft>
-                <a:spcPts val="0"/>
-              </a:spcAft>
-              <a:defRPr sz="1100">
-                <a:solidFill>
-                  <a:srgbClr val="FFFFFF"/>
-                </a:solidFill>
-                <a:latin typeface="Calibri"/>
-              </a:defRPr>
-            </a:pPr>
-            <a:r>
-              <a:t>•    MATCH (p:Person)-[:HAS_SKILL]-&gt;(s:Skill)</a:t>
-            </a:r>
-          </a:p>
-          <a:p>
-            <a:pPr algn="l">
-              <a:spcAft>
-                <a:spcPts val="0"/>
-              </a:spcAft>
-              <a:defRPr sz="1100">
-                <a:solidFill>
-                  <a:srgbClr val="FFFFFF"/>
-                </a:solidFill>
-                <a:latin typeface="Calibri"/>
-              </a:defRPr>
-            </a:pPr>
-            <a:r>
-              <a:t>•    RETURN s.name, count(*) AS persone</a:t>
-            </a:r>
-          </a:p>
-          <a:p>
-            <a:pPr algn="l">
-              <a:spcAft>
-                <a:spcPts val="0"/>
-              </a:spcAft>
-              <a:defRPr sz="1100">
-                <a:solidFill>
-                  <a:srgbClr val="FFFFFF"/>
-                </a:solidFill>
-                <a:latin typeface="Calibri"/>
-              </a:defRPr>
-            </a:pPr>
-            <a:r>
-              <a:t>•    ORDER BY persone DESC LIMIT 5</a:t>
-            </a:r>
-          </a:p>
-          <a:p>
-            <a:pPr algn="l">
-              <a:spcAft>
-                <a:spcPts val="0"/>
-              </a:spcAft>
-              <a:defRPr sz="1100">
-                <a:solidFill>
-                  <a:srgbClr val="FFFFFF"/>
-                </a:solidFill>
-                <a:latin typeface="Calibri"/>
-              </a:defRPr>
-            </a:pPr>
-            <a:r>
-              <a:t>•  </a:t>
-            </a:r>
-          </a:p>
-          <a:p>
-            <a:pPr algn="l">
-              <a:spcAft>
-                <a:spcPts val="0"/>
-              </a:spcAft>
-              <a:defRPr sz="1100">
-                <a:solidFill>
-                  <a:srgbClr val="FFFFFF"/>
-                </a:solidFill>
-                <a:latin typeface="Calibri"/>
-              </a:defRPr>
-            </a:pPr>
-            <a:r>
-              <a:t>•  7. Media proficiency per skill</a:t>
-            </a:r>
-          </a:p>
-          <a:p>
-            <a:pPr algn="l">
-              <a:spcAft>
-                <a:spcPts val="0"/>
-              </a:spcAft>
-              <a:defRPr sz="1100">
-                <a:solidFill>
-                  <a:srgbClr val="FFFFFF"/>
-                </a:solidFill>
-                <a:latin typeface="Calibri"/>
-              </a:defRPr>
-            </a:pPr>
-            <a:r>
-              <a:t>•    MATCH (p:Person)-[h:HAS_SKILL]-&gt;(s:Skill)</a:t>
-            </a:r>
-          </a:p>
-          <a:p>
-            <a:pPr algn="l">
-              <a:spcAft>
-                <a:spcPts val="0"/>
-              </a:spcAft>
-              <a:defRPr sz="1100">
-                <a:solidFill>
-                  <a:srgbClr val="FFFFFF"/>
-                </a:solidFill>
-                <a:latin typeface="Calibri"/>
-              </a:defRPr>
-            </a:pPr>
-            <a:r>
-              <a:t>•    RETURN s.name, avg(h.proficiency), count(p)</a:t>
-            </a:r>
-          </a:p>
-          <a:p>
-            <a:pPr algn="l">
-              <a:spcAft>
-                <a:spcPts val="0"/>
-              </a:spcAft>
-              <a:defRPr sz="1100">
-                <a:solidFill>
-                  <a:srgbClr val="FFFFFF"/>
-                </a:solidFill>
-                <a:latin typeface="Calibri"/>
-              </a:defRPr>
-            </a:pPr>
-            <a:r>
-              <a:t>•    ORDER BY avg(h.proficiency) DESC LIMIT 10</a:t>
-            </a:r>
-          </a:p>
-          <a:p>
-            <a:pPr algn="l">
-              <a:spcAft>
-                <a:spcPts val="0"/>
-              </a:spcAft>
-              <a:defRPr sz="1100">
-                <a:solidFill>
-                  <a:srgbClr val="FFFFFF"/>
-                </a:solidFill>
-                <a:latin typeface="Calibri"/>
-              </a:defRPr>
-            </a:pPr>
-            <a:r>
-              <a:t>•  </a:t>
-            </a:r>
-          </a:p>
-          <a:p>
-            <a:pPr algn="l">
-              <a:spcAft>
-                <a:spcPts val="0"/>
-              </a:spcAft>
-              <a:defRPr sz="1100">
-                <a:solidFill>
-                  <a:srgbClr val="FFFFFF"/>
-                </a:solidFill>
-                <a:latin typeface="Calibri"/>
-              </a:defRPr>
-            </a:pPr>
-            <a:r>
-              <a:t>•  8. Persone che condividono un progetto</a:t>
-            </a:r>
-          </a:p>
-          <a:p>
-            <a:pPr algn="l">
-              <a:spcAft>
-                <a:spcPts val="0"/>
-              </a:spcAft>
-              <a:defRPr sz="1100">
-                <a:solidFill>
-                  <a:srgbClr val="FFFFFF"/>
-                </a:solidFill>
-                <a:latin typeface="Calibri"/>
-              </a:defRPr>
-            </a:pPr>
-            <a:r>
-              <a:t>•    MATCH (p1:Person)-[:WORKED_ON]-&gt;(proj:Project)</a:t>
-            </a:r>
-          </a:p>
-          <a:p>
-            <a:pPr algn="l">
-              <a:spcAft>
-                <a:spcPts val="0"/>
-              </a:spcAft>
-              <a:defRPr sz="1100">
-                <a:solidFill>
-                  <a:srgbClr val="FFFFFF"/>
-                </a:solidFill>
-                <a:latin typeface="Calibri"/>
-              </a:defRPr>
-            </a:pPr>
-            <a:r>
-              <a:t>•      &lt;-[:WORKED_ON]-(p2:Person)</a:t>
-            </a:r>
-          </a:p>
-          <a:p>
-            <a:pPr algn="l">
-              <a:spcAft>
-                <a:spcPts val="0"/>
-              </a:spcAft>
-              <a:defRPr sz="1100">
-                <a:solidFill>
-                  <a:srgbClr val="FFFFFF"/>
-                </a:solidFill>
-                <a:latin typeface="Calibri"/>
-              </a:defRPr>
-            </a:pPr>
-            <a:r>
-              <a:t>•    RETURN p1.name, p2.name, proj.name LIMIT 10</a:t>
-            </a:r>
-          </a:p>
-          <a:p>
-            <a:pPr algn="l">
-              <a:spcAft>
-                <a:spcPts val="0"/>
-              </a:spcAft>
-              <a:defRPr sz="1100">
-                <a:solidFill>
-                  <a:srgbClr val="FFFFFF"/>
-                </a:solidFill>
-                <a:latin typeface="Calibri"/>
-              </a:defRPr>
-            </a:pPr>
-            <a:r>
-              <a:t>•  </a:t>
-            </a:r>
-          </a:p>
-          <a:p>
-            <a:pPr algn="l">
-              <a:spcAft>
-                <a:spcPts val="0"/>
-              </a:spcAft>
-              <a:defRPr sz="1100">
-                <a:solidFill>
-                  <a:srgbClr val="FFFFFF"/>
-                </a:solidFill>
-                <a:latin typeface="Calibri"/>
-              </a:defRPr>
-            </a:pPr>
-            <a:r>
-              <a:t>•  9. Crea un nuovo nodo Person e dagli una skill</a:t>
-            </a:r>
-          </a:p>
-          <a:p>
-            <a:pPr algn="l">
-              <a:spcAft>
-                <a:spcPts val="0"/>
-              </a:spcAft>
-              <a:defRPr sz="1100">
-                <a:solidFill>
-                  <a:srgbClr val="FFFFFF"/>
-                </a:solidFill>
-                <a:latin typeface="Calibri"/>
-              </a:defRPr>
-            </a:pPr>
-            <a:r>
-              <a:t>•    MERGE (p:Person {employee_id: 999})</a:t>
-            </a:r>
-          </a:p>
-          <a:p>
-            <a:pPr algn="l">
-              <a:spcAft>
-                <a:spcPts val="0"/>
-              </a:spcAft>
-              <a:defRPr sz="1100">
-                <a:solidFill>
-                  <a:srgbClr val="FFFFFF"/>
-                </a:solidFill>
-                <a:latin typeface="Calibri"/>
-              </a:defRPr>
-            </a:pPr>
-            <a:r>
-              <a:t>•    SET p.name = "Test"</a:t>
-            </a:r>
-          </a:p>
-          <a:p>
-            <a:pPr algn="l">
-              <a:spcAft>
-                <a:spcPts val="0"/>
-              </a:spcAft>
-              <a:defRPr sz="1100">
-                <a:solidFill>
-                  <a:srgbClr val="FFFFFF"/>
-                </a:solidFill>
-                <a:latin typeface="Calibri"/>
-              </a:defRPr>
-            </a:pPr>
-            <a:r>
-              <a:t>•    MATCH (s:Skill {name: 'Python'})</a:t>
-            </a:r>
-          </a:p>
-          <a:p>
-            <a:pPr algn="l">
-              <a:spcAft>
-                <a:spcPts val="0"/>
-              </a:spcAft>
-              <a:defRPr sz="1100">
-                <a:solidFill>
-                  <a:srgbClr val="FFFFFF"/>
-                </a:solidFill>
-                <a:latin typeface="Calibri"/>
-              </a:defRPr>
-            </a:pPr>
-            <a:r>
-              <a:t>•    MERGE (p)-[:HAS_SKILL {proficiency: 3}]-&gt;(s)</a:t>
+              <a:t>Esercizi sul dataset Org Graph. Le soluzioni sono nel notebook della Sessione 1.</a:t>
             </a:r>
           </a:p>
         </p:txBody>
@@ -36108,8 +35692,8 @@
         </p:nvSpPr>
         <p:spPr>
           <a:xfrm>
-            <a:off x="5669280" y="1097280"/>
-            <a:ext cx="4846320" cy="4572000"/>
+            <a:off x="731520" y="1371600"/>
+            <a:ext cx="5029200" cy="4114800"/>
           </a:xfrm>
           <a:prstGeom prst="rect">
             <a:avLst/>
@@ -36123,69 +35707,386 @@
           <a:lstStyle/>
           <a:p>
             <a:pPr algn="l">
-              <a:defRPr sz="1200" b="0">
-                <a:solidFill>
-                  <a:srgbClr val="CCCCCC"/>
+              <a:spcAft>
+                <a:spcPts val="0"/>
+              </a:spcAft>
+              <a:defRPr sz="1200">
+                <a:solidFill>
+                  <a:srgbClr val="FFFFFF"/>
                 </a:solidFill>
                 <a:latin typeface="Calibri"/>
               </a:defRPr>
             </a:pPr>
             <a:r>
-              <a:t>Obiettivi degli esercizi:</a:t>
+              <a:t>•  1. Connettiti a Neo4j via Python driver</a:t>
+            </a:r>
+          </a:p>
+          <a:p>
+            <a:pPr algn="l">
+              <a:spcAft>
+                <a:spcPts val="0"/>
+              </a:spcAft>
+              <a:defRPr sz="1200">
+                <a:solidFill>
+                  <a:srgbClr val="FFFFFF"/>
+                </a:solidFill>
+                <a:latin typeface="Calibri"/>
+              </a:defRPr>
+            </a:pPr>
+            <a:r>
+              <a:t>•    driver = GraphDatabase.driver(URI, auth=(USER, PASS))</a:t>
+            </a:r>
+          </a:p>
+          <a:p>
+            <a:pPr algn="l">
+              <a:spcAft>
+                <a:spcPts val="0"/>
+              </a:spcAft>
+              <a:defRPr sz="1200">
+                <a:solidFill>
+                  <a:srgbClr val="FFFFFF"/>
+                </a:solidFill>
+                <a:latin typeface="Calibri"/>
+              </a:defRPr>
+            </a:pPr>
+            <a:r>
+              <a:t>•    Esegui: MATCH (n) RETURN n LIMIT 25</a:t>
+            </a:r>
+          </a:p>
+          <a:p>
+            <a:pPr algn="l">
+              <a:spcAft>
+                <a:spcPts val="0"/>
+              </a:spcAft>
+              <a:defRPr sz="1200">
+                <a:solidFill>
+                  <a:srgbClr val="FFFFFF"/>
+                </a:solidFill>
+                <a:latin typeface="Calibri"/>
+              </a:defRPr>
+            </a:pPr>
+            <a:r>
+              <a:t>•  </a:t>
+            </a:r>
+          </a:p>
+          <a:p>
+            <a:pPr algn="l">
+              <a:spcAft>
+                <a:spcPts val="0"/>
+              </a:spcAft>
+              <a:defRPr sz="1200">
+                <a:solidFill>
+                  <a:srgbClr val="FFFFFF"/>
+                </a:solidFill>
+                <a:latin typeface="Calibri"/>
+              </a:defRPr>
+            </a:pPr>
+            <a:r>
+              <a:t>•  2. Trova tutte le persone di Roma</a:t>
+            </a:r>
+          </a:p>
+          <a:p>
+            <a:pPr algn="l">
+              <a:spcAft>
+                <a:spcPts val="0"/>
+              </a:spcAft>
+              <a:defRPr sz="1200">
+                <a:solidFill>
+                  <a:srgbClr val="FFFFFF"/>
+                </a:solidFill>
+                <a:latin typeface="Calibri"/>
+              </a:defRPr>
+            </a:pPr>
+            <a:r>
+              <a:t>•    MATCH (p:Person) WHERE p.location = "Roma"</a:t>
+            </a:r>
+          </a:p>
+          <a:p>
+            <a:pPr algn="l">
+              <a:spcAft>
+                <a:spcPts val="0"/>
+              </a:spcAft>
+              <a:defRPr sz="1200">
+                <a:solidFill>
+                  <a:srgbClr val="FFFFFF"/>
+                </a:solidFill>
+                <a:latin typeface="Calibri"/>
+              </a:defRPr>
+            </a:pPr>
+            <a:r>
+              <a:t>•    RETURN p.name, p.title</a:t>
+            </a:r>
+          </a:p>
+          <a:p>
+            <a:pPr algn="l">
+              <a:spcAft>
+                <a:spcPts val="0"/>
+              </a:spcAft>
+              <a:defRPr sz="1200">
+                <a:solidFill>
+                  <a:srgbClr val="FFFFFF"/>
+                </a:solidFill>
+                <a:latin typeface="Calibri"/>
+              </a:defRPr>
+            </a:pPr>
+            <a:r>
+              <a:t>•  </a:t>
+            </a:r>
+          </a:p>
+          <a:p>
+            <a:pPr algn="l">
+              <a:spcAft>
+                <a:spcPts val="0"/>
+              </a:spcAft>
+              <a:defRPr sz="1200">
+                <a:solidFill>
+                  <a:srgbClr val="FFFFFF"/>
+                </a:solidFill>
+                <a:latin typeface="Calibri"/>
+              </a:defRPr>
+            </a:pPr>
+            <a:r>
+              <a:t>•  3. Quante persone per ogni location?</a:t>
+            </a:r>
+          </a:p>
+          <a:p>
+            <a:pPr algn="l">
+              <a:spcAft>
+                <a:spcPts val="0"/>
+              </a:spcAft>
+              <a:defRPr sz="1200">
+                <a:solidFill>
+                  <a:srgbClr val="FFFFFF"/>
+                </a:solidFill>
+                <a:latin typeface="Calibri"/>
+              </a:defRPr>
+            </a:pPr>
+            <a:r>
+              <a:t>•    MATCH (p:Person) RETURN p.location, count(*)</a:t>
+            </a:r>
+          </a:p>
+          <a:p>
+            <a:pPr algn="l">
+              <a:spcAft>
+                <a:spcPts val="0"/>
+              </a:spcAft>
+              <a:defRPr sz="1200">
+                <a:solidFill>
+                  <a:srgbClr val="FFFFFF"/>
+                </a:solidFill>
+                <a:latin typeface="Calibri"/>
+              </a:defRPr>
+            </a:pPr>
+            <a:r>
+              <a:t>•    ORDER BY count(*) DESC</a:t>
+            </a:r>
+          </a:p>
+          <a:p>
+            <a:pPr algn="l">
+              <a:spcAft>
+                <a:spcPts val="0"/>
+              </a:spcAft>
+              <a:defRPr sz="1200">
+                <a:solidFill>
+                  <a:srgbClr val="FFFFFF"/>
+                </a:solidFill>
+                <a:latin typeface="Calibri"/>
+              </a:defRPr>
+            </a:pPr>
+            <a:r>
+              <a:t>•  </a:t>
+            </a:r>
+          </a:p>
+          <a:p>
+            <a:pPr algn="l">
+              <a:spcAft>
+                <a:spcPts val="0"/>
+              </a:spcAft>
+              <a:defRPr sz="1200">
+                <a:solidFill>
+                  <a:srgbClr val="FFFFFF"/>
+                </a:solidFill>
+                <a:latin typeface="Calibri"/>
+              </a:defRPr>
+            </a:pPr>
+            <a:r>
+              <a:t>•  4. Trova tutte le skill di una persona specifica</a:t>
+            </a:r>
+          </a:p>
+          <a:p>
+            <a:pPr algn="l">
+              <a:spcAft>
+                <a:spcPts val="0"/>
+              </a:spcAft>
+              <a:defRPr sz="1200">
+                <a:solidFill>
+                  <a:srgbClr val="FFFFFF"/>
+                </a:solidFill>
+                <a:latin typeface="Calibri"/>
+              </a:defRPr>
+            </a:pPr>
+            <a:r>
+              <a:t>•    MATCH (p:Person {name: 'Mario Rossi'})</a:t>
+            </a:r>
+          </a:p>
+          <a:p>
+            <a:pPr algn="l">
+              <a:spcAft>
+                <a:spcPts val="0"/>
+              </a:spcAft>
+              <a:defRPr sz="1200">
+                <a:solidFill>
+                  <a:srgbClr val="FFFFFF"/>
+                </a:solidFill>
+                <a:latin typeface="Calibri"/>
+              </a:defRPr>
+            </a:pPr>
+            <a:r>
+              <a:t>•    -[:HAS_SKILL]-&gt;(s:Skill) RETURN s.name</a:t>
+            </a:r>
+          </a:p>
+          <a:p>
+            <a:pPr algn="l">
+              <a:spcAft>
+                <a:spcPts val="0"/>
+              </a:spcAft>
+              <a:defRPr sz="1200">
+                <a:solidFill>
+                  <a:srgbClr val="FFFFFF"/>
+                </a:solidFill>
+                <a:latin typeface="Calibri"/>
+              </a:defRPr>
+            </a:pPr>
+            <a:r>
+              <a:t>•  </a:t>
+            </a:r>
+          </a:p>
+          <a:p>
+            <a:pPr algn="l">
+              <a:spcAft>
+                <a:spcPts val="0"/>
+              </a:spcAft>
+              <a:defRPr sz="1200">
+                <a:solidFill>
+                  <a:srgbClr val="FFFFFF"/>
+                </a:solidFill>
+                <a:latin typeface="Calibri"/>
+              </a:defRPr>
+            </a:pPr>
+            <a:r>
+              <a:t>•  5. Persone che hanno Python come skill</a:t>
+            </a:r>
+          </a:p>
+          <a:p>
+            <a:pPr algn="l">
+              <a:spcAft>
+                <a:spcPts val="0"/>
+              </a:spcAft>
+              <a:defRPr sz="1200">
+                <a:solidFill>
+                  <a:srgbClr val="FFFFFF"/>
+                </a:solidFill>
+                <a:latin typeface="Calibri"/>
+              </a:defRPr>
+            </a:pPr>
+            <a:r>
+              <a:t>•    MATCH (p:Person)-[:HAS_SKILL]-&gt;(s:Skill {name: 'Python'})</a:t>
+            </a:r>
+          </a:p>
+          <a:p>
+            <a:pPr algn="l">
+              <a:spcAft>
+                <a:spcPts val="0"/>
+              </a:spcAft>
+              <a:defRPr sz="1200">
+                <a:solidFill>
+                  <a:srgbClr val="FFFFFF"/>
+                </a:solidFill>
+                <a:latin typeface="Calibri"/>
+              </a:defRPr>
+            </a:pPr>
+            <a:r>
+              <a:t>•    RETURN p.name ORDER BY p.name</a:t>
+            </a:r>
+          </a:p>
+        </p:txBody>
+      </p:sp>
+      <p:sp>
+        <p:nvSpPr>
+          <p:cNvPr id="5" name="TextBox 4"/>
+          <p:cNvSpPr txBox="1"/>
+          <p:nvPr/>
+        </p:nvSpPr>
+        <p:spPr>
+          <a:xfrm>
+            <a:off x="5669280" y="1371600"/>
+            <a:ext cx="4846320" cy="4114800"/>
+          </a:xfrm>
+          <a:prstGeom prst="rect">
+            <a:avLst/>
+          </a:prstGeom>
+          <a:noFill/>
+        </p:spPr>
+        <p:txBody>
+          <a:bodyPr wrap="square">
+            <a:spAutoFit/>
+          </a:bodyPr>
+          <a:lstStyle/>
+          <a:p>
+            <a:pPr algn="l">
+              <a:defRPr sz="1100" b="0">
+                <a:solidFill>
+                  <a:srgbClr val="7EC68E"/>
+                </a:solidFill>
+                <a:latin typeface="Consolas"/>
+              </a:defRPr>
+            </a:pPr>
+            <a:r>
+              <a:t>Suggerimenti:</a:t>
             </a:r>
             <a:br/>
             <a:br/>
             <a:r>
-              <a:t>1. Verificare la connessione al DB</a:t>
+              <a:t>Usa il notebook per eseguire le</a:t>
             </a:r>
             <a:br/>
             <a:r>
-              <a:t>2. Filtrare con WHERE =, IN</a:t>
-            </a:r>
-            <a:br/>
-            <a:r>
-              <a:t>3. Raggruppare con count()</a:t>
-            </a:r>
-            <a:br/>
-            <a:r>
-              <a:t>4. Navigare relazioni HAS_SKILL</a:t>
-            </a:r>
-            <a:br/>
-            <a:r>
-              <a:t>5. Filtrare su nodi specifici</a:t>
-            </a:r>
-            <a:br/>
-            <a:r>
-              <a:t>6. Aggregare con ORDER BY + LIMIT</a:t>
-            </a:r>
-            <a:br/>
-            <a:r>
-              <a:t>7. Media su proprietà relazione</a:t>
-            </a:r>
-            <a:br/>
-            <a:r>
-              <a:t>8. Pattern multi-hop con progetto</a:t>
-            </a:r>
-            <a:br/>
-            <a:r>
-              <a:t>   condiviso</a:t>
-            </a:r>
-            <a:br/>
-            <a:r>
-              <a:t>9. Scrivere dati con MERGE</a:t>
+              <a:t>query con driver.execute_query()</a:t>
             </a:r>
             <a:br/>
             <a:br/>
             <a:r>
-              <a:t>Tempo stimato: 20-30 minuti.</a:t>
+              <a:t>Oppure apri Neo4j Browser e incolla</a:t>
             </a:r>
             <a:br/>
             <a:r>
-              <a:t>Le soluzioni complete sono nel</a:t>
+              <a:t>direttamente il Cypher.</a:t>
             </a:r>
             <a:br/>
-            <a:r>
-              <a:t>notebook della Sessione 1.</a:t>
+            <a:br/>
+            <a:r>
+              <a:t>Tutte le proprietà sono in inglese:</a:t>
+            </a:r>
+            <a:br/>
+            <a:r>
+              <a:t>  name, employee_id, location,</a:t>
+            </a:r>
+            <a:br/>
+            <a:r>
+              <a:t>  title, department, gender.</a:t>
+            </a:r>
+            <a:br/>
+            <a:br/>
+            <a:r>
+              <a:t>Skill: HAS_SKILL {proficiency}</a:t>
+            </a:r>
+            <a:br/>
+            <a:r>
+              <a:t>Progetti: WORKED_ON {role}</a:t>
+            </a:r>
+            <a:br/>
+            <a:r>
+              <a:t>Riporti: REPORTS_TO</a:t>
             </a:r>
           </a:p>
         </p:txBody>
@@ -36247,6 +36148,501 @@
               </a:defRPr>
             </a:pPr>
             <a:r>
+              <a:t>Esercizi (2/2)</a:t>
+            </a:r>
+          </a:p>
+        </p:txBody>
+      </p:sp>
+      <p:sp>
+        <p:nvSpPr>
+          <p:cNvPr id="3" name="TextBox 2"/>
+          <p:cNvSpPr txBox="1"/>
+          <p:nvPr/>
+        </p:nvSpPr>
+        <p:spPr>
+          <a:xfrm>
+            <a:off x="731520" y="1097280"/>
+            <a:ext cx="5029200" cy="4572000"/>
+          </a:xfrm>
+          <a:prstGeom prst="rect">
+            <a:avLst/>
+          </a:prstGeom>
+          <a:noFill/>
+        </p:spPr>
+        <p:txBody>
+          <a:bodyPr wrap="square">
+            <a:spAutoFit/>
+          </a:bodyPr>
+          <a:lstStyle/>
+          <a:p>
+            <a:pPr algn="l">
+              <a:spcAft>
+                <a:spcPts val="0"/>
+              </a:spcAft>
+              <a:defRPr sz="1100">
+                <a:solidFill>
+                  <a:srgbClr val="FFFFFF"/>
+                </a:solidFill>
+                <a:latin typeface="Calibri"/>
+              </a:defRPr>
+            </a:pPr>
+            <a:r>
+              <a:t>•  6. Skill più diffuse (top 5)</a:t>
+            </a:r>
+          </a:p>
+          <a:p>
+            <a:pPr algn="l">
+              <a:spcAft>
+                <a:spcPts val="0"/>
+              </a:spcAft>
+              <a:defRPr sz="1100">
+                <a:solidFill>
+                  <a:srgbClr val="FFFFFF"/>
+                </a:solidFill>
+                <a:latin typeface="Calibri"/>
+              </a:defRPr>
+            </a:pPr>
+            <a:r>
+              <a:t>•    MATCH (p:Person)-[:HAS_SKILL]-&gt;(s:Skill)</a:t>
+            </a:r>
+          </a:p>
+          <a:p>
+            <a:pPr algn="l">
+              <a:spcAft>
+                <a:spcPts val="0"/>
+              </a:spcAft>
+              <a:defRPr sz="1100">
+                <a:solidFill>
+                  <a:srgbClr val="FFFFFF"/>
+                </a:solidFill>
+                <a:latin typeface="Calibri"/>
+              </a:defRPr>
+            </a:pPr>
+            <a:r>
+              <a:t>•    RETURN s.name, count(*) AS persone</a:t>
+            </a:r>
+          </a:p>
+          <a:p>
+            <a:pPr algn="l">
+              <a:spcAft>
+                <a:spcPts val="0"/>
+              </a:spcAft>
+              <a:defRPr sz="1100">
+                <a:solidFill>
+                  <a:srgbClr val="FFFFFF"/>
+                </a:solidFill>
+                <a:latin typeface="Calibri"/>
+              </a:defRPr>
+            </a:pPr>
+            <a:r>
+              <a:t>•    ORDER BY persone DESC LIMIT 5</a:t>
+            </a:r>
+          </a:p>
+          <a:p>
+            <a:pPr algn="l">
+              <a:spcAft>
+                <a:spcPts val="0"/>
+              </a:spcAft>
+              <a:defRPr sz="1100">
+                <a:solidFill>
+                  <a:srgbClr val="FFFFFF"/>
+                </a:solidFill>
+                <a:latin typeface="Calibri"/>
+              </a:defRPr>
+            </a:pPr>
+            <a:r>
+              <a:t>•  </a:t>
+            </a:r>
+          </a:p>
+          <a:p>
+            <a:pPr algn="l">
+              <a:spcAft>
+                <a:spcPts val="0"/>
+              </a:spcAft>
+              <a:defRPr sz="1100">
+                <a:solidFill>
+                  <a:srgbClr val="FFFFFF"/>
+                </a:solidFill>
+                <a:latin typeface="Calibri"/>
+              </a:defRPr>
+            </a:pPr>
+            <a:r>
+              <a:t>•  7. Media proficiency per skill</a:t>
+            </a:r>
+          </a:p>
+          <a:p>
+            <a:pPr algn="l">
+              <a:spcAft>
+                <a:spcPts val="0"/>
+              </a:spcAft>
+              <a:defRPr sz="1100">
+                <a:solidFill>
+                  <a:srgbClr val="FFFFFF"/>
+                </a:solidFill>
+                <a:latin typeface="Calibri"/>
+              </a:defRPr>
+            </a:pPr>
+            <a:r>
+              <a:t>•    MATCH (p:Person)-[h:HAS_SKILL]-&gt;(s:Skill)</a:t>
+            </a:r>
+          </a:p>
+          <a:p>
+            <a:pPr algn="l">
+              <a:spcAft>
+                <a:spcPts val="0"/>
+              </a:spcAft>
+              <a:defRPr sz="1100">
+                <a:solidFill>
+                  <a:srgbClr val="FFFFFF"/>
+                </a:solidFill>
+                <a:latin typeface="Calibri"/>
+              </a:defRPr>
+            </a:pPr>
+            <a:r>
+              <a:t>•    RETURN s.name, avg(h.proficiency), count(p)</a:t>
+            </a:r>
+          </a:p>
+          <a:p>
+            <a:pPr algn="l">
+              <a:spcAft>
+                <a:spcPts val="0"/>
+              </a:spcAft>
+              <a:defRPr sz="1100">
+                <a:solidFill>
+                  <a:srgbClr val="FFFFFF"/>
+                </a:solidFill>
+                <a:latin typeface="Calibri"/>
+              </a:defRPr>
+            </a:pPr>
+            <a:r>
+              <a:t>•    ORDER BY avg(h.proficiency) DESC LIMIT 10</a:t>
+            </a:r>
+          </a:p>
+          <a:p>
+            <a:pPr algn="l">
+              <a:spcAft>
+                <a:spcPts val="0"/>
+              </a:spcAft>
+              <a:defRPr sz="1100">
+                <a:solidFill>
+                  <a:srgbClr val="FFFFFF"/>
+                </a:solidFill>
+                <a:latin typeface="Calibri"/>
+              </a:defRPr>
+            </a:pPr>
+            <a:r>
+              <a:t>•  </a:t>
+            </a:r>
+          </a:p>
+          <a:p>
+            <a:pPr algn="l">
+              <a:spcAft>
+                <a:spcPts val="0"/>
+              </a:spcAft>
+              <a:defRPr sz="1100">
+                <a:solidFill>
+                  <a:srgbClr val="FFFFFF"/>
+                </a:solidFill>
+                <a:latin typeface="Calibri"/>
+              </a:defRPr>
+            </a:pPr>
+            <a:r>
+              <a:t>•  8. Persone che condividono un progetto</a:t>
+            </a:r>
+          </a:p>
+          <a:p>
+            <a:pPr algn="l">
+              <a:spcAft>
+                <a:spcPts val="0"/>
+              </a:spcAft>
+              <a:defRPr sz="1100">
+                <a:solidFill>
+                  <a:srgbClr val="FFFFFF"/>
+                </a:solidFill>
+                <a:latin typeface="Calibri"/>
+              </a:defRPr>
+            </a:pPr>
+            <a:r>
+              <a:t>•    MATCH (p1:Person)-[:WORKED_ON]-&gt;(proj:Project)</a:t>
+            </a:r>
+          </a:p>
+          <a:p>
+            <a:pPr algn="l">
+              <a:spcAft>
+                <a:spcPts val="0"/>
+              </a:spcAft>
+              <a:defRPr sz="1100">
+                <a:solidFill>
+                  <a:srgbClr val="FFFFFF"/>
+                </a:solidFill>
+                <a:latin typeface="Calibri"/>
+              </a:defRPr>
+            </a:pPr>
+            <a:r>
+              <a:t>•      &lt;-[:WORKED_ON]-(p2:Person)</a:t>
+            </a:r>
+          </a:p>
+          <a:p>
+            <a:pPr algn="l">
+              <a:spcAft>
+                <a:spcPts val="0"/>
+              </a:spcAft>
+              <a:defRPr sz="1100">
+                <a:solidFill>
+                  <a:srgbClr val="FFFFFF"/>
+                </a:solidFill>
+                <a:latin typeface="Calibri"/>
+              </a:defRPr>
+            </a:pPr>
+            <a:r>
+              <a:t>•    RETURN p1.name, p2.name, proj.name LIMIT 10</a:t>
+            </a:r>
+          </a:p>
+          <a:p>
+            <a:pPr algn="l">
+              <a:spcAft>
+                <a:spcPts val="0"/>
+              </a:spcAft>
+              <a:defRPr sz="1100">
+                <a:solidFill>
+                  <a:srgbClr val="FFFFFF"/>
+                </a:solidFill>
+                <a:latin typeface="Calibri"/>
+              </a:defRPr>
+            </a:pPr>
+            <a:r>
+              <a:t>•  </a:t>
+            </a:r>
+          </a:p>
+          <a:p>
+            <a:pPr algn="l">
+              <a:spcAft>
+                <a:spcPts val="0"/>
+              </a:spcAft>
+              <a:defRPr sz="1100">
+                <a:solidFill>
+                  <a:srgbClr val="FFFFFF"/>
+                </a:solidFill>
+                <a:latin typeface="Calibri"/>
+              </a:defRPr>
+            </a:pPr>
+            <a:r>
+              <a:t>•  9. Crea un nuovo nodo Person e dagli una skill</a:t>
+            </a:r>
+          </a:p>
+          <a:p>
+            <a:pPr algn="l">
+              <a:spcAft>
+                <a:spcPts val="0"/>
+              </a:spcAft>
+              <a:defRPr sz="1100">
+                <a:solidFill>
+                  <a:srgbClr val="FFFFFF"/>
+                </a:solidFill>
+                <a:latin typeface="Calibri"/>
+              </a:defRPr>
+            </a:pPr>
+            <a:r>
+              <a:t>•    MERGE (p:Person {employee_id: 999})</a:t>
+            </a:r>
+          </a:p>
+          <a:p>
+            <a:pPr algn="l">
+              <a:spcAft>
+                <a:spcPts val="0"/>
+              </a:spcAft>
+              <a:defRPr sz="1100">
+                <a:solidFill>
+                  <a:srgbClr val="FFFFFF"/>
+                </a:solidFill>
+                <a:latin typeface="Calibri"/>
+              </a:defRPr>
+            </a:pPr>
+            <a:r>
+              <a:t>•    SET p.name = "Test"</a:t>
+            </a:r>
+          </a:p>
+          <a:p>
+            <a:pPr algn="l">
+              <a:spcAft>
+                <a:spcPts val="0"/>
+              </a:spcAft>
+              <a:defRPr sz="1100">
+                <a:solidFill>
+                  <a:srgbClr val="FFFFFF"/>
+                </a:solidFill>
+                <a:latin typeface="Calibri"/>
+              </a:defRPr>
+            </a:pPr>
+            <a:r>
+              <a:t>•    MATCH (s:Skill {name: 'Python'})</a:t>
+            </a:r>
+          </a:p>
+          <a:p>
+            <a:pPr algn="l">
+              <a:spcAft>
+                <a:spcPts val="0"/>
+              </a:spcAft>
+              <a:defRPr sz="1100">
+                <a:solidFill>
+                  <a:srgbClr val="FFFFFF"/>
+                </a:solidFill>
+                <a:latin typeface="Calibri"/>
+              </a:defRPr>
+            </a:pPr>
+            <a:r>
+              <a:t>•    MERGE (p)-[:HAS_SKILL {proficiency: 3}]-&gt;(s)</a:t>
+            </a:r>
+          </a:p>
+        </p:txBody>
+      </p:sp>
+      <p:sp>
+        <p:nvSpPr>
+          <p:cNvPr id="4" name="TextBox 3"/>
+          <p:cNvSpPr txBox="1"/>
+          <p:nvPr/>
+        </p:nvSpPr>
+        <p:spPr>
+          <a:xfrm>
+            <a:off x="5669280" y="1097280"/>
+            <a:ext cx="4846320" cy="4572000"/>
+          </a:xfrm>
+          <a:prstGeom prst="rect">
+            <a:avLst/>
+          </a:prstGeom>
+          <a:noFill/>
+        </p:spPr>
+        <p:txBody>
+          <a:bodyPr wrap="square">
+            <a:spAutoFit/>
+          </a:bodyPr>
+          <a:lstStyle/>
+          <a:p>
+            <a:pPr algn="l">
+              <a:defRPr sz="1200" b="0">
+                <a:solidFill>
+                  <a:srgbClr val="CCCCCC"/>
+                </a:solidFill>
+                <a:latin typeface="Calibri"/>
+              </a:defRPr>
+            </a:pPr>
+            <a:r>
+              <a:t>Obiettivi degli esercizi:</a:t>
+            </a:r>
+            <a:br/>
+            <a:br/>
+            <a:r>
+              <a:t>1. Verificare la connessione al DB</a:t>
+            </a:r>
+            <a:br/>
+            <a:r>
+              <a:t>2. Filtrare con WHERE =, IN</a:t>
+            </a:r>
+            <a:br/>
+            <a:r>
+              <a:t>3. Raggruppare con count()</a:t>
+            </a:r>
+            <a:br/>
+            <a:r>
+              <a:t>4. Navigare relazioni HAS_SKILL</a:t>
+            </a:r>
+            <a:br/>
+            <a:r>
+              <a:t>5. Filtrare su nodi specifici</a:t>
+            </a:r>
+            <a:br/>
+            <a:r>
+              <a:t>6. Aggregare con ORDER BY + LIMIT</a:t>
+            </a:r>
+            <a:br/>
+            <a:r>
+              <a:t>7. Media su proprietà relazione</a:t>
+            </a:r>
+            <a:br/>
+            <a:r>
+              <a:t>8. Pattern multi-hop con progetto</a:t>
+            </a:r>
+            <a:br/>
+            <a:r>
+              <a:t>   condiviso</a:t>
+            </a:r>
+            <a:br/>
+            <a:r>
+              <a:t>9. Scrivere dati con MERGE</a:t>
+            </a:r>
+            <a:br/>
+            <a:br/>
+            <a:r>
+              <a:t>Tempo stimato: 20-30 minuti.</a:t>
+            </a:r>
+            <a:br/>
+            <a:r>
+              <a:t>Le soluzioni complete sono nel</a:t>
+            </a:r>
+            <a:br/>
+            <a:r>
+              <a:t>notebook della Sessione 1.</a:t>
+            </a:r>
+          </a:p>
+        </p:txBody>
+      </p:sp>
+    </p:spTree>
+  </p:cSld>
+  <p:clrMapOvr>
+    <a:masterClrMapping/>
+  </p:clrMapOvr>
+</p:sld>
+</file>
+
+<file path=ppt/slides/slide26.xml><?xml version="1.0" encoding="utf-8"?>
+<p:sld xmlns:a="http://schemas.openxmlformats.org/drawingml/2006/main" xmlns:p="http://schemas.openxmlformats.org/presentationml/2006/main" xmlns:r="http://schemas.openxmlformats.org/officeDocument/2006/relationships">
+  <p:cSld>
+    <p:bg>
+      <p:bgPr>
+        <a:solidFill>
+          <a:srgbClr val="272936"/>
+        </a:solidFill>
+        <a:effectLst/>
+      </p:bgPr>
+    </p:bg>
+    <p:spTree>
+      <p:nvGrpSpPr>
+        <p:cNvPr id="1" name=""/>
+        <p:cNvGrpSpPr/>
+        <p:nvPr/>
+      </p:nvGrpSpPr>
+      <p:grpSpPr/>
+      <p:sp>
+        <p:nvSpPr>
+          <p:cNvPr id="2" name="TextBox 1"/>
+          <p:cNvSpPr txBox="1"/>
+          <p:nvPr/>
+        </p:nvSpPr>
+        <p:spPr>
+          <a:xfrm>
+            <a:off x="731520" y="320040"/>
+            <a:ext cx="10515600" cy="594360"/>
+          </a:xfrm>
+          <a:prstGeom prst="rect">
+            <a:avLst/>
+          </a:prstGeom>
+          <a:noFill/>
+        </p:spPr>
+        <p:txBody>
+          <a:bodyPr wrap="square">
+            <a:spAutoFit/>
+          </a:bodyPr>
+          <a:lstStyle/>
+          <a:p>
+            <a:pPr algn="l">
+              <a:defRPr sz="3300" b="1">
+                <a:solidFill>
+                  <a:srgbClr val="F0C040"/>
+                </a:solidFill>
+                <a:latin typeface="Calibri"/>
+              </a:defRPr>
+            </a:pPr>
+            <a:r>
               <a:t>Punti Chiave</a:t>
             </a:r>
           </a:p>
@@ -36443,7 +36839,7 @@
 </p:sld>
 </file>
 
-<file path=ppt/slides/slide26.xml><?xml version="1.0" encoding="utf-8"?>
+<file path=ppt/slides/slide27.xml><?xml version="1.0" encoding="utf-8"?>
 <p:sld xmlns:a="http://schemas.openxmlformats.org/drawingml/2006/main" xmlns:p="http://schemas.openxmlformats.org/presentationml/2006/main" xmlns:r="http://schemas.openxmlformats.org/officeDocument/2006/relationships">
   <p:cSld>
     <p:bg>

--- a/slides/session-01/session-01.pptx
+++ b/slides/session-01/session-01.pptx
@@ -26438,7 +26438,7 @@
         <p:spPr>
           <a:xfrm>
             <a:off x="731520" y="960120"/>
-            <a:ext cx="10515600" cy="365760"/>
+            <a:ext cx="10515600" cy="457200"/>
           </a:xfrm>
           <a:prstGeom prst="rect">
             <a:avLst/>
@@ -26473,7 +26473,7 @@
         </p:nvSpPr>
         <p:spPr>
           <a:xfrm>
-            <a:off x="731520" y="1371600"/>
+            <a:off x="731520" y="1417320"/>
             <a:ext cx="5029200" cy="411480"/>
           </a:xfrm>
           <a:prstGeom prst="rect">
@@ -26509,7 +26509,7 @@
         </p:nvSpPr>
         <p:spPr>
           <a:xfrm>
-            <a:off x="731520" y="1783080"/>
+            <a:off x="731520" y="1828800"/>
             <a:ext cx="5029200" cy="1645920"/>
           </a:xfrm>
           <a:prstGeom prst="rect">
@@ -26554,7 +26554,7 @@
         </p:nvSpPr>
         <p:spPr>
           <a:xfrm>
-            <a:off x="841248" y="1856232"/>
+            <a:off x="841248" y="1901952"/>
             <a:ext cx="4809744" cy="1499616"/>
           </a:xfrm>
           <a:prstGeom prst="rect">
@@ -26580,7 +26580,7 @@
               </a:defRPr>
             </a:pPr>
             <a:r>
-              <a:t>// Operatori: =, &lt;&gt;, &lt;, &gt;, &lt;=, &gt;=</a:t>
+              <a:t>// AND / OR con parentesi:</a:t>
             </a:r>
           </a:p>
           <a:p>
@@ -26612,7 +26612,7 @@
               </a:defRPr>
             </a:pPr>
             <a:r>
-              <a:t>WHERE p.location = "Roma"</a:t>
+              <a:t>WHERE (p.location = "Roma"</a:t>
             </a:r>
           </a:p>
           <a:p>
@@ -26628,7 +26628,7 @@
               </a:defRPr>
             </a:pPr>
             <a:r>
-              <a:t>RETURN p.name, p.title;</a:t>
+              <a:t>   OR  p.location = "Milano")</a:t>
             </a:r>
           </a:p>
           <a:p>
@@ -26643,6 +26643,9 @@
                 <a:latin typeface="Consolas"/>
               </a:defRPr>
             </a:pPr>
+            <a:r>
+              <a:t>  AND p.title CONTAINS "Senior"</a:t>
+            </a:r>
           </a:p>
           <a:p>
             <a:pPr>
@@ -26657,7 +26660,7 @@
               </a:defRPr>
             </a:pPr>
             <a:r>
-              <a:t>// Combinazioni AND / OR con parentesi:</a:t>
+              <a:t>RETURN p.name, p.location, p.title;</a:t>
             </a:r>
           </a:p>
           <a:p>
@@ -26672,6 +26675,35 @@
                 <a:latin typeface="Consolas"/>
               </a:defRPr>
             </a:pPr>
+          </a:p>
+          <a:p>
+            <a:pPr>
+              <a:spcAft>
+                <a:spcPts val="100"/>
+              </a:spcAft>
+              <a:defRPr sz="1000">
+                <a:solidFill>
+                  <a:srgbClr val="7EC68E"/>
+                </a:solidFill>
+                <a:latin typeface="Consolas"/>
+              </a:defRPr>
+            </a:pPr>
+            <a:r>
+              <a:t>// IN per liste:</a:t>
+            </a:r>
+          </a:p>
+          <a:p>
+            <a:pPr>
+              <a:spcAft>
+                <a:spcPts val="100"/>
+              </a:spcAft>
+              <a:defRPr sz="1000">
+                <a:solidFill>
+                  <a:srgbClr val="7EC68E"/>
+                </a:solidFill>
+                <a:latin typeface="Consolas"/>
+              </a:defRPr>
+            </a:pPr>
             <a:r>
               <a:t>MATCH (p:Person)</a:t>
             </a:r>
@@ -26689,7 +26721,7 @@
               </a:defRPr>
             </a:pPr>
             <a:r>
-              <a:t>WHERE (p.location = "Roma"</a:t>
+              <a:t>WHERE p.location IN ("Roma", "Milano")</a:t>
             </a:r>
           </a:p>
           <a:p>
@@ -26705,39 +26737,7 @@
               </a:defRPr>
             </a:pPr>
             <a:r>
-              <a:t>   OR  p.location = "Milano")</a:t>
-            </a:r>
-          </a:p>
-          <a:p>
-            <a:pPr>
-              <a:spcAft>
-                <a:spcPts val="100"/>
-              </a:spcAft>
-              <a:defRPr sz="1000">
-                <a:solidFill>
-                  <a:srgbClr val="7EC68E"/>
-                </a:solidFill>
-                <a:latin typeface="Consolas"/>
-              </a:defRPr>
-            </a:pPr>
-            <a:r>
-              <a:t>  AND p.title CONTAINS "Senior"</a:t>
-            </a:r>
-          </a:p>
-          <a:p>
-            <a:pPr>
-              <a:spcAft>
-                <a:spcPts val="100"/>
-              </a:spcAft>
-              <a:defRPr sz="1000">
-                <a:solidFill>
-                  <a:srgbClr val="7EC68E"/>
-                </a:solidFill>
-                <a:latin typeface="Consolas"/>
-              </a:defRPr>
-            </a:pPr>
-            <a:r>
-              <a:t>RETURN p.name, p.location, p.title;</a:t>
+              <a:t>RETURN p.name, p.location;</a:t>
             </a:r>
           </a:p>
         </p:txBody>
@@ -26750,7 +26750,7 @@
         </p:nvSpPr>
         <p:spPr>
           <a:xfrm>
-            <a:off x="5669280" y="1371600"/>
+            <a:off x="5669280" y="1417320"/>
             <a:ext cx="4846320" cy="411480"/>
           </a:xfrm>
           <a:prstGeom prst="rect">
@@ -26773,7 +26773,7 @@
               </a:defRPr>
             </a:pPr>
             <a:r>
-              <a:t>Ricerca testuale e liste</a:t>
+              <a:t>Testo e valori NULL</a:t>
             </a:r>
           </a:p>
         </p:txBody>
@@ -26786,7 +26786,7 @@
         </p:nvSpPr>
         <p:spPr>
           <a:xfrm>
-            <a:off x="5669280" y="1783080"/>
+            <a:off x="5669280" y="1828800"/>
             <a:ext cx="4846320" cy="1645920"/>
           </a:xfrm>
           <a:prstGeom prst="rect">
@@ -26831,7 +26831,7 @@
         </p:nvSpPr>
         <p:spPr>
           <a:xfrm>
-            <a:off x="5779008" y="1856232"/>
+            <a:off x="5779008" y="1901952"/>
             <a:ext cx="4626864" cy="1499616"/>
           </a:xfrm>
           <a:prstGeom prst="rect">
@@ -26857,7 +26857,7 @@
               </a:defRPr>
             </a:pPr>
             <a:r>
-              <a:t>// CONTAINS, STARTS WITH, ENDS WITH</a:t>
+              <a:t>// CONTAINS, STARTS WITH, ENDS WITH:</a:t>
             </a:r>
           </a:p>
           <a:p>
@@ -26905,7 +26905,7 @@
               </a:defRPr>
             </a:pPr>
             <a:r>
-              <a:t>RETURN s.name;  // Python, PySpark</a:t>
+              <a:t>RETURN s.name UNION</a:t>
             </a:r>
           </a:p>
           <a:p>
@@ -26920,6 +26920,9 @@
                 <a:latin typeface="Consolas"/>
               </a:defRPr>
             </a:pPr>
+            <a:r>
+              <a:t>MATCH (s:Skill)</a:t>
+            </a:r>
           </a:p>
           <a:p>
             <a:pPr>
@@ -26934,7 +26937,7 @@
               </a:defRPr>
             </a:pPr>
             <a:r>
-              <a:t>// IN per liste:</a:t>
+              <a:t>WHERE s.name CONTAINS "cloud"</a:t>
             </a:r>
           </a:p>
           <a:p>
@@ -26950,6 +26953,51 @@
               </a:defRPr>
             </a:pPr>
             <a:r>
+              <a:t>RETURN s.name;</a:t>
+            </a:r>
+          </a:p>
+          <a:p>
+            <a:pPr>
+              <a:spcAft>
+                <a:spcPts val="100"/>
+              </a:spcAft>
+              <a:defRPr sz="1000">
+                <a:solidFill>
+                  <a:srgbClr val="7EC68E"/>
+                </a:solidFill>
+                <a:latin typeface="Consolas"/>
+              </a:defRPr>
+            </a:pPr>
+          </a:p>
+          <a:p>
+            <a:pPr>
+              <a:spcAft>
+                <a:spcPts val="100"/>
+              </a:spcAft>
+              <a:defRPr sz="1000">
+                <a:solidFill>
+                  <a:srgbClr val="7EC68E"/>
+                </a:solidFill>
+                <a:latin typeface="Consolas"/>
+              </a:defRPr>
+            </a:pPr>
+            <a:r>
+              <a:t>// IS NULL / IS NOT NULL:</a:t>
+            </a:r>
+          </a:p>
+          <a:p>
+            <a:pPr>
+              <a:spcAft>
+                <a:spcPts val="100"/>
+              </a:spcAft>
+              <a:defRPr sz="1000">
+                <a:solidFill>
+                  <a:srgbClr val="7EC68E"/>
+                </a:solidFill>
+                <a:latin typeface="Consolas"/>
+              </a:defRPr>
+            </a:pPr>
+            <a:r>
               <a:t>MATCH (p:Person)</a:t>
             </a:r>
           </a:p>
@@ -26966,7 +27014,7 @@
               </a:defRPr>
             </a:pPr>
             <a:r>
-              <a:t>WHERE p.location IN ("Roma", "Milano")</a:t>
+              <a:t>WHERE p.location IS NULL</a:t>
             </a:r>
           </a:p>
           <a:p>
@@ -26982,84 +27030,7 @@
               </a:defRPr>
             </a:pPr>
             <a:r>
-              <a:t>RETURN p.name, p.location;</a:t>
-            </a:r>
-          </a:p>
-          <a:p>
-            <a:pPr>
-              <a:spcAft>
-                <a:spcPts val="100"/>
-              </a:spcAft>
-              <a:defRPr sz="1000">
-                <a:solidFill>
-                  <a:srgbClr val="7EC68E"/>
-                </a:solidFill>
-                <a:latin typeface="Consolas"/>
-              </a:defRPr>
-            </a:pPr>
-          </a:p>
-          <a:p>
-            <a:pPr>
-              <a:spcAft>
-                <a:spcPts val="100"/>
-              </a:spcAft>
-              <a:defRPr sz="1000">
-                <a:solidFill>
-                  <a:srgbClr val="7EC68E"/>
-                </a:solidFill>
-                <a:latin typeface="Consolas"/>
-              </a:defRPr>
-            </a:pPr>
-            <a:r>
-              <a:t>// IS NULL / IS NOT NULL:</a:t>
-            </a:r>
-          </a:p>
-          <a:p>
-            <a:pPr>
-              <a:spcAft>
-                <a:spcPts val="100"/>
-              </a:spcAft>
-              <a:defRPr sz="1000">
-                <a:solidFill>
-                  <a:srgbClr val="7EC68E"/>
-                </a:solidFill>
-                <a:latin typeface="Consolas"/>
-              </a:defRPr>
-            </a:pPr>
-            <a:r>
-              <a:t>MATCH (p:Person)</a:t>
-            </a:r>
-          </a:p>
-          <a:p>
-            <a:pPr>
-              <a:spcAft>
-                <a:spcPts val="100"/>
-              </a:spcAft>
-              <a:defRPr sz="1000">
-                <a:solidFill>
-                  <a:srgbClr val="7EC68E"/>
-                </a:solidFill>
-                <a:latin typeface="Consolas"/>
-              </a:defRPr>
-            </a:pPr>
-            <a:r>
-              <a:t>WHERE p.location IS NULL</a:t>
-            </a:r>
-          </a:p>
-          <a:p>
-            <a:pPr>
-              <a:spcAft>
-                <a:spcPts val="100"/>
-              </a:spcAft>
-              <a:defRPr sz="1000">
-                <a:solidFill>
-                  <a:srgbClr val="7EC68E"/>
-                </a:solidFill>
-                <a:latin typeface="Consolas"/>
-              </a:defRPr>
-            </a:pPr>
-            <a:r>
-              <a:t>RETURN p.name;  // location mancante</a:t>
+              <a:t>RETURN p.name;</a:t>
             </a:r>
           </a:p>
         </p:txBody>
@@ -27072,7 +27043,7 @@
         </p:nvSpPr>
         <p:spPr>
           <a:xfrm>
-            <a:off x="731520" y="3749039"/>
+            <a:off x="731520" y="3840480"/>
             <a:ext cx="10698480" cy="36576"/>
           </a:xfrm>
           <a:prstGeom prst="rect">
@@ -27115,7 +27086,7 @@
         </p:nvSpPr>
         <p:spPr>
           <a:xfrm>
-            <a:off x="731520" y="3931920"/>
+            <a:off x="731520" y="4023360"/>
             <a:ext cx="10515600" cy="365760"/>
           </a:xfrm>
           <a:prstGeom prst="rect">
@@ -27151,8 +27122,8 @@
         </p:nvSpPr>
         <p:spPr>
           <a:xfrm>
-            <a:off x="731520" y="4343400"/>
-            <a:ext cx="5029200" cy="1554480"/>
+            <a:off x="731520" y="4434840"/>
+            <a:ext cx="10515600" cy="1645920"/>
           </a:xfrm>
           <a:prstGeom prst="rect">
             <a:avLst/>
@@ -27196,8 +27167,8 @@
         </p:nvSpPr>
         <p:spPr>
           <a:xfrm>
-            <a:off x="841248" y="4416552"/>
-            <a:ext cx="4809744" cy="1408176"/>
+            <a:off x="841248" y="4507992"/>
+            <a:ext cx="10296144" cy="1499616"/>
           </a:xfrm>
           <a:prstGeom prst="rect">
             <a:avLst/>
@@ -27222,7 +27193,7 @@
               </a:defRPr>
             </a:pPr>
             <a:r>
-              <a:t>// ORDER BY (ASC default, DESC esplicito)</a:t>
+              <a:t>MATCH (p:Person)</a:t>
             </a:r>
           </a:p>
           <a:p>
@@ -27238,7 +27209,7 @@
               </a:defRPr>
             </a:pPr>
             <a:r>
-              <a:t>MATCH (p:Person)</a:t>
+              <a:t>RETURN p.name, p.location AS nome, p.title AS ruolo</a:t>
             </a:r>
           </a:p>
           <a:p>
@@ -27254,7 +27225,7 @@
               </a:defRPr>
             </a:pPr>
             <a:r>
-              <a:t>RETURN p.name, p.title</a:t>
+              <a:t>ORDER BY nome ASC</a:t>
             </a:r>
           </a:p>
           <a:p>
@@ -27270,7 +27241,7 @@
               </a:defRPr>
             </a:pPr>
             <a:r>
-              <a:t>ORDER BY p.name ASC, p.title DESC;</a:t>
+              <a:t>SKIP 10 LIMIT 10;  // pagina 2</a:t>
             </a:r>
           </a:p>
           <a:p>
@@ -27299,7 +27270,7 @@
               </a:defRPr>
             </a:pPr>
             <a:r>
-              <a:t>// LIMIT + SKIP per paginazione:</a:t>
+              <a:t>MATCH (p:Person)-[:WORKED_ON]-&gt;(proj:Project)</a:t>
             </a:r>
           </a:p>
           <a:p>
@@ -27315,7 +27286,7 @@
               </a:defRPr>
             </a:pPr>
             <a:r>
-              <a:t>MATCH (p:Person)</a:t>
+              <a:t>RETURN DISTINCT p.location AS sedi</a:t>
             </a:r>
           </a:p>
           <a:p>
@@ -27331,280 +27302,7 @@
               </a:defRPr>
             </a:pPr>
             <a:r>
-              <a:t>RETURN p.name</a:t>
-            </a:r>
-          </a:p>
-          <a:p>
-            <a:pPr>
-              <a:spcAft>
-                <a:spcPts val="100"/>
-              </a:spcAft>
-              <a:defRPr sz="1000">
-                <a:solidFill>
-                  <a:srgbClr val="7EC68E"/>
-                </a:solidFill>
-                <a:latin typeface="Consolas"/>
-              </a:defRPr>
-            </a:pPr>
-            <a:r>
-              <a:t>ORDER BY p.name</a:t>
-            </a:r>
-          </a:p>
-          <a:p>
-            <a:pPr>
-              <a:spcAft>
-                <a:spcPts val="100"/>
-              </a:spcAft>
-              <a:defRPr sz="1000">
-                <a:solidFill>
-                  <a:srgbClr val="7EC68E"/>
-                </a:solidFill>
-                <a:latin typeface="Consolas"/>
-              </a:defRPr>
-            </a:pPr>
-            <a:r>
-              <a:t>SKIP 10 LIMIT 10;  // pagina 2</a:t>
-            </a:r>
-          </a:p>
-        </p:txBody>
-      </p:sp>
-      <p:sp>
-        <p:nvSpPr>
-          <p:cNvPr id="14" name="Rectangle 13"/>
-          <p:cNvSpPr/>
-          <p:nvPr/>
-        </p:nvSpPr>
-        <p:spPr>
-          <a:xfrm>
-            <a:off x="5669280" y="4343400"/>
-            <a:ext cx="4846320" cy="1828800"/>
-          </a:xfrm>
-          <a:prstGeom prst="rect">
-            <a:avLst/>
-          </a:prstGeom>
-          <a:solidFill>
-            <a:srgbClr val="1B2A4A"/>
-          </a:solidFill>
-          <a:ln w="12700">
-            <a:solidFill>
-              <a:srgbClr val="2D4F7A"/>
-            </a:solidFill>
-          </a:ln>
-        </p:spPr>
-        <p:style>
-          <a:lnRef idx="1">
-            <a:schemeClr val="accent1"/>
-          </a:lnRef>
-          <a:fillRef idx="3">
-            <a:schemeClr val="accent1"/>
-          </a:fillRef>
-          <a:effectRef idx="2">
-            <a:schemeClr val="accent1"/>
-          </a:effectRef>
-          <a:fontRef idx="minor">
-            <a:schemeClr val="lt1"/>
-          </a:fontRef>
-        </p:style>
-        <p:txBody>
-          <a:bodyPr rtlCol="0" anchor="ctr"/>
-          <a:lstStyle/>
-          <a:p>
-            <a:pPr algn="ctr"/>
-          </a:p>
-        </p:txBody>
-      </p:sp>
-      <p:sp>
-        <p:nvSpPr>
-          <p:cNvPr id="15" name="TextBox 14"/>
-          <p:cNvSpPr txBox="1"/>
-          <p:nvPr/>
-        </p:nvSpPr>
-        <p:spPr>
-          <a:xfrm>
-            <a:off x="5779008" y="4416552"/>
-            <a:ext cx="4626864" cy="1682496"/>
-          </a:xfrm>
-          <a:prstGeom prst="rect">
-            <a:avLst/>
-          </a:prstGeom>
-          <a:noFill/>
-        </p:spPr>
-        <p:txBody>
-          <a:bodyPr wrap="square">
-            <a:spAutoFit/>
-          </a:bodyPr>
-          <a:lstStyle/>
-          <a:p>
-            <a:pPr>
-              <a:spcAft>
-                <a:spcPts val="100"/>
-              </a:spcAft>
-              <a:defRPr sz="1000">
-                <a:solidFill>
-                  <a:srgbClr val="7EC68E"/>
-                </a:solidFill>
-                <a:latin typeface="Consolas"/>
-              </a:defRPr>
-            </a:pPr>
-            <a:r>
-              <a:t>// DISTINCT per rimuovere duplicati:</a:t>
-            </a:r>
-          </a:p>
-          <a:p>
-            <a:pPr>
-              <a:spcAft>
-                <a:spcPts val="100"/>
-              </a:spcAft>
-              <a:defRPr sz="1000">
-                <a:solidFill>
-                  <a:srgbClr val="7EC68E"/>
-                </a:solidFill>
-                <a:latin typeface="Consolas"/>
-              </a:defRPr>
-            </a:pPr>
-            <a:r>
-              <a:t>MATCH (p:Person)-[:WORKED_ON]-&gt;(proj:Project)</a:t>
-            </a:r>
-          </a:p>
-          <a:p>
-            <a:pPr>
-              <a:spcAft>
-                <a:spcPts val="100"/>
-              </a:spcAft>
-              <a:defRPr sz="1000">
-                <a:solidFill>
-                  <a:srgbClr val="7EC68E"/>
-                </a:solidFill>
-                <a:latin typeface="Consolas"/>
-              </a:defRPr>
-            </a:pPr>
-            <a:r>
-              <a:t>RETURN DISTINCT p.location AS sedi</a:t>
-            </a:r>
-          </a:p>
-          <a:p>
-            <a:pPr>
-              <a:spcAft>
-                <a:spcPts val="100"/>
-              </a:spcAft>
-              <a:defRPr sz="1000">
-                <a:solidFill>
-                  <a:srgbClr val="7EC68E"/>
-                </a:solidFill>
-                <a:latin typeface="Consolas"/>
-              </a:defRPr>
-            </a:pPr>
-            <a:r>
               <a:t>ORDER BY sedi;</a:t>
-            </a:r>
-          </a:p>
-          <a:p>
-            <a:pPr>
-              <a:spcAft>
-                <a:spcPts val="100"/>
-              </a:spcAft>
-              <a:defRPr sz="1000">
-                <a:solidFill>
-                  <a:srgbClr val="7EC68E"/>
-                </a:solidFill>
-                <a:latin typeface="Consolas"/>
-              </a:defRPr>
-            </a:pPr>
-          </a:p>
-          <a:p>
-            <a:pPr>
-              <a:spcAft>
-                <a:spcPts val="100"/>
-              </a:spcAft>
-              <a:defRPr sz="1000">
-                <a:solidFill>
-                  <a:srgbClr val="7EC68E"/>
-                </a:solidFill>
-                <a:latin typeface="Consolas"/>
-              </a:defRPr>
-            </a:pPr>
-            <a:r>
-              <a:t>// AS per rinominare colonne:</a:t>
-            </a:r>
-          </a:p>
-          <a:p>
-            <a:pPr>
-              <a:spcAft>
-                <a:spcPts val="100"/>
-              </a:spcAft>
-              <a:defRPr sz="1000">
-                <a:solidFill>
-                  <a:srgbClr val="7EC68E"/>
-                </a:solidFill>
-                <a:latin typeface="Consolas"/>
-              </a:defRPr>
-            </a:pPr>
-            <a:r>
-              <a:t>MATCH (p:Person)</a:t>
-            </a:r>
-          </a:p>
-          <a:p>
-            <a:pPr>
-              <a:spcAft>
-                <a:spcPts val="100"/>
-              </a:spcAft>
-              <a:defRPr sz="1000">
-                <a:solidFill>
-                  <a:srgbClr val="7EC68E"/>
-                </a:solidFill>
-                <a:latin typeface="Consolas"/>
-              </a:defRPr>
-            </a:pPr>
-            <a:r>
-              <a:t>RETURN p.name AS nome,</a:t>
-            </a:r>
-          </a:p>
-          <a:p>
-            <a:pPr>
-              <a:spcAft>
-                <a:spcPts val="100"/>
-              </a:spcAft>
-              <a:defRPr sz="1000">
-                <a:solidFill>
-                  <a:srgbClr val="7EC68E"/>
-                </a:solidFill>
-                <a:latin typeface="Consolas"/>
-              </a:defRPr>
-            </a:pPr>
-            <a:r>
-              <a:t>       p.title AS ruolo,</a:t>
-            </a:r>
-          </a:p>
-          <a:p>
-            <a:pPr>
-              <a:spcAft>
-                <a:spcPts val="100"/>
-              </a:spcAft>
-              <a:defRPr sz="1000">
-                <a:solidFill>
-                  <a:srgbClr val="7EC68E"/>
-                </a:solidFill>
-                <a:latin typeface="Consolas"/>
-              </a:defRPr>
-            </a:pPr>
-            <a:r>
-              <a:t>       p.location AS sede</a:t>
-            </a:r>
-          </a:p>
-          <a:p>
-            <a:pPr>
-              <a:spcAft>
-                <a:spcPts val="100"/>
-              </a:spcAft>
-              <a:defRPr sz="1000">
-                <a:solidFill>
-                  <a:srgbClr val="7EC68E"/>
-                </a:solidFill>
-                <a:latin typeface="Consolas"/>
-              </a:defRPr>
-            </a:pPr>
-            <a:r>
-              <a:t>ORDER BY nome;</a:t>
             </a:r>
           </a:p>
         </p:txBody>
@@ -29076,7 +28774,7 @@
               </a:defRPr>
             </a:pPr>
             <a:r>
-              <a:t>•    Crea automaticamente un indice RANGE</a:t>
+              <a:t>  Crea automaticamente un indice RANGE</a:t>
             </a:r>
           </a:p>
           <a:p>
@@ -29092,7 +28790,7 @@
               </a:defRPr>
             </a:pPr>
             <a:r>
-              <a:t>•    Rilevante per MERGE: senza constraint, MERGE concorrente può duplicare</a:t>
+              <a:t>  Rilevante per MERGE: senza constraint, MERGE concorrente può duplicare</a:t>
             </a:r>
           </a:p>
           <a:p>
@@ -30625,7 +30323,7 @@
               </a:defRPr>
             </a:pPr>
             <a:r>
-              <a:t>// Poi filtra una per una in memoria</a:t>
+              <a:t>//  Poi filtra una per una in memoria</a:t>
             </a:r>
           </a:p>
           <a:p>
@@ -30671,22 +30369,6 @@
             </a:pPr>
             <a:r>
               <a:t>// dbHits: ~3 (indice + recupero nodo)</a:t>
-            </a:r>
-          </a:p>
-          <a:p>
-            <a:pPr>
-              <a:spcAft>
-                <a:spcPts val="100"/>
-              </a:spcAft>
-              <a:defRPr sz="1000">
-                <a:solidFill>
-                  <a:srgbClr val="7EC68E"/>
-                </a:solidFill>
-                <a:latin typeface="Consolas"/>
-              </a:defRPr>
-            </a:pPr>
-            <a:r>
-              <a:t>// Solo i nodi corrispondenti</a:t>
             </a:r>
           </a:p>
           <a:p>
@@ -30884,7 +30566,7 @@
               </a:defRPr>
             </a:pPr>
             <a:r>
-              <a:t>•    Costo: latenza di rete N volte + N transazioni</a:t>
+              <a:t>  Costo: latenza di rete N volte + N transazioni</a:t>
             </a:r>
           </a:p>
           <a:p>
@@ -30916,7 +30598,7 @@
               </a:defRPr>
             </a:pPr>
             <a:r>
-              <a:t>•    Costo: 1 chiamata + 1 transazione + ciclo nel database</a:t>
+              <a:t>  Costo: 1 chiamata + 1 transazione + ciclo nel database</a:t>
             </a:r>
           </a:p>
           <a:p>
@@ -31520,7 +31202,7 @@
               </a:defRPr>
             </a:pPr>
             <a:r>
-              <a:t>•    • :play movie-graph per tutorial interattivo</a:t>
+              <a:t>  • :play movie-graph per tutorial interattivo</a:t>
             </a:r>
           </a:p>
           <a:p>
@@ -31536,7 +31218,7 @@
               </a:defRPr>
             </a:pPr>
             <a:r>
-              <a:t>•    • Visualizzazione grafica a cerchi e frecce</a:t>
+              <a:t>  • Visualizzazione grafica a cerchi e frecce</a:t>
             </a:r>
           </a:p>
           <a:p>
@@ -31552,7 +31234,7 @@
               </a:defRPr>
             </a:pPr>
             <a:r>
-              <a:t>•    • Esportazione PNG, CSV, JSON</a:t>
+              <a:t>  • Esportazione PNG, CSV, JSON</a:t>
             </a:r>
           </a:p>
           <a:p>
@@ -31584,7 +31266,7 @@
               </a:defRPr>
             </a:pPr>
             <a:r>
-              <a:t>•    • Ricerca in linguaggio naturale</a:t>
+              <a:t>  • Ricerca in linguaggio naturale</a:t>
             </a:r>
           </a:p>
           <a:p>
@@ -31600,7 +31282,7 @@
               </a:defRPr>
             </a:pPr>
             <a:r>
-              <a:t>•    • Grafi animati, filtri visuali</a:t>
+              <a:t>  • Grafi animati, filtri visuali</a:t>
             </a:r>
           </a:p>
           <a:p>
@@ -33518,7 +33200,7 @@
               </a:defRPr>
             </a:pPr>
             <a:r>
-              <a:t>•    • HAS_SKILL {proficiency: 1-5}</a:t>
+              <a:t>  • HAS_SKILL {proficiency: 1-5}</a:t>
             </a:r>
           </a:p>
           <a:p>
@@ -33534,7 +33216,7 @@
               </a:defRPr>
             </a:pPr>
             <a:r>
-              <a:t>•    • WORKED_ON {role: Developer/Architect/etc.}</a:t>
+              <a:t>  • WORKED_ON {role: Developer/Architect/etc.}</a:t>
             </a:r>
           </a:p>
           <a:p>
@@ -33550,7 +33232,7 @@
               </a:defRPr>
             </a:pPr>
             <a:r>
-              <a:t>•    • REPORTS_TO (Person → Supervisor)</a:t>
+              <a:t>  • REPORTS_TO (Person → Supervisor)</a:t>
             </a:r>
           </a:p>
           <a:p>
@@ -33849,7 +33531,7 @@
         <p:spPr>
           <a:xfrm>
             <a:off x="731520" y="1371600"/>
-            <a:ext cx="3200400" cy="365760"/>
+            <a:ext cx="5029200" cy="365760"/>
           </a:xfrm>
           <a:prstGeom prst="rect">
             <a:avLst/>
@@ -33885,7 +33567,7 @@
         <p:spPr>
           <a:xfrm>
             <a:off x="731520" y="1783080"/>
-            <a:ext cx="2286000" cy="1097280"/>
+            <a:ext cx="5029200" cy="731520"/>
           </a:xfrm>
           <a:prstGeom prst="rect">
             <a:avLst/>
@@ -33899,130 +33581,15 @@
           <a:lstStyle/>
           <a:p>
             <a:pPr algn="l">
-              <a:spcAft>
-                <a:spcPts val="0"/>
-              </a:spcAft>
-              <a:defRPr sz="1000">
+              <a:defRPr sz="1100" b="0">
                 <a:solidFill>
                   <a:srgbClr val="7EC68E"/>
                 </a:solidFill>
-                <a:latin typeface="Calibri"/>
-              </a:defRPr>
-            </a:pPr>
-            <a:r>
-              <a:t>•  employee_id</a:t>
-            </a:r>
-          </a:p>
-          <a:p>
-            <a:pPr algn="l">
-              <a:spcAft>
-                <a:spcPts val="0"/>
-              </a:spcAft>
-              <a:defRPr sz="1000">
-                <a:solidFill>
-                  <a:srgbClr val="7EC68E"/>
-                </a:solidFill>
-                <a:latin typeface="Calibri"/>
-              </a:defRPr>
-            </a:pPr>
-            <a:r>
-              <a:t>•  name</a:t>
-            </a:r>
-          </a:p>
-          <a:p>
-            <a:pPr algn="l">
-              <a:spcAft>
-                <a:spcPts val="0"/>
-              </a:spcAft>
-              <a:defRPr sz="1000">
-                <a:solidFill>
-                  <a:srgbClr val="7EC68E"/>
-                </a:solidFill>
-                <a:latin typeface="Calibri"/>
-              </a:defRPr>
-            </a:pPr>
-            <a:r>
-              <a:t>•  gender</a:t>
-            </a:r>
-          </a:p>
-          <a:p>
-            <a:pPr algn="l">
-              <a:spcAft>
-                <a:spcPts val="0"/>
-              </a:spcAft>
-              <a:defRPr sz="1000">
-                <a:solidFill>
-                  <a:srgbClr val="7EC68E"/>
-                </a:solidFill>
-                <a:latin typeface="Calibri"/>
-              </a:defRPr>
-            </a:pPr>
-            <a:r>
-              <a:t>•  discipline</a:t>
-            </a:r>
-          </a:p>
-          <a:p>
-            <a:pPr algn="l">
-              <a:spcAft>
-                <a:spcPts val="0"/>
-              </a:spcAft>
-              <a:defRPr sz="1000">
-                <a:solidFill>
-                  <a:srgbClr val="7EC68E"/>
-                </a:solidFill>
-                <a:latin typeface="Calibri"/>
-              </a:defRPr>
-            </a:pPr>
-            <a:r>
-              <a:t>•  department</a:t>
-            </a:r>
-          </a:p>
-          <a:p>
-            <a:pPr algn="l">
-              <a:spcAft>
-                <a:spcPts val="0"/>
-              </a:spcAft>
-              <a:defRPr sz="1000">
-                <a:solidFill>
-                  <a:srgbClr val="7EC68E"/>
-                </a:solidFill>
-                <a:latin typeface="Calibri"/>
-              </a:defRPr>
-            </a:pPr>
-            <a:r>
-              <a:t>•  code</a:t>
-            </a:r>
-          </a:p>
-          <a:p>
-            <a:pPr algn="l">
-              <a:spcAft>
-                <a:spcPts val="0"/>
-              </a:spcAft>
-              <a:defRPr sz="1000">
-                <a:solidFill>
-                  <a:srgbClr val="7EC68E"/>
-                </a:solidFill>
-                <a:latin typeface="Calibri"/>
-              </a:defRPr>
-            </a:pPr>
-            <a:r>
-              <a:t>•  location</a:t>
-            </a:r>
-          </a:p>
-          <a:p>
-            <a:pPr algn="l">
-              <a:spcAft>
-                <a:spcPts val="0"/>
-              </a:spcAft>
-              <a:defRPr sz="1000">
-                <a:solidFill>
-                  <a:srgbClr val="7EC68E"/>
-                </a:solidFill>
-                <a:latin typeface="Calibri"/>
-              </a:defRPr>
-            </a:pPr>
-            <a:r>
-              <a:t>•  title</a:t>
+                <a:latin typeface="Consolas"/>
+              </a:defRPr>
+            </a:pPr>
+            <a:r>
+              <a:t>employee_id  name  gender  discipline</a:t>
             </a:r>
           </a:p>
         </p:txBody>
@@ -34035,8 +33602,8 @@
         </p:nvSpPr>
         <p:spPr>
           <a:xfrm>
-            <a:off x="3840480" y="1371600"/>
-            <a:ext cx="3200400" cy="365760"/>
+            <a:off x="731520" y="2103120"/>
+            <a:ext cx="5029200" cy="731520"/>
           </a:xfrm>
           <a:prstGeom prst="rect">
             <a:avLst/>
@@ -34050,15 +33617,15 @@
           <a:lstStyle/>
           <a:p>
             <a:pPr algn="l">
-              <a:defRPr sz="1600" b="1">
-                <a:solidFill>
-                  <a:srgbClr val="F08040"/>
-                </a:solidFill>
-                <a:latin typeface="Calibri"/>
-              </a:defRPr>
-            </a:pPr>
-            <a:r>
-              <a:t>(:Skill)</a:t>
+              <a:defRPr sz="1100" b="0">
+                <a:solidFill>
+                  <a:srgbClr val="7EC68E"/>
+                </a:solidFill>
+                <a:latin typeface="Consolas"/>
+              </a:defRPr>
+            </a:pPr>
+            <a:r>
+              <a:t>department  code  location  title       </a:t>
             </a:r>
           </a:p>
         </p:txBody>
@@ -34071,8 +33638,8 @@
         </p:nvSpPr>
         <p:spPr>
           <a:xfrm>
-            <a:off x="3840480" y="1783080"/>
-            <a:ext cx="2286000" cy="1097280"/>
+            <a:off x="5669280" y="1371600"/>
+            <a:ext cx="5029200" cy="365760"/>
           </a:xfrm>
           <a:prstGeom prst="rect">
             <a:avLst/>
@@ -34086,34 +33653,15 @@
           <a:lstStyle/>
           <a:p>
             <a:pPr algn="l">
-              <a:spcAft>
-                <a:spcPts val="0"/>
-              </a:spcAft>
-              <a:defRPr sz="1000">
-                <a:solidFill>
-                  <a:srgbClr val="7EC68E"/>
+              <a:defRPr sz="1600" b="1">
+                <a:solidFill>
+                  <a:srgbClr val="F08040"/>
                 </a:solidFill>
                 <a:latin typeface="Calibri"/>
               </a:defRPr>
             </a:pPr>
             <a:r>
-              <a:t>•  name</a:t>
-            </a:r>
-          </a:p>
-          <a:p>
-            <a:pPr algn="l">
-              <a:spcAft>
-                <a:spcPts val="0"/>
-              </a:spcAft>
-              <a:defRPr sz="1000">
-                <a:solidFill>
-                  <a:srgbClr val="7EC68E"/>
-                </a:solidFill>
-                <a:latin typeface="Calibri"/>
-              </a:defRPr>
-            </a:pPr>
-            <a:r>
-              <a:t>•  </a:t>
+              <a:t>(:Skill)  e  (:Project)  e  (:Supervisor)</a:t>
             </a:r>
           </a:p>
         </p:txBody>
@@ -34126,8 +33674,8 @@
         </p:nvSpPr>
         <p:spPr>
           <a:xfrm>
-            <a:off x="5943600" y="1371600"/>
-            <a:ext cx="3200400" cy="365760"/>
+            <a:off x="5669280" y="1783080"/>
+            <a:ext cx="5029200" cy="731520"/>
           </a:xfrm>
           <a:prstGeom prst="rect">
             <a:avLst/>
@@ -34141,15 +33689,15 @@
           <a:lstStyle/>
           <a:p>
             <a:pPr algn="l">
-              <a:defRPr sz="1600" b="1">
-                <a:solidFill>
-                  <a:srgbClr val="F08040"/>
-                </a:solidFill>
-                <a:latin typeface="Calibri"/>
-              </a:defRPr>
-            </a:pPr>
-            <a:r>
-              <a:t>(:Project)</a:t>
+              <a:defRPr sz="1100" b="0">
+                <a:solidFill>
+                  <a:srgbClr val="7EC68E"/>
+                </a:solidFill>
+                <a:latin typeface="Consolas"/>
+              </a:defRPr>
+            </a:pPr>
+            <a:r>
+              <a:t>Skill: name</a:t>
             </a:r>
           </a:p>
         </p:txBody>
@@ -34162,8 +33710,8 @@
         </p:nvSpPr>
         <p:spPr>
           <a:xfrm>
-            <a:off x="5943600" y="1783080"/>
-            <a:ext cx="2286000" cy="1097280"/>
+            <a:off x="5669280" y="2103120"/>
+            <a:ext cx="5029200" cy="731520"/>
           </a:xfrm>
           <a:prstGeom prst="rect">
             <a:avLst/>
@@ -34177,34 +33725,15 @@
           <a:lstStyle/>
           <a:p>
             <a:pPr algn="l">
-              <a:spcAft>
-                <a:spcPts val="0"/>
-              </a:spcAft>
-              <a:defRPr sz="1000">
+              <a:defRPr sz="1100" b="0">
                 <a:solidFill>
                   <a:srgbClr val="7EC68E"/>
                 </a:solidFill>
-                <a:latin typeface="Calibri"/>
-              </a:defRPr>
-            </a:pPr>
-            <a:r>
-              <a:t>•  project_id</a:t>
-            </a:r>
-          </a:p>
-          <a:p>
-            <a:pPr algn="l">
-              <a:spcAft>
-                <a:spcPts val="0"/>
-              </a:spcAft>
-              <a:defRPr sz="1000">
-                <a:solidFill>
-                  <a:srgbClr val="7EC68E"/>
-                </a:solidFill>
-                <a:latin typeface="Calibri"/>
-              </a:defRPr>
-            </a:pPr>
-            <a:r>
-              <a:t>•  name</a:t>
+                <a:latin typeface="Consolas"/>
+              </a:defRPr>
+            </a:pPr>
+            <a:r>
+              <a:t>Project: project_id, name</a:t>
             </a:r>
           </a:p>
         </p:txBody>
@@ -34217,8 +33746,8 @@
         </p:nvSpPr>
         <p:spPr>
           <a:xfrm>
-            <a:off x="7772400" y="1371600"/>
-            <a:ext cx="3200400" cy="365760"/>
+            <a:off x="5669280" y="2423160"/>
+            <a:ext cx="5029200" cy="731520"/>
           </a:xfrm>
           <a:prstGeom prst="rect">
             <a:avLst/>
@@ -34232,77 +33761,22 @@
           <a:lstStyle/>
           <a:p>
             <a:pPr algn="l">
-              <a:defRPr sz="1600" b="1">
-                <a:solidFill>
-                  <a:srgbClr val="F08040"/>
-                </a:solidFill>
-                <a:latin typeface="Calibri"/>
-              </a:defRPr>
-            </a:pPr>
-            <a:r>
-              <a:t>(:Supervisor)</a:t>
+              <a:defRPr sz="1100" b="0">
+                <a:solidFill>
+                  <a:srgbClr val="7EC68E"/>
+                </a:solidFill>
+                <a:latin typeface="Consolas"/>
+              </a:defRPr>
+            </a:pPr>
+            <a:r>
+              <a:t>Supervisor: supervisor_id, name</a:t>
             </a:r>
           </a:p>
         </p:txBody>
       </p:sp>
       <p:sp>
         <p:nvSpPr>
-          <p:cNvPr id="11" name="TextBox 10"/>
-          <p:cNvSpPr txBox="1"/>
-          <p:nvPr/>
-        </p:nvSpPr>
-        <p:spPr>
-          <a:xfrm>
-            <a:off x="7772400" y="1783080"/>
-            <a:ext cx="2286000" cy="1097280"/>
-          </a:xfrm>
-          <a:prstGeom prst="rect">
-            <a:avLst/>
-          </a:prstGeom>
-          <a:noFill/>
-        </p:spPr>
-        <p:txBody>
-          <a:bodyPr wrap="square">
-            <a:spAutoFit/>
-          </a:bodyPr>
-          <a:lstStyle/>
-          <a:p>
-            <a:pPr algn="l">
-              <a:spcAft>
-                <a:spcPts val="0"/>
-              </a:spcAft>
-              <a:defRPr sz="1000">
-                <a:solidFill>
-                  <a:srgbClr val="7EC68E"/>
-                </a:solidFill>
-                <a:latin typeface="Calibri"/>
-              </a:defRPr>
-            </a:pPr>
-            <a:r>
-              <a:t>•  supervisor_id</a:t>
-            </a:r>
-          </a:p>
-          <a:p>
-            <a:pPr algn="l">
-              <a:spcAft>
-                <a:spcPts val="0"/>
-              </a:spcAft>
-              <a:defRPr sz="1000">
-                <a:solidFill>
-                  <a:srgbClr val="7EC68E"/>
-                </a:solidFill>
-                <a:latin typeface="Calibri"/>
-              </a:defRPr>
-            </a:pPr>
-            <a:r>
-              <a:t>•  name</a:t>
-            </a:r>
-          </a:p>
-        </p:txBody>
-      </p:sp>
-      <p:sp>
-        <p:nvSpPr>
-          <p:cNvPr id="12" name="Rectangle 11"/>
+          <p:cNvPr id="11" name="Rectangle 10"/>
           <p:cNvSpPr/>
           <p:nvPr/>
         </p:nvSpPr>
@@ -34345,7 +33819,7 @@
       </p:sp>
       <p:sp>
         <p:nvSpPr>
-          <p:cNvPr id="13" name="TextBox 12"/>
+          <p:cNvPr id="12" name="TextBox 11"/>
           <p:cNvSpPr txBox="1"/>
           <p:nvPr/>
         </p:nvSpPr>
@@ -34381,7 +33855,7 @@
       </p:sp>
       <p:sp>
         <p:nvSpPr>
-          <p:cNvPr id="14" name="Rectangle 13"/>
+          <p:cNvPr id="13" name="Rectangle 12"/>
           <p:cNvSpPr/>
           <p:nvPr/>
         </p:nvSpPr>
@@ -34426,7 +33900,7 @@
       </p:sp>
       <p:sp>
         <p:nvSpPr>
-          <p:cNvPr id="15" name="TextBox 14"/>
+          <p:cNvPr id="14" name="TextBox 13"/>
           <p:cNvSpPr txBox="1"/>
           <p:nvPr/>
         </p:nvSpPr>
@@ -34571,14 +34045,14 @@
       </p:sp>
       <p:sp>
         <p:nvSpPr>
-          <p:cNvPr id="16" name="TextBox 15"/>
+          <p:cNvPr id="15" name="TextBox 14"/>
           <p:cNvSpPr txBox="1"/>
           <p:nvPr/>
         </p:nvSpPr>
         <p:spPr>
           <a:xfrm>
             <a:off x="731520" y="5760720"/>
-            <a:ext cx="5029200" cy="365760"/>
+            <a:ext cx="10515600" cy="365760"/>
           </a:xfrm>
           <a:prstGeom prst="rect">
             <a:avLst/>
@@ -34592,7 +34066,7 @@
           <a:lstStyle/>
           <a:p>
             <a:pPr algn="l">
-              <a:defRPr sz="1200" b="0">
+              <a:defRPr sz="1100" b="0">
                 <a:solidFill>
                   <a:srgbClr val="CCCCCC"/>
                 </a:solidFill>
@@ -34600,43 +34074,7 @@
               </a:defRPr>
             </a:pPr>
             <a:r>
-              <a:t>Una persona PUÒ non avere skill, non avere progetti, o non riportare a nessuno.</a:t>
-            </a:r>
-          </a:p>
-        </p:txBody>
-      </p:sp>
-      <p:sp>
-        <p:nvSpPr>
-          <p:cNvPr id="17" name="TextBox 16"/>
-          <p:cNvSpPr txBox="1"/>
-          <p:nvPr/>
-        </p:nvSpPr>
-        <p:spPr>
-          <a:xfrm>
-            <a:off x="5669280" y="5760720"/>
-            <a:ext cx="4846320" cy="365760"/>
-          </a:xfrm>
-          <a:prstGeom prst="rect">
-            <a:avLst/>
-          </a:prstGeom>
-          <a:noFill/>
-        </p:spPr>
-        <p:txBody>
-          <a:bodyPr wrap="square">
-            <a:spAutoFit/>
-          </a:bodyPr>
-          <a:lstStyle/>
-          <a:p>
-            <a:pPr algn="l">
-              <a:defRPr sz="1200" b="0">
-                <a:solidFill>
-                  <a:srgbClr val="F0C040"/>
-                </a:solidFill>
-                <a:latin typeface="Calibri"/>
-              </a:defRPr>
-            </a:pPr>
-            <a:r>
-              <a:t>Tutte le proprietà sono in INGLESE (name, non nome).</a:t>
+              <a:t>Una persona PUÒ non avere skill, non avere progetti, o non riportare a nessuno. Tutte le proprietà sono in INGLESE (name, non nome).</a:t>
             </a:r>
           </a:p>
         </p:txBody>
@@ -35734,7 +35172,7 @@
               </a:defRPr>
             </a:pPr>
             <a:r>
-              <a:t>•    driver = GraphDatabase.driver(URI, auth=(USER, PASS))</a:t>
+              <a:t>  driver = GraphDatabase.driver(URI, auth=(USER, PASS))</a:t>
             </a:r>
           </a:p>
           <a:p>
@@ -35750,7 +35188,7 @@
               </a:defRPr>
             </a:pPr>
             <a:r>
-              <a:t>•    Esegui: MATCH (n) RETURN n LIMIT 25</a:t>
+              <a:t>  Esegui: MATCH (n) RETURN n LIMIT 25</a:t>
             </a:r>
           </a:p>
           <a:p>
@@ -35798,7 +35236,7 @@
               </a:defRPr>
             </a:pPr>
             <a:r>
-              <a:t>•    MATCH (p:Person) WHERE p.location = "Roma"</a:t>
+              <a:t>  MATCH (p:Person) WHERE p.location = "Roma"</a:t>
             </a:r>
           </a:p>
           <a:p>
@@ -35814,7 +35252,7 @@
               </a:defRPr>
             </a:pPr>
             <a:r>
-              <a:t>•    RETURN p.name, p.title</a:t>
+              <a:t>  RETURN p.name, p.title</a:t>
             </a:r>
           </a:p>
           <a:p>
@@ -35862,7 +35300,7 @@
               </a:defRPr>
             </a:pPr>
             <a:r>
-              <a:t>•    MATCH (p:Person) RETURN p.location, count(*)</a:t>
+              <a:t>  MATCH (p:Person) RETURN p.location, count(*)</a:t>
             </a:r>
           </a:p>
           <a:p>
@@ -35878,7 +35316,7 @@
               </a:defRPr>
             </a:pPr>
             <a:r>
-              <a:t>•    ORDER BY count(*) DESC</a:t>
+              <a:t>  ORDER BY count(*) DESC</a:t>
             </a:r>
           </a:p>
           <a:p>
@@ -35926,7 +35364,7 @@
               </a:defRPr>
             </a:pPr>
             <a:r>
-              <a:t>•    MATCH (p:Person {name: 'Mario Rossi'})</a:t>
+              <a:t>  MATCH (p:Person {name: 'Mario Rossi'})</a:t>
             </a:r>
           </a:p>
           <a:p>
@@ -35942,7 +35380,7 @@
               </a:defRPr>
             </a:pPr>
             <a:r>
-              <a:t>•    -[:HAS_SKILL]-&gt;(s:Skill) RETURN s.name</a:t>
+              <a:t>  -[:HAS_SKILL]-&gt;(s:Skill) RETURN s.name</a:t>
             </a:r>
           </a:p>
           <a:p>
@@ -35990,7 +35428,7 @@
               </a:defRPr>
             </a:pPr>
             <a:r>
-              <a:t>•    MATCH (p:Person)-[:HAS_SKILL]-&gt;(s:Skill {name: 'Python'})</a:t>
+              <a:t>  MATCH (p:Person)-[:HAS_SKILL]-&gt;(s:Skill {name: 'Python'})</a:t>
             </a:r>
           </a:p>
           <a:p>
@@ -36006,7 +35444,7 @@
               </a:defRPr>
             </a:pPr>
             <a:r>
-              <a:t>•    RETURN p.name ORDER BY p.name</a:t>
+              <a:t>  RETURN p.name ORDER BY p.name</a:t>
             </a:r>
           </a:p>
         </p:txBody>
@@ -36203,7 +35641,7 @@
               </a:defRPr>
             </a:pPr>
             <a:r>
-              <a:t>•    MATCH (p:Person)-[:HAS_SKILL]-&gt;(s:Skill)</a:t>
+              <a:t>  MATCH (p:Person)-[:HAS_SKILL]-&gt;(s:Skill)</a:t>
             </a:r>
           </a:p>
           <a:p>
@@ -36219,7 +35657,7 @@
               </a:defRPr>
             </a:pPr>
             <a:r>
-              <a:t>•    RETURN s.name, count(*) AS persone</a:t>
+              <a:t>  RETURN s.name, count(*) AS persone</a:t>
             </a:r>
           </a:p>
           <a:p>
@@ -36235,7 +35673,7 @@
               </a:defRPr>
             </a:pPr>
             <a:r>
-              <a:t>•    ORDER BY persone DESC LIMIT 5</a:t>
+              <a:t>  ORDER BY persone DESC LIMIT 5</a:t>
             </a:r>
           </a:p>
           <a:p>
@@ -36283,7 +35721,7 @@
               </a:defRPr>
             </a:pPr>
             <a:r>
-              <a:t>•    MATCH (p:Person)-[h:HAS_SKILL]-&gt;(s:Skill)</a:t>
+              <a:t>  MATCH (p:Person)-[h:HAS_SKILL]-&gt;(s:Skill)</a:t>
             </a:r>
           </a:p>
           <a:p>
@@ -36299,7 +35737,7 @@
               </a:defRPr>
             </a:pPr>
             <a:r>
-              <a:t>•    RETURN s.name, avg(h.proficiency), count(p)</a:t>
+              <a:t>  RETURN s.name, avg(h.proficiency), count(p)</a:t>
             </a:r>
           </a:p>
           <a:p>
@@ -36315,7 +35753,7 @@
               </a:defRPr>
             </a:pPr>
             <a:r>
-              <a:t>•    ORDER BY avg(h.proficiency) DESC LIMIT 10</a:t>
+              <a:t>  ORDER BY avg(h.proficiency) DESC LIMIT 10</a:t>
             </a:r>
           </a:p>
           <a:p>
@@ -36363,7 +35801,7 @@
               </a:defRPr>
             </a:pPr>
             <a:r>
-              <a:t>•    MATCH (p1:Person)-[:WORKED_ON]-&gt;(proj:Project)</a:t>
+              <a:t>  MATCH (p1:Person)-[:WORKED_ON]-&gt;(proj:Project)</a:t>
             </a:r>
           </a:p>
           <a:p>
@@ -36379,7 +35817,7 @@
               </a:defRPr>
             </a:pPr>
             <a:r>
-              <a:t>•      &lt;-[:WORKED_ON]-(p2:Person)</a:t>
+              <a:t>    &lt;-[:WORKED_ON]-(p2:Person)</a:t>
             </a:r>
           </a:p>
           <a:p>
@@ -36395,7 +35833,7 @@
               </a:defRPr>
             </a:pPr>
             <a:r>
-              <a:t>•    RETURN p1.name, p2.name, proj.name LIMIT 10</a:t>
+              <a:t>  RETURN p1.name, p2.name, proj.name LIMIT 10</a:t>
             </a:r>
           </a:p>
           <a:p>
@@ -36443,7 +35881,7 @@
               </a:defRPr>
             </a:pPr>
             <a:r>
-              <a:t>•    MERGE (p:Person {employee_id: 999})</a:t>
+              <a:t>  MERGE (p:Person {employee_id: 999})</a:t>
             </a:r>
           </a:p>
           <a:p>
@@ -36459,7 +35897,7 @@
               </a:defRPr>
             </a:pPr>
             <a:r>
-              <a:t>•    SET p.name = "Test"</a:t>
+              <a:t>  SET p.name = "Test"</a:t>
             </a:r>
           </a:p>
           <a:p>
@@ -36475,7 +35913,7 @@
               </a:defRPr>
             </a:pPr>
             <a:r>
-              <a:t>•    MATCH (s:Skill {name: 'Python'})</a:t>
+              <a:t>  MATCH (s:Skill {name: 'Python'})</a:t>
             </a:r>
           </a:p>
           <a:p>
@@ -36491,7 +35929,7 @@
               </a:defRPr>
             </a:pPr>
             <a:r>
-              <a:t>•    MERGE (p)-[:HAS_SKILL {proficiency: 3}]-&gt;(s)</a:t>
+              <a:t>  MERGE (p)-[:HAS_SKILL {proficiency: 3}]-&gt;(s)</a:t>
             </a:r>
           </a:p>
         </p:txBody>
@@ -39448,7 +38886,7 @@
               </a:defRPr>
             </a:pPr>
             <a:r>
-              <a:t>•    — Mario ha Python con livello 5</a:t>
+              <a:t>  — Mario ha Python con livello 5</a:t>
             </a:r>
           </a:p>
           <a:p>
@@ -39480,7 +38918,7 @@
               </a:defRPr>
             </a:pPr>
             <a:r>
-              <a:t>•    — Mario ha lavorato al progetto AI Platform</a:t>
+              <a:t>  — Mario ha lavorato al progetto AI Platform</a:t>
             </a:r>
           </a:p>
           <a:p>
@@ -39512,7 +38950,7 @@
               </a:defRPr>
             </a:pPr>
             <a:r>
-              <a:t>•    — Mario riporta ad Anna Bianchi</a:t>
+              <a:t>  — Mario riporta ad Anna Bianchi</a:t>
             </a:r>
           </a:p>
         </p:txBody>
@@ -39970,7 +39408,7 @@
         <p:spPr>
           <a:xfrm>
             <a:off x="731520" y="1051560"/>
-            <a:ext cx="5029200" cy="4572000"/>
+            <a:ext cx="5029200" cy="2286000"/>
           </a:xfrm>
           <a:prstGeom prst="rect">
             <a:avLst/>
@@ -40011,7 +39449,7 @@
               </a:defRPr>
             </a:pPr>
             <a:r>
-              <a:t>•    http://localhost:7474 o workspace.neo4j.io</a:t>
+              <a:t>  http://localhost:7474 o workspace.neo4j.io</a:t>
             </a:r>
           </a:p>
           <a:p>
@@ -40027,7 +39465,7 @@
               </a:defRPr>
             </a:pPr>
             <a:r>
-              <a:t>•    • Editor con syntax highlighting</a:t>
+              <a:t>  Editor con syntax highlighting, visualizzazione grafica</a:t>
             </a:r>
           </a:p>
           <a:p>
@@ -40043,7 +39481,7 @@
               </a:defRPr>
             </a:pPr>
             <a:r>
-              <a:t>•    • Visualizzazione grafica dei risultati</a:t>
+              <a:t>  :play movie-graph per tutorial interattivo</a:t>
             </a:r>
           </a:p>
           <a:p>
@@ -40059,7 +39497,7 @@
               </a:defRPr>
             </a:pPr>
             <a:r>
-              <a:t>•    • :play movie-graph per tutorial interattivo</a:t>
+              <a:t>•  Neo4j AuraDB — database cloud managed</a:t>
             </a:r>
           </a:p>
           <a:p>
@@ -40075,7 +39513,7 @@
               </a:defRPr>
             </a:pPr>
             <a:r>
-              <a:t>•  Neo4j AuraDB — cloud managed (Free Tier: 200k nodi)</a:t>
+              <a:t>  Free Tier: 200k nodi, 500k relazioni</a:t>
             </a:r>
           </a:p>
           <a:p>
@@ -40091,7 +39529,7 @@
               </a:defRPr>
             </a:pPr>
             <a:r>
-              <a:t>•    • Zero configurazione, SSL nativo</a:t>
+              <a:t>  Zero configurazione, backup automatici, scaling</a:t>
             </a:r>
           </a:p>
           <a:p>
@@ -40107,7 +39545,7 @@
               </a:defRPr>
             </a:pPr>
             <a:r>
-              <a:t>•    • Backup automatici, scaling a un click</a:t>
+              <a:t>  Usiamo AuraDB per questo corso</a:t>
             </a:r>
           </a:p>
           <a:p>
@@ -40123,7 +39561,7 @@
               </a:defRPr>
             </a:pPr>
             <a:r>
-              <a:t>•    • Usiamo AuraDB per questo corso</a:t>
+              <a:t>•  Neo4j Bloom — visualizzazione senza scrivere Cypher</a:t>
             </a:r>
           </a:p>
           <a:p>
@@ -40139,7 +39577,7 @@
               </a:defRPr>
             </a:pPr>
             <a:r>
-              <a:t>•  Neo4j Bloom — visualizzazione drag &amp; drop senza Cypher</a:t>
+              <a:t>•  Neo4j Desktop — ambiente di sviluppo locale</a:t>
             </a:r>
           </a:p>
           <a:p>
@@ -40155,39 +39593,7 @@
               </a:defRPr>
             </a:pPr>
             <a:r>
-              <a:t>•  Neo4j Workspace — modellazione grafica collaborativa</a:t>
-            </a:r>
-          </a:p>
-          <a:p>
-            <a:pPr algn="l">
-              <a:spcAft>
-                <a:spcPts val="0"/>
-              </a:spcAft>
-              <a:defRPr sz="1200">
-                <a:solidFill>
-                  <a:srgbClr val="FFFFFF"/>
-                </a:solidFill>
-                <a:latin typeface="Calibri"/>
-              </a:defRPr>
-            </a:pPr>
-            <a:r>
-              <a:t>•  Neo4j Desktop — ambiente di sviluppo locale</a:t>
-            </a:r>
-          </a:p>
-          <a:p>
-            <a:pPr algn="l">
-              <a:spcAft>
-                <a:spcPts val="0"/>
-              </a:spcAft>
-              <a:defRPr sz="1200">
-                <a:solidFill>
-                  <a:srgbClr val="FFFFFF"/>
-                </a:solidFill>
-                <a:latin typeface="Calibri"/>
-              </a:defRPr>
-            </a:pPr>
-            <a:r>
-              <a:t>•  Drivers ufficiali: Python, Java, JavaScript, Go, .NET, C</a:t>
+              <a:t>•  Drivers ufficiali: Python, Java, JS, Go, .NET</a:t>
             </a:r>
           </a:p>
         </p:txBody>
@@ -40201,7 +39607,7 @@
         <p:spPr>
           <a:xfrm>
             <a:off x="5669280" y="1051560"/>
-            <a:ext cx="4846320" cy="4572000"/>
+            <a:ext cx="4846320" cy="5029200"/>
           </a:xfrm>
           <a:prstGeom prst="rect">
             <a:avLst/>
@@ -40223,7 +39629,7 @@
               </a:defRPr>
             </a:pPr>
             <a:r>
-              <a:t>Architettura a strati:</a:t>
+              <a:t>Architettura:</a:t>
             </a:r>
             <a:br/>
             <a:br/>
@@ -40273,15 +39679,11 @@
             <a:br/>
             <a:br/>
             <a:r>
-              <a:t>Browser, Bloom e Workspace</a:t>
+              <a:t>Browser, Bloom e Workspace sono</a:t>
             </a:r>
             <a:br/>
             <a:r>
-              <a:t>sono UI che parlano al</a:t>
-            </a:r>
-            <a:br/>
-            <a:r>
-              <a:t>database via Bolt o HTTP.</a:t>
+              <a:t>UI che parlano al database via Bolt.</a:t>
             </a:r>
             <a:br/>
             <a:br/>
@@ -40290,15 +39692,15 @@
             </a:r>
             <a:br/>
             <a:r>
-              <a:t>• Python Driver (codice)</a:t>
+              <a:t>  • Python Driver (codice)</a:t>
             </a:r>
             <a:br/>
             <a:r>
-              <a:t>• Neo4j Browser (esplorazione)</a:t>
+              <a:t>  • Neo4j Browser (esplorazione)</a:t>
             </a:r>
             <a:br/>
             <a:r>
-              <a:t>• AuraDB (cloud)</a:t>
+              <a:t>  • AuraDB (cloud)</a:t>
             </a:r>
           </a:p>
         </p:txBody>

--- a/slides/session-01/session-01.pptx
+++ b/slides/session-01/session-01.pptx
@@ -24333,7 +24333,7 @@
         <p:spPr>
           <a:xfrm>
             <a:off x="5669280" y="1463040"/>
-            <a:ext cx="4846320" cy="1371600"/>
+            <a:ext cx="4846320" cy="1645920"/>
           </a:xfrm>
           <a:prstGeom prst="rect">
             <a:avLst/>
@@ -24378,7 +24378,7 @@
         <p:spPr>
           <a:xfrm>
             <a:off x="5779008" y="1536192"/>
-            <a:ext cx="4626864" cy="1225296"/>
+            <a:ext cx="4626864" cy="1499616"/>
           </a:xfrm>
           <a:prstGeom prst="rect">
             <a:avLst/>
@@ -24618,7 +24618,7 @@
         <p:spPr>
           <a:xfrm>
             <a:off x="731520" y="3794760"/>
-            <a:ext cx="3657600" cy="2011680"/>
+            <a:ext cx="3657600" cy="2286000"/>
           </a:xfrm>
           <a:prstGeom prst="rect">
             <a:avLst/>
@@ -24699,7 +24699,7 @@
         <p:spPr>
           <a:xfrm>
             <a:off x="4114800" y="3794760"/>
-            <a:ext cx="6400800" cy="2011680"/>
+            <a:ext cx="6400800" cy="2286000"/>
           </a:xfrm>
           <a:prstGeom prst="rect">
             <a:avLst/>
@@ -25699,7 +25699,7 @@
         <p:spPr>
           <a:xfrm>
             <a:off x="731520" y="1463040"/>
-            <a:ext cx="5029200" cy="2011680"/>
+            <a:ext cx="5029200" cy="2194560"/>
           </a:xfrm>
           <a:prstGeom prst="rect">
             <a:avLst/>
@@ -25744,7 +25744,7 @@
         <p:spPr>
           <a:xfrm>
             <a:off x="841248" y="1536192"/>
-            <a:ext cx="4809744" cy="1865376"/>
+            <a:ext cx="4809744" cy="2048256"/>
           </a:xfrm>
           <a:prstGeom prst="rect">
             <a:avLst/>
@@ -25969,7 +25969,7 @@
         <p:spPr>
           <a:xfrm>
             <a:off x="5669280" y="1463040"/>
-            <a:ext cx="4846320" cy="2011680"/>
+            <a:ext cx="4846320" cy="2194560"/>
           </a:xfrm>
           <a:prstGeom prst="rect">
             <a:avLst/>
@@ -26014,7 +26014,7 @@
         <p:spPr>
           <a:xfrm>
             <a:off x="5779008" y="1536192"/>
-            <a:ext cx="4626864" cy="1865376"/>
+            <a:ext cx="4626864" cy="2048256"/>
           </a:xfrm>
           <a:prstGeom prst="rect">
             <a:avLst/>
@@ -26510,7 +26510,7 @@
         <p:spPr>
           <a:xfrm>
             <a:off x="731520" y="1828800"/>
-            <a:ext cx="5029200" cy="1645920"/>
+            <a:ext cx="5029200" cy="1920240"/>
           </a:xfrm>
           <a:prstGeom prst="rect">
             <a:avLst/>
@@ -26555,7 +26555,7 @@
         <p:spPr>
           <a:xfrm>
             <a:off x="841248" y="1901952"/>
-            <a:ext cx="4809744" cy="1499616"/>
+            <a:ext cx="4809744" cy="1773936"/>
           </a:xfrm>
           <a:prstGeom prst="rect">
             <a:avLst/>
@@ -26787,7 +26787,7 @@
         <p:spPr>
           <a:xfrm>
             <a:off x="5669280" y="1828800"/>
-            <a:ext cx="4846320" cy="1645920"/>
+            <a:ext cx="4846320" cy="2103120"/>
           </a:xfrm>
           <a:prstGeom prst="rect">
             <a:avLst/>
@@ -26832,7 +26832,7 @@
         <p:spPr>
           <a:xfrm>
             <a:off x="5779008" y="1901952"/>
-            <a:ext cx="4626864" cy="1499616"/>
+            <a:ext cx="4626864" cy="1956816"/>
           </a:xfrm>
           <a:prstGeom prst="rect">
             <a:avLst/>
@@ -27043,7 +27043,7 @@
         </p:nvSpPr>
         <p:spPr>
           <a:xfrm>
-            <a:off x="731520" y="3840480"/>
+            <a:off x="731520" y="4206240"/>
             <a:ext cx="10698480" cy="36576"/>
           </a:xfrm>
           <a:prstGeom prst="rect">
@@ -27086,7 +27086,7 @@
         </p:nvSpPr>
         <p:spPr>
           <a:xfrm>
-            <a:off x="731520" y="4023360"/>
+            <a:off x="731520" y="4389120"/>
             <a:ext cx="10515600" cy="365760"/>
           </a:xfrm>
           <a:prstGeom prst="rect">
@@ -27122,7 +27122,7 @@
         </p:nvSpPr>
         <p:spPr>
           <a:xfrm>
-            <a:off x="731520" y="4434840"/>
+            <a:off x="731520" y="4800600"/>
             <a:ext cx="10515600" cy="1645920"/>
           </a:xfrm>
           <a:prstGeom prst="rect">
@@ -27167,7 +27167,7 @@
         </p:nvSpPr>
         <p:spPr>
           <a:xfrm>
-            <a:off x="841248" y="4507992"/>
+            <a:off x="841248" y="4873752"/>
             <a:ext cx="10296144" cy="1499616"/>
           </a:xfrm>
           <a:prstGeom prst="rect">
@@ -28059,7 +28059,7 @@
         <p:spPr>
           <a:xfrm>
             <a:off x="731520" y="4206240"/>
-            <a:ext cx="5029200" cy="1645920"/>
+            <a:ext cx="5029200" cy="1828800"/>
           </a:xfrm>
           <a:prstGeom prst="rect">
             <a:avLst/>
@@ -28104,7 +28104,7 @@
         <p:spPr>
           <a:xfrm>
             <a:off x="841248" y="4279392"/>
-            <a:ext cx="4809744" cy="1499616"/>
+            <a:ext cx="4809744" cy="1682496"/>
           </a:xfrm>
           <a:prstGeom prst="rect">
             <a:avLst/>
@@ -28836,7 +28836,7 @@
         <p:spPr>
           <a:xfrm>
             <a:off x="5669280" y="1371600"/>
-            <a:ext cx="4846320" cy="1828800"/>
+            <a:ext cx="4846320" cy="2011680"/>
           </a:xfrm>
           <a:prstGeom prst="rect">
             <a:avLst/>
@@ -28881,7 +28881,7 @@
         <p:spPr>
           <a:xfrm>
             <a:off x="5779008" y="1444752"/>
-            <a:ext cx="4626864" cy="1682496"/>
+            <a:ext cx="4626864" cy="1865376"/>
           </a:xfrm>
           <a:prstGeom prst="rect">
             <a:avLst/>
@@ -29637,7 +29637,7 @@
         <p:spPr>
           <a:xfrm>
             <a:off x="5669280" y="1463040"/>
-            <a:ext cx="4846320" cy="1828800"/>
+            <a:ext cx="4846320" cy="2011680"/>
           </a:xfrm>
           <a:prstGeom prst="rect">
             <a:avLst/>
@@ -29682,7 +29682,7 @@
         <p:spPr>
           <a:xfrm>
             <a:off x="5779008" y="1536192"/>
-            <a:ext cx="4626864" cy="1682496"/>
+            <a:ext cx="4626864" cy="1865376"/>
           </a:xfrm>
           <a:prstGeom prst="rect">
             <a:avLst/>
@@ -29967,7 +29967,7 @@
         <p:spPr>
           <a:xfrm>
             <a:off x="731520" y="4297680"/>
-            <a:ext cx="5029200" cy="1645920"/>
+            <a:ext cx="5029200" cy="1828800"/>
           </a:xfrm>
           <a:prstGeom prst="rect">
             <a:avLst/>
@@ -30012,7 +30012,7 @@
         <p:spPr>
           <a:xfrm>
             <a:off x="841248" y="4370832"/>
-            <a:ext cx="4809744" cy="1499616"/>
+            <a:ext cx="4809744" cy="1682496"/>
           </a:xfrm>
           <a:prstGeom prst="rect">
             <a:avLst/>
@@ -30192,7 +30192,7 @@
         <p:spPr>
           <a:xfrm>
             <a:off x="5669280" y="4297680"/>
-            <a:ext cx="4846320" cy="1920240"/>
+            <a:ext cx="4846320" cy="2103120"/>
           </a:xfrm>
           <a:prstGeom prst="rect">
             <a:avLst/>
@@ -30237,7 +30237,7 @@
         <p:spPr>
           <a:xfrm>
             <a:off x="5779008" y="4370832"/>
-            <a:ext cx="4626864" cy="1773936"/>
+            <a:ext cx="4626864" cy="1956816"/>
           </a:xfrm>
           <a:prstGeom prst="rect">
             <a:avLst/>
@@ -31161,7 +31161,7 @@
         <p:spPr>
           <a:xfrm>
             <a:off x="731520" y="1051560"/>
-            <a:ext cx="5029200" cy="1828800"/>
+            <a:ext cx="5029200" cy="2286000"/>
           </a:xfrm>
           <a:prstGeom prst="rect">
             <a:avLst/>
@@ -31348,7 +31348,7 @@
         <p:spPr>
           <a:xfrm>
             <a:off x="5669280" y="1508760"/>
-            <a:ext cx="4846320" cy="1828800"/>
+            <a:ext cx="4846320" cy="2194560"/>
           </a:xfrm>
           <a:prstGeom prst="rect">
             <a:avLst/>
@@ -31457,7 +31457,7 @@
         <p:spPr>
           <a:xfrm>
             <a:off x="731520" y="3566160"/>
-            <a:ext cx="5029200" cy="2286000"/>
+            <a:ext cx="5029200" cy="2560320"/>
           </a:xfrm>
           <a:prstGeom prst="rect">
             <a:avLst/>
@@ -31502,7 +31502,7 @@
         <p:spPr>
           <a:xfrm>
             <a:off x="841248" y="3639312"/>
-            <a:ext cx="4809744" cy="2139696"/>
+            <a:ext cx="4809744" cy="2414016"/>
           </a:xfrm>
           <a:prstGeom prst="rect">
             <a:avLst/>
@@ -32272,7 +32272,7 @@
         <p:spPr>
           <a:xfrm>
             <a:off x="731520" y="2560320"/>
-            <a:ext cx="5029200" cy="2743200"/>
+            <a:ext cx="5029200" cy="3017520"/>
           </a:xfrm>
           <a:prstGeom prst="rect">
             <a:avLst/>
@@ -32317,7 +32317,7 @@
         <p:spPr>
           <a:xfrm>
             <a:off x="841248" y="2633472"/>
-            <a:ext cx="4809744" cy="2596896"/>
+            <a:ext cx="4809744" cy="2871216"/>
           </a:xfrm>
           <a:prstGeom prst="rect">
             <a:avLst/>
@@ -32606,7 +32606,7 @@
         <p:spPr>
           <a:xfrm>
             <a:off x="5669280" y="2560320"/>
-            <a:ext cx="4846320" cy="2743200"/>
+            <a:ext cx="4846320" cy="3017520"/>
           </a:xfrm>
           <a:prstGeom prst="rect">
             <a:avLst/>
@@ -32651,7 +32651,7 @@
         <p:spPr>
           <a:xfrm>
             <a:off x="5779008" y="2633472"/>
-            <a:ext cx="4626864" cy="2596896"/>
+            <a:ext cx="4626864" cy="2871216"/>
           </a:xfrm>
           <a:prstGeom prst="rect">
             <a:avLst/>
@@ -32917,7 +32917,7 @@
         </p:nvSpPr>
         <p:spPr>
           <a:xfrm>
-            <a:off x="731520" y="5486400"/>
+            <a:off x="731520" y="5760720"/>
             <a:ext cx="10698480" cy="36576"/>
           </a:xfrm>
           <a:prstGeom prst="rect">
@@ -32960,7 +32960,7 @@
         </p:nvSpPr>
         <p:spPr>
           <a:xfrm>
-            <a:off x="731520" y="5669280"/>
+            <a:off x="731520" y="5943600"/>
             <a:ext cx="10515600" cy="365760"/>
           </a:xfrm>
           <a:prstGeom prst="rect">
@@ -33278,7 +33278,7 @@
         <p:spPr>
           <a:xfrm>
             <a:off x="5669280" y="1463040"/>
-            <a:ext cx="4846320" cy="2011680"/>
+            <a:ext cx="4846320" cy="2377440"/>
           </a:xfrm>
           <a:prstGeom prst="rect">
             <a:avLst/>
@@ -33366,8 +33366,8 @@
         </p:nvSpPr>
         <p:spPr>
           <a:xfrm>
-            <a:off x="5669280" y="3657600"/>
-            <a:ext cx="4846320" cy="1097280"/>
+            <a:off x="5669280" y="3931920"/>
+            <a:ext cx="4846320" cy="1645920"/>
           </a:xfrm>
           <a:prstGeom prst="rect">
             <a:avLst/>
@@ -34349,7 +34349,7 @@
               </a:defRPr>
             </a:pPr>
             <a:r>
-              <a:t>// Output:</a:t>
+              <a:t>// Co-protagonisti di Tom Hanks:</a:t>
             </a:r>
           </a:p>
           <a:p>
@@ -34365,7 +34365,7 @@
               </a:defRPr>
             </a:pPr>
             <a:r>
-              <a:t>// Tom Hanks | Cloud Atlas | 2012</a:t>
+              <a:t>MATCH (tom:Person {name: "Tom Hanks"})</a:t>
             </a:r>
           </a:p>
           <a:p>
@@ -34381,7 +34381,7 @@
               </a:defRPr>
             </a:pPr>
             <a:r>
-              <a:t>// Hugo Weaving | Cloud Atlas | 2012</a:t>
+              <a:t>  -[:ACTED_IN]-&gt;(m:Movie)&lt;-[:ACTED_IN]-(co:Person)</a:t>
             </a:r>
           </a:p>
           <a:p>
@@ -34396,6 +34396,9 @@
                 <a:latin typeface="Consolas"/>
               </a:defRPr>
             </a:pPr>
+            <a:r>
+              <a:t>RETURN co.name, m.title ORDER BY m.title;</a:t>
+            </a:r>
           </a:p>
           <a:p>
             <a:pPr>
@@ -34409,9 +34412,6 @@
                 <a:latin typeface="Consolas"/>
               </a:defRPr>
             </a:pPr>
-            <a:r>
-              <a:t>// Co-protagonisti di Tom Hanks:</a:t>
-            </a:r>
           </a:p>
           <a:p>
             <a:pPr>
@@ -34426,7 +34426,7 @@
               </a:defRPr>
             </a:pPr>
             <a:r>
-              <a:t>MATCH (tom:Person {name: "Tom Hanks"})</a:t>
+              <a:t>// Output: Meg Ryan | Sleepless in Seattle</a:t>
             </a:r>
           </a:p>
           <a:p>
@@ -34442,100 +34442,7 @@
               </a:defRPr>
             </a:pPr>
             <a:r>
-              <a:t>  -[:ACTED_IN]-&gt;(m:Movie)&lt;-[:ACTED_IN]-(co:Person)</a:t>
-            </a:r>
-          </a:p>
-          <a:p>
-            <a:pPr>
-              <a:spcAft>
-                <a:spcPts val="100"/>
-              </a:spcAft>
-              <a:defRPr sz="1000">
-                <a:solidFill>
-                  <a:srgbClr val="7EC68E"/>
-                </a:solidFill>
-                <a:latin typeface="Consolas"/>
-              </a:defRPr>
-            </a:pPr>
-            <a:r>
-              <a:t>RETURN co.name, m.title ORDER BY m.title;</a:t>
-            </a:r>
-          </a:p>
-          <a:p>
-            <a:pPr>
-              <a:spcAft>
-                <a:spcPts val="100"/>
-              </a:spcAft>
-              <a:defRPr sz="1000">
-                <a:solidFill>
-                  <a:srgbClr val="7EC68E"/>
-                </a:solidFill>
-                <a:latin typeface="Consolas"/>
-              </a:defRPr>
-            </a:pPr>
-          </a:p>
-          <a:p>
-            <a:pPr>
-              <a:spcAft>
-                <a:spcPts val="100"/>
-              </a:spcAft>
-              <a:defRPr sz="1000">
-                <a:solidFill>
-                  <a:srgbClr val="7EC68E"/>
-                </a:solidFill>
-                <a:latin typeface="Consolas"/>
-              </a:defRPr>
-            </a:pPr>
-            <a:r>
-              <a:t>// Output:</a:t>
-            </a:r>
-          </a:p>
-          <a:p>
-            <a:pPr>
-              <a:spcAft>
-                <a:spcPts val="100"/>
-              </a:spcAft>
-              <a:defRPr sz="1000">
-                <a:solidFill>
-                  <a:srgbClr val="7EC68E"/>
-                </a:solidFill>
-                <a:latin typeface="Consolas"/>
-              </a:defRPr>
-            </a:pPr>
-            <a:r>
-              <a:t>// Meg Ryan | Sleepless in Seattle</a:t>
-            </a:r>
-          </a:p>
-          <a:p>
-            <a:pPr>
-              <a:spcAft>
-                <a:spcPts val="100"/>
-              </a:spcAft>
-              <a:defRPr sz="1000">
-                <a:solidFill>
-                  <a:srgbClr val="7EC68E"/>
-                </a:solidFill>
-                <a:latin typeface="Consolas"/>
-              </a:defRPr>
-            </a:pPr>
-            <a:r>
-              <a:t>// Meg Ryan | You've Got Mail</a:t>
-            </a:r>
-          </a:p>
-          <a:p>
-            <a:pPr>
-              <a:spcAft>
-                <a:spcPts val="100"/>
-              </a:spcAft>
-              <a:defRPr sz="1000">
-                <a:solidFill>
-                  <a:srgbClr val="7EC68E"/>
-                </a:solidFill>
-                <a:latin typeface="Consolas"/>
-              </a:defRPr>
-            </a:pPr>
-            <a:r>
-              <a:t>// Bill Paxton | Apollo 13</a:t>
+              <a:t>//         Bill Paxton | Apollo 13</a:t>
             </a:r>
           </a:p>
         </p:txBody>
@@ -34549,7 +34456,7 @@
         <p:spPr>
           <a:xfrm>
             <a:off x="5669280" y="1371600"/>
-            <a:ext cx="4846320" cy="2560320"/>
+            <a:ext cx="4846320" cy="2651760"/>
           </a:xfrm>
           <a:prstGeom prst="rect">
             <a:avLst/>
@@ -34594,7 +34501,7 @@
         <p:spPr>
           <a:xfrm>
             <a:off x="5779008" y="1444752"/>
-            <a:ext cx="4626864" cy="2414016"/>
+            <a:ext cx="4626864" cy="2505456"/>
           </a:xfrm>
           <a:prstGeom prst="rect">
             <a:avLst/>
@@ -34696,67 +34603,6 @@
               </a:defRPr>
             </a:pPr>
             <a:r>
-              <a:t>// Output:</a:t>
-            </a:r>
-          </a:p>
-          <a:p>
-            <a:pPr>
-              <a:spcAft>
-                <a:spcPts val="100"/>
-              </a:spcAft>
-              <a:defRPr sz="1000">
-                <a:solidFill>
-                  <a:srgbClr val="7EC68E"/>
-                </a:solidFill>
-                <a:latin typeface="Consolas"/>
-              </a:defRPr>
-            </a:pPr>
-            <a:r>
-              <a:t>// Tom Hanks | 12</a:t>
-            </a:r>
-          </a:p>
-          <a:p>
-            <a:pPr>
-              <a:spcAft>
-                <a:spcPts val="100"/>
-              </a:spcAft>
-              <a:defRPr sz="1000">
-                <a:solidFill>
-                  <a:srgbClr val="7EC68E"/>
-                </a:solidFill>
-                <a:latin typeface="Consolas"/>
-              </a:defRPr>
-            </a:pPr>
-            <a:r>
-              <a:t>// Keanu Reeves | 10</a:t>
-            </a:r>
-          </a:p>
-          <a:p>
-            <a:pPr>
-              <a:spcAft>
-                <a:spcPts val="100"/>
-              </a:spcAft>
-              <a:defRPr sz="1000">
-                <a:solidFill>
-                  <a:srgbClr val="7EC68E"/>
-                </a:solidFill>
-                <a:latin typeface="Consolas"/>
-              </a:defRPr>
-            </a:pPr>
-          </a:p>
-          <a:p>
-            <a:pPr>
-              <a:spcAft>
-                <a:spcPts val="100"/>
-              </a:spcAft>
-              <a:defRPr sz="1000">
-                <a:solidFill>
-                  <a:srgbClr val="7EC68E"/>
-                </a:solidFill>
-                <a:latin typeface="Consolas"/>
-              </a:defRPr>
-            </a:pPr>
-            <a:r>
               <a:t>// Registi e i loro attori:</a:t>
             </a:r>
           </a:p>
@@ -34866,7 +34712,7 @@
         </p:nvSpPr>
         <p:spPr>
           <a:xfrm>
-            <a:off x="731520" y="3931920"/>
+            <a:off x="731520" y="4023360"/>
             <a:ext cx="10698480" cy="36576"/>
           </a:xfrm>
           <a:prstGeom prst="rect">
@@ -34909,7 +34755,7 @@
         </p:nvSpPr>
         <p:spPr>
           <a:xfrm>
-            <a:off x="731520" y="4114800"/>
+            <a:off x="731520" y="4206240"/>
             <a:ext cx="10515600" cy="365760"/>
           </a:xfrm>
           <a:prstGeom prst="rect">
@@ -34945,7 +34791,7 @@
         </p:nvSpPr>
         <p:spPr>
           <a:xfrm>
-            <a:off x="731520" y="4572000"/>
+            <a:off x="731520" y="4663440"/>
             <a:ext cx="10515600" cy="1371600"/>
           </a:xfrm>
           <a:prstGeom prst="rect">

--- a/slides/session-01/session-01.pptx
+++ b/slides/session-01/session-01.pptx
@@ -6,32 +6,32 @@
   </p:sldMasterIdLst>
   <p:sldIdLst>
     <p:sldId id="256" r:id="rId2"/>
-    <p:sldId id="257" r:id="rId7"/>
-    <p:sldId id="258" r:id="rId8"/>
-    <p:sldId id="259" r:id="rId9"/>
-    <p:sldId id="260" r:id="rId10"/>
-    <p:sldId id="261" r:id="rId11"/>
-    <p:sldId id="262" r:id="rId12"/>
-    <p:sldId id="263" r:id="rId13"/>
-    <p:sldId id="264" r:id="rId14"/>
-    <p:sldId id="265" r:id="rId15"/>
-    <p:sldId id="266" r:id="rId16"/>
-    <p:sldId id="267" r:id="rId17"/>
-    <p:sldId id="268" r:id="rId18"/>
-    <p:sldId id="269" r:id="rId19"/>
-    <p:sldId id="270" r:id="rId20"/>
-    <p:sldId id="271" r:id="rId21"/>
-    <p:sldId id="272" r:id="rId22"/>
-    <p:sldId id="273" r:id="rId23"/>
-    <p:sldId id="274" r:id="rId24"/>
-    <p:sldId id="275" r:id="rId25"/>
-    <p:sldId id="276" r:id="rId26"/>
-    <p:sldId id="277" r:id="rId27"/>
-    <p:sldId id="278" r:id="rId28"/>
-    <p:sldId id="279" r:id="rId29"/>
-    <p:sldId id="280" r:id="rId30"/>
-    <p:sldId id="281" r:id="rId31"/>
-    <p:sldId id="282" r:id="rId32"/>
+    <p:sldId id="257" r:id="rId3"/>
+    <p:sldId id="258" r:id="rId4"/>
+    <p:sldId id="259" r:id="rId5"/>
+    <p:sldId id="260" r:id="rId6"/>
+    <p:sldId id="261" r:id="rId7"/>
+    <p:sldId id="262" r:id="rId8"/>
+    <p:sldId id="263" r:id="rId9"/>
+    <p:sldId id="264" r:id="rId10"/>
+    <p:sldId id="265" r:id="rId11"/>
+    <p:sldId id="266" r:id="rId12"/>
+    <p:sldId id="267" r:id="rId13"/>
+    <p:sldId id="268" r:id="rId14"/>
+    <p:sldId id="269" r:id="rId15"/>
+    <p:sldId id="270" r:id="rId16"/>
+    <p:sldId id="271" r:id="rId17"/>
+    <p:sldId id="272" r:id="rId18"/>
+    <p:sldId id="273" r:id="rId19"/>
+    <p:sldId id="274" r:id="rId20"/>
+    <p:sldId id="275" r:id="rId21"/>
+    <p:sldId id="276" r:id="rId22"/>
+    <p:sldId id="277" r:id="rId23"/>
+    <p:sldId id="278" r:id="rId24"/>
+    <p:sldId id="279" r:id="rId25"/>
+    <p:sldId id="280" r:id="rId26"/>
+    <p:sldId id="281" r:id="rId27"/>
+    <p:sldId id="282" r:id="rId28"/>
   </p:sldIdLst>
   <p:sldSz cx="12192000" cy="6858000"/>
   <p:notesSz cx="6858000" cy="9144000"/>
@@ -130,6 +130,11 @@
       </a:defRPr>
     </a:lvl9pPr>
   </p:defaultTextStyle>
+  <p:extLst>
+    <p:ext uri="{EFAFB233-063F-42B5-8137-9DF3F51BA10A}">
+      <p15:sldGuideLst xmlns:p15="http://schemas.microsoft.com/office/powerpoint/2012/main"/>
+    </p:ext>
+  </p:extLst>
 </p:presentation>
 </file>
 
@@ -12602,7 +12607,7 @@
           </a:ln>
           <a:extLst>
             <a:ext uri="{91240B29-F687-4f45-9708-019B960494DF}">
-              <a14:hiddenLine xmlns="" xmlns:a14="http://schemas.microsoft.com/office/drawing/2010/main" w="9525">
+              <a14:hiddenLine xmlns:a14="http://schemas.microsoft.com/office/drawing/2010/main" xmlns="" w="9525">
                 <a:solidFill>
                   <a:srgbClr val="000000"/>
                 </a:solidFill>
@@ -12774,7 +12779,7 @@
             </a:ln>
             <a:extLst>
               <a:ext uri="{91240B29-F687-4f45-9708-019B960494DF}">
-                <a14:hiddenLine xmlns="" xmlns:a14="http://schemas.microsoft.com/office/drawing/2010/main" w="9525">
+                <a14:hiddenLine xmlns:a14="http://schemas.microsoft.com/office/drawing/2010/main" xmlns="" w="9525">
                   <a:solidFill>
                     <a:srgbClr val="000000"/>
                   </a:solidFill>
@@ -12955,7 +12960,7 @@
             </a:ln>
             <a:extLst>
               <a:ext uri="{91240B29-F687-4f45-9708-019B960494DF}">
-                <a14:hiddenLine xmlns="" xmlns:a14="http://schemas.microsoft.com/office/drawing/2010/main" w="9525">
+                <a14:hiddenLine xmlns:a14="http://schemas.microsoft.com/office/drawing/2010/main" xmlns="" w="9525">
                   <a:solidFill>
                     <a:srgbClr val="000000"/>
                   </a:solidFill>
@@ -23955,7 +23960,7 @@
 </file>
 
 <file path=ppt/slides/slide1.xml><?xml version="1.0" encoding="utf-8"?>
-<p:sld xmlns:a="http://schemas.openxmlformats.org/drawingml/2006/main" xmlns:p="http://schemas.openxmlformats.org/presentationml/2006/main" xmlns:r="http://schemas.openxmlformats.org/officeDocument/2006/relationships">
+<p:sld xmlns:a="http://schemas.openxmlformats.org/drawingml/2006/main" xmlns:r="http://schemas.openxmlformats.org/officeDocument/2006/relationships" xmlns:p="http://schemas.openxmlformats.org/presentationml/2006/main">
   <p:cSld>
     <p:bg>
       <p:bgPr>
@@ -23971,7 +23976,14 @@
         <p:cNvGrpSpPr/>
         <p:nvPr/>
       </p:nvGrpSpPr>
-      <p:grpSpPr/>
+      <p:grpSpPr>
+        <a:xfrm>
+          <a:off x="0" y="0"/>
+          <a:ext cx="0" cy="0"/>
+          <a:chOff x="0" y="0"/>
+          <a:chExt cx="0" cy="0"/>
+        </a:xfrm>
+      </p:grpSpPr>
       <p:sp>
         <p:nvSpPr>
           <p:cNvPr id="2" name="Rectangle 1"/>
@@ -24012,6 +24024,7 @@
           <a:lstStyle/>
           <a:p>
             <a:pPr algn="ctr"/>
+            <a:endParaRPr/>
           </a:p>
         </p:txBody>
       </p:sp>
@@ -24132,7 +24145,7 @@
 </file>
 
 <file path=ppt/slides/slide10.xml><?xml version="1.0" encoding="utf-8"?>
-<p:sld xmlns:a="http://schemas.openxmlformats.org/drawingml/2006/main" xmlns:p="http://schemas.openxmlformats.org/presentationml/2006/main" xmlns:r="http://schemas.openxmlformats.org/officeDocument/2006/relationships">
+<p:sld xmlns:a="http://schemas.openxmlformats.org/drawingml/2006/main" xmlns:r="http://schemas.openxmlformats.org/officeDocument/2006/relationships" xmlns:p="http://schemas.openxmlformats.org/presentationml/2006/main">
   <p:cSld>
     <p:bg>
       <p:bgPr>
@@ -24148,7 +24161,14 @@
         <p:cNvGrpSpPr/>
         <p:nvPr/>
       </p:nvGrpSpPr>
-      <p:grpSpPr/>
+      <p:grpSpPr>
+        <a:xfrm>
+          <a:off x="0" y="0"/>
+          <a:ext cx="0" cy="0"/>
+          <a:chOff x="0" y="0"/>
+          <a:chExt cx="0" cy="0"/>
+        </a:xfrm>
+      </p:grpSpPr>
       <p:sp>
         <p:nvSpPr>
           <p:cNvPr id="2" name="TextBox 1"/>
@@ -24366,6 +24386,7 @@
           <a:lstStyle/>
           <a:p>
             <a:pPr algn="ctr"/>
+            <a:endParaRPr/>
           </a:p>
         </p:txBody>
       </p:sp>
@@ -24418,6 +24439,7 @@
                 <a:latin typeface="Consolas"/>
               </a:defRPr>
             </a:pPr>
+            <a:endParaRPr/>
           </a:p>
           <a:p>
             <a:pPr>
@@ -24479,6 +24501,7 @@
                 <a:latin typeface="Consolas"/>
               </a:defRPr>
             </a:pPr>
+            <a:endParaRPr/>
           </a:p>
           <a:p>
             <a:pPr>
@@ -24538,7 +24561,7 @@
         </p:nvSpPr>
         <p:spPr>
           <a:xfrm>
-            <a:off x="731520" y="3200400"/>
+            <a:off x="731520" y="3291840"/>
             <a:ext cx="10698480" cy="36576"/>
           </a:xfrm>
           <a:prstGeom prst="rect">
@@ -24570,6 +24593,7 @@
           <a:lstStyle/>
           <a:p>
             <a:pPr algn="ctr"/>
+            <a:endParaRPr/>
           </a:p>
         </p:txBody>
       </p:sp>
@@ -24581,7 +24605,7 @@
         </p:nvSpPr>
         <p:spPr>
           <a:xfrm>
-            <a:off x="731520" y="3383280"/>
+            <a:off x="731520" y="3474720"/>
             <a:ext cx="10515600" cy="365760"/>
           </a:xfrm>
           <a:prstGeom prst="rect">
@@ -24617,7 +24641,7 @@
         </p:nvSpPr>
         <p:spPr>
           <a:xfrm>
-            <a:off x="731520" y="3794760"/>
+            <a:off x="731520" y="3886200"/>
             <a:ext cx="3657600" cy="2286000"/>
           </a:xfrm>
           <a:prstGeom prst="rect">
@@ -24698,8 +24722,8 @@
         </p:nvSpPr>
         <p:spPr>
           <a:xfrm>
-            <a:off x="4114800" y="3794760"/>
-            <a:ext cx="6400800" cy="2286000"/>
+            <a:off x="4114800" y="3886200"/>
+            <a:ext cx="6400800" cy="1754326"/>
           </a:xfrm>
           <a:prstGeom prst="rect">
             <a:avLst/>
@@ -24721,41 +24745,196 @@
               </a:defRPr>
             </a:pPr>
             <a:r>
-              <a:t>Perché i parametri ($loc) invece</a:t>
-            </a:r>
-            <a:br/>
-            <a:r>
-              <a:t>di stringhe concatenate?</a:t>
-            </a:r>
-            <a:br/>
-            <a:br/>
-            <a:r>
-              <a:t>1. Sicurezza: previene Cypher Injection</a:t>
-            </a:r>
-            <a:br/>
-            <a:r>
-              <a:t>2. Performance: il piano viene cacheato</a:t>
-            </a:r>
-            <a:br/>
-            <a:r>
-              <a:t>3. Type safety: il driver gestisce</a:t>
-            </a:r>
-            <a:br/>
-            <a:r>
-              <a:t>   la conversione dei tipi automaticamente</a:t>
-            </a:r>
-            <a:br/>
-            <a:br/>
-            <a:r>
-              <a:t>Injection esempio EVITARE:</a:t>
-            </a:r>
-            <a:br/>
-            <a:r>
-              <a:t>  f"... location = '{valore}'"  ✖</a:t>
-            </a:r>
-            <a:br/>
-            <a:r>
-              <a:t>Usare parametri: location = $valore  ✔</a:t>
+              <a:rPr dirty="0" err="1"/>
+              <a:t>Perché</a:t>
+            </a:r>
+            <a:r>
+              <a:rPr dirty="0"/>
+              <a:t> </a:t>
+            </a:r>
+            <a:r>
+              <a:rPr dirty="0" err="1"/>
+              <a:t>i</a:t>
+            </a:r>
+            <a:r>
+              <a:rPr dirty="0"/>
+              <a:t> </a:t>
+            </a:r>
+            <a:r>
+              <a:rPr dirty="0" err="1"/>
+              <a:t>parametri</a:t>
+            </a:r>
+            <a:r>
+              <a:rPr dirty="0"/>
+              <a:t> ($loc) </a:t>
+            </a:r>
+            <a:r>
+              <a:rPr dirty="0" err="1"/>
+              <a:t>invece</a:t>
+            </a:r>
+            <a:r>
+              <a:rPr lang="en-US" dirty="0"/>
+              <a:t> </a:t>
+            </a:r>
+            <a:r>
+              <a:rPr dirty="0"/>
+              <a:t>di </a:t>
+            </a:r>
+            <a:r>
+              <a:rPr dirty="0" err="1"/>
+              <a:t>stringhe</a:t>
+            </a:r>
+            <a:r>
+              <a:rPr dirty="0"/>
+              <a:t> concatenate?</a:t>
+            </a:r>
+            <a:br>
+              <a:rPr dirty="0"/>
+            </a:br>
+            <a:br>
+              <a:rPr dirty="0"/>
+            </a:br>
+            <a:r>
+              <a:rPr dirty="0"/>
+              <a:t>1. </a:t>
+            </a:r>
+            <a:r>
+              <a:rPr dirty="0" err="1"/>
+              <a:t>Sicurezza</a:t>
+            </a:r>
+            <a:r>
+              <a:rPr dirty="0"/>
+              <a:t>: </a:t>
+            </a:r>
+            <a:r>
+              <a:rPr dirty="0" err="1"/>
+              <a:t>previene</a:t>
+            </a:r>
+            <a:r>
+              <a:rPr dirty="0"/>
+              <a:t> Cypher Injection</a:t>
+            </a:r>
+            <a:br>
+              <a:rPr dirty="0"/>
+            </a:br>
+            <a:r>
+              <a:rPr dirty="0"/>
+              <a:t>2. Performance: il piano </a:t>
+            </a:r>
+            <a:r>
+              <a:rPr dirty="0" err="1"/>
+              <a:t>viene</a:t>
+            </a:r>
+            <a:r>
+              <a:rPr dirty="0"/>
+              <a:t> </a:t>
+            </a:r>
+            <a:r>
+              <a:rPr dirty="0" err="1"/>
+              <a:t>cacheato</a:t>
+            </a:r>
+            <a:br>
+              <a:rPr dirty="0"/>
+            </a:br>
+            <a:r>
+              <a:rPr dirty="0"/>
+              <a:t>3. Type safety: il driver </a:t>
+            </a:r>
+            <a:r>
+              <a:rPr dirty="0" err="1"/>
+              <a:t>gestisce</a:t>
+            </a:r>
+            <a:r>
+              <a:rPr dirty="0"/>
+              <a:t> la </a:t>
+            </a:r>
+            <a:r>
+              <a:rPr dirty="0" err="1"/>
+              <a:t>conversione</a:t>
+            </a:r>
+            <a:r>
+              <a:rPr dirty="0"/>
+              <a:t> </a:t>
+            </a:r>
+            <a:r>
+              <a:rPr dirty="0" err="1"/>
+              <a:t>dei</a:t>
+            </a:r>
+            <a:r>
+              <a:rPr dirty="0"/>
+              <a:t> tipi </a:t>
+            </a:r>
+            <a:r>
+              <a:rPr dirty="0" err="1"/>
+              <a:t>automaticamente</a:t>
+            </a:r>
+            <a:br>
+              <a:rPr dirty="0"/>
+            </a:br>
+            <a:br>
+              <a:rPr dirty="0"/>
+            </a:br>
+            <a:r>
+              <a:rPr dirty="0"/>
+              <a:t>Injection </a:t>
+            </a:r>
+            <a:r>
+              <a:rPr dirty="0" err="1"/>
+              <a:t>esempio</a:t>
+            </a:r>
+            <a:r>
+              <a:rPr dirty="0"/>
+              <a:t> EVITARE:</a:t>
+            </a:r>
+            <a:br>
+              <a:rPr dirty="0"/>
+            </a:br>
+            <a:r>
+              <a:rPr dirty="0"/>
+              <a:t>  f"... location = '{</a:t>
+            </a:r>
+            <a:r>
+              <a:rPr dirty="0" err="1"/>
+              <a:t>valore</a:t>
+            </a:r>
+            <a:r>
+              <a:rPr dirty="0"/>
+              <a:t>}'</a:t>
+            </a:r>
+            <a:r>
+              <a:rPr lang="en-US" dirty="0"/>
+              <a:t> </a:t>
+            </a:r>
+            <a:r>
+              <a:rPr dirty="0"/>
+              <a:t>"  ✖</a:t>
+            </a:r>
+            <a:br>
+              <a:rPr dirty="0"/>
+            </a:br>
+            <a:r>
+              <a:rPr dirty="0" err="1"/>
+              <a:t>Usare</a:t>
+            </a:r>
+            <a:r>
+              <a:rPr dirty="0"/>
+              <a:t> </a:t>
+            </a:r>
+            <a:r>
+              <a:rPr dirty="0" err="1"/>
+              <a:t>parametri</a:t>
+            </a:r>
+            <a:r>
+              <a:rPr dirty="0"/>
+              <a:t>: location = $</a:t>
+            </a:r>
+            <a:r>
+              <a:rPr dirty="0" err="1"/>
+              <a:t>valore</a:t>
+            </a:r>
+            <a:r>
+              <a:rPr dirty="0"/>
+              <a:t>  ✔</a:t>
             </a:r>
           </a:p>
         </p:txBody>
@@ -24769,7 +24948,7 @@
 </file>
 
 <file path=ppt/slides/slide11.xml><?xml version="1.0" encoding="utf-8"?>
-<p:sld xmlns:a="http://schemas.openxmlformats.org/drawingml/2006/main" xmlns:p="http://schemas.openxmlformats.org/presentationml/2006/main" xmlns:r="http://schemas.openxmlformats.org/officeDocument/2006/relationships">
+<p:sld xmlns:a="http://schemas.openxmlformats.org/drawingml/2006/main" xmlns:r="http://schemas.openxmlformats.org/officeDocument/2006/relationships" xmlns:p="http://schemas.openxmlformats.org/presentationml/2006/main">
   <p:cSld>
     <p:bg>
       <p:bgPr>
@@ -24785,7 +24964,14 @@
         <p:cNvGrpSpPr/>
         <p:nvPr/>
       </p:nvGrpSpPr>
-      <p:grpSpPr/>
+      <p:grpSpPr>
+        <a:xfrm>
+          <a:off x="0" y="0"/>
+          <a:ext cx="0" cy="0"/>
+          <a:chOff x="0" y="0"/>
+          <a:chExt cx="0" cy="0"/>
+        </a:xfrm>
+      </p:grpSpPr>
       <p:sp>
         <p:nvSpPr>
           <p:cNvPr id="2" name="TextBox 1"/>
@@ -24936,6 +25122,7 @@
           <a:lstStyle/>
           <a:p>
             <a:pPr algn="ctr"/>
+            <a:endParaRPr/>
           </a:p>
         </p:txBody>
       </p:sp>
@@ -25050,7 +25237,7 @@
         </p:nvSpPr>
         <p:spPr>
           <a:xfrm>
-            <a:off x="4114800" y="1417320"/>
+            <a:off x="4498848" y="1417320"/>
             <a:ext cx="3657600" cy="411480"/>
           </a:xfrm>
           <a:prstGeom prst="rect">
@@ -25086,7 +25273,7 @@
         </p:nvSpPr>
         <p:spPr>
           <a:xfrm>
-            <a:off x="4114800" y="1874519"/>
+            <a:off x="4498848" y="1874519"/>
             <a:ext cx="3657600" cy="1188720"/>
           </a:xfrm>
           <a:prstGeom prst="rect">
@@ -25120,6 +25307,7 @@
           <a:lstStyle/>
           <a:p>
             <a:pPr algn="ctr"/>
+            <a:endParaRPr/>
           </a:p>
         </p:txBody>
       </p:sp>
@@ -25131,8 +25319,8 @@
         </p:nvSpPr>
         <p:spPr>
           <a:xfrm>
-            <a:off x="4224528" y="1947671"/>
-            <a:ext cx="3438144" cy="1042416"/>
+            <a:off x="4608576" y="1947671"/>
+            <a:ext cx="3578354" cy="913070"/>
           </a:xfrm>
           <a:prstGeom prst="rect">
             <a:avLst/>
@@ -25157,8 +25345,14 @@
               </a:defRPr>
             </a:pPr>
             <a:r>
-              <a:t>(p)-[:HAS_SKILL]-&gt;(s)    // uscita</a:t>
-            </a:r>
+              <a:rPr dirty="0"/>
+              <a:t>(p)-[:HAS_SKILL]-&gt;(s)    // </a:t>
+            </a:r>
+            <a:r>
+              <a:rPr dirty="0" err="1"/>
+              <a:t>uscita</a:t>
+            </a:r>
+            <a:endParaRPr dirty="0"/>
           </a:p>
           <a:p>
             <a:pPr>
@@ -25173,8 +25367,14 @@
               </a:defRPr>
             </a:pPr>
             <a:r>
-              <a:t>(p)&lt;-[:REPORTS_TO]-(s)   // entrata</a:t>
-            </a:r>
+              <a:rPr dirty="0"/>
+              <a:t>(p)&lt;-[:REPORTS_TO]-(s)   // </a:t>
+            </a:r>
+            <a:r>
+              <a:rPr dirty="0" err="1"/>
+              <a:t>entrata</a:t>
+            </a:r>
+            <a:endParaRPr dirty="0"/>
           </a:p>
           <a:p>
             <a:pPr>
@@ -25189,8 +25389,22 @@
               </a:defRPr>
             </a:pPr>
             <a:r>
-              <a:t>(p)-[r:HAS_SKILL]-&gt;(s)   // con variabile</a:t>
-            </a:r>
+              <a:rPr dirty="0"/>
+              <a:t>(p)-[</a:t>
+            </a:r>
+            <a:r>
+              <a:rPr dirty="0" err="1"/>
+              <a:t>r:HAS_SKILL</a:t>
+            </a:r>
+            <a:r>
+              <a:rPr dirty="0"/>
+              <a:t>]-&gt;(s)   // con </a:t>
+            </a:r>
+            <a:r>
+              <a:rPr dirty="0" err="1"/>
+              <a:t>variabile</a:t>
+            </a:r>
+            <a:endParaRPr dirty="0"/>
           </a:p>
           <a:p>
             <a:pPr>
@@ -25205,6 +25419,7 @@
               </a:defRPr>
             </a:pPr>
             <a:r>
+              <a:rPr dirty="0"/>
               <a:t>(p)-[h {proficiency:5}]-&gt;(s) // con props</a:t>
             </a:r>
           </a:p>
@@ -25221,8 +25436,22 @@
               </a:defRPr>
             </a:pPr>
             <a:r>
-              <a:t>(p)-[:KNOWS*1..3]-(q)    // profondità variabile</a:t>
-            </a:r>
+              <a:rPr dirty="0"/>
+              <a:t>(p)-[:KNOWS*1..3]-(q)    // </a:t>
+            </a:r>
+            <a:r>
+              <a:rPr dirty="0" err="1"/>
+              <a:t>profondità</a:t>
+            </a:r>
+            <a:r>
+              <a:rPr dirty="0"/>
+              <a:t> </a:t>
+            </a:r>
+            <a:r>
+              <a:rPr dirty="0" err="1"/>
+              <a:t>variabile</a:t>
+            </a:r>
+            <a:endParaRPr dirty="0"/>
           </a:p>
         </p:txBody>
       </p:sp>
@@ -25234,7 +25463,7 @@
         </p:nvSpPr>
         <p:spPr>
           <a:xfrm>
-            <a:off x="7772400" y="1417320"/>
+            <a:off x="8266176" y="1417320"/>
             <a:ext cx="3657600" cy="411480"/>
           </a:xfrm>
           <a:prstGeom prst="rect">
@@ -25270,7 +25499,7 @@
         </p:nvSpPr>
         <p:spPr>
           <a:xfrm>
-            <a:off x="7772400" y="1874519"/>
+            <a:off x="8266176" y="1874519"/>
             <a:ext cx="2743200" cy="1188720"/>
           </a:xfrm>
           <a:prstGeom prst="rect">
@@ -25304,6 +25533,7 @@
           <a:lstStyle/>
           <a:p>
             <a:pPr algn="ctr"/>
+            <a:endParaRPr/>
           </a:p>
         </p:txBody>
       </p:sp>
@@ -25315,7 +25545,7 @@
         </p:nvSpPr>
         <p:spPr>
           <a:xfrm>
-            <a:off x="7882128" y="1947671"/>
+            <a:off x="8375904" y="1947671"/>
             <a:ext cx="2523744" cy="1042416"/>
           </a:xfrm>
           <a:prstGeom prst="rect">
@@ -25450,6 +25680,7 @@
           <a:lstStyle/>
           <a:p>
             <a:pPr algn="ctr"/>
+            <a:endParaRPr/>
           </a:p>
         </p:txBody>
       </p:sp>
@@ -25523,8 +25754,54 @@
               </a:defRPr>
             </a:pPr>
             <a:r>
-              <a:t>•  MATCH cerca il pattern nel grafo — se non trova corrispondenza, righe vuote</a:t>
-            </a:r>
+              <a:rPr dirty="0"/>
+              <a:t>•  MATCH </a:t>
+            </a:r>
+            <a:r>
+              <a:rPr dirty="0" err="1"/>
+              <a:t>cerca</a:t>
+            </a:r>
+            <a:r>
+              <a:rPr dirty="0"/>
+              <a:t> il pattern </a:t>
+            </a:r>
+            <a:r>
+              <a:rPr dirty="0" err="1"/>
+              <a:t>nel</a:t>
+            </a:r>
+            <a:r>
+              <a:rPr dirty="0"/>
+              <a:t> </a:t>
+            </a:r>
+            <a:r>
+              <a:rPr dirty="0" err="1"/>
+              <a:t>grafo</a:t>
+            </a:r>
+            <a:r>
+              <a:rPr dirty="0"/>
+              <a:t> — se non trova </a:t>
+            </a:r>
+            <a:r>
+              <a:rPr dirty="0" err="1"/>
+              <a:t>corrispondenza</a:t>
+            </a:r>
+            <a:r>
+              <a:rPr dirty="0"/>
+              <a:t>, </a:t>
+            </a:r>
+            <a:r>
+              <a:rPr dirty="0" err="1"/>
+              <a:t>righe</a:t>
+            </a:r>
+            <a:r>
+              <a:rPr dirty="0"/>
+              <a:t> </a:t>
+            </a:r>
+            <a:r>
+              <a:rPr dirty="0" err="1"/>
+              <a:t>vuote</a:t>
+            </a:r>
+            <a:endParaRPr dirty="0"/>
           </a:p>
           <a:p>
             <a:pPr algn="l">
@@ -25539,8 +25816,46 @@
               </a:defRPr>
             </a:pPr>
             <a:r>
-              <a:t>•  La variabile (es: p) serve per riferirsi al nodo in RETURN, WHERE e altre clausole</a:t>
-            </a:r>
+              <a:rPr dirty="0"/>
+              <a:t>•  La </a:t>
+            </a:r>
+            <a:r>
+              <a:rPr dirty="0" err="1"/>
+              <a:t>variabile</a:t>
+            </a:r>
+            <a:r>
+              <a:rPr dirty="0"/>
+              <a:t> (es: p) serve per </a:t>
+            </a:r>
+            <a:r>
+              <a:rPr dirty="0" err="1"/>
+              <a:t>riferirsi</a:t>
+            </a:r>
+            <a:r>
+              <a:rPr dirty="0"/>
+              <a:t> al </a:t>
+            </a:r>
+            <a:r>
+              <a:rPr dirty="0" err="1"/>
+              <a:t>nodo</a:t>
+            </a:r>
+            <a:r>
+              <a:rPr dirty="0"/>
+              <a:t> in RETURN, WHERE e </a:t>
+            </a:r>
+            <a:r>
+              <a:rPr dirty="0" err="1"/>
+              <a:t>altre</a:t>
+            </a:r>
+            <a:r>
+              <a:rPr dirty="0"/>
+              <a:t> </a:t>
+            </a:r>
+            <a:r>
+              <a:rPr dirty="0" err="1"/>
+              <a:t>clausole</a:t>
+            </a:r>
+            <a:endParaRPr dirty="0"/>
           </a:p>
           <a:p>
             <a:pPr algn="l">
@@ -25555,8 +25870,62 @@
               </a:defRPr>
             </a:pPr>
             <a:r>
-              <a:t>•  Le proprietà in MATCH filtrano: MATCH (p:Person {name: 'Alice'}) cerca quel nodo specifico</a:t>
-            </a:r>
+              <a:rPr dirty="0"/>
+              <a:t>•  Le </a:t>
+            </a:r>
+            <a:r>
+              <a:rPr dirty="0" err="1"/>
+              <a:t>proprietà</a:t>
+            </a:r>
+            <a:r>
+              <a:rPr dirty="0"/>
+              <a:t> in MATCH </a:t>
+            </a:r>
+            <a:r>
+              <a:rPr dirty="0" err="1"/>
+              <a:t>filtrano</a:t>
+            </a:r>
+            <a:r>
+              <a:rPr dirty="0"/>
+              <a:t>: MATCH (</a:t>
+            </a:r>
+            <a:r>
+              <a:rPr dirty="0" err="1"/>
+              <a:t>p:Person</a:t>
+            </a:r>
+            <a:r>
+              <a:rPr dirty="0"/>
+              <a:t> {name: 'Alice'}) </a:t>
+            </a:r>
+            <a:r>
+              <a:rPr dirty="0" err="1"/>
+              <a:t>cerca</a:t>
+            </a:r>
+            <a:r>
+              <a:rPr dirty="0"/>
+              <a:t> </a:t>
+            </a:r>
+            <a:r>
+              <a:rPr dirty="0" err="1"/>
+              <a:t>quel</a:t>
+            </a:r>
+            <a:r>
+              <a:rPr dirty="0"/>
+              <a:t> </a:t>
+            </a:r>
+            <a:r>
+              <a:rPr dirty="0" err="1"/>
+              <a:t>nodo</a:t>
+            </a:r>
+            <a:r>
+              <a:rPr dirty="0"/>
+              <a:t> </a:t>
+            </a:r>
+            <a:r>
+              <a:rPr dirty="0" err="1"/>
+              <a:t>specifico</a:t>
+            </a:r>
+            <a:endParaRPr dirty="0"/>
           </a:p>
           <a:p>
             <a:pPr algn="l">
@@ -25571,8 +25940,54 @@
               </a:defRPr>
             </a:pPr>
             <a:r>
-              <a:t>•  La freccia indica la direzione della relazione: → uscita, ← entrata, — bidirezionale</a:t>
-            </a:r>
+              <a:rPr dirty="0"/>
+              <a:t>•  La </a:t>
+            </a:r>
+            <a:r>
+              <a:rPr dirty="0" err="1"/>
+              <a:t>freccia</a:t>
+            </a:r>
+            <a:r>
+              <a:rPr dirty="0"/>
+              <a:t> indica la </a:t>
+            </a:r>
+            <a:r>
+              <a:rPr dirty="0" err="1"/>
+              <a:t>direzione</a:t>
+            </a:r>
+            <a:r>
+              <a:rPr dirty="0"/>
+              <a:t> della </a:t>
+            </a:r>
+            <a:r>
+              <a:rPr dirty="0" err="1"/>
+              <a:t>relazione</a:t>
+            </a:r>
+            <a:r>
+              <a:rPr dirty="0"/>
+              <a:t>: → </a:t>
+            </a:r>
+            <a:r>
+              <a:rPr dirty="0" err="1"/>
+              <a:t>uscita</a:t>
+            </a:r>
+            <a:r>
+              <a:rPr dirty="0"/>
+              <a:t>, ← </a:t>
+            </a:r>
+            <a:r>
+              <a:rPr dirty="0" err="1"/>
+              <a:t>entrata</a:t>
+            </a:r>
+            <a:r>
+              <a:rPr dirty="0"/>
+              <a:t>, — </a:t>
+            </a:r>
+            <a:r>
+              <a:rPr dirty="0" err="1"/>
+              <a:t>bidirezionale</a:t>
+            </a:r>
+            <a:endParaRPr dirty="0"/>
           </a:p>
           <a:p>
             <a:pPr algn="l">
@@ -25587,7 +26002,32 @@
               </a:defRPr>
             </a:pPr>
             <a:r>
-              <a:t>•  I commenti in Cypher usano // (non -- che è SQL)</a:t>
+              <a:rPr dirty="0"/>
+              <a:t>•  I </a:t>
+            </a:r>
+            <a:r>
+              <a:rPr dirty="0" err="1"/>
+              <a:t>commenti</a:t>
+            </a:r>
+            <a:r>
+              <a:rPr dirty="0"/>
+              <a:t> in Cypher </a:t>
+            </a:r>
+            <a:r>
+              <a:rPr dirty="0" err="1"/>
+              <a:t>usano</a:t>
+            </a:r>
+            <a:r>
+              <a:rPr dirty="0"/>
+              <a:t> // (non -- </a:t>
+            </a:r>
+            <a:r>
+              <a:rPr dirty="0" err="1"/>
+              <a:t>che</a:t>
+            </a:r>
+            <a:r>
+              <a:rPr dirty="0"/>
+              <a:t> è SQL)</a:t>
             </a:r>
           </a:p>
         </p:txBody>
@@ -25601,7 +26041,7 @@
 </file>
 
 <file path=ppt/slides/slide12.xml><?xml version="1.0" encoding="utf-8"?>
-<p:sld xmlns:a="http://schemas.openxmlformats.org/drawingml/2006/main" xmlns:p="http://schemas.openxmlformats.org/presentationml/2006/main" xmlns:r="http://schemas.openxmlformats.org/officeDocument/2006/relationships">
+<p:sld xmlns:a="http://schemas.openxmlformats.org/drawingml/2006/main" xmlns:r="http://schemas.openxmlformats.org/officeDocument/2006/relationships" xmlns:p="http://schemas.openxmlformats.org/presentationml/2006/main">
   <p:cSld>
     <p:bg>
       <p:bgPr>
@@ -25617,7 +26057,14 @@
         <p:cNvGrpSpPr/>
         <p:nvPr/>
       </p:nvGrpSpPr>
-      <p:grpSpPr/>
+      <p:grpSpPr>
+        <a:xfrm>
+          <a:off x="0" y="0"/>
+          <a:ext cx="0" cy="0"/>
+          <a:chOff x="0" y="0"/>
+          <a:chExt cx="0" cy="0"/>
+        </a:xfrm>
+      </p:grpSpPr>
       <p:sp>
         <p:nvSpPr>
           <p:cNvPr id="2" name="TextBox 1"/>
@@ -25698,8 +26145,8 @@
         </p:nvSpPr>
         <p:spPr>
           <a:xfrm>
-            <a:off x="731520" y="1463040"/>
-            <a:ext cx="5029200" cy="2194560"/>
+            <a:off x="731520" y="1376172"/>
+            <a:ext cx="5029200" cy="2359152"/>
           </a:xfrm>
           <a:prstGeom prst="rect">
             <a:avLst/>
@@ -25732,6 +26179,7 @@
           <a:lstStyle/>
           <a:p>
             <a:pPr algn="ctr"/>
+            <a:endParaRPr/>
           </a:p>
         </p:txBody>
       </p:sp>
@@ -25743,7 +26191,7 @@
         </p:nvSpPr>
         <p:spPr>
           <a:xfrm>
-            <a:off x="841248" y="1536192"/>
+            <a:off x="841248" y="1449324"/>
             <a:ext cx="4809744" cy="2048256"/>
           </a:xfrm>
           <a:prstGeom prst="rect">
@@ -25769,7 +26217,48 @@
               </a:defRPr>
             </a:pPr>
             <a:r>
-              <a:t>// Persone che lavorano INSIEME su un progetto:</a:t>
+              <a:rPr dirty="0"/>
+              <a:t>// </a:t>
+            </a:r>
+            <a:r>
+              <a:rPr dirty="0" err="1"/>
+              <a:t>Persone</a:t>
+            </a:r>
+            <a:r>
+              <a:rPr dirty="0"/>
+              <a:t> </a:t>
+            </a:r>
+            <a:r>
+              <a:rPr dirty="0" err="1"/>
+              <a:t>che</a:t>
+            </a:r>
+            <a:r>
+              <a:rPr dirty="0"/>
+              <a:t> </a:t>
+            </a:r>
+            <a:r>
+              <a:rPr dirty="0" err="1"/>
+              <a:t>lavorano</a:t>
+            </a:r>
+            <a:r>
+              <a:rPr dirty="0"/>
+              <a:t> INSIEME </a:t>
+            </a:r>
+            <a:r>
+              <a:rPr dirty="0" err="1"/>
+              <a:t>su</a:t>
+            </a:r>
+            <a:r>
+              <a:rPr dirty="0"/>
+              <a:t> un </a:t>
+            </a:r>
+            <a:r>
+              <a:rPr dirty="0" err="1"/>
+              <a:t>progetto</a:t>
+            </a:r>
+            <a:r>
+              <a:rPr dirty="0"/>
+              <a:t>:</a:t>
             </a:r>
           </a:p>
           <a:p>
@@ -25785,7 +26274,16 @@
               </a:defRPr>
             </a:pPr>
             <a:r>
-              <a:t>MATCH (p1:Person)-[:WORKED_ON]-&gt;(proj:Project)</a:t>
+              <a:rPr dirty="0"/>
+              <a:t>MATCH (p1:Person)-[:WORKED_ON]-&gt;(</a:t>
+            </a:r>
+            <a:r>
+              <a:rPr dirty="0" err="1"/>
+              <a:t>proj:Project</a:t>
+            </a:r>
+            <a:r>
+              <a:rPr dirty="0"/>
+              <a:t>)</a:t>
             </a:r>
           </a:p>
           <a:p>
@@ -25801,6 +26299,7 @@
               </a:defRPr>
             </a:pPr>
             <a:r>
+              <a:rPr dirty="0"/>
               <a:t>      &lt;-[:WORKED_ON]-(p2:Person)</a:t>
             </a:r>
           </a:p>
@@ -25817,6 +26316,7 @@
               </a:defRPr>
             </a:pPr>
             <a:r>
+              <a:rPr dirty="0"/>
               <a:t>RETURN p1.name, p2.name, proj.name</a:t>
             </a:r>
           </a:p>
@@ -25833,6 +26333,7 @@
               </a:defRPr>
             </a:pPr>
             <a:r>
+              <a:rPr dirty="0"/>
               <a:t>LIMIT 10;</a:t>
             </a:r>
           </a:p>
@@ -25848,6 +26349,7 @@
                 <a:latin typeface="Consolas"/>
               </a:defRPr>
             </a:pPr>
+            <a:endParaRPr dirty="0"/>
           </a:p>
           <a:p>
             <a:pPr>
@@ -25862,6 +26364,7 @@
               </a:defRPr>
             </a:pPr>
             <a:r>
+              <a:rPr dirty="0"/>
               <a:t>// Output:</a:t>
             </a:r>
           </a:p>
@@ -25878,6 +26381,7 @@
               </a:defRPr>
             </a:pPr>
             <a:r>
+              <a:rPr dirty="0"/>
               <a:t>// Alice | Bob | AI Platform</a:t>
             </a:r>
           </a:p>
@@ -25894,6 +26398,7 @@
               </a:defRPr>
             </a:pPr>
             <a:r>
+              <a:rPr dirty="0"/>
               <a:t>// Carlo | Diana | Data Lake</a:t>
             </a:r>
           </a:p>
@@ -25909,6 +26414,7 @@
                 <a:latin typeface="Consolas"/>
               </a:defRPr>
             </a:pPr>
+            <a:endParaRPr dirty="0"/>
           </a:p>
           <a:p>
             <a:pPr>
@@ -25923,8 +26429,22 @@
               </a:defRPr>
             </a:pPr>
             <a:r>
-              <a:t>// Pattern: P1 ha lavorato a un progetto</a:t>
-            </a:r>
+              <a:rPr dirty="0"/>
+              <a:t>// Pattern: P1 ha </a:t>
+            </a:r>
+            <a:r>
+              <a:rPr dirty="0" err="1"/>
+              <a:t>lavorato</a:t>
+            </a:r>
+            <a:r>
+              <a:rPr dirty="0"/>
+              <a:t> a un </a:t>
+            </a:r>
+            <a:r>
+              <a:rPr dirty="0" err="1"/>
+              <a:t>progetto</a:t>
+            </a:r>
+            <a:endParaRPr dirty="0"/>
           </a:p>
           <a:p>
             <a:pPr>
@@ -25939,7 +26459,24 @@
               </a:defRPr>
             </a:pPr>
             <a:r>
-              <a:t>// a cui ha lavorato anche P2.</a:t>
+              <a:rPr dirty="0"/>
+              <a:t>// a cui ha </a:t>
+            </a:r>
+            <a:r>
+              <a:rPr dirty="0" err="1"/>
+              <a:t>lavorato</a:t>
+            </a:r>
+            <a:r>
+              <a:rPr dirty="0"/>
+              <a:t> </a:t>
+            </a:r>
+            <a:r>
+              <a:rPr dirty="0" err="1"/>
+              <a:t>anche</a:t>
+            </a:r>
+            <a:r>
+              <a:rPr dirty="0"/>
+              <a:t> P2.</a:t>
             </a:r>
           </a:p>
           <a:p>
@@ -25955,7 +26492,32 @@
               </a:defRPr>
             </a:pPr>
             <a:r>
-              <a:t>// proj è il nodo PROJECT condiviso.</a:t>
+              <a:rPr dirty="0"/>
+              <a:t>// </a:t>
+            </a:r>
+            <a:r>
+              <a:rPr dirty="0" err="1"/>
+              <a:t>proj</a:t>
+            </a:r>
+            <a:r>
+              <a:rPr dirty="0"/>
+              <a:t> è il </a:t>
+            </a:r>
+            <a:r>
+              <a:rPr dirty="0" err="1"/>
+              <a:t>nodo</a:t>
+            </a:r>
+            <a:r>
+              <a:rPr dirty="0"/>
+              <a:t> PROJECT </a:t>
+            </a:r>
+            <a:r>
+              <a:rPr dirty="0" err="1"/>
+              <a:t>condiviso</a:t>
+            </a:r>
+            <a:r>
+              <a:rPr dirty="0"/>
+              <a:t>.</a:t>
             </a:r>
           </a:p>
         </p:txBody>
@@ -25968,7 +26530,837 @@
         </p:nvSpPr>
         <p:spPr>
           <a:xfrm>
-            <a:off x="5669280" y="1463040"/>
+            <a:off x="6096000" y="1376172"/>
+            <a:ext cx="4846320" cy="2359152"/>
+          </a:xfrm>
+          <a:prstGeom prst="rect">
+            <a:avLst/>
+          </a:prstGeom>
+          <a:solidFill>
+            <a:srgbClr val="1B2A4A"/>
+          </a:solidFill>
+          <a:ln w="12700">
+            <a:solidFill>
+              <a:srgbClr val="2D4F7A"/>
+            </a:solidFill>
+          </a:ln>
+        </p:spPr>
+        <p:style>
+          <a:lnRef idx="1">
+            <a:schemeClr val="accent1"/>
+          </a:lnRef>
+          <a:fillRef idx="3">
+            <a:schemeClr val="accent1"/>
+          </a:fillRef>
+          <a:effectRef idx="2">
+            <a:schemeClr val="accent1"/>
+          </a:effectRef>
+          <a:fontRef idx="minor">
+            <a:schemeClr val="lt1"/>
+          </a:fontRef>
+        </p:style>
+        <p:txBody>
+          <a:bodyPr rtlCol="0" anchor="ctr"/>
+          <a:lstStyle/>
+          <a:p>
+            <a:pPr algn="ctr"/>
+            <a:endParaRPr/>
+          </a:p>
+        </p:txBody>
+      </p:sp>
+      <p:sp>
+        <p:nvSpPr>
+          <p:cNvPr id="7" name="TextBox 6"/>
+          <p:cNvSpPr txBox="1"/>
+          <p:nvPr/>
+        </p:nvSpPr>
+        <p:spPr>
+          <a:xfrm>
+            <a:off x="6205728" y="1449324"/>
+            <a:ext cx="4626864" cy="2048256"/>
+          </a:xfrm>
+          <a:prstGeom prst="rect">
+            <a:avLst/>
+          </a:prstGeom>
+          <a:noFill/>
+        </p:spPr>
+        <p:txBody>
+          <a:bodyPr wrap="square">
+            <a:spAutoFit/>
+          </a:bodyPr>
+          <a:lstStyle/>
+          <a:p>
+            <a:pPr>
+              <a:spcAft>
+                <a:spcPts val="100"/>
+              </a:spcAft>
+              <a:defRPr sz="1000">
+                <a:solidFill>
+                  <a:srgbClr val="7EC68E"/>
+                </a:solidFill>
+                <a:latin typeface="Consolas"/>
+              </a:defRPr>
+            </a:pPr>
+            <a:r>
+              <a:t>// Path a profondità variabile:</a:t>
+            </a:r>
+          </a:p>
+          <a:p>
+            <a:pPr>
+              <a:spcAft>
+                <a:spcPts val="100"/>
+              </a:spcAft>
+              <a:defRPr sz="1000">
+                <a:solidFill>
+                  <a:srgbClr val="7EC68E"/>
+                </a:solidFill>
+                <a:latin typeface="Consolas"/>
+              </a:defRPr>
+            </a:pPr>
+            <a:r>
+              <a:t>// Cerchiamo persone raggiungibili via</a:t>
+            </a:r>
+          </a:p>
+          <a:p>
+            <a:pPr>
+              <a:spcAft>
+                <a:spcPts val="100"/>
+              </a:spcAft>
+              <a:defRPr sz="1000">
+                <a:solidFill>
+                  <a:srgbClr val="7EC68E"/>
+                </a:solidFill>
+                <a:latin typeface="Consolas"/>
+              </a:defRPr>
+            </a:pPr>
+            <a:r>
+              <a:t>// WORKED_ON in al massimo 3 salti:</a:t>
+            </a:r>
+          </a:p>
+          <a:p>
+            <a:pPr>
+              <a:spcAft>
+                <a:spcPts val="100"/>
+              </a:spcAft>
+              <a:defRPr sz="1000">
+                <a:solidFill>
+                  <a:srgbClr val="7EC68E"/>
+                </a:solidFill>
+                <a:latin typeface="Consolas"/>
+              </a:defRPr>
+            </a:pPr>
+            <a:r>
+              <a:t>MATCH path = (a:Person {employee_id: 1})</a:t>
+            </a:r>
+          </a:p>
+          <a:p>
+            <a:pPr>
+              <a:spcAft>
+                <a:spcPts val="100"/>
+              </a:spcAft>
+              <a:defRPr sz="1000">
+                <a:solidFill>
+                  <a:srgbClr val="7EC68E"/>
+                </a:solidFill>
+                <a:latin typeface="Consolas"/>
+              </a:defRPr>
+            </a:pPr>
+            <a:r>
+              <a:t>      -[:WORKED_ON*1..3]-(b:Person)</a:t>
+            </a:r>
+          </a:p>
+          <a:p>
+            <a:pPr>
+              <a:spcAft>
+                <a:spcPts val="100"/>
+              </a:spcAft>
+              <a:defRPr sz="1000">
+                <a:solidFill>
+                  <a:srgbClr val="7EC68E"/>
+                </a:solidFill>
+                <a:latin typeface="Consolas"/>
+              </a:defRPr>
+            </a:pPr>
+            <a:r>
+              <a:t>RETURN [n IN nodes(path) | n.name] AS percorso,</a:t>
+            </a:r>
+          </a:p>
+          <a:p>
+            <a:pPr>
+              <a:spcAft>
+                <a:spcPts val="100"/>
+              </a:spcAft>
+              <a:defRPr sz="1000">
+                <a:solidFill>
+                  <a:srgbClr val="7EC68E"/>
+                </a:solidFill>
+                <a:latin typeface="Consolas"/>
+              </a:defRPr>
+            </a:pPr>
+            <a:r>
+              <a:t>       length(path) AS salti</a:t>
+            </a:r>
+          </a:p>
+          <a:p>
+            <a:pPr>
+              <a:spcAft>
+                <a:spcPts val="100"/>
+              </a:spcAft>
+              <a:defRPr sz="1000">
+                <a:solidFill>
+                  <a:srgbClr val="7EC68E"/>
+                </a:solidFill>
+                <a:latin typeface="Consolas"/>
+              </a:defRPr>
+            </a:pPr>
+            <a:r>
+              <a:t>LIMIT 5;</a:t>
+            </a:r>
+          </a:p>
+          <a:p>
+            <a:pPr>
+              <a:spcAft>
+                <a:spcPts val="100"/>
+              </a:spcAft>
+              <a:defRPr sz="1000">
+                <a:solidFill>
+                  <a:srgbClr val="7EC68E"/>
+                </a:solidFill>
+                <a:latin typeface="Consolas"/>
+              </a:defRPr>
+            </a:pPr>
+            <a:endParaRPr/>
+          </a:p>
+          <a:p>
+            <a:pPr>
+              <a:spcAft>
+                <a:spcPts val="100"/>
+              </a:spcAft>
+              <a:defRPr sz="1000">
+                <a:solidFill>
+                  <a:srgbClr val="7EC68E"/>
+                </a:solidFill>
+                <a:latin typeface="Consolas"/>
+              </a:defRPr>
+            </a:pPr>
+            <a:r>
+              <a:t>// [*1..3] = da 1 a 3 relazioni WORKED_ON</a:t>
+            </a:r>
+          </a:p>
+          <a:p>
+            <a:pPr>
+              <a:spcAft>
+                <a:spcPts val="100"/>
+              </a:spcAft>
+              <a:defRPr sz="1000">
+                <a:solidFill>
+                  <a:srgbClr val="7EC68E"/>
+                </a:solidFill>
+                <a:latin typeface="Consolas"/>
+              </a:defRPr>
+            </a:pPr>
+            <a:r>
+              <a:t>// path = variabile per l'intero percorso</a:t>
+            </a:r>
+          </a:p>
+          <a:p>
+            <a:pPr>
+              <a:spcAft>
+                <a:spcPts val="100"/>
+              </a:spcAft>
+              <a:defRPr sz="1000">
+                <a:solidFill>
+                  <a:srgbClr val="7EC68E"/>
+                </a:solidFill>
+                <a:latin typeface="Consolas"/>
+              </a:defRPr>
+            </a:pPr>
+            <a:r>
+              <a:t>// nodes(path) = lista nodi del percorso</a:t>
+            </a:r>
+          </a:p>
+        </p:txBody>
+      </p:sp>
+      <p:sp>
+        <p:nvSpPr>
+          <p:cNvPr id="8" name="Rectangle 7"/>
+          <p:cNvSpPr/>
+          <p:nvPr/>
+        </p:nvSpPr>
+        <p:spPr>
+          <a:xfrm>
+            <a:off x="731520" y="3995928"/>
+            <a:ext cx="10698480" cy="36576"/>
+          </a:xfrm>
+          <a:prstGeom prst="rect">
+            <a:avLst/>
+          </a:prstGeom>
+          <a:solidFill>
+            <a:srgbClr val="F0C040"/>
+          </a:solidFill>
+          <a:ln>
+            <a:noFill/>
+          </a:ln>
+        </p:spPr>
+        <p:style>
+          <a:lnRef idx="1">
+            <a:schemeClr val="accent1"/>
+          </a:lnRef>
+          <a:fillRef idx="3">
+            <a:schemeClr val="accent1"/>
+          </a:fillRef>
+          <a:effectRef idx="2">
+            <a:schemeClr val="accent1"/>
+          </a:effectRef>
+          <a:fontRef idx="minor">
+            <a:schemeClr val="lt1"/>
+          </a:fontRef>
+        </p:style>
+        <p:txBody>
+          <a:bodyPr rtlCol="0" anchor="ctr"/>
+          <a:lstStyle/>
+          <a:p>
+            <a:pPr algn="ctr"/>
+            <a:endParaRPr/>
+          </a:p>
+        </p:txBody>
+      </p:sp>
+      <p:sp>
+        <p:nvSpPr>
+          <p:cNvPr id="9" name="TextBox 8"/>
+          <p:cNvSpPr txBox="1"/>
+          <p:nvPr/>
+        </p:nvSpPr>
+        <p:spPr>
+          <a:xfrm>
+            <a:off x="731520" y="4178808"/>
+            <a:ext cx="10515600" cy="365760"/>
+          </a:xfrm>
+          <a:prstGeom prst="rect">
+            <a:avLst/>
+          </a:prstGeom>
+          <a:noFill/>
+        </p:spPr>
+        <p:txBody>
+          <a:bodyPr wrap="square">
+            <a:spAutoFit/>
+          </a:bodyPr>
+          <a:lstStyle/>
+          <a:p>
+            <a:pPr algn="l">
+              <a:defRPr sz="1500" b="1">
+                <a:solidFill>
+                  <a:srgbClr val="F08040"/>
+                </a:solidFill>
+                <a:latin typeface="Calibri"/>
+              </a:defRPr>
+            </a:pPr>
+            <a:r>
+              <a:t>Optional Match: come LEFT JOIN</a:t>
+            </a:r>
+          </a:p>
+        </p:txBody>
+      </p:sp>
+      <p:sp>
+        <p:nvSpPr>
+          <p:cNvPr id="10" name="TextBox 9"/>
+          <p:cNvSpPr txBox="1"/>
+          <p:nvPr/>
+        </p:nvSpPr>
+        <p:spPr>
+          <a:xfrm>
+            <a:off x="731520" y="4636008"/>
+            <a:ext cx="10515600" cy="1097280"/>
+          </a:xfrm>
+          <a:prstGeom prst="rect">
+            <a:avLst/>
+          </a:prstGeom>
+          <a:noFill/>
+        </p:spPr>
+        <p:txBody>
+          <a:bodyPr wrap="square">
+            <a:spAutoFit/>
+          </a:bodyPr>
+          <a:lstStyle/>
+          <a:p>
+            <a:pPr algn="l">
+              <a:spcAft>
+                <a:spcPts val="300"/>
+              </a:spcAft>
+              <a:defRPr sz="1200">
+                <a:solidFill>
+                  <a:srgbClr val="FFFFFF"/>
+                </a:solidFill>
+                <a:latin typeface="Calibri"/>
+              </a:defRPr>
+            </a:pPr>
+            <a:r>
+              <a:t>•  OPTIONAL MATCH — cerca il pattern, se non trovato restituisce NULL (non scarta la riga)</a:t>
+            </a:r>
+          </a:p>
+          <a:p>
+            <a:pPr algn="l">
+              <a:spcAft>
+                <a:spcPts val="300"/>
+              </a:spcAft>
+              <a:defRPr sz="1200">
+                <a:solidFill>
+                  <a:srgbClr val="FFFFFF"/>
+                </a:solidFill>
+                <a:latin typeface="Calibri"/>
+              </a:defRPr>
+            </a:pPr>
+            <a:r>
+              <a:t>•  Utile per: "trova tutte le persone e le loro skill (incluse quelle senza skill)"</a:t>
+            </a:r>
+          </a:p>
+          <a:p>
+            <a:pPr algn="l">
+              <a:spcAft>
+                <a:spcPts val="300"/>
+              </a:spcAft>
+              <a:defRPr sz="1200">
+                <a:solidFill>
+                  <a:srgbClr val="FFFFFF"/>
+                </a:solidFill>
+                <a:latin typeface="Calibri"/>
+              </a:defRPr>
+            </a:pPr>
+            <a:r>
+              <a:t>•  MATCH normale scarta le righe che non corrispondono al pattern</a:t>
+            </a:r>
+          </a:p>
+        </p:txBody>
+      </p:sp>
+    </p:spTree>
+  </p:cSld>
+  <p:clrMapOvr>
+    <a:masterClrMapping/>
+  </p:clrMapOvr>
+</p:sld>
+</file>
+
+<file path=ppt/slides/slide13.xml><?xml version="1.0" encoding="utf-8"?>
+<p:sld xmlns:a="http://schemas.openxmlformats.org/drawingml/2006/main" xmlns:r="http://schemas.openxmlformats.org/officeDocument/2006/relationships" xmlns:p="http://schemas.openxmlformats.org/presentationml/2006/main">
+  <p:cSld>
+    <p:bg>
+      <p:bgPr>
+        <a:solidFill>
+          <a:srgbClr val="272936"/>
+        </a:solidFill>
+        <a:effectLst/>
+      </p:bgPr>
+    </p:bg>
+    <p:spTree>
+      <p:nvGrpSpPr>
+        <p:cNvPr id="1" name=""/>
+        <p:cNvGrpSpPr/>
+        <p:nvPr/>
+      </p:nvGrpSpPr>
+      <p:grpSpPr>
+        <a:xfrm>
+          <a:off x="0" y="0"/>
+          <a:ext cx="0" cy="0"/>
+          <a:chOff x="0" y="0"/>
+          <a:chExt cx="0" cy="0"/>
+        </a:xfrm>
+      </p:grpSpPr>
+      <p:sp>
+        <p:nvSpPr>
+          <p:cNvPr id="2" name="TextBox 1"/>
+          <p:cNvSpPr txBox="1"/>
+          <p:nvPr/>
+        </p:nvSpPr>
+        <p:spPr>
+          <a:xfrm>
+            <a:off x="731520" y="320040"/>
+            <a:ext cx="10515600" cy="594360"/>
+          </a:xfrm>
+          <a:prstGeom prst="rect">
+            <a:avLst/>
+          </a:prstGeom>
+          <a:noFill/>
+        </p:spPr>
+        <p:txBody>
+          <a:bodyPr wrap="square">
+            <a:spAutoFit/>
+          </a:bodyPr>
+          <a:lstStyle/>
+          <a:p>
+            <a:pPr algn="l">
+              <a:defRPr sz="3300" b="1">
+                <a:solidFill>
+                  <a:srgbClr val="F0C040"/>
+                </a:solidFill>
+                <a:latin typeface="Calibri"/>
+              </a:defRPr>
+            </a:pPr>
+            <a:r>
+              <a:t>Cypher: Leggere Dati con MATCH + WHERE</a:t>
+            </a:r>
+          </a:p>
+        </p:txBody>
+      </p:sp>
+      <p:sp>
+        <p:nvSpPr>
+          <p:cNvPr id="3" name="TextBox 2"/>
+          <p:cNvSpPr txBox="1"/>
+          <p:nvPr/>
+        </p:nvSpPr>
+        <p:spPr>
+          <a:xfrm>
+            <a:off x="731520" y="960120"/>
+            <a:ext cx="10515600" cy="457200"/>
+          </a:xfrm>
+          <a:prstGeom prst="rect">
+            <a:avLst/>
+          </a:prstGeom>
+          <a:noFill/>
+        </p:spPr>
+        <p:txBody>
+          <a:bodyPr wrap="square">
+            <a:spAutoFit/>
+          </a:bodyPr>
+          <a:lstStyle/>
+          <a:p>
+            <a:pPr algn="l">
+              <a:defRPr sz="1400" b="0">
+                <a:solidFill>
+                  <a:srgbClr val="CCCCCC"/>
+                </a:solidFill>
+                <a:latin typeface="Calibri"/>
+              </a:defRPr>
+            </a:pPr>
+            <a:r>
+              <a:t>WHERE filtra i risultati. Supporta operatori logici, confronti, testo e liste.</a:t>
+            </a:r>
+          </a:p>
+        </p:txBody>
+      </p:sp>
+      <p:sp>
+        <p:nvSpPr>
+          <p:cNvPr id="4" name="TextBox 3"/>
+          <p:cNvSpPr txBox="1"/>
+          <p:nvPr/>
+        </p:nvSpPr>
+        <p:spPr>
+          <a:xfrm>
+            <a:off x="731520" y="1417320"/>
+            <a:ext cx="5029200" cy="411480"/>
+          </a:xfrm>
+          <a:prstGeom prst="rect">
+            <a:avLst/>
+          </a:prstGeom>
+          <a:noFill/>
+        </p:spPr>
+        <p:txBody>
+          <a:bodyPr wrap="square">
+            <a:spAutoFit/>
+          </a:bodyPr>
+          <a:lstStyle/>
+          <a:p>
+            <a:pPr algn="l">
+              <a:defRPr sz="1600" b="1">
+                <a:solidFill>
+                  <a:srgbClr val="F08040"/>
+                </a:solidFill>
+                <a:latin typeface="Calibri"/>
+              </a:defRPr>
+            </a:pPr>
+            <a:r>
+              <a:t>Filtri con WHERE</a:t>
+            </a:r>
+          </a:p>
+        </p:txBody>
+      </p:sp>
+      <p:sp>
+        <p:nvSpPr>
+          <p:cNvPr id="5" name="Rectangle 4"/>
+          <p:cNvSpPr/>
+          <p:nvPr/>
+        </p:nvSpPr>
+        <p:spPr>
+          <a:xfrm>
+            <a:off x="731520" y="1828800"/>
+            <a:ext cx="5029200" cy="1993392"/>
+          </a:xfrm>
+          <a:prstGeom prst="rect">
+            <a:avLst/>
+          </a:prstGeom>
+          <a:solidFill>
+            <a:srgbClr val="1B2A4A"/>
+          </a:solidFill>
+          <a:ln w="12700">
+            <a:solidFill>
+              <a:srgbClr val="2D4F7A"/>
+            </a:solidFill>
+          </a:ln>
+        </p:spPr>
+        <p:style>
+          <a:lnRef idx="1">
+            <a:schemeClr val="accent1"/>
+          </a:lnRef>
+          <a:fillRef idx="3">
+            <a:schemeClr val="accent1"/>
+          </a:fillRef>
+          <a:effectRef idx="2">
+            <a:schemeClr val="accent1"/>
+          </a:effectRef>
+          <a:fontRef idx="minor">
+            <a:schemeClr val="lt1"/>
+          </a:fontRef>
+        </p:style>
+        <p:txBody>
+          <a:bodyPr rtlCol="0" anchor="ctr"/>
+          <a:lstStyle/>
+          <a:p>
+            <a:pPr algn="ctr"/>
+            <a:endParaRPr/>
+          </a:p>
+        </p:txBody>
+      </p:sp>
+      <p:sp>
+        <p:nvSpPr>
+          <p:cNvPr id="6" name="TextBox 5"/>
+          <p:cNvSpPr txBox="1"/>
+          <p:nvPr/>
+        </p:nvSpPr>
+        <p:spPr>
+          <a:xfrm>
+            <a:off x="841248" y="1901952"/>
+            <a:ext cx="4809744" cy="1773936"/>
+          </a:xfrm>
+          <a:prstGeom prst="rect">
+            <a:avLst/>
+          </a:prstGeom>
+          <a:noFill/>
+        </p:spPr>
+        <p:txBody>
+          <a:bodyPr wrap="square">
+            <a:spAutoFit/>
+          </a:bodyPr>
+          <a:lstStyle/>
+          <a:p>
+            <a:pPr>
+              <a:spcAft>
+                <a:spcPts val="100"/>
+              </a:spcAft>
+              <a:defRPr sz="1000">
+                <a:solidFill>
+                  <a:srgbClr val="7EC68E"/>
+                </a:solidFill>
+                <a:latin typeface="Consolas"/>
+              </a:defRPr>
+            </a:pPr>
+            <a:r>
+              <a:t>// AND / OR con parentesi:</a:t>
+            </a:r>
+          </a:p>
+          <a:p>
+            <a:pPr>
+              <a:spcAft>
+                <a:spcPts val="100"/>
+              </a:spcAft>
+              <a:defRPr sz="1000">
+                <a:solidFill>
+                  <a:srgbClr val="7EC68E"/>
+                </a:solidFill>
+                <a:latin typeface="Consolas"/>
+              </a:defRPr>
+            </a:pPr>
+            <a:r>
+              <a:t>MATCH (p:Person)</a:t>
+            </a:r>
+          </a:p>
+          <a:p>
+            <a:pPr>
+              <a:spcAft>
+                <a:spcPts val="100"/>
+              </a:spcAft>
+              <a:defRPr sz="1000">
+                <a:solidFill>
+                  <a:srgbClr val="7EC68E"/>
+                </a:solidFill>
+                <a:latin typeface="Consolas"/>
+              </a:defRPr>
+            </a:pPr>
+            <a:r>
+              <a:t>WHERE (p.location = "Roma"</a:t>
+            </a:r>
+          </a:p>
+          <a:p>
+            <a:pPr>
+              <a:spcAft>
+                <a:spcPts val="100"/>
+              </a:spcAft>
+              <a:defRPr sz="1000">
+                <a:solidFill>
+                  <a:srgbClr val="7EC68E"/>
+                </a:solidFill>
+                <a:latin typeface="Consolas"/>
+              </a:defRPr>
+            </a:pPr>
+            <a:r>
+              <a:t>   OR  p.location = "Milano")</a:t>
+            </a:r>
+          </a:p>
+          <a:p>
+            <a:pPr>
+              <a:spcAft>
+                <a:spcPts val="100"/>
+              </a:spcAft>
+              <a:defRPr sz="1000">
+                <a:solidFill>
+                  <a:srgbClr val="7EC68E"/>
+                </a:solidFill>
+                <a:latin typeface="Consolas"/>
+              </a:defRPr>
+            </a:pPr>
+            <a:r>
+              <a:t>  AND p.title CONTAINS "Senior"</a:t>
+            </a:r>
+          </a:p>
+          <a:p>
+            <a:pPr>
+              <a:spcAft>
+                <a:spcPts val="100"/>
+              </a:spcAft>
+              <a:defRPr sz="1000">
+                <a:solidFill>
+                  <a:srgbClr val="7EC68E"/>
+                </a:solidFill>
+                <a:latin typeface="Consolas"/>
+              </a:defRPr>
+            </a:pPr>
+            <a:r>
+              <a:t>RETURN p.name, p.location, p.title;</a:t>
+            </a:r>
+          </a:p>
+          <a:p>
+            <a:pPr>
+              <a:spcAft>
+                <a:spcPts val="100"/>
+              </a:spcAft>
+              <a:defRPr sz="1000">
+                <a:solidFill>
+                  <a:srgbClr val="7EC68E"/>
+                </a:solidFill>
+                <a:latin typeface="Consolas"/>
+              </a:defRPr>
+            </a:pPr>
+            <a:endParaRPr/>
+          </a:p>
+          <a:p>
+            <a:pPr>
+              <a:spcAft>
+                <a:spcPts val="100"/>
+              </a:spcAft>
+              <a:defRPr sz="1000">
+                <a:solidFill>
+                  <a:srgbClr val="7EC68E"/>
+                </a:solidFill>
+                <a:latin typeface="Consolas"/>
+              </a:defRPr>
+            </a:pPr>
+            <a:r>
+              <a:t>// IN per liste:</a:t>
+            </a:r>
+          </a:p>
+          <a:p>
+            <a:pPr>
+              <a:spcAft>
+                <a:spcPts val="100"/>
+              </a:spcAft>
+              <a:defRPr sz="1000">
+                <a:solidFill>
+                  <a:srgbClr val="7EC68E"/>
+                </a:solidFill>
+                <a:latin typeface="Consolas"/>
+              </a:defRPr>
+            </a:pPr>
+            <a:r>
+              <a:t>MATCH (p:Person)</a:t>
+            </a:r>
+          </a:p>
+          <a:p>
+            <a:pPr>
+              <a:spcAft>
+                <a:spcPts val="100"/>
+              </a:spcAft>
+              <a:defRPr sz="1000">
+                <a:solidFill>
+                  <a:srgbClr val="7EC68E"/>
+                </a:solidFill>
+                <a:latin typeface="Consolas"/>
+              </a:defRPr>
+            </a:pPr>
+            <a:r>
+              <a:t>WHERE p.location IN ("Roma", "Milano")</a:t>
+            </a:r>
+          </a:p>
+          <a:p>
+            <a:pPr>
+              <a:spcAft>
+                <a:spcPts val="100"/>
+              </a:spcAft>
+              <a:defRPr sz="1000">
+                <a:solidFill>
+                  <a:srgbClr val="7EC68E"/>
+                </a:solidFill>
+                <a:latin typeface="Consolas"/>
+              </a:defRPr>
+            </a:pPr>
+            <a:r>
+              <a:t>RETURN p.name, p.location;</a:t>
+            </a:r>
+          </a:p>
+        </p:txBody>
+      </p:sp>
+      <p:sp>
+        <p:nvSpPr>
+          <p:cNvPr id="7" name="TextBox 6"/>
+          <p:cNvSpPr txBox="1"/>
+          <p:nvPr/>
+        </p:nvSpPr>
+        <p:spPr>
+          <a:xfrm>
+            <a:off x="6096000" y="1417320"/>
+            <a:ext cx="4846320" cy="411480"/>
+          </a:xfrm>
+          <a:prstGeom prst="rect">
+            <a:avLst/>
+          </a:prstGeom>
+          <a:noFill/>
+        </p:spPr>
+        <p:txBody>
+          <a:bodyPr wrap="square">
+            <a:spAutoFit/>
+          </a:bodyPr>
+          <a:lstStyle/>
+          <a:p>
+            <a:pPr algn="l">
+              <a:defRPr sz="1600" b="1">
+                <a:solidFill>
+                  <a:srgbClr val="F08040"/>
+                </a:solidFill>
+                <a:latin typeface="Calibri"/>
+              </a:defRPr>
+            </a:pPr>
+            <a:r>
+              <a:t>Testo e valori NULL</a:t>
+            </a:r>
+          </a:p>
+        </p:txBody>
+      </p:sp>
+      <p:sp>
+        <p:nvSpPr>
+          <p:cNvPr id="8" name="Rectangle 7"/>
+          <p:cNvSpPr/>
+          <p:nvPr/>
+        </p:nvSpPr>
+        <p:spPr>
+          <a:xfrm>
+            <a:off x="6096000" y="1828800"/>
             <a:ext cx="4846320" cy="2194560"/>
           </a:xfrm>
           <a:prstGeom prst="rect">
@@ -26002,261 +27394,7 @@
           <a:lstStyle/>
           <a:p>
             <a:pPr algn="ctr"/>
-          </a:p>
-        </p:txBody>
-      </p:sp>
-      <p:sp>
-        <p:nvSpPr>
-          <p:cNvPr id="7" name="TextBox 6"/>
-          <p:cNvSpPr txBox="1"/>
-          <p:nvPr/>
-        </p:nvSpPr>
-        <p:spPr>
-          <a:xfrm>
-            <a:off x="5779008" y="1536192"/>
-            <a:ext cx="4626864" cy="2048256"/>
-          </a:xfrm>
-          <a:prstGeom prst="rect">
-            <a:avLst/>
-          </a:prstGeom>
-          <a:noFill/>
-        </p:spPr>
-        <p:txBody>
-          <a:bodyPr wrap="square">
-            <a:spAutoFit/>
-          </a:bodyPr>
-          <a:lstStyle/>
-          <a:p>
-            <a:pPr>
-              <a:spcAft>
-                <a:spcPts val="100"/>
-              </a:spcAft>
-              <a:defRPr sz="1000">
-                <a:solidFill>
-                  <a:srgbClr val="7EC68E"/>
-                </a:solidFill>
-                <a:latin typeface="Consolas"/>
-              </a:defRPr>
-            </a:pPr>
-            <a:r>
-              <a:t>// Path a profondità variabile:</a:t>
-            </a:r>
-          </a:p>
-          <a:p>
-            <a:pPr>
-              <a:spcAft>
-                <a:spcPts val="100"/>
-              </a:spcAft>
-              <a:defRPr sz="1000">
-                <a:solidFill>
-                  <a:srgbClr val="7EC68E"/>
-                </a:solidFill>
-                <a:latin typeface="Consolas"/>
-              </a:defRPr>
-            </a:pPr>
-            <a:r>
-              <a:t>// Cerchiamo persone raggiungibili via</a:t>
-            </a:r>
-          </a:p>
-          <a:p>
-            <a:pPr>
-              <a:spcAft>
-                <a:spcPts val="100"/>
-              </a:spcAft>
-              <a:defRPr sz="1000">
-                <a:solidFill>
-                  <a:srgbClr val="7EC68E"/>
-                </a:solidFill>
-                <a:latin typeface="Consolas"/>
-              </a:defRPr>
-            </a:pPr>
-            <a:r>
-              <a:t>// WORKED_ON in al massimo 3 salti:</a:t>
-            </a:r>
-          </a:p>
-          <a:p>
-            <a:pPr>
-              <a:spcAft>
-                <a:spcPts val="100"/>
-              </a:spcAft>
-              <a:defRPr sz="1000">
-                <a:solidFill>
-                  <a:srgbClr val="7EC68E"/>
-                </a:solidFill>
-                <a:latin typeface="Consolas"/>
-              </a:defRPr>
-            </a:pPr>
-            <a:r>
-              <a:t>MATCH path = (a:Person {employee_id: 1})</a:t>
-            </a:r>
-          </a:p>
-          <a:p>
-            <a:pPr>
-              <a:spcAft>
-                <a:spcPts val="100"/>
-              </a:spcAft>
-              <a:defRPr sz="1000">
-                <a:solidFill>
-                  <a:srgbClr val="7EC68E"/>
-                </a:solidFill>
-                <a:latin typeface="Consolas"/>
-              </a:defRPr>
-            </a:pPr>
-            <a:r>
-              <a:t>      -[:WORKED_ON*1..3]-(b:Person)</a:t>
-            </a:r>
-          </a:p>
-          <a:p>
-            <a:pPr>
-              <a:spcAft>
-                <a:spcPts val="100"/>
-              </a:spcAft>
-              <a:defRPr sz="1000">
-                <a:solidFill>
-                  <a:srgbClr val="7EC68E"/>
-                </a:solidFill>
-                <a:latin typeface="Consolas"/>
-              </a:defRPr>
-            </a:pPr>
-            <a:r>
-              <a:t>RETURN [n IN nodes(path) | n.name] AS percorso,</a:t>
-            </a:r>
-          </a:p>
-          <a:p>
-            <a:pPr>
-              <a:spcAft>
-                <a:spcPts val="100"/>
-              </a:spcAft>
-              <a:defRPr sz="1000">
-                <a:solidFill>
-                  <a:srgbClr val="7EC68E"/>
-                </a:solidFill>
-                <a:latin typeface="Consolas"/>
-              </a:defRPr>
-            </a:pPr>
-            <a:r>
-              <a:t>       length(path) AS salti</a:t>
-            </a:r>
-          </a:p>
-          <a:p>
-            <a:pPr>
-              <a:spcAft>
-                <a:spcPts val="100"/>
-              </a:spcAft>
-              <a:defRPr sz="1000">
-                <a:solidFill>
-                  <a:srgbClr val="7EC68E"/>
-                </a:solidFill>
-                <a:latin typeface="Consolas"/>
-              </a:defRPr>
-            </a:pPr>
-            <a:r>
-              <a:t>LIMIT 5;</a:t>
-            </a:r>
-          </a:p>
-          <a:p>
-            <a:pPr>
-              <a:spcAft>
-                <a:spcPts val="100"/>
-              </a:spcAft>
-              <a:defRPr sz="1000">
-                <a:solidFill>
-                  <a:srgbClr val="7EC68E"/>
-                </a:solidFill>
-                <a:latin typeface="Consolas"/>
-              </a:defRPr>
-            </a:pPr>
-          </a:p>
-          <a:p>
-            <a:pPr>
-              <a:spcAft>
-                <a:spcPts val="100"/>
-              </a:spcAft>
-              <a:defRPr sz="1000">
-                <a:solidFill>
-                  <a:srgbClr val="7EC68E"/>
-                </a:solidFill>
-                <a:latin typeface="Consolas"/>
-              </a:defRPr>
-            </a:pPr>
-            <a:r>
-              <a:t>// [*1..3] = da 1 a 3 relazioni WORKED_ON</a:t>
-            </a:r>
-          </a:p>
-          <a:p>
-            <a:pPr>
-              <a:spcAft>
-                <a:spcPts val="100"/>
-              </a:spcAft>
-              <a:defRPr sz="1000">
-                <a:solidFill>
-                  <a:srgbClr val="7EC68E"/>
-                </a:solidFill>
-                <a:latin typeface="Consolas"/>
-              </a:defRPr>
-            </a:pPr>
-            <a:r>
-              <a:t>// path = variabile per l'intero percorso</a:t>
-            </a:r>
-          </a:p>
-          <a:p>
-            <a:pPr>
-              <a:spcAft>
-                <a:spcPts val="100"/>
-              </a:spcAft>
-              <a:defRPr sz="1000">
-                <a:solidFill>
-                  <a:srgbClr val="7EC68E"/>
-                </a:solidFill>
-                <a:latin typeface="Consolas"/>
-              </a:defRPr>
-            </a:pPr>
-            <a:r>
-              <a:t>// nodes(path) = lista nodi del percorso</a:t>
-            </a:r>
-          </a:p>
-        </p:txBody>
-      </p:sp>
-      <p:sp>
-        <p:nvSpPr>
-          <p:cNvPr id="8" name="Rectangle 7"/>
-          <p:cNvSpPr/>
-          <p:nvPr/>
-        </p:nvSpPr>
-        <p:spPr>
-          <a:xfrm>
-            <a:off x="731520" y="3840480"/>
-            <a:ext cx="10698480" cy="36576"/>
-          </a:xfrm>
-          <a:prstGeom prst="rect">
-            <a:avLst/>
-          </a:prstGeom>
-          <a:solidFill>
-            <a:srgbClr val="F0C040"/>
-          </a:solidFill>
-          <a:ln>
-            <a:noFill/>
-          </a:ln>
-        </p:spPr>
-        <p:style>
-          <a:lnRef idx="1">
-            <a:schemeClr val="accent1"/>
-          </a:lnRef>
-          <a:fillRef idx="3">
-            <a:schemeClr val="accent1"/>
-          </a:fillRef>
-          <a:effectRef idx="2">
-            <a:schemeClr val="accent1"/>
-          </a:effectRef>
-          <a:fontRef idx="minor">
-            <a:schemeClr val="lt1"/>
-          </a:fontRef>
-        </p:style>
-        <p:txBody>
-          <a:bodyPr rtlCol="0" anchor="ctr"/>
-          <a:lstStyle/>
-          <a:p>
-            <a:pPr algn="ctr"/>
+            <a:endParaRPr/>
           </a:p>
         </p:txBody>
       </p:sp>
@@ -26268,570 +27406,7 @@
         </p:nvSpPr>
         <p:spPr>
           <a:xfrm>
-            <a:off x="731520" y="4023360"/>
-            <a:ext cx="10515600" cy="365760"/>
-          </a:xfrm>
-          <a:prstGeom prst="rect">
-            <a:avLst/>
-          </a:prstGeom>
-          <a:noFill/>
-        </p:spPr>
-        <p:txBody>
-          <a:bodyPr wrap="square">
-            <a:spAutoFit/>
-          </a:bodyPr>
-          <a:lstStyle/>
-          <a:p>
-            <a:pPr algn="l">
-              <a:defRPr sz="1500" b="1">
-                <a:solidFill>
-                  <a:srgbClr val="F08040"/>
-                </a:solidFill>
-                <a:latin typeface="Calibri"/>
-              </a:defRPr>
-            </a:pPr>
-            <a:r>
-              <a:t>Optional Match: come LEFT JOIN</a:t>
-            </a:r>
-          </a:p>
-        </p:txBody>
-      </p:sp>
-      <p:sp>
-        <p:nvSpPr>
-          <p:cNvPr id="10" name="TextBox 9"/>
-          <p:cNvSpPr txBox="1"/>
-          <p:nvPr/>
-        </p:nvSpPr>
-        <p:spPr>
-          <a:xfrm>
-            <a:off x="731520" y="4480560"/>
-            <a:ext cx="10515600" cy="1097280"/>
-          </a:xfrm>
-          <a:prstGeom prst="rect">
-            <a:avLst/>
-          </a:prstGeom>
-          <a:noFill/>
-        </p:spPr>
-        <p:txBody>
-          <a:bodyPr wrap="square">
-            <a:spAutoFit/>
-          </a:bodyPr>
-          <a:lstStyle/>
-          <a:p>
-            <a:pPr algn="l">
-              <a:spcAft>
-                <a:spcPts val="300"/>
-              </a:spcAft>
-              <a:defRPr sz="1200">
-                <a:solidFill>
-                  <a:srgbClr val="FFFFFF"/>
-                </a:solidFill>
-                <a:latin typeface="Calibri"/>
-              </a:defRPr>
-            </a:pPr>
-            <a:r>
-              <a:t>•  OPTIONAL MATCH — cerca il pattern, se non trovato restituisce NULL (non scarta la riga)</a:t>
-            </a:r>
-          </a:p>
-          <a:p>
-            <a:pPr algn="l">
-              <a:spcAft>
-                <a:spcPts val="300"/>
-              </a:spcAft>
-              <a:defRPr sz="1200">
-                <a:solidFill>
-                  <a:srgbClr val="FFFFFF"/>
-                </a:solidFill>
-                <a:latin typeface="Calibri"/>
-              </a:defRPr>
-            </a:pPr>
-            <a:r>
-              <a:t>•  Utile per: "trova tutte le persone e le loro skill (incluse quelle senza skill)"</a:t>
-            </a:r>
-          </a:p>
-          <a:p>
-            <a:pPr algn="l">
-              <a:spcAft>
-                <a:spcPts val="300"/>
-              </a:spcAft>
-              <a:defRPr sz="1200">
-                <a:solidFill>
-                  <a:srgbClr val="FFFFFF"/>
-                </a:solidFill>
-                <a:latin typeface="Calibri"/>
-              </a:defRPr>
-            </a:pPr>
-            <a:r>
-              <a:t>•  MATCH normale scarta le righe che non corrispondono al pattern</a:t>
-            </a:r>
-          </a:p>
-        </p:txBody>
-      </p:sp>
-    </p:spTree>
-  </p:cSld>
-  <p:clrMapOvr>
-    <a:masterClrMapping/>
-  </p:clrMapOvr>
-</p:sld>
-</file>
-
-<file path=ppt/slides/slide13.xml><?xml version="1.0" encoding="utf-8"?>
-<p:sld xmlns:a="http://schemas.openxmlformats.org/drawingml/2006/main" xmlns:p="http://schemas.openxmlformats.org/presentationml/2006/main" xmlns:r="http://schemas.openxmlformats.org/officeDocument/2006/relationships">
-  <p:cSld>
-    <p:bg>
-      <p:bgPr>
-        <a:solidFill>
-          <a:srgbClr val="272936"/>
-        </a:solidFill>
-        <a:effectLst/>
-      </p:bgPr>
-    </p:bg>
-    <p:spTree>
-      <p:nvGrpSpPr>
-        <p:cNvPr id="1" name=""/>
-        <p:cNvGrpSpPr/>
-        <p:nvPr/>
-      </p:nvGrpSpPr>
-      <p:grpSpPr/>
-      <p:sp>
-        <p:nvSpPr>
-          <p:cNvPr id="2" name="TextBox 1"/>
-          <p:cNvSpPr txBox="1"/>
-          <p:nvPr/>
-        </p:nvSpPr>
-        <p:spPr>
-          <a:xfrm>
-            <a:off x="731520" y="320040"/>
-            <a:ext cx="10515600" cy="594360"/>
-          </a:xfrm>
-          <a:prstGeom prst="rect">
-            <a:avLst/>
-          </a:prstGeom>
-          <a:noFill/>
-        </p:spPr>
-        <p:txBody>
-          <a:bodyPr wrap="square">
-            <a:spAutoFit/>
-          </a:bodyPr>
-          <a:lstStyle/>
-          <a:p>
-            <a:pPr algn="l">
-              <a:defRPr sz="3300" b="1">
-                <a:solidFill>
-                  <a:srgbClr val="F0C040"/>
-                </a:solidFill>
-                <a:latin typeface="Calibri"/>
-              </a:defRPr>
-            </a:pPr>
-            <a:r>
-              <a:t>Cypher: Leggere Dati con MATCH + WHERE</a:t>
-            </a:r>
-          </a:p>
-        </p:txBody>
-      </p:sp>
-      <p:sp>
-        <p:nvSpPr>
-          <p:cNvPr id="3" name="TextBox 2"/>
-          <p:cNvSpPr txBox="1"/>
-          <p:nvPr/>
-        </p:nvSpPr>
-        <p:spPr>
-          <a:xfrm>
-            <a:off x="731520" y="960120"/>
-            <a:ext cx="10515600" cy="457200"/>
-          </a:xfrm>
-          <a:prstGeom prst="rect">
-            <a:avLst/>
-          </a:prstGeom>
-          <a:noFill/>
-        </p:spPr>
-        <p:txBody>
-          <a:bodyPr wrap="square">
-            <a:spAutoFit/>
-          </a:bodyPr>
-          <a:lstStyle/>
-          <a:p>
-            <a:pPr algn="l">
-              <a:defRPr sz="1400" b="0">
-                <a:solidFill>
-                  <a:srgbClr val="CCCCCC"/>
-                </a:solidFill>
-                <a:latin typeface="Calibri"/>
-              </a:defRPr>
-            </a:pPr>
-            <a:r>
-              <a:t>WHERE filtra i risultati. Supporta operatori logici, confronti, testo e liste.</a:t>
-            </a:r>
-          </a:p>
-        </p:txBody>
-      </p:sp>
-      <p:sp>
-        <p:nvSpPr>
-          <p:cNvPr id="4" name="TextBox 3"/>
-          <p:cNvSpPr txBox="1"/>
-          <p:nvPr/>
-        </p:nvSpPr>
-        <p:spPr>
-          <a:xfrm>
-            <a:off x="731520" y="1417320"/>
-            <a:ext cx="5029200" cy="411480"/>
-          </a:xfrm>
-          <a:prstGeom prst="rect">
-            <a:avLst/>
-          </a:prstGeom>
-          <a:noFill/>
-        </p:spPr>
-        <p:txBody>
-          <a:bodyPr wrap="square">
-            <a:spAutoFit/>
-          </a:bodyPr>
-          <a:lstStyle/>
-          <a:p>
-            <a:pPr algn="l">
-              <a:defRPr sz="1600" b="1">
-                <a:solidFill>
-                  <a:srgbClr val="F08040"/>
-                </a:solidFill>
-                <a:latin typeface="Calibri"/>
-              </a:defRPr>
-            </a:pPr>
-            <a:r>
-              <a:t>Filtri con WHERE</a:t>
-            </a:r>
-          </a:p>
-        </p:txBody>
-      </p:sp>
-      <p:sp>
-        <p:nvSpPr>
-          <p:cNvPr id="5" name="Rectangle 4"/>
-          <p:cNvSpPr/>
-          <p:nvPr/>
-        </p:nvSpPr>
-        <p:spPr>
-          <a:xfrm>
-            <a:off x="731520" y="1828800"/>
-            <a:ext cx="5029200" cy="1920240"/>
-          </a:xfrm>
-          <a:prstGeom prst="rect">
-            <a:avLst/>
-          </a:prstGeom>
-          <a:solidFill>
-            <a:srgbClr val="1B2A4A"/>
-          </a:solidFill>
-          <a:ln w="12700">
-            <a:solidFill>
-              <a:srgbClr val="2D4F7A"/>
-            </a:solidFill>
-          </a:ln>
-        </p:spPr>
-        <p:style>
-          <a:lnRef idx="1">
-            <a:schemeClr val="accent1"/>
-          </a:lnRef>
-          <a:fillRef idx="3">
-            <a:schemeClr val="accent1"/>
-          </a:fillRef>
-          <a:effectRef idx="2">
-            <a:schemeClr val="accent1"/>
-          </a:effectRef>
-          <a:fontRef idx="minor">
-            <a:schemeClr val="lt1"/>
-          </a:fontRef>
-        </p:style>
-        <p:txBody>
-          <a:bodyPr rtlCol="0" anchor="ctr"/>
-          <a:lstStyle/>
-          <a:p>
-            <a:pPr algn="ctr"/>
-          </a:p>
-        </p:txBody>
-      </p:sp>
-      <p:sp>
-        <p:nvSpPr>
-          <p:cNvPr id="6" name="TextBox 5"/>
-          <p:cNvSpPr txBox="1"/>
-          <p:nvPr/>
-        </p:nvSpPr>
-        <p:spPr>
-          <a:xfrm>
-            <a:off x="841248" y="1901952"/>
-            <a:ext cx="4809744" cy="1773936"/>
-          </a:xfrm>
-          <a:prstGeom prst="rect">
-            <a:avLst/>
-          </a:prstGeom>
-          <a:noFill/>
-        </p:spPr>
-        <p:txBody>
-          <a:bodyPr wrap="square">
-            <a:spAutoFit/>
-          </a:bodyPr>
-          <a:lstStyle/>
-          <a:p>
-            <a:pPr>
-              <a:spcAft>
-                <a:spcPts val="100"/>
-              </a:spcAft>
-              <a:defRPr sz="1000">
-                <a:solidFill>
-                  <a:srgbClr val="7EC68E"/>
-                </a:solidFill>
-                <a:latin typeface="Consolas"/>
-              </a:defRPr>
-            </a:pPr>
-            <a:r>
-              <a:t>// AND / OR con parentesi:</a:t>
-            </a:r>
-          </a:p>
-          <a:p>
-            <a:pPr>
-              <a:spcAft>
-                <a:spcPts val="100"/>
-              </a:spcAft>
-              <a:defRPr sz="1000">
-                <a:solidFill>
-                  <a:srgbClr val="7EC68E"/>
-                </a:solidFill>
-                <a:latin typeface="Consolas"/>
-              </a:defRPr>
-            </a:pPr>
-            <a:r>
-              <a:t>MATCH (p:Person)</a:t>
-            </a:r>
-          </a:p>
-          <a:p>
-            <a:pPr>
-              <a:spcAft>
-                <a:spcPts val="100"/>
-              </a:spcAft>
-              <a:defRPr sz="1000">
-                <a:solidFill>
-                  <a:srgbClr val="7EC68E"/>
-                </a:solidFill>
-                <a:latin typeface="Consolas"/>
-              </a:defRPr>
-            </a:pPr>
-            <a:r>
-              <a:t>WHERE (p.location = "Roma"</a:t>
-            </a:r>
-          </a:p>
-          <a:p>
-            <a:pPr>
-              <a:spcAft>
-                <a:spcPts val="100"/>
-              </a:spcAft>
-              <a:defRPr sz="1000">
-                <a:solidFill>
-                  <a:srgbClr val="7EC68E"/>
-                </a:solidFill>
-                <a:latin typeface="Consolas"/>
-              </a:defRPr>
-            </a:pPr>
-            <a:r>
-              <a:t>   OR  p.location = "Milano")</a:t>
-            </a:r>
-          </a:p>
-          <a:p>
-            <a:pPr>
-              <a:spcAft>
-                <a:spcPts val="100"/>
-              </a:spcAft>
-              <a:defRPr sz="1000">
-                <a:solidFill>
-                  <a:srgbClr val="7EC68E"/>
-                </a:solidFill>
-                <a:latin typeface="Consolas"/>
-              </a:defRPr>
-            </a:pPr>
-            <a:r>
-              <a:t>  AND p.title CONTAINS "Senior"</a:t>
-            </a:r>
-          </a:p>
-          <a:p>
-            <a:pPr>
-              <a:spcAft>
-                <a:spcPts val="100"/>
-              </a:spcAft>
-              <a:defRPr sz="1000">
-                <a:solidFill>
-                  <a:srgbClr val="7EC68E"/>
-                </a:solidFill>
-                <a:latin typeface="Consolas"/>
-              </a:defRPr>
-            </a:pPr>
-            <a:r>
-              <a:t>RETURN p.name, p.location, p.title;</a:t>
-            </a:r>
-          </a:p>
-          <a:p>
-            <a:pPr>
-              <a:spcAft>
-                <a:spcPts val="100"/>
-              </a:spcAft>
-              <a:defRPr sz="1000">
-                <a:solidFill>
-                  <a:srgbClr val="7EC68E"/>
-                </a:solidFill>
-                <a:latin typeface="Consolas"/>
-              </a:defRPr>
-            </a:pPr>
-          </a:p>
-          <a:p>
-            <a:pPr>
-              <a:spcAft>
-                <a:spcPts val="100"/>
-              </a:spcAft>
-              <a:defRPr sz="1000">
-                <a:solidFill>
-                  <a:srgbClr val="7EC68E"/>
-                </a:solidFill>
-                <a:latin typeface="Consolas"/>
-              </a:defRPr>
-            </a:pPr>
-            <a:r>
-              <a:t>// IN per liste:</a:t>
-            </a:r>
-          </a:p>
-          <a:p>
-            <a:pPr>
-              <a:spcAft>
-                <a:spcPts val="100"/>
-              </a:spcAft>
-              <a:defRPr sz="1000">
-                <a:solidFill>
-                  <a:srgbClr val="7EC68E"/>
-                </a:solidFill>
-                <a:latin typeface="Consolas"/>
-              </a:defRPr>
-            </a:pPr>
-            <a:r>
-              <a:t>MATCH (p:Person)</a:t>
-            </a:r>
-          </a:p>
-          <a:p>
-            <a:pPr>
-              <a:spcAft>
-                <a:spcPts val="100"/>
-              </a:spcAft>
-              <a:defRPr sz="1000">
-                <a:solidFill>
-                  <a:srgbClr val="7EC68E"/>
-                </a:solidFill>
-                <a:latin typeface="Consolas"/>
-              </a:defRPr>
-            </a:pPr>
-            <a:r>
-              <a:t>WHERE p.location IN ("Roma", "Milano")</a:t>
-            </a:r>
-          </a:p>
-          <a:p>
-            <a:pPr>
-              <a:spcAft>
-                <a:spcPts val="100"/>
-              </a:spcAft>
-              <a:defRPr sz="1000">
-                <a:solidFill>
-                  <a:srgbClr val="7EC68E"/>
-                </a:solidFill>
-                <a:latin typeface="Consolas"/>
-              </a:defRPr>
-            </a:pPr>
-            <a:r>
-              <a:t>RETURN p.name, p.location;</a:t>
-            </a:r>
-          </a:p>
-        </p:txBody>
-      </p:sp>
-      <p:sp>
-        <p:nvSpPr>
-          <p:cNvPr id="7" name="TextBox 6"/>
-          <p:cNvSpPr txBox="1"/>
-          <p:nvPr/>
-        </p:nvSpPr>
-        <p:spPr>
-          <a:xfrm>
-            <a:off x="5669280" y="1417320"/>
-            <a:ext cx="4846320" cy="411480"/>
-          </a:xfrm>
-          <a:prstGeom prst="rect">
-            <a:avLst/>
-          </a:prstGeom>
-          <a:noFill/>
-        </p:spPr>
-        <p:txBody>
-          <a:bodyPr wrap="square">
-            <a:spAutoFit/>
-          </a:bodyPr>
-          <a:lstStyle/>
-          <a:p>
-            <a:pPr algn="l">
-              <a:defRPr sz="1600" b="1">
-                <a:solidFill>
-                  <a:srgbClr val="F08040"/>
-                </a:solidFill>
-                <a:latin typeface="Calibri"/>
-              </a:defRPr>
-            </a:pPr>
-            <a:r>
-              <a:t>Testo e valori NULL</a:t>
-            </a:r>
-          </a:p>
-        </p:txBody>
-      </p:sp>
-      <p:sp>
-        <p:nvSpPr>
-          <p:cNvPr id="8" name="Rectangle 7"/>
-          <p:cNvSpPr/>
-          <p:nvPr/>
-        </p:nvSpPr>
-        <p:spPr>
-          <a:xfrm>
-            <a:off x="5669280" y="1828800"/>
-            <a:ext cx="4846320" cy="2103120"/>
-          </a:xfrm>
-          <a:prstGeom prst="rect">
-            <a:avLst/>
-          </a:prstGeom>
-          <a:solidFill>
-            <a:srgbClr val="1B2A4A"/>
-          </a:solidFill>
-          <a:ln w="12700">
-            <a:solidFill>
-              <a:srgbClr val="2D4F7A"/>
-            </a:solidFill>
-          </a:ln>
-        </p:spPr>
-        <p:style>
-          <a:lnRef idx="1">
-            <a:schemeClr val="accent1"/>
-          </a:lnRef>
-          <a:fillRef idx="3">
-            <a:schemeClr val="accent1"/>
-          </a:fillRef>
-          <a:effectRef idx="2">
-            <a:schemeClr val="accent1"/>
-          </a:effectRef>
-          <a:fontRef idx="minor">
-            <a:schemeClr val="lt1"/>
-          </a:fontRef>
-        </p:style>
-        <p:txBody>
-          <a:bodyPr rtlCol="0" anchor="ctr"/>
-          <a:lstStyle/>
-          <a:p>
-            <a:pPr algn="ctr"/>
-          </a:p>
-        </p:txBody>
-      </p:sp>
-      <p:sp>
-        <p:nvSpPr>
-          <p:cNvPr id="9" name="TextBox 8"/>
-          <p:cNvSpPr txBox="1"/>
-          <p:nvPr/>
-        </p:nvSpPr>
-        <p:spPr>
-          <a:xfrm>
-            <a:off x="5779008" y="1901952"/>
+            <a:off x="6205728" y="1901952"/>
             <a:ext cx="4626864" cy="1956816"/>
           </a:xfrm>
           <a:prstGeom prst="rect">
@@ -26857,6 +27432,7 @@
               </a:defRPr>
             </a:pPr>
             <a:r>
+              <a:rPr dirty="0"/>
               <a:t>// CONTAINS, STARTS WITH, ENDS WITH:</a:t>
             </a:r>
           </a:p>
@@ -26873,7 +27449,16 @@
               </a:defRPr>
             </a:pPr>
             <a:r>
-              <a:t>MATCH (s:Skill)</a:t>
+              <a:rPr dirty="0"/>
+              <a:t>MATCH (</a:t>
+            </a:r>
+            <a:r>
+              <a:rPr dirty="0" err="1"/>
+              <a:t>s:Skill</a:t>
+            </a:r>
+            <a:r>
+              <a:rPr dirty="0"/>
+              <a:t>)</a:t>
             </a:r>
           </a:p>
           <a:p>
@@ -26889,6 +27474,7 @@
               </a:defRPr>
             </a:pPr>
             <a:r>
+              <a:rPr dirty="0"/>
               <a:t>WHERE s.name STARTS WITH "Py"</a:t>
             </a:r>
           </a:p>
@@ -26905,6 +27491,7 @@
               </a:defRPr>
             </a:pPr>
             <a:r>
+              <a:rPr dirty="0"/>
               <a:t>RETURN s.name UNION</a:t>
             </a:r>
           </a:p>
@@ -26921,7 +27508,16 @@
               </a:defRPr>
             </a:pPr>
             <a:r>
-              <a:t>MATCH (s:Skill)</a:t>
+              <a:rPr dirty="0"/>
+              <a:t>MATCH (</a:t>
+            </a:r>
+            <a:r>
+              <a:rPr dirty="0" err="1"/>
+              <a:t>s:Skill</a:t>
+            </a:r>
+            <a:r>
+              <a:rPr dirty="0"/>
+              <a:t>)</a:t>
             </a:r>
           </a:p>
           <a:p>
@@ -26937,6 +27533,7 @@
               </a:defRPr>
             </a:pPr>
             <a:r>
+              <a:rPr dirty="0"/>
               <a:t>WHERE s.name CONTAINS "cloud"</a:t>
             </a:r>
           </a:p>
@@ -26953,6 +27550,7 @@
               </a:defRPr>
             </a:pPr>
             <a:r>
+              <a:rPr dirty="0"/>
               <a:t>RETURN s.name;</a:t>
             </a:r>
           </a:p>
@@ -26968,6 +27566,7 @@
                 <a:latin typeface="Consolas"/>
               </a:defRPr>
             </a:pPr>
+            <a:endParaRPr dirty="0"/>
           </a:p>
           <a:p>
             <a:pPr>
@@ -26982,6 +27581,7 @@
               </a:defRPr>
             </a:pPr>
             <a:r>
+              <a:rPr dirty="0"/>
               <a:t>// IS NULL / IS NOT NULL:</a:t>
             </a:r>
           </a:p>
@@ -26998,7 +27598,16 @@
               </a:defRPr>
             </a:pPr>
             <a:r>
-              <a:t>MATCH (p:Person)</a:t>
+              <a:rPr dirty="0"/>
+              <a:t>MATCH (</a:t>
+            </a:r>
+            <a:r>
+              <a:rPr dirty="0" err="1"/>
+              <a:t>p:Person</a:t>
+            </a:r>
+            <a:r>
+              <a:rPr dirty="0"/>
+              <a:t>)</a:t>
             </a:r>
           </a:p>
           <a:p>
@@ -27014,7 +27623,16 @@
               </a:defRPr>
             </a:pPr>
             <a:r>
-              <a:t>WHERE p.location IS NULL</a:t>
+              <a:rPr dirty="0"/>
+              <a:t>WHERE </a:t>
+            </a:r>
+            <a:r>
+              <a:rPr dirty="0" err="1"/>
+              <a:t>p.location</a:t>
+            </a:r>
+            <a:r>
+              <a:rPr dirty="0"/>
+              <a:t> IS NULL</a:t>
             </a:r>
           </a:p>
           <a:p>
@@ -27030,6 +27648,7 @@
               </a:defRPr>
             </a:pPr>
             <a:r>
+              <a:rPr dirty="0"/>
               <a:t>RETURN p.name;</a:t>
             </a:r>
           </a:p>
@@ -27075,6 +27694,7 @@
           <a:lstStyle/>
           <a:p>
             <a:pPr algn="ctr"/>
+            <a:endParaRPr/>
           </a:p>
         </p:txBody>
       </p:sp>
@@ -27156,6 +27776,7 @@
           <a:lstStyle/>
           <a:p>
             <a:pPr algn="ctr"/>
+            <a:endParaRPr/>
           </a:p>
         </p:txBody>
       </p:sp>
@@ -27256,6 +27877,7 @@
                 <a:latin typeface="Consolas"/>
               </a:defRPr>
             </a:pPr>
+            <a:endParaRPr/>
           </a:p>
           <a:p>
             <a:pPr>
@@ -27316,7 +27938,7 @@
 </file>
 
 <file path=ppt/slides/slide14.xml><?xml version="1.0" encoding="utf-8"?>
-<p:sld xmlns:a="http://schemas.openxmlformats.org/drawingml/2006/main" xmlns:p="http://schemas.openxmlformats.org/presentationml/2006/main" xmlns:r="http://schemas.openxmlformats.org/officeDocument/2006/relationships">
+<p:sld xmlns:a="http://schemas.openxmlformats.org/drawingml/2006/main" xmlns:r="http://schemas.openxmlformats.org/officeDocument/2006/relationships" xmlns:p="http://schemas.openxmlformats.org/presentationml/2006/main">
   <p:cSld>
     <p:bg>
       <p:bgPr>
@@ -27332,7 +27954,14 @@
         <p:cNvGrpSpPr/>
         <p:nvPr/>
       </p:nvGrpSpPr>
-      <p:grpSpPr/>
+      <p:grpSpPr>
+        <a:xfrm>
+          <a:off x="0" y="0"/>
+          <a:ext cx="0" cy="0"/>
+          <a:chOff x="0" y="0"/>
+          <a:chExt cx="0" cy="0"/>
+        </a:xfrm>
+      </p:grpSpPr>
       <p:sp>
         <p:nvSpPr>
           <p:cNvPr id="2" name="TextBox 1"/>
@@ -27447,6 +28076,7 @@
           <a:lstStyle/>
           <a:p>
             <a:pPr algn="ctr"/>
+            <a:endParaRPr/>
           </a:p>
         </p:txBody>
       </p:sp>
@@ -27563,6 +28193,7 @@
                 <a:latin typeface="Consolas"/>
               </a:defRPr>
             </a:pPr>
+            <a:endParaRPr/>
           </a:p>
           <a:p>
             <a:pPr>
@@ -27670,7 +28301,7 @@
         </p:nvSpPr>
         <p:spPr>
           <a:xfrm>
-            <a:off x="5669280" y="1554480"/>
+            <a:off x="6096000" y="1554480"/>
             <a:ext cx="4846320" cy="2377440"/>
           </a:xfrm>
           <a:prstGeom prst="rect">
@@ -27693,59 +28324,272 @@
               </a:defRPr>
             </a:pPr>
             <a:r>
-              <a:t>Dettaglio funzioni di aggregazione:</a:t>
-            </a:r>
-            <a:br/>
-            <a:br/>
-            <a:r>
-              <a:t>count(*)     = conta tutte le righe</a:t>
-            </a:r>
-            <a:br/>
-            <a:r>
-              <a:t>count(expr)  = conta i valori non-NULL</a:t>
-            </a:r>
-            <a:br/>
-            <a:r>
-              <a:t>count(DISTINCT expr) = conta valori unici</a:t>
-            </a:r>
-            <a:br/>
-            <a:br/>
-            <a:r>
-              <a:t>collect(expr)      = lista di tutti i valori</a:t>
-            </a:r>
-            <a:br/>
-            <a:r>
-              <a:t>collect(DISTINCT)  = lista senza duplicati</a:t>
-            </a:r>
-            <a:br/>
-            <a:br/>
-            <a:r>
-              <a:t>avg(expr)  = media aritmetica</a:t>
-            </a:r>
-            <a:br/>
-            <a:r>
+              <a:rPr dirty="0" err="1"/>
+              <a:t>Dettaglio</a:t>
+            </a:r>
+            <a:r>
+              <a:rPr dirty="0"/>
+              <a:t> </a:t>
+            </a:r>
+            <a:r>
+              <a:rPr dirty="0" err="1"/>
+              <a:t>funzioni</a:t>
+            </a:r>
+            <a:r>
+              <a:rPr dirty="0"/>
+              <a:t> di </a:t>
+            </a:r>
+            <a:r>
+              <a:rPr dirty="0" err="1"/>
+              <a:t>aggregazione</a:t>
+            </a:r>
+            <a:r>
+              <a:rPr dirty="0"/>
+              <a:t>:</a:t>
+            </a:r>
+            <a:br>
+              <a:rPr dirty="0"/>
+            </a:br>
+            <a:br>
+              <a:rPr dirty="0"/>
+            </a:br>
+            <a:r>
+              <a:rPr dirty="0"/>
+              <a:t>count(*)     = </a:t>
+            </a:r>
+            <a:r>
+              <a:rPr dirty="0" err="1"/>
+              <a:t>conta</a:t>
+            </a:r>
+            <a:r>
+              <a:rPr dirty="0"/>
+              <a:t> tutte le </a:t>
+            </a:r>
+            <a:r>
+              <a:rPr dirty="0" err="1"/>
+              <a:t>righe</a:t>
+            </a:r>
+            <a:br>
+              <a:rPr dirty="0"/>
+            </a:br>
+            <a:r>
+              <a:rPr dirty="0"/>
+              <a:t>count(expr)  = </a:t>
+            </a:r>
+            <a:r>
+              <a:rPr dirty="0" err="1"/>
+              <a:t>conta</a:t>
+            </a:r>
+            <a:r>
+              <a:rPr dirty="0"/>
+              <a:t> </a:t>
+            </a:r>
+            <a:r>
+              <a:rPr dirty="0" err="1"/>
+              <a:t>i</a:t>
+            </a:r>
+            <a:r>
+              <a:rPr dirty="0"/>
+              <a:t> </a:t>
+            </a:r>
+            <a:r>
+              <a:rPr dirty="0" err="1"/>
+              <a:t>valori</a:t>
+            </a:r>
+            <a:r>
+              <a:rPr dirty="0"/>
+              <a:t> non-NULL</a:t>
+            </a:r>
+            <a:br>
+              <a:rPr dirty="0"/>
+            </a:br>
+            <a:r>
+              <a:rPr dirty="0"/>
+              <a:t>count(DISTINCT expr) = </a:t>
+            </a:r>
+            <a:r>
+              <a:rPr dirty="0" err="1"/>
+              <a:t>conta</a:t>
+            </a:r>
+            <a:r>
+              <a:rPr dirty="0"/>
+              <a:t> </a:t>
+            </a:r>
+            <a:r>
+              <a:rPr dirty="0" err="1"/>
+              <a:t>valori</a:t>
+            </a:r>
+            <a:r>
+              <a:rPr dirty="0"/>
+              <a:t> </a:t>
+            </a:r>
+            <a:r>
+              <a:rPr dirty="0" err="1"/>
+              <a:t>unici</a:t>
+            </a:r>
+            <a:br>
+              <a:rPr dirty="0"/>
+            </a:br>
+            <a:br>
+              <a:rPr dirty="0"/>
+            </a:br>
+            <a:r>
+              <a:rPr dirty="0"/>
+              <a:t>collect(expr)      = </a:t>
+            </a:r>
+            <a:r>
+              <a:rPr dirty="0" err="1"/>
+              <a:t>lista</a:t>
+            </a:r>
+            <a:r>
+              <a:rPr dirty="0"/>
+              <a:t> di tutti </a:t>
+            </a:r>
+            <a:r>
+              <a:rPr dirty="0" err="1"/>
+              <a:t>i</a:t>
+            </a:r>
+            <a:r>
+              <a:rPr dirty="0"/>
+              <a:t> </a:t>
+            </a:r>
+            <a:r>
+              <a:rPr dirty="0" err="1"/>
+              <a:t>valori</a:t>
+            </a:r>
+            <a:br>
+              <a:rPr dirty="0"/>
+            </a:br>
+            <a:r>
+              <a:rPr dirty="0"/>
+              <a:t>collect(DISTINCT)  = </a:t>
+            </a:r>
+            <a:r>
+              <a:rPr dirty="0" err="1"/>
+              <a:t>lista</a:t>
+            </a:r>
+            <a:r>
+              <a:rPr dirty="0"/>
+              <a:t> senza </a:t>
+            </a:r>
+            <a:r>
+              <a:rPr dirty="0" err="1"/>
+              <a:t>duplicati</a:t>
+            </a:r>
+            <a:br>
+              <a:rPr dirty="0"/>
+            </a:br>
+            <a:br>
+              <a:rPr dirty="0"/>
+            </a:br>
+            <a:r>
+              <a:rPr dirty="0"/>
+              <a:t>avg(expr)  = media </a:t>
+            </a:r>
+            <a:r>
+              <a:rPr dirty="0" err="1"/>
+              <a:t>aritmetica</a:t>
+            </a:r>
+            <a:br>
+              <a:rPr dirty="0"/>
+            </a:br>
+            <a:r>
+              <a:rPr dirty="0"/>
               <a:t>sum(expr)  = somma</a:t>
             </a:r>
-            <a:br/>
-            <a:r>
-              <a:t>min(expr)  = valore minimo</a:t>
-            </a:r>
-            <a:br/>
-            <a:r>
-              <a:t>max(expr)  = valore massimo</a:t>
-            </a:r>
-            <a:br/>
-            <a:br/>
-            <a:r>
-              <a:t>Attenzione: count() è più veloce</a:t>
-            </a:r>
-            <a:br/>
-            <a:r>
-              <a:t>di size(collect()) perché non</a:t>
-            </a:r>
-            <a:br/>
-            <a:r>
-              <a:t>costruisce la lista intermedia.</a:t>
+            <a:br>
+              <a:rPr dirty="0"/>
+            </a:br>
+            <a:r>
+              <a:rPr dirty="0"/>
+              <a:t>min(expr)  = </a:t>
+            </a:r>
+            <a:r>
+              <a:rPr dirty="0" err="1"/>
+              <a:t>valore</a:t>
+            </a:r>
+            <a:r>
+              <a:rPr dirty="0"/>
+              <a:t> </a:t>
+            </a:r>
+            <a:r>
+              <a:rPr dirty="0" err="1"/>
+              <a:t>minimo</a:t>
+            </a:r>
+            <a:br>
+              <a:rPr dirty="0"/>
+            </a:br>
+            <a:r>
+              <a:rPr dirty="0"/>
+              <a:t>max(expr)  = </a:t>
+            </a:r>
+            <a:r>
+              <a:rPr dirty="0" err="1"/>
+              <a:t>valore</a:t>
+            </a:r>
+            <a:r>
+              <a:rPr dirty="0"/>
+              <a:t> </a:t>
+            </a:r>
+            <a:r>
+              <a:rPr dirty="0" err="1"/>
+              <a:t>massimo</a:t>
+            </a:r>
+            <a:br>
+              <a:rPr dirty="0"/>
+            </a:br>
+            <a:br>
+              <a:rPr dirty="0"/>
+            </a:br>
+            <a:r>
+              <a:rPr dirty="0" err="1"/>
+              <a:t>Attenzione</a:t>
+            </a:r>
+            <a:r>
+              <a:rPr dirty="0"/>
+              <a:t>: count() è </a:t>
+            </a:r>
+            <a:r>
+              <a:rPr dirty="0" err="1"/>
+              <a:t>più</a:t>
+            </a:r>
+            <a:r>
+              <a:rPr dirty="0"/>
+              <a:t> veloce</a:t>
+            </a:r>
+            <a:br>
+              <a:rPr dirty="0"/>
+            </a:br>
+            <a:r>
+              <a:rPr dirty="0"/>
+              <a:t>di size(collect()) </a:t>
+            </a:r>
+            <a:r>
+              <a:rPr dirty="0" err="1"/>
+              <a:t>perché</a:t>
+            </a:r>
+            <a:r>
+              <a:rPr dirty="0"/>
+              <a:t> non</a:t>
+            </a:r>
+            <a:br>
+              <a:rPr dirty="0"/>
+            </a:br>
+            <a:r>
+              <a:rPr dirty="0" err="1"/>
+              <a:t>costruisce</a:t>
+            </a:r>
+            <a:r>
+              <a:rPr dirty="0"/>
+              <a:t> la </a:t>
+            </a:r>
+            <a:r>
+              <a:rPr dirty="0" err="1"/>
+              <a:t>lista</a:t>
+            </a:r>
+            <a:r>
+              <a:rPr dirty="0"/>
+              <a:t> intermedia.</a:t>
             </a:r>
           </a:p>
         </p:txBody>
@@ -27758,7 +28602,7 @@
         </p:nvSpPr>
         <p:spPr>
           <a:xfrm>
-            <a:off x="731520" y="4663440"/>
+            <a:off x="731520" y="4754880"/>
             <a:ext cx="10698480" cy="36576"/>
           </a:xfrm>
           <a:prstGeom prst="rect">
@@ -27790,6 +28634,7 @@
           <a:lstStyle/>
           <a:p>
             <a:pPr algn="ctr"/>
+            <a:endParaRPr/>
           </a:p>
         </p:txBody>
       </p:sp>
@@ -27801,7 +28646,7 @@
         </p:nvSpPr>
         <p:spPr>
           <a:xfrm>
-            <a:off x="731520" y="4846320"/>
+            <a:off x="731520" y="4937760"/>
             <a:ext cx="10515600" cy="365760"/>
           </a:xfrm>
           <a:prstGeom prst="rect">
@@ -27838,7 +28683,7 @@
 </file>
 
 <file path=ppt/slides/slide15.xml><?xml version="1.0" encoding="utf-8"?>
-<p:sld xmlns:a="http://schemas.openxmlformats.org/drawingml/2006/main" xmlns:p="http://schemas.openxmlformats.org/presentationml/2006/main" xmlns:r="http://schemas.openxmlformats.org/officeDocument/2006/relationships">
+<p:sld xmlns:a="http://schemas.openxmlformats.org/drawingml/2006/main" xmlns:r="http://schemas.openxmlformats.org/officeDocument/2006/relationships" xmlns:p="http://schemas.openxmlformats.org/presentationml/2006/main">
   <p:cSld>
     <p:bg>
       <p:bgPr>
@@ -27854,7 +28699,14 @@
         <p:cNvGrpSpPr/>
         <p:nvPr/>
       </p:nvGrpSpPr>
-      <p:grpSpPr/>
+      <p:grpSpPr>
+        <a:xfrm>
+          <a:off x="0" y="0"/>
+          <a:ext cx="0" cy="0"/>
+          <a:chOff x="0" y="0"/>
+          <a:chExt cx="0" cy="0"/>
+        </a:xfrm>
+      </p:grpSpPr>
       <p:sp>
         <p:nvSpPr>
           <p:cNvPr id="2" name="TextBox 1"/>
@@ -28092,6 +28944,7 @@
           <a:lstStyle/>
           <a:p>
             <a:pPr algn="ctr"/>
+            <a:endParaRPr/>
           </a:p>
         </p:txBody>
       </p:sp>
@@ -28208,6 +29061,7 @@
                 <a:latin typeface="Consolas"/>
               </a:defRPr>
             </a:pPr>
+            <a:endParaRPr/>
           </a:p>
           <a:p>
             <a:pPr>
@@ -28283,7 +29137,7 @@
         </p:nvSpPr>
         <p:spPr>
           <a:xfrm>
-            <a:off x="5669280" y="1417320"/>
+            <a:off x="6096000" y="1417320"/>
             <a:ext cx="4846320" cy="411480"/>
           </a:xfrm>
           <a:prstGeom prst="rect">
@@ -28319,7 +29173,7 @@
         </p:nvSpPr>
         <p:spPr>
           <a:xfrm>
-            <a:off x="5669280" y="1828800"/>
+            <a:off x="6096000" y="1828800"/>
             <a:ext cx="4846320" cy="3200400"/>
           </a:xfrm>
           <a:prstGeom prst="rect">
@@ -28353,6 +29207,7 @@
           <a:lstStyle/>
           <a:p>
             <a:pPr algn="ctr"/>
+            <a:endParaRPr/>
           </a:p>
         </p:txBody>
       </p:sp>
@@ -28364,7 +29219,7 @@
         </p:nvSpPr>
         <p:spPr>
           <a:xfrm>
-            <a:off x="5779008" y="1901952"/>
+            <a:off x="6205728" y="1901952"/>
             <a:ext cx="4626864" cy="3054096"/>
           </a:xfrm>
           <a:prstGeom prst="rect">
@@ -28437,6 +29292,7 @@
                 <a:latin typeface="Consolas"/>
               </a:defRPr>
             </a:pPr>
+            <a:endParaRPr/>
           </a:p>
           <a:p>
             <a:pPr>
@@ -28498,6 +29354,7 @@
                 <a:latin typeface="Consolas"/>
               </a:defRPr>
             </a:pPr>
+            <a:endParaRPr/>
           </a:p>
           <a:p>
             <a:pPr>
@@ -28575,6 +29432,7 @@
                 <a:latin typeface="Consolas"/>
               </a:defRPr>
             </a:pPr>
+            <a:endParaRPr/>
           </a:p>
           <a:p>
             <a:pPr>
@@ -28635,7 +29493,7 @@
 </file>
 
 <file path=ppt/slides/slide16.xml><?xml version="1.0" encoding="utf-8"?>
-<p:sld xmlns:a="http://schemas.openxmlformats.org/drawingml/2006/main" xmlns:p="http://schemas.openxmlformats.org/presentationml/2006/main" xmlns:r="http://schemas.openxmlformats.org/officeDocument/2006/relationships">
+<p:sld xmlns:a="http://schemas.openxmlformats.org/drawingml/2006/main" xmlns:r="http://schemas.openxmlformats.org/officeDocument/2006/relationships" xmlns:p="http://schemas.openxmlformats.org/presentationml/2006/main">
   <p:cSld>
     <p:bg>
       <p:bgPr>
@@ -28651,7 +29509,14 @@
         <p:cNvGrpSpPr/>
         <p:nvPr/>
       </p:nvGrpSpPr>
-      <p:grpSpPr/>
+      <p:grpSpPr>
+        <a:xfrm>
+          <a:off x="0" y="0"/>
+          <a:ext cx="0" cy="0"/>
+          <a:chOff x="0" y="0"/>
+          <a:chExt cx="0" cy="0"/>
+        </a:xfrm>
+      </p:grpSpPr>
       <p:sp>
         <p:nvSpPr>
           <p:cNvPr id="2" name="TextBox 1"/>
@@ -28835,8 +29700,8 @@
         </p:nvSpPr>
         <p:spPr>
           <a:xfrm>
-            <a:off x="5669280" y="1371600"/>
-            <a:ext cx="4846320" cy="2011680"/>
+            <a:off x="6096000" y="1280160"/>
+            <a:ext cx="4846320" cy="2139696"/>
           </a:xfrm>
           <a:prstGeom prst="rect">
             <a:avLst/>
@@ -28869,6 +29734,7 @@
           <a:lstStyle/>
           <a:p>
             <a:pPr algn="ctr"/>
+            <a:endParaRPr/>
           </a:p>
         </p:txBody>
       </p:sp>
@@ -28880,7 +29746,7 @@
         </p:nvSpPr>
         <p:spPr>
           <a:xfrm>
-            <a:off x="5779008" y="1444752"/>
+            <a:off x="6205728" y="1353312"/>
             <a:ext cx="4626864" cy="1865376"/>
           </a:xfrm>
           <a:prstGeom prst="rect">
@@ -28906,7 +29772,16 @@
               </a:defRPr>
             </a:pPr>
             <a:r>
-              <a:t>CREATE CONSTRAINT person_id IF NOT EXISTS</a:t>
+              <a:rPr dirty="0"/>
+              <a:t>CREATE CONSTRAINT </a:t>
+            </a:r>
+            <a:r>
+              <a:rPr dirty="0" err="1"/>
+              <a:t>person_id</a:t>
+            </a:r>
+            <a:r>
+              <a:rPr dirty="0"/>
+              <a:t> IF NOT EXISTS</a:t>
             </a:r>
           </a:p>
           <a:p>
@@ -28922,7 +29797,16 @@
               </a:defRPr>
             </a:pPr>
             <a:r>
-              <a:t>  FOR (p:Person)</a:t>
+              <a:rPr dirty="0"/>
+              <a:t>  FOR (</a:t>
+            </a:r>
+            <a:r>
+              <a:rPr dirty="0" err="1"/>
+              <a:t>p:Person</a:t>
+            </a:r>
+            <a:r>
+              <a:rPr dirty="0"/>
+              <a:t>)</a:t>
             </a:r>
           </a:p>
           <a:p>
@@ -28938,7 +29822,16 @@
               </a:defRPr>
             </a:pPr>
             <a:r>
-              <a:t>  REQUIRE p.employee_id IS UNIQUE;</a:t>
+              <a:rPr dirty="0"/>
+              <a:t>  REQUIRE </a:t>
+            </a:r>
+            <a:r>
+              <a:rPr dirty="0" err="1"/>
+              <a:t>p.employee_id</a:t>
+            </a:r>
+            <a:r>
+              <a:rPr dirty="0"/>
+              <a:t> IS UNIQUE;</a:t>
             </a:r>
           </a:p>
           <a:p>
@@ -28953,6 +29846,7 @@
                 <a:latin typeface="Consolas"/>
               </a:defRPr>
             </a:pPr>
+            <a:endParaRPr dirty="0"/>
           </a:p>
           <a:p>
             <a:pPr>
@@ -28967,7 +29861,16 @@
               </a:defRPr>
             </a:pPr>
             <a:r>
-              <a:t>CREATE CONSTRAINT person_name IF NOT EXISTS</a:t>
+              <a:rPr dirty="0"/>
+              <a:t>CREATE CONSTRAINT </a:t>
+            </a:r>
+            <a:r>
+              <a:rPr dirty="0" err="1"/>
+              <a:t>person_name</a:t>
+            </a:r>
+            <a:r>
+              <a:rPr dirty="0"/>
+              <a:t> IF NOT EXISTS</a:t>
             </a:r>
           </a:p>
           <a:p>
@@ -28983,7 +29886,16 @@
               </a:defRPr>
             </a:pPr>
             <a:r>
-              <a:t>  FOR (p:Person)</a:t>
+              <a:rPr dirty="0"/>
+              <a:t>  FOR (</a:t>
+            </a:r>
+            <a:r>
+              <a:rPr dirty="0" err="1"/>
+              <a:t>p:Person</a:t>
+            </a:r>
+            <a:r>
+              <a:rPr dirty="0"/>
+              <a:t>)</a:t>
             </a:r>
           </a:p>
           <a:p>
@@ -28999,6 +29911,7 @@
               </a:defRPr>
             </a:pPr>
             <a:r>
+              <a:rPr dirty="0"/>
               <a:t>  REQUIRE p.name IS NOT NULL;</a:t>
             </a:r>
           </a:p>
@@ -29014,6 +29927,7 @@
                 <a:latin typeface="Consolas"/>
               </a:defRPr>
             </a:pPr>
+            <a:endParaRPr dirty="0"/>
           </a:p>
           <a:p>
             <a:pPr>
@@ -29028,7 +29942,16 @@
               </a:defRPr>
             </a:pPr>
             <a:r>
-              <a:t>// Node Key composto:</a:t>
+              <a:rPr dirty="0"/>
+              <a:t>// Node Key </a:t>
+            </a:r>
+            <a:r>
+              <a:rPr dirty="0" err="1"/>
+              <a:t>composto</a:t>
+            </a:r>
+            <a:r>
+              <a:rPr dirty="0"/>
+              <a:t>:</a:t>
             </a:r>
           </a:p>
           <a:p>
@@ -29044,7 +29967,16 @@
               </a:defRPr>
             </a:pPr>
             <a:r>
-              <a:t>CREATE CONSTRAINT project_key IF NOT EXISTS</a:t>
+              <a:rPr dirty="0"/>
+              <a:t>CREATE CONSTRAINT </a:t>
+            </a:r>
+            <a:r>
+              <a:rPr dirty="0" err="1"/>
+              <a:t>project_key</a:t>
+            </a:r>
+            <a:r>
+              <a:rPr dirty="0"/>
+              <a:t> IF NOT EXISTS</a:t>
             </a:r>
           </a:p>
           <a:p>
@@ -29060,7 +29992,16 @@
               </a:defRPr>
             </a:pPr>
             <a:r>
-              <a:t>  FOR (p:Project)</a:t>
+              <a:rPr dirty="0"/>
+              <a:t>  FOR (</a:t>
+            </a:r>
+            <a:r>
+              <a:rPr dirty="0" err="1"/>
+              <a:t>p:Project</a:t>
+            </a:r>
+            <a:r>
+              <a:rPr dirty="0"/>
+              <a:t>)</a:t>
             </a:r>
           </a:p>
           <a:p>
@@ -29076,805 +30017,16 @@
               </a:defRPr>
             </a:pPr>
             <a:r>
-              <a:t>  REQUIRE (p.project_id, p.name) IS NODE KEY;</a:t>
-            </a:r>
-          </a:p>
-        </p:txBody>
-      </p:sp>
-      <p:sp>
-        <p:nvSpPr>
-          <p:cNvPr id="7" name="Rectangle 6"/>
-          <p:cNvSpPr/>
-          <p:nvPr/>
-        </p:nvSpPr>
-        <p:spPr>
-          <a:xfrm>
-            <a:off x="731520" y="3474720"/>
-            <a:ext cx="10698480" cy="36576"/>
-          </a:xfrm>
-          <a:prstGeom prst="rect">
-            <a:avLst/>
-          </a:prstGeom>
-          <a:solidFill>
-            <a:srgbClr val="F0C040"/>
-          </a:solidFill>
-          <a:ln>
-            <a:noFill/>
-          </a:ln>
-        </p:spPr>
-        <p:style>
-          <a:lnRef idx="1">
-            <a:schemeClr val="accent1"/>
-          </a:lnRef>
-          <a:fillRef idx="3">
-            <a:schemeClr val="accent1"/>
-          </a:fillRef>
-          <a:effectRef idx="2">
-            <a:schemeClr val="accent1"/>
-          </a:effectRef>
-          <a:fontRef idx="minor">
-            <a:schemeClr val="lt1"/>
-          </a:fontRef>
-        </p:style>
-        <p:txBody>
-          <a:bodyPr rtlCol="0" anchor="ctr"/>
-          <a:lstStyle/>
-          <a:p>
-            <a:pPr algn="ctr"/>
-          </a:p>
-        </p:txBody>
-      </p:sp>
-      <p:sp>
-        <p:nvSpPr>
-          <p:cNvPr id="8" name="TextBox 7"/>
-          <p:cNvSpPr txBox="1"/>
-          <p:nvPr/>
-        </p:nvSpPr>
-        <p:spPr>
-          <a:xfrm>
-            <a:off x="731520" y="3657600"/>
-            <a:ext cx="10515600" cy="365760"/>
-          </a:xfrm>
-          <a:prstGeom prst="rect">
-            <a:avLst/>
-          </a:prstGeom>
-          <a:noFill/>
-        </p:spPr>
-        <p:txBody>
-          <a:bodyPr wrap="square">
-            <a:spAutoFit/>
-          </a:bodyPr>
-          <a:lstStyle/>
-          <a:p>
-            <a:pPr algn="l">
-              <a:defRPr sz="1500" b="1">
-                <a:solidFill>
-                  <a:srgbClr val="F08040"/>
-                </a:solidFill>
-                <a:latin typeface="Calibri"/>
-              </a:defRPr>
-            </a:pPr>
-            <a:r>
-              <a:t>Verificare i constraint esistenti:</a:t>
-            </a:r>
-          </a:p>
-        </p:txBody>
-      </p:sp>
-      <p:sp>
-        <p:nvSpPr>
-          <p:cNvPr id="9" name="Rectangle 8"/>
-          <p:cNvSpPr/>
-          <p:nvPr/>
-        </p:nvSpPr>
-        <p:spPr>
-          <a:xfrm>
-            <a:off x="731520" y="4114800"/>
-            <a:ext cx="5029200" cy="1645920"/>
-          </a:xfrm>
-          <a:prstGeom prst="rect">
-            <a:avLst/>
-          </a:prstGeom>
-          <a:solidFill>
-            <a:srgbClr val="1B2A4A"/>
-          </a:solidFill>
-          <a:ln w="12700">
-            <a:solidFill>
-              <a:srgbClr val="2D4F7A"/>
-            </a:solidFill>
-          </a:ln>
-        </p:spPr>
-        <p:style>
-          <a:lnRef idx="1">
-            <a:schemeClr val="accent1"/>
-          </a:lnRef>
-          <a:fillRef idx="3">
-            <a:schemeClr val="accent1"/>
-          </a:fillRef>
-          <a:effectRef idx="2">
-            <a:schemeClr val="accent1"/>
-          </a:effectRef>
-          <a:fontRef idx="minor">
-            <a:schemeClr val="lt1"/>
-          </a:fontRef>
-        </p:style>
-        <p:txBody>
-          <a:bodyPr rtlCol="0" anchor="ctr"/>
-          <a:lstStyle/>
-          <a:p>
-            <a:pPr algn="ctr"/>
-          </a:p>
-        </p:txBody>
-      </p:sp>
-      <p:sp>
-        <p:nvSpPr>
-          <p:cNvPr id="10" name="TextBox 9"/>
-          <p:cNvSpPr txBox="1"/>
-          <p:nvPr/>
-        </p:nvSpPr>
-        <p:spPr>
-          <a:xfrm>
-            <a:off x="841248" y="4187952"/>
-            <a:ext cx="4809744" cy="1499616"/>
-          </a:xfrm>
-          <a:prstGeom prst="rect">
-            <a:avLst/>
-          </a:prstGeom>
-          <a:noFill/>
-        </p:spPr>
-        <p:txBody>
-          <a:bodyPr wrap="square">
-            <a:spAutoFit/>
-          </a:bodyPr>
-          <a:lstStyle/>
-          <a:p>
-            <a:pPr>
-              <a:spcAft>
-                <a:spcPts val="100"/>
-              </a:spcAft>
-              <a:defRPr sz="1000">
-                <a:solidFill>
-                  <a:srgbClr val="7EC68E"/>
-                </a:solidFill>
-                <a:latin typeface="Consolas"/>
-              </a:defRPr>
-            </a:pPr>
-            <a:r>
-              <a:t>SHOW CONSTRAINTS;</a:t>
-            </a:r>
-          </a:p>
-          <a:p>
-            <a:pPr>
-              <a:spcAft>
-                <a:spcPts val="100"/>
-              </a:spcAft>
-              <a:defRPr sz="1000">
-                <a:solidFill>
-                  <a:srgbClr val="7EC68E"/>
-                </a:solidFill>
-                <a:latin typeface="Consolas"/>
-              </a:defRPr>
-            </a:pPr>
-          </a:p>
-          <a:p>
-            <a:pPr>
-              <a:spcAft>
-                <a:spcPts val="100"/>
-              </a:spcAft>
-              <a:defRPr sz="1000">
-                <a:solidFill>
-                  <a:srgbClr val="7EC68E"/>
-                </a:solidFill>
-                <a:latin typeface="Consolas"/>
-              </a:defRPr>
-            </a:pPr>
-            <a:r>
-              <a:t>// Output esempio:</a:t>
-            </a:r>
-          </a:p>
-          <a:p>
-            <a:pPr>
-              <a:spcAft>
-                <a:spcPts val="100"/>
-              </a:spcAft>
-              <a:defRPr sz="1000">
-                <a:solidFill>
-                  <a:srgbClr val="7EC68E"/>
-                </a:solidFill>
-                <a:latin typeface="Consolas"/>
-              </a:defRPr>
-            </a:pPr>
-            <a:r>
-              <a:t>// name          | type   | label    | properties</a:t>
-            </a:r>
-          </a:p>
-          <a:p>
-            <a:pPr>
-              <a:spcAft>
-                <a:spcPts val="100"/>
-              </a:spcAft>
-              <a:defRPr sz="1000">
-                <a:solidFill>
-                  <a:srgbClr val="7EC68E"/>
-                </a:solidFill>
-                <a:latin typeface="Consolas"/>
-              </a:defRPr>
-            </a:pPr>
-            <a:r>
-              <a:t>// person_id     | UNIQUE | Person   | employee_id</a:t>
-            </a:r>
-          </a:p>
-          <a:p>
-            <a:pPr>
-              <a:spcAft>
-                <a:spcPts val="100"/>
-              </a:spcAft>
-              <a:defRPr sz="1000">
-                <a:solidFill>
-                  <a:srgbClr val="7EC68E"/>
-                </a:solidFill>
-                <a:latin typeface="Consolas"/>
-              </a:defRPr>
-            </a:pPr>
-            <a:r>
-              <a:t>// person_name   | EXISTS | Person   | name</a:t>
-            </a:r>
-          </a:p>
-          <a:p>
-            <a:pPr>
-              <a:spcAft>
-                <a:spcPts val="100"/>
-              </a:spcAft>
-              <a:defRPr sz="1000">
-                <a:solidFill>
-                  <a:srgbClr val="7EC68E"/>
-                </a:solidFill>
-                <a:latin typeface="Consolas"/>
-              </a:defRPr>
-            </a:pPr>
-            <a:r>
-              <a:t>// project_key   | NODE KEY | Project | project_id, name</a:t>
-            </a:r>
-          </a:p>
-        </p:txBody>
-      </p:sp>
-      <p:sp>
-        <p:nvSpPr>
-          <p:cNvPr id="11" name="TextBox 10"/>
-          <p:cNvSpPr txBox="1"/>
-          <p:nvPr/>
-        </p:nvSpPr>
-        <p:spPr>
-          <a:xfrm>
-            <a:off x="5669280" y="4114800"/>
-            <a:ext cx="4846320" cy="1645920"/>
-          </a:xfrm>
-          <a:prstGeom prst="rect">
-            <a:avLst/>
-          </a:prstGeom>
-          <a:noFill/>
-        </p:spPr>
-        <p:txBody>
-          <a:bodyPr wrap="square">
-            <a:spAutoFit/>
-          </a:bodyPr>
-          <a:lstStyle/>
-          <a:p>
-            <a:pPr algn="l">
-              <a:defRPr sz="1200" b="0">
-                <a:solidFill>
-                  <a:srgbClr val="CCCCCC"/>
-                </a:solidFill>
-                <a:latin typeface="Calibri"/>
-              </a:defRPr>
-            </a:pPr>
-            <a:r>
-              <a:t>Perché creare constraint PRIMA?</a:t>
-            </a:r>
-            <a:br/>
-            <a:br/>
-            <a:r>
-              <a:t>1. Il caricamento fallisce subito se</a:t>
-            </a:r>
-            <a:br/>
-            <a:r>
-              <a:t>   i dati violano i vincoli</a:t>
-            </a:r>
-            <a:br/>
-            <a:r>
-              <a:t>2. MERGE su proprietà UNIQUE è</a:t>
-            </a:r>
-            <a:br/>
-            <a:r>
-              <a:t>   atomicamente sicuro</a:t>
-            </a:r>
-            <a:br/>
-            <a:r>
-              <a:t>3. L’indice sottostante accelera</a:t>
-            </a:r>
-            <a:br/>
-            <a:r>
-              <a:t>   il caricamento (nessuna scansione)</a:t>
-            </a:r>
-            <a:br/>
-            <a:br/>
-            <a:r>
-              <a:t>Regola: CREATE CONSTRAINT ... →</a:t>
-            </a:r>
-            <a:br/>
-            <a:r>
-              <a:t>LOAD DATA → SHOW CONSTRAINTS</a:t>
-            </a:r>
-            <a:br/>
-            <a:r>
-              <a:t>per verificare</a:t>
-            </a:r>
-          </a:p>
-        </p:txBody>
-      </p:sp>
-    </p:spTree>
-  </p:cSld>
-  <p:clrMapOvr>
-    <a:masterClrMapping/>
-  </p:clrMapOvr>
-</p:sld>
-</file>
-
-<file path=ppt/slides/slide17.xml><?xml version="1.0" encoding="utf-8"?>
-<p:sld xmlns:a="http://schemas.openxmlformats.org/drawingml/2006/main" xmlns:p="http://schemas.openxmlformats.org/presentationml/2006/main" xmlns:r="http://schemas.openxmlformats.org/officeDocument/2006/relationships">
-  <p:cSld>
-    <p:bg>
-      <p:bgPr>
-        <a:solidFill>
-          <a:srgbClr val="272936"/>
-        </a:solidFill>
-        <a:effectLst/>
-      </p:bgPr>
-    </p:bg>
-    <p:spTree>
-      <p:nvGrpSpPr>
-        <p:cNvPr id="1" name=""/>
-        <p:cNvGrpSpPr/>
-        <p:nvPr/>
-      </p:nvGrpSpPr>
-      <p:grpSpPr/>
-      <p:sp>
-        <p:nvSpPr>
-          <p:cNvPr id="2" name="TextBox 1"/>
-          <p:cNvSpPr txBox="1"/>
-          <p:nvPr/>
-        </p:nvSpPr>
-        <p:spPr>
-          <a:xfrm>
-            <a:off x="731520" y="320040"/>
-            <a:ext cx="10515600" cy="594360"/>
-          </a:xfrm>
-          <a:prstGeom prst="rect">
-            <a:avLst/>
-          </a:prstGeom>
-          <a:noFill/>
-        </p:spPr>
-        <p:txBody>
-          <a:bodyPr wrap="square">
-            <a:spAutoFit/>
-          </a:bodyPr>
-          <a:lstStyle/>
-          <a:p>
-            <a:pPr algn="l">
-              <a:defRPr sz="3300" b="1">
-                <a:solidFill>
-                  <a:srgbClr val="F0C040"/>
-                </a:solidFill>
-                <a:latin typeface="Calibri"/>
-              </a:defRPr>
-            </a:pPr>
-            <a:r>
-              <a:t>Indici e Performance</a:t>
-            </a:r>
-          </a:p>
-        </p:txBody>
-      </p:sp>
-      <p:sp>
-        <p:nvSpPr>
-          <p:cNvPr id="3" name="TextBox 2"/>
-          <p:cNvSpPr txBox="1"/>
-          <p:nvPr/>
-        </p:nvSpPr>
-        <p:spPr>
-          <a:xfrm>
-            <a:off x="731520" y="914400"/>
-            <a:ext cx="10515600" cy="457200"/>
-          </a:xfrm>
-          <a:prstGeom prst="rect">
-            <a:avLst/>
-          </a:prstGeom>
-          <a:noFill/>
-        </p:spPr>
-        <p:txBody>
-          <a:bodyPr wrap="square">
-            <a:spAutoFit/>
-          </a:bodyPr>
-          <a:lstStyle/>
-          <a:p>
-            <a:pPr algn="l">
-              <a:defRPr sz="1400" b="0">
-                <a:solidFill>
-                  <a:srgbClr val="CCCCCC"/>
-                </a:solidFill>
-                <a:latin typeface="Calibri"/>
-              </a:defRPr>
-            </a:pPr>
-            <a:r>
-              <a:t>Gli indici accelerano la lettura. Senza indice, Neo4j esegue NodeByLabelScan (legge tutti i nodi).</a:t>
-            </a:r>
-          </a:p>
-        </p:txBody>
-      </p:sp>
-      <p:sp>
-        <p:nvSpPr>
-          <p:cNvPr id="4" name="TextBox 3"/>
-          <p:cNvSpPr txBox="1"/>
-          <p:nvPr/>
-        </p:nvSpPr>
-        <p:spPr>
-          <a:xfrm>
-            <a:off x="731520" y="1463040"/>
-            <a:ext cx="5029200" cy="1828800"/>
-          </a:xfrm>
-          <a:prstGeom prst="rect">
-            <a:avLst/>
-          </a:prstGeom>
-          <a:noFill/>
-        </p:spPr>
-        <p:txBody>
-          <a:bodyPr wrap="square">
-            <a:spAutoFit/>
-          </a:bodyPr>
-          <a:lstStyle/>
-          <a:p>
-            <a:pPr algn="l">
-              <a:spcAft>
-                <a:spcPts val="300"/>
-              </a:spcAft>
-              <a:defRPr sz="1200">
-                <a:solidFill>
-                  <a:srgbClr val="FFFFFF"/>
-                </a:solidFill>
-                <a:latin typeface="Calibri"/>
-              </a:defRPr>
-            </a:pPr>
-            <a:r>
-              <a:t>•  RANGE (default) — per confronti esatti, range, ORDER BY</a:t>
-            </a:r>
-          </a:p>
-          <a:p>
-            <a:pPr algn="l">
-              <a:spcAft>
-                <a:spcPts val="300"/>
-              </a:spcAft>
-              <a:defRPr sz="1200">
-                <a:solidFill>
-                  <a:srgbClr val="FFFFFF"/>
-                </a:solidFill>
-                <a:latin typeface="Calibri"/>
-              </a:defRPr>
-            </a:pPr>
-            <a:r>
-              <a:t>•  TEXT — per CONTAINS, STARTS WITH, ENDS WITH</a:t>
-            </a:r>
-          </a:p>
-          <a:p>
-            <a:pPr algn="l">
-              <a:spcAft>
-                <a:spcPts val="300"/>
-              </a:spcAft>
-              <a:defRPr sz="1200">
-                <a:solidFill>
-                  <a:srgbClr val="FFFFFF"/>
-                </a:solidFill>
-                <a:latin typeface="Calibri"/>
-              </a:defRPr>
-            </a:pPr>
-            <a:r>
-              <a:t>•  POINT — per ricerche geospaziali</a:t>
-            </a:r>
-          </a:p>
-          <a:p>
-            <a:pPr algn="l">
-              <a:spcAft>
-                <a:spcPts val="300"/>
-              </a:spcAft>
-              <a:defRPr sz="1200">
-                <a:solidFill>
-                  <a:srgbClr val="FFFFFF"/>
-                </a:solidFill>
-                <a:latin typeface="Calibri"/>
-              </a:defRPr>
-            </a:pPr>
-            <a:r>
-              <a:t>•  FULLTEXT — per ricerca testuale avanzata (tokenizzazione)</a:t>
-            </a:r>
-          </a:p>
-          <a:p>
-            <a:pPr algn="l">
-              <a:spcAft>
-                <a:spcPts val="300"/>
-              </a:spcAft>
-              <a:defRPr sz="1200">
-                <a:solidFill>
-                  <a:srgbClr val="FFFFFF"/>
-                </a:solidFill>
-                <a:latin typeface="Calibri"/>
-              </a:defRPr>
-            </a:pPr>
-            <a:r>
-              <a:t>•  I constraint UNIQUE creano automaticamente un indice RANGE</a:t>
-            </a:r>
-          </a:p>
-          <a:p>
-            <a:pPr algn="l">
-              <a:spcAft>
-                <a:spcPts val="300"/>
-              </a:spcAft>
-              <a:defRPr sz="1200">
-                <a:solidFill>
-                  <a:srgbClr val="FFFFFF"/>
-                </a:solidFill>
-                <a:latin typeface="Calibri"/>
-              </a:defRPr>
-            </a:pPr>
-            <a:r>
-              <a:t>•  Gli indici migliorano la LETTURA ma rallentano leggermente la SCRITTURA</a:t>
-            </a:r>
-          </a:p>
-        </p:txBody>
-      </p:sp>
-      <p:sp>
-        <p:nvSpPr>
-          <p:cNvPr id="5" name="Rectangle 4"/>
-          <p:cNvSpPr/>
-          <p:nvPr/>
-        </p:nvSpPr>
-        <p:spPr>
-          <a:xfrm>
-            <a:off x="5669280" y="1463040"/>
-            <a:ext cx="4846320" cy="2011680"/>
-          </a:xfrm>
-          <a:prstGeom prst="rect">
-            <a:avLst/>
-          </a:prstGeom>
-          <a:solidFill>
-            <a:srgbClr val="1B2A4A"/>
-          </a:solidFill>
-          <a:ln w="12700">
-            <a:solidFill>
-              <a:srgbClr val="2D4F7A"/>
-            </a:solidFill>
-          </a:ln>
-        </p:spPr>
-        <p:style>
-          <a:lnRef idx="1">
-            <a:schemeClr val="accent1"/>
-          </a:lnRef>
-          <a:fillRef idx="3">
-            <a:schemeClr val="accent1"/>
-          </a:fillRef>
-          <a:effectRef idx="2">
-            <a:schemeClr val="accent1"/>
-          </a:effectRef>
-          <a:fontRef idx="minor">
-            <a:schemeClr val="lt1"/>
-          </a:fontRef>
-        </p:style>
-        <p:txBody>
-          <a:bodyPr rtlCol="0" anchor="ctr"/>
-          <a:lstStyle/>
-          <a:p>
-            <a:pPr algn="ctr"/>
-          </a:p>
-        </p:txBody>
-      </p:sp>
-      <p:sp>
-        <p:nvSpPr>
-          <p:cNvPr id="6" name="TextBox 5"/>
-          <p:cNvSpPr txBox="1"/>
-          <p:nvPr/>
-        </p:nvSpPr>
-        <p:spPr>
-          <a:xfrm>
-            <a:off x="5779008" y="1536192"/>
-            <a:ext cx="4626864" cy="1865376"/>
-          </a:xfrm>
-          <a:prstGeom prst="rect">
-            <a:avLst/>
-          </a:prstGeom>
-          <a:noFill/>
-        </p:spPr>
-        <p:txBody>
-          <a:bodyPr wrap="square">
-            <a:spAutoFit/>
-          </a:bodyPr>
-          <a:lstStyle/>
-          <a:p>
-            <a:pPr>
-              <a:spcAft>
-                <a:spcPts val="100"/>
-              </a:spcAft>
-              <a:defRPr sz="1000">
-                <a:solidFill>
-                  <a:srgbClr val="7EC68E"/>
-                </a:solidFill>
-                <a:latin typeface="Consolas"/>
-              </a:defRPr>
-            </a:pPr>
-            <a:r>
-              <a:t>CREATE INDEX person_location IF NOT EXISTS</a:t>
-            </a:r>
-          </a:p>
-          <a:p>
-            <a:pPr>
-              <a:spcAft>
-                <a:spcPts val="100"/>
-              </a:spcAft>
-              <a:defRPr sz="1000">
-                <a:solidFill>
-                  <a:srgbClr val="7EC68E"/>
-                </a:solidFill>
-                <a:latin typeface="Consolas"/>
-              </a:defRPr>
-            </a:pPr>
-            <a:r>
-              <a:t>  FOR (p:Person) ON (p.location);</a:t>
-            </a:r>
-          </a:p>
-          <a:p>
-            <a:pPr>
-              <a:spcAft>
-                <a:spcPts val="100"/>
-              </a:spcAft>
-              <a:defRPr sz="1000">
-                <a:solidFill>
-                  <a:srgbClr val="7EC68E"/>
-                </a:solidFill>
-                <a:latin typeface="Consolas"/>
-              </a:defRPr>
-            </a:pPr>
-          </a:p>
-          <a:p>
-            <a:pPr>
-              <a:spcAft>
-                <a:spcPts val="100"/>
-              </a:spcAft>
-              <a:defRPr sz="1000">
-                <a:solidFill>
-                  <a:srgbClr val="7EC68E"/>
-                </a:solidFill>
-                <a:latin typeface="Consolas"/>
-              </a:defRPr>
-            </a:pPr>
-            <a:r>
-              <a:t>CREATE TEXT INDEX skill_name IF NOT EXISTS</a:t>
-            </a:r>
-          </a:p>
-          <a:p>
-            <a:pPr>
-              <a:spcAft>
-                <a:spcPts val="100"/>
-              </a:spcAft>
-              <a:defRPr sz="1000">
-                <a:solidFill>
-                  <a:srgbClr val="7EC68E"/>
-                </a:solidFill>
-                <a:latin typeface="Consolas"/>
-              </a:defRPr>
-            </a:pPr>
-            <a:r>
-              <a:t>  FOR (s:Skill) ON (s.name);</a:t>
-            </a:r>
-          </a:p>
-          <a:p>
-            <a:pPr>
-              <a:spcAft>
-                <a:spcPts val="100"/>
-              </a:spcAft>
-              <a:defRPr sz="1000">
-                <a:solidFill>
-                  <a:srgbClr val="7EC68E"/>
-                </a:solidFill>
-                <a:latin typeface="Consolas"/>
-              </a:defRPr>
-            </a:pPr>
-          </a:p>
-          <a:p>
-            <a:pPr>
-              <a:spcAft>
-                <a:spcPts val="100"/>
-              </a:spcAft>
-              <a:defRPr sz="1000">
-                <a:solidFill>
-                  <a:srgbClr val="7EC68E"/>
-                </a:solidFill>
-                <a:latin typeface="Consolas"/>
-              </a:defRPr>
-            </a:pPr>
-            <a:r>
-              <a:t>// Indice composito:</a:t>
-            </a:r>
-          </a:p>
-          <a:p>
-            <a:pPr>
-              <a:spcAft>
-                <a:spcPts val="100"/>
-              </a:spcAft>
-              <a:defRPr sz="1000">
-                <a:solidFill>
-                  <a:srgbClr val="7EC68E"/>
-                </a:solidFill>
-                <a:latin typeface="Consolas"/>
-              </a:defRPr>
-            </a:pPr>
-            <a:r>
-              <a:t>CREATE INDEX person_dept_role IF NOT EXISTS</a:t>
-            </a:r>
-          </a:p>
-          <a:p>
-            <a:pPr>
-              <a:spcAft>
-                <a:spcPts val="100"/>
-              </a:spcAft>
-              <a:defRPr sz="1000">
-                <a:solidFill>
-                  <a:srgbClr val="7EC68E"/>
-                </a:solidFill>
-                <a:latin typeface="Consolas"/>
-              </a:defRPr>
-            </a:pPr>
-            <a:r>
-              <a:t>  FOR (p:Person)</a:t>
-            </a:r>
-          </a:p>
-          <a:p>
-            <a:pPr>
-              <a:spcAft>
-                <a:spcPts val="100"/>
-              </a:spcAft>
-              <a:defRPr sz="1000">
-                <a:solidFill>
-                  <a:srgbClr val="7EC68E"/>
-                </a:solidFill>
-                <a:latin typeface="Consolas"/>
-              </a:defRPr>
-            </a:pPr>
-            <a:r>
-              <a:t>  ON (p.department, p.title);</a:t>
-            </a:r>
-          </a:p>
-          <a:p>
-            <a:pPr>
-              <a:spcAft>
-                <a:spcPts val="100"/>
-              </a:spcAft>
-              <a:defRPr sz="1000">
-                <a:solidFill>
-                  <a:srgbClr val="7EC68E"/>
-                </a:solidFill>
-                <a:latin typeface="Consolas"/>
-              </a:defRPr>
-            </a:pPr>
-          </a:p>
-          <a:p>
-            <a:pPr>
-              <a:spcAft>
-                <a:spcPts val="100"/>
-              </a:spcAft>
-              <a:defRPr sz="1000">
-                <a:solidFill>
-                  <a:srgbClr val="7EC68E"/>
-                </a:solidFill>
-                <a:latin typeface="Consolas"/>
-              </a:defRPr>
-            </a:pPr>
-            <a:r>
-              <a:t>SHOW INDEXES;</a:t>
+              <a:rPr dirty="0"/>
+              <a:t>  REQUIRE (</a:t>
+            </a:r>
+            <a:r>
+              <a:rPr dirty="0" err="1"/>
+              <a:t>p.project_id</a:t>
+            </a:r>
+            <a:r>
+              <a:rPr dirty="0"/>
+              <a:t>, p.name) IS NODE KEY;</a:t>
             </a:r>
           </a:p>
         </p:txBody>
@@ -29919,6 +30071,7 @@
           <a:lstStyle/>
           <a:p>
             <a:pPr algn="ctr"/>
+            <a:endParaRPr/>
           </a:p>
         </p:txBody>
       </p:sp>
@@ -29953,7 +30106,7 @@
               </a:defRPr>
             </a:pPr>
             <a:r>
-              <a:t>PROFILE: vedere se la query usa l’indice</a:t>
+              <a:t>Verificare i constraint esistenti:</a:t>
             </a:r>
           </a:p>
         </p:txBody>
@@ -29967,6 +30120,984 @@
         <p:spPr>
           <a:xfrm>
             <a:off x="731520" y="4297680"/>
+            <a:ext cx="5029200" cy="1645920"/>
+          </a:xfrm>
+          <a:prstGeom prst="rect">
+            <a:avLst/>
+          </a:prstGeom>
+          <a:solidFill>
+            <a:srgbClr val="1B2A4A"/>
+          </a:solidFill>
+          <a:ln w="12700">
+            <a:solidFill>
+              <a:srgbClr val="2D4F7A"/>
+            </a:solidFill>
+          </a:ln>
+        </p:spPr>
+        <p:style>
+          <a:lnRef idx="1">
+            <a:schemeClr val="accent1"/>
+          </a:lnRef>
+          <a:fillRef idx="3">
+            <a:schemeClr val="accent1"/>
+          </a:fillRef>
+          <a:effectRef idx="2">
+            <a:schemeClr val="accent1"/>
+          </a:effectRef>
+          <a:fontRef idx="minor">
+            <a:schemeClr val="lt1"/>
+          </a:fontRef>
+        </p:style>
+        <p:txBody>
+          <a:bodyPr rtlCol="0" anchor="ctr"/>
+          <a:lstStyle/>
+          <a:p>
+            <a:pPr algn="ctr"/>
+            <a:endParaRPr/>
+          </a:p>
+        </p:txBody>
+      </p:sp>
+      <p:sp>
+        <p:nvSpPr>
+          <p:cNvPr id="10" name="TextBox 9"/>
+          <p:cNvSpPr txBox="1"/>
+          <p:nvPr/>
+        </p:nvSpPr>
+        <p:spPr>
+          <a:xfrm>
+            <a:off x="841248" y="4370832"/>
+            <a:ext cx="4809744" cy="1499616"/>
+          </a:xfrm>
+          <a:prstGeom prst="rect">
+            <a:avLst/>
+          </a:prstGeom>
+          <a:noFill/>
+        </p:spPr>
+        <p:txBody>
+          <a:bodyPr wrap="square">
+            <a:spAutoFit/>
+          </a:bodyPr>
+          <a:lstStyle/>
+          <a:p>
+            <a:pPr>
+              <a:spcAft>
+                <a:spcPts val="100"/>
+              </a:spcAft>
+              <a:defRPr sz="1000">
+                <a:solidFill>
+                  <a:srgbClr val="7EC68E"/>
+                </a:solidFill>
+                <a:latin typeface="Consolas"/>
+              </a:defRPr>
+            </a:pPr>
+            <a:r>
+              <a:t>SHOW CONSTRAINTS;</a:t>
+            </a:r>
+          </a:p>
+          <a:p>
+            <a:pPr>
+              <a:spcAft>
+                <a:spcPts val="100"/>
+              </a:spcAft>
+              <a:defRPr sz="1000">
+                <a:solidFill>
+                  <a:srgbClr val="7EC68E"/>
+                </a:solidFill>
+                <a:latin typeface="Consolas"/>
+              </a:defRPr>
+            </a:pPr>
+            <a:endParaRPr/>
+          </a:p>
+          <a:p>
+            <a:pPr>
+              <a:spcAft>
+                <a:spcPts val="100"/>
+              </a:spcAft>
+              <a:defRPr sz="1000">
+                <a:solidFill>
+                  <a:srgbClr val="7EC68E"/>
+                </a:solidFill>
+                <a:latin typeface="Consolas"/>
+              </a:defRPr>
+            </a:pPr>
+            <a:r>
+              <a:t>// Output esempio:</a:t>
+            </a:r>
+          </a:p>
+          <a:p>
+            <a:pPr>
+              <a:spcAft>
+                <a:spcPts val="100"/>
+              </a:spcAft>
+              <a:defRPr sz="1000">
+                <a:solidFill>
+                  <a:srgbClr val="7EC68E"/>
+                </a:solidFill>
+                <a:latin typeface="Consolas"/>
+              </a:defRPr>
+            </a:pPr>
+            <a:r>
+              <a:t>// name          | type   | label    | properties</a:t>
+            </a:r>
+          </a:p>
+          <a:p>
+            <a:pPr>
+              <a:spcAft>
+                <a:spcPts val="100"/>
+              </a:spcAft>
+              <a:defRPr sz="1000">
+                <a:solidFill>
+                  <a:srgbClr val="7EC68E"/>
+                </a:solidFill>
+                <a:latin typeface="Consolas"/>
+              </a:defRPr>
+            </a:pPr>
+            <a:r>
+              <a:t>// person_id     | UNIQUE | Person   | employee_id</a:t>
+            </a:r>
+          </a:p>
+          <a:p>
+            <a:pPr>
+              <a:spcAft>
+                <a:spcPts val="100"/>
+              </a:spcAft>
+              <a:defRPr sz="1000">
+                <a:solidFill>
+                  <a:srgbClr val="7EC68E"/>
+                </a:solidFill>
+                <a:latin typeface="Consolas"/>
+              </a:defRPr>
+            </a:pPr>
+            <a:r>
+              <a:t>// person_name   | EXISTS | Person   | name</a:t>
+            </a:r>
+          </a:p>
+          <a:p>
+            <a:pPr>
+              <a:spcAft>
+                <a:spcPts val="100"/>
+              </a:spcAft>
+              <a:defRPr sz="1000">
+                <a:solidFill>
+                  <a:srgbClr val="7EC68E"/>
+                </a:solidFill>
+                <a:latin typeface="Consolas"/>
+              </a:defRPr>
+            </a:pPr>
+            <a:r>
+              <a:t>// project_key   | NODE KEY | Project | project_id, name</a:t>
+            </a:r>
+          </a:p>
+        </p:txBody>
+      </p:sp>
+      <p:sp>
+        <p:nvSpPr>
+          <p:cNvPr id="11" name="TextBox 10"/>
+          <p:cNvSpPr txBox="1"/>
+          <p:nvPr/>
+        </p:nvSpPr>
+        <p:spPr>
+          <a:xfrm>
+            <a:off x="6096000" y="4297680"/>
+            <a:ext cx="4846320" cy="1569660"/>
+          </a:xfrm>
+          <a:prstGeom prst="rect">
+            <a:avLst/>
+          </a:prstGeom>
+          <a:noFill/>
+        </p:spPr>
+        <p:txBody>
+          <a:bodyPr wrap="square">
+            <a:spAutoFit/>
+          </a:bodyPr>
+          <a:lstStyle/>
+          <a:p>
+            <a:pPr algn="l">
+              <a:defRPr sz="1200" b="0">
+                <a:solidFill>
+                  <a:srgbClr val="CCCCCC"/>
+                </a:solidFill>
+                <a:latin typeface="Calibri"/>
+              </a:defRPr>
+            </a:pPr>
+            <a:r>
+              <a:rPr dirty="0" err="1"/>
+              <a:t>Perché</a:t>
+            </a:r>
+            <a:r>
+              <a:rPr dirty="0"/>
+              <a:t> </a:t>
+            </a:r>
+            <a:r>
+              <a:rPr dirty="0" err="1"/>
+              <a:t>creare</a:t>
+            </a:r>
+            <a:r>
+              <a:rPr dirty="0"/>
+              <a:t> constraint PRIMA?</a:t>
+            </a:r>
+            <a:br>
+              <a:rPr dirty="0"/>
+            </a:br>
+            <a:br>
+              <a:rPr dirty="0"/>
+            </a:br>
+            <a:r>
+              <a:rPr dirty="0"/>
+              <a:t>1. Il </a:t>
+            </a:r>
+            <a:r>
+              <a:rPr dirty="0" err="1"/>
+              <a:t>caricamento</a:t>
+            </a:r>
+            <a:r>
+              <a:rPr dirty="0"/>
+              <a:t> </a:t>
+            </a:r>
+            <a:r>
+              <a:rPr dirty="0" err="1"/>
+              <a:t>fallisce</a:t>
+            </a:r>
+            <a:r>
+              <a:rPr dirty="0"/>
+              <a:t> subito se</a:t>
+            </a:r>
+            <a:r>
+              <a:rPr lang="en-US" dirty="0"/>
+              <a:t> </a:t>
+            </a:r>
+            <a:r>
+              <a:rPr dirty="0" err="1"/>
+              <a:t>i</a:t>
+            </a:r>
+            <a:r>
+              <a:rPr dirty="0"/>
+              <a:t> </a:t>
+            </a:r>
+            <a:r>
+              <a:rPr dirty="0" err="1"/>
+              <a:t>dati</a:t>
+            </a:r>
+            <a:r>
+              <a:rPr dirty="0"/>
+              <a:t> </a:t>
+            </a:r>
+            <a:r>
+              <a:rPr dirty="0" err="1"/>
+              <a:t>violano</a:t>
+            </a:r>
+            <a:r>
+              <a:rPr dirty="0"/>
+              <a:t> </a:t>
+            </a:r>
+            <a:r>
+              <a:rPr dirty="0" err="1"/>
+              <a:t>i</a:t>
+            </a:r>
+            <a:r>
+              <a:rPr dirty="0"/>
+              <a:t> </a:t>
+            </a:r>
+            <a:r>
+              <a:rPr dirty="0" err="1"/>
+              <a:t>vincoli</a:t>
+            </a:r>
+            <a:br>
+              <a:rPr dirty="0"/>
+            </a:br>
+            <a:r>
+              <a:rPr dirty="0"/>
+              <a:t>2. MERGE </a:t>
+            </a:r>
+            <a:r>
+              <a:rPr dirty="0" err="1"/>
+              <a:t>su</a:t>
+            </a:r>
+            <a:r>
+              <a:rPr dirty="0"/>
+              <a:t> </a:t>
+            </a:r>
+            <a:r>
+              <a:rPr dirty="0" err="1"/>
+              <a:t>proprietà</a:t>
+            </a:r>
+            <a:r>
+              <a:rPr dirty="0"/>
+              <a:t> UNIQUE è </a:t>
+            </a:r>
+            <a:r>
+              <a:rPr dirty="0" err="1"/>
+              <a:t>atomicamente</a:t>
+            </a:r>
+            <a:r>
+              <a:rPr dirty="0"/>
+              <a:t> </a:t>
+            </a:r>
+            <a:r>
+              <a:rPr dirty="0" err="1"/>
+              <a:t>sicuro</a:t>
+            </a:r>
+            <a:br>
+              <a:rPr dirty="0"/>
+            </a:br>
+            <a:r>
+              <a:rPr dirty="0"/>
+              <a:t>3. </a:t>
+            </a:r>
+            <a:r>
+              <a:rPr dirty="0" err="1"/>
+              <a:t>L’indice</a:t>
+            </a:r>
+            <a:r>
+              <a:rPr dirty="0"/>
+              <a:t> </a:t>
+            </a:r>
+            <a:r>
+              <a:rPr dirty="0" err="1"/>
+              <a:t>sottostante</a:t>
+            </a:r>
+            <a:r>
+              <a:rPr dirty="0"/>
+              <a:t> </a:t>
+            </a:r>
+            <a:r>
+              <a:rPr dirty="0" err="1"/>
+              <a:t>accelera</a:t>
+            </a:r>
+            <a:r>
+              <a:rPr dirty="0"/>
+              <a:t> il </a:t>
+            </a:r>
+            <a:r>
+              <a:rPr dirty="0" err="1"/>
+              <a:t>caricamento</a:t>
+            </a:r>
+            <a:r>
+              <a:rPr dirty="0"/>
+              <a:t> (</a:t>
+            </a:r>
+            <a:r>
+              <a:rPr dirty="0" err="1"/>
+              <a:t>nessuna</a:t>
+            </a:r>
+            <a:r>
+              <a:rPr dirty="0"/>
+              <a:t> </a:t>
+            </a:r>
+            <a:r>
+              <a:rPr dirty="0" err="1"/>
+              <a:t>scansione</a:t>
+            </a:r>
+            <a:r>
+              <a:rPr dirty="0"/>
+              <a:t>)</a:t>
+            </a:r>
+            <a:br>
+              <a:rPr dirty="0"/>
+            </a:br>
+            <a:br>
+              <a:rPr dirty="0"/>
+            </a:br>
+            <a:r>
+              <a:rPr dirty="0" err="1"/>
+              <a:t>Regola</a:t>
+            </a:r>
+            <a:r>
+              <a:rPr dirty="0"/>
+              <a:t>: CREATE CONSTRAINT ... →</a:t>
+            </a:r>
+            <a:r>
+              <a:rPr lang="en-US" dirty="0"/>
+              <a:t> </a:t>
+            </a:r>
+            <a:r>
+              <a:rPr dirty="0"/>
+              <a:t>LOAD DATA → SHOW CONSTRAINTS</a:t>
+            </a:r>
+            <a:r>
+              <a:rPr lang="en-US" dirty="0"/>
+              <a:t> </a:t>
+            </a:r>
+            <a:r>
+              <a:rPr dirty="0"/>
+              <a:t>per </a:t>
+            </a:r>
+            <a:r>
+              <a:rPr dirty="0" err="1"/>
+              <a:t>verificare</a:t>
+            </a:r>
+            <a:endParaRPr dirty="0"/>
+          </a:p>
+        </p:txBody>
+      </p:sp>
+    </p:spTree>
+  </p:cSld>
+  <p:clrMapOvr>
+    <a:masterClrMapping/>
+  </p:clrMapOvr>
+</p:sld>
+</file>
+
+<file path=ppt/slides/slide17.xml><?xml version="1.0" encoding="utf-8"?>
+<p:sld xmlns:a="http://schemas.openxmlformats.org/drawingml/2006/main" xmlns:r="http://schemas.openxmlformats.org/officeDocument/2006/relationships" xmlns:p="http://schemas.openxmlformats.org/presentationml/2006/main">
+  <p:cSld>
+    <p:bg>
+      <p:bgPr>
+        <a:solidFill>
+          <a:srgbClr val="272936"/>
+        </a:solidFill>
+        <a:effectLst/>
+      </p:bgPr>
+    </p:bg>
+    <p:spTree>
+      <p:nvGrpSpPr>
+        <p:cNvPr id="1" name=""/>
+        <p:cNvGrpSpPr/>
+        <p:nvPr/>
+      </p:nvGrpSpPr>
+      <p:grpSpPr>
+        <a:xfrm>
+          <a:off x="0" y="0"/>
+          <a:ext cx="0" cy="0"/>
+          <a:chOff x="0" y="0"/>
+          <a:chExt cx="0" cy="0"/>
+        </a:xfrm>
+      </p:grpSpPr>
+      <p:sp>
+        <p:nvSpPr>
+          <p:cNvPr id="2" name="TextBox 1"/>
+          <p:cNvSpPr txBox="1"/>
+          <p:nvPr/>
+        </p:nvSpPr>
+        <p:spPr>
+          <a:xfrm>
+            <a:off x="731520" y="320040"/>
+            <a:ext cx="10515600" cy="594360"/>
+          </a:xfrm>
+          <a:prstGeom prst="rect">
+            <a:avLst/>
+          </a:prstGeom>
+          <a:noFill/>
+        </p:spPr>
+        <p:txBody>
+          <a:bodyPr wrap="square">
+            <a:spAutoFit/>
+          </a:bodyPr>
+          <a:lstStyle/>
+          <a:p>
+            <a:pPr algn="l">
+              <a:defRPr sz="3300" b="1">
+                <a:solidFill>
+                  <a:srgbClr val="F0C040"/>
+                </a:solidFill>
+                <a:latin typeface="Calibri"/>
+              </a:defRPr>
+            </a:pPr>
+            <a:r>
+              <a:t>Indici e Performance</a:t>
+            </a:r>
+          </a:p>
+        </p:txBody>
+      </p:sp>
+      <p:sp>
+        <p:nvSpPr>
+          <p:cNvPr id="3" name="TextBox 2"/>
+          <p:cNvSpPr txBox="1"/>
+          <p:nvPr/>
+        </p:nvSpPr>
+        <p:spPr>
+          <a:xfrm>
+            <a:off x="731520" y="914400"/>
+            <a:ext cx="10515600" cy="457200"/>
+          </a:xfrm>
+          <a:prstGeom prst="rect">
+            <a:avLst/>
+          </a:prstGeom>
+          <a:noFill/>
+        </p:spPr>
+        <p:txBody>
+          <a:bodyPr wrap="square">
+            <a:spAutoFit/>
+          </a:bodyPr>
+          <a:lstStyle/>
+          <a:p>
+            <a:pPr algn="l">
+              <a:defRPr sz="1400" b="0">
+                <a:solidFill>
+                  <a:srgbClr val="CCCCCC"/>
+                </a:solidFill>
+                <a:latin typeface="Calibri"/>
+              </a:defRPr>
+            </a:pPr>
+            <a:r>
+              <a:t>Gli indici accelerano la lettura. Senza indice, Neo4j esegue NodeByLabelScan (legge tutti i nodi).</a:t>
+            </a:r>
+          </a:p>
+        </p:txBody>
+      </p:sp>
+      <p:sp>
+        <p:nvSpPr>
+          <p:cNvPr id="4" name="TextBox 3"/>
+          <p:cNvSpPr txBox="1"/>
+          <p:nvPr/>
+        </p:nvSpPr>
+        <p:spPr>
+          <a:xfrm>
+            <a:off x="731520" y="1463040"/>
+            <a:ext cx="5029200" cy="1828800"/>
+          </a:xfrm>
+          <a:prstGeom prst="rect">
+            <a:avLst/>
+          </a:prstGeom>
+          <a:noFill/>
+        </p:spPr>
+        <p:txBody>
+          <a:bodyPr wrap="square">
+            <a:spAutoFit/>
+          </a:bodyPr>
+          <a:lstStyle/>
+          <a:p>
+            <a:pPr algn="l">
+              <a:spcAft>
+                <a:spcPts val="300"/>
+              </a:spcAft>
+              <a:defRPr sz="1200">
+                <a:solidFill>
+                  <a:srgbClr val="FFFFFF"/>
+                </a:solidFill>
+                <a:latin typeface="Calibri"/>
+              </a:defRPr>
+            </a:pPr>
+            <a:r>
+              <a:t>•  RANGE (default) — per confronti esatti, range, ORDER BY</a:t>
+            </a:r>
+          </a:p>
+          <a:p>
+            <a:pPr algn="l">
+              <a:spcAft>
+                <a:spcPts val="300"/>
+              </a:spcAft>
+              <a:defRPr sz="1200">
+                <a:solidFill>
+                  <a:srgbClr val="FFFFFF"/>
+                </a:solidFill>
+                <a:latin typeface="Calibri"/>
+              </a:defRPr>
+            </a:pPr>
+            <a:r>
+              <a:t>•  TEXT — per CONTAINS, STARTS WITH, ENDS WITH</a:t>
+            </a:r>
+          </a:p>
+          <a:p>
+            <a:pPr algn="l">
+              <a:spcAft>
+                <a:spcPts val="300"/>
+              </a:spcAft>
+              <a:defRPr sz="1200">
+                <a:solidFill>
+                  <a:srgbClr val="FFFFFF"/>
+                </a:solidFill>
+                <a:latin typeface="Calibri"/>
+              </a:defRPr>
+            </a:pPr>
+            <a:r>
+              <a:t>•  POINT — per ricerche geospaziali</a:t>
+            </a:r>
+          </a:p>
+          <a:p>
+            <a:pPr algn="l">
+              <a:spcAft>
+                <a:spcPts val="300"/>
+              </a:spcAft>
+              <a:defRPr sz="1200">
+                <a:solidFill>
+                  <a:srgbClr val="FFFFFF"/>
+                </a:solidFill>
+                <a:latin typeface="Calibri"/>
+              </a:defRPr>
+            </a:pPr>
+            <a:r>
+              <a:t>•  FULLTEXT — per ricerca testuale avanzata (tokenizzazione)</a:t>
+            </a:r>
+          </a:p>
+          <a:p>
+            <a:pPr algn="l">
+              <a:spcAft>
+                <a:spcPts val="300"/>
+              </a:spcAft>
+              <a:defRPr sz="1200">
+                <a:solidFill>
+                  <a:srgbClr val="FFFFFF"/>
+                </a:solidFill>
+                <a:latin typeface="Calibri"/>
+              </a:defRPr>
+            </a:pPr>
+            <a:r>
+              <a:t>•  I constraint UNIQUE creano automaticamente un indice RANGE</a:t>
+            </a:r>
+          </a:p>
+          <a:p>
+            <a:pPr algn="l">
+              <a:spcAft>
+                <a:spcPts val="300"/>
+              </a:spcAft>
+              <a:defRPr sz="1200">
+                <a:solidFill>
+                  <a:srgbClr val="FFFFFF"/>
+                </a:solidFill>
+                <a:latin typeface="Calibri"/>
+              </a:defRPr>
+            </a:pPr>
+            <a:r>
+              <a:t>•  Gli indici migliorano la LETTURA ma rallentano leggermente la SCRITTURA</a:t>
+            </a:r>
+          </a:p>
+        </p:txBody>
+      </p:sp>
+      <p:sp>
+        <p:nvSpPr>
+          <p:cNvPr id="5" name="Rectangle 4"/>
+          <p:cNvSpPr/>
+          <p:nvPr/>
+        </p:nvSpPr>
+        <p:spPr>
+          <a:xfrm>
+            <a:off x="6096000" y="1371600"/>
+            <a:ext cx="4846320" cy="2148840"/>
+          </a:xfrm>
+          <a:prstGeom prst="rect">
+            <a:avLst/>
+          </a:prstGeom>
+          <a:solidFill>
+            <a:srgbClr val="1B2A4A"/>
+          </a:solidFill>
+          <a:ln w="12700">
+            <a:solidFill>
+              <a:srgbClr val="2D4F7A"/>
+            </a:solidFill>
+          </a:ln>
+        </p:spPr>
+        <p:style>
+          <a:lnRef idx="1">
+            <a:schemeClr val="accent1"/>
+          </a:lnRef>
+          <a:fillRef idx="3">
+            <a:schemeClr val="accent1"/>
+          </a:fillRef>
+          <a:effectRef idx="2">
+            <a:schemeClr val="accent1"/>
+          </a:effectRef>
+          <a:fontRef idx="minor">
+            <a:schemeClr val="lt1"/>
+          </a:fontRef>
+        </p:style>
+        <p:txBody>
+          <a:bodyPr rtlCol="0" anchor="ctr"/>
+          <a:lstStyle/>
+          <a:p>
+            <a:pPr algn="ctr"/>
+            <a:endParaRPr/>
+          </a:p>
+        </p:txBody>
+      </p:sp>
+      <p:sp>
+        <p:nvSpPr>
+          <p:cNvPr id="6" name="TextBox 5"/>
+          <p:cNvSpPr txBox="1"/>
+          <p:nvPr/>
+        </p:nvSpPr>
+        <p:spPr>
+          <a:xfrm>
+            <a:off x="6205728" y="1444752"/>
+            <a:ext cx="4626864" cy="1865376"/>
+          </a:xfrm>
+          <a:prstGeom prst="rect">
+            <a:avLst/>
+          </a:prstGeom>
+          <a:noFill/>
+        </p:spPr>
+        <p:txBody>
+          <a:bodyPr wrap="square">
+            <a:spAutoFit/>
+          </a:bodyPr>
+          <a:lstStyle/>
+          <a:p>
+            <a:pPr>
+              <a:spcAft>
+                <a:spcPts val="100"/>
+              </a:spcAft>
+              <a:defRPr sz="1000">
+                <a:solidFill>
+                  <a:srgbClr val="7EC68E"/>
+                </a:solidFill>
+                <a:latin typeface="Consolas"/>
+              </a:defRPr>
+            </a:pPr>
+            <a:r>
+              <a:t>CREATE INDEX person_location IF NOT EXISTS</a:t>
+            </a:r>
+          </a:p>
+          <a:p>
+            <a:pPr>
+              <a:spcAft>
+                <a:spcPts val="100"/>
+              </a:spcAft>
+              <a:defRPr sz="1000">
+                <a:solidFill>
+                  <a:srgbClr val="7EC68E"/>
+                </a:solidFill>
+                <a:latin typeface="Consolas"/>
+              </a:defRPr>
+            </a:pPr>
+            <a:r>
+              <a:t>  FOR (p:Person) ON (p.location);</a:t>
+            </a:r>
+          </a:p>
+          <a:p>
+            <a:pPr>
+              <a:spcAft>
+                <a:spcPts val="100"/>
+              </a:spcAft>
+              <a:defRPr sz="1000">
+                <a:solidFill>
+                  <a:srgbClr val="7EC68E"/>
+                </a:solidFill>
+                <a:latin typeface="Consolas"/>
+              </a:defRPr>
+            </a:pPr>
+            <a:endParaRPr/>
+          </a:p>
+          <a:p>
+            <a:pPr>
+              <a:spcAft>
+                <a:spcPts val="100"/>
+              </a:spcAft>
+              <a:defRPr sz="1000">
+                <a:solidFill>
+                  <a:srgbClr val="7EC68E"/>
+                </a:solidFill>
+                <a:latin typeface="Consolas"/>
+              </a:defRPr>
+            </a:pPr>
+            <a:r>
+              <a:t>CREATE TEXT INDEX skill_name IF NOT EXISTS</a:t>
+            </a:r>
+          </a:p>
+          <a:p>
+            <a:pPr>
+              <a:spcAft>
+                <a:spcPts val="100"/>
+              </a:spcAft>
+              <a:defRPr sz="1000">
+                <a:solidFill>
+                  <a:srgbClr val="7EC68E"/>
+                </a:solidFill>
+                <a:latin typeface="Consolas"/>
+              </a:defRPr>
+            </a:pPr>
+            <a:r>
+              <a:t>  FOR (s:Skill) ON (s.name);</a:t>
+            </a:r>
+          </a:p>
+          <a:p>
+            <a:pPr>
+              <a:spcAft>
+                <a:spcPts val="100"/>
+              </a:spcAft>
+              <a:defRPr sz="1000">
+                <a:solidFill>
+                  <a:srgbClr val="7EC68E"/>
+                </a:solidFill>
+                <a:latin typeface="Consolas"/>
+              </a:defRPr>
+            </a:pPr>
+            <a:endParaRPr/>
+          </a:p>
+          <a:p>
+            <a:pPr>
+              <a:spcAft>
+                <a:spcPts val="100"/>
+              </a:spcAft>
+              <a:defRPr sz="1000">
+                <a:solidFill>
+                  <a:srgbClr val="7EC68E"/>
+                </a:solidFill>
+                <a:latin typeface="Consolas"/>
+              </a:defRPr>
+            </a:pPr>
+            <a:r>
+              <a:t>// Indice composito:</a:t>
+            </a:r>
+          </a:p>
+          <a:p>
+            <a:pPr>
+              <a:spcAft>
+                <a:spcPts val="100"/>
+              </a:spcAft>
+              <a:defRPr sz="1000">
+                <a:solidFill>
+                  <a:srgbClr val="7EC68E"/>
+                </a:solidFill>
+                <a:latin typeface="Consolas"/>
+              </a:defRPr>
+            </a:pPr>
+            <a:r>
+              <a:t>CREATE INDEX person_dept_role IF NOT EXISTS</a:t>
+            </a:r>
+          </a:p>
+          <a:p>
+            <a:pPr>
+              <a:spcAft>
+                <a:spcPts val="100"/>
+              </a:spcAft>
+              <a:defRPr sz="1000">
+                <a:solidFill>
+                  <a:srgbClr val="7EC68E"/>
+                </a:solidFill>
+                <a:latin typeface="Consolas"/>
+              </a:defRPr>
+            </a:pPr>
+            <a:r>
+              <a:t>  FOR (p:Person)</a:t>
+            </a:r>
+          </a:p>
+          <a:p>
+            <a:pPr>
+              <a:spcAft>
+                <a:spcPts val="100"/>
+              </a:spcAft>
+              <a:defRPr sz="1000">
+                <a:solidFill>
+                  <a:srgbClr val="7EC68E"/>
+                </a:solidFill>
+                <a:latin typeface="Consolas"/>
+              </a:defRPr>
+            </a:pPr>
+            <a:r>
+              <a:t>  ON (p.department, p.title);</a:t>
+            </a:r>
+          </a:p>
+          <a:p>
+            <a:pPr>
+              <a:spcAft>
+                <a:spcPts val="100"/>
+              </a:spcAft>
+              <a:defRPr sz="1000">
+                <a:solidFill>
+                  <a:srgbClr val="7EC68E"/>
+                </a:solidFill>
+                <a:latin typeface="Consolas"/>
+              </a:defRPr>
+            </a:pPr>
+            <a:endParaRPr/>
+          </a:p>
+          <a:p>
+            <a:pPr>
+              <a:spcAft>
+                <a:spcPts val="100"/>
+              </a:spcAft>
+              <a:defRPr sz="1000">
+                <a:solidFill>
+                  <a:srgbClr val="7EC68E"/>
+                </a:solidFill>
+                <a:latin typeface="Consolas"/>
+              </a:defRPr>
+            </a:pPr>
+            <a:r>
+              <a:t>SHOW INDEXES;</a:t>
+            </a:r>
+          </a:p>
+        </p:txBody>
+      </p:sp>
+      <p:sp>
+        <p:nvSpPr>
+          <p:cNvPr id="7" name="Rectangle 6"/>
+          <p:cNvSpPr/>
+          <p:nvPr/>
+        </p:nvSpPr>
+        <p:spPr>
+          <a:xfrm>
+            <a:off x="731520" y="3794760"/>
+            <a:ext cx="10698480" cy="36576"/>
+          </a:xfrm>
+          <a:prstGeom prst="rect">
+            <a:avLst/>
+          </a:prstGeom>
+          <a:solidFill>
+            <a:srgbClr val="F0C040"/>
+          </a:solidFill>
+          <a:ln>
+            <a:noFill/>
+          </a:ln>
+        </p:spPr>
+        <p:style>
+          <a:lnRef idx="1">
+            <a:schemeClr val="accent1"/>
+          </a:lnRef>
+          <a:fillRef idx="3">
+            <a:schemeClr val="accent1"/>
+          </a:fillRef>
+          <a:effectRef idx="2">
+            <a:schemeClr val="accent1"/>
+          </a:effectRef>
+          <a:fontRef idx="minor">
+            <a:schemeClr val="lt1"/>
+          </a:fontRef>
+        </p:style>
+        <p:txBody>
+          <a:bodyPr rtlCol="0" anchor="ctr"/>
+          <a:lstStyle/>
+          <a:p>
+            <a:pPr algn="ctr"/>
+            <a:endParaRPr/>
+          </a:p>
+        </p:txBody>
+      </p:sp>
+      <p:sp>
+        <p:nvSpPr>
+          <p:cNvPr id="8" name="TextBox 7"/>
+          <p:cNvSpPr txBox="1"/>
+          <p:nvPr/>
+        </p:nvSpPr>
+        <p:spPr>
+          <a:xfrm>
+            <a:off x="731520" y="3977640"/>
+            <a:ext cx="10515600" cy="365760"/>
+          </a:xfrm>
+          <a:prstGeom prst="rect">
+            <a:avLst/>
+          </a:prstGeom>
+          <a:noFill/>
+        </p:spPr>
+        <p:txBody>
+          <a:bodyPr wrap="square">
+            <a:spAutoFit/>
+          </a:bodyPr>
+          <a:lstStyle/>
+          <a:p>
+            <a:pPr algn="l">
+              <a:defRPr sz="1500" b="1">
+                <a:solidFill>
+                  <a:srgbClr val="F08040"/>
+                </a:solidFill>
+                <a:latin typeface="Calibri"/>
+              </a:defRPr>
+            </a:pPr>
+            <a:r>
+              <a:t>PROFILE: vedere se la query usa l’indice</a:t>
+            </a:r>
+          </a:p>
+        </p:txBody>
+      </p:sp>
+      <p:sp>
+        <p:nvSpPr>
+          <p:cNvPr id="9" name="Rectangle 8"/>
+          <p:cNvSpPr/>
+          <p:nvPr/>
+        </p:nvSpPr>
+        <p:spPr>
+          <a:xfrm>
+            <a:off x="731520" y="4434840"/>
             <a:ext cx="5029200" cy="1828800"/>
           </a:xfrm>
           <a:prstGeom prst="rect">
@@ -30000,6 +31131,7 @@
           <a:lstStyle/>
           <a:p>
             <a:pPr algn="ctr"/>
+            <a:endParaRPr/>
           </a:p>
         </p:txBody>
       </p:sp>
@@ -30011,7 +31143,7 @@
         </p:nvSpPr>
         <p:spPr>
           <a:xfrm>
-            <a:off x="841248" y="4370832"/>
+            <a:off x="841248" y="4507992"/>
             <a:ext cx="4809744" cy="1682496"/>
           </a:xfrm>
           <a:prstGeom prst="rect">
@@ -30100,6 +31232,7 @@
                 <a:latin typeface="Consolas"/>
               </a:defRPr>
             </a:pPr>
+            <a:endParaRPr/>
           </a:p>
           <a:p>
             <a:pPr>
@@ -30191,8 +31324,8 @@
         </p:nvSpPr>
         <p:spPr>
           <a:xfrm>
-            <a:off x="5669280" y="4297680"/>
-            <a:ext cx="4846320" cy="2103120"/>
+            <a:off x="6096000" y="4434840"/>
+            <a:ext cx="4846320" cy="2029968"/>
           </a:xfrm>
           <a:prstGeom prst="rect">
             <a:avLst/>
@@ -30225,6 +31358,7 @@
           <a:lstStyle/>
           <a:p>
             <a:pPr algn="ctr"/>
+            <a:endParaRPr/>
           </a:p>
         </p:txBody>
       </p:sp>
@@ -30236,7 +31370,7 @@
         </p:nvSpPr>
         <p:spPr>
           <a:xfrm>
-            <a:off x="5779008" y="4370832"/>
+            <a:off x="6205728" y="4507992"/>
             <a:ext cx="4626864" cy="1956816"/>
           </a:xfrm>
           <a:prstGeom prst="rect">
@@ -30277,6 +31411,7 @@
                 <a:latin typeface="Consolas"/>
               </a:defRPr>
             </a:pPr>
+            <a:endParaRPr/>
           </a:p>
           <a:p>
             <a:pPr>
@@ -30338,6 +31473,7 @@
                 <a:latin typeface="Consolas"/>
               </a:defRPr>
             </a:pPr>
+            <a:endParaRPr/>
           </a:p>
           <a:p>
             <a:pPr>
@@ -30383,6 +31519,7 @@
                 <a:latin typeface="Consolas"/>
               </a:defRPr>
             </a:pPr>
+            <a:endParaRPr/>
           </a:p>
           <a:p>
             <a:pPr>
@@ -30427,7 +31564,7 @@
 </file>
 
 <file path=ppt/slides/slide18.xml><?xml version="1.0" encoding="utf-8"?>
-<p:sld xmlns:a="http://schemas.openxmlformats.org/drawingml/2006/main" xmlns:p="http://schemas.openxmlformats.org/presentationml/2006/main" xmlns:r="http://schemas.openxmlformats.org/officeDocument/2006/relationships">
+<p:sld xmlns:a="http://schemas.openxmlformats.org/drawingml/2006/main" xmlns:r="http://schemas.openxmlformats.org/officeDocument/2006/relationships" xmlns:p="http://schemas.openxmlformats.org/presentationml/2006/main">
   <p:cSld>
     <p:bg>
       <p:bgPr>
@@ -30443,7 +31580,14 @@
         <p:cNvGrpSpPr/>
         <p:nvPr/>
       </p:nvGrpSpPr>
-      <p:grpSpPr/>
+      <p:grpSpPr>
+        <a:xfrm>
+          <a:off x="0" y="0"/>
+          <a:ext cx="0" cy="0"/>
+          <a:chOff x="0" y="0"/>
+          <a:chExt cx="0" cy="0"/>
+        </a:xfrm>
+      </p:grpSpPr>
       <p:sp>
         <p:nvSpPr>
           <p:cNvPr id="2" name="TextBox 1"/>
@@ -30550,7 +31694,32 @@
               </a:defRPr>
             </a:pPr>
             <a:r>
-              <a:t>•  Row-by-row: una query per ogni riga → N chiamate al database</a:t>
+              <a:rPr dirty="0"/>
+              <a:t>•  Row-by-row: </a:t>
+            </a:r>
+            <a:r>
+              <a:rPr dirty="0" err="1"/>
+              <a:t>una</a:t>
+            </a:r>
+            <a:r>
+              <a:rPr dirty="0"/>
+              <a:t> query per ogni </a:t>
+            </a:r>
+            <a:r>
+              <a:rPr dirty="0" err="1"/>
+              <a:t>riga</a:t>
+            </a:r>
+            <a:r>
+              <a:rPr dirty="0"/>
+              <a:t> → N </a:t>
+            </a:r>
+            <a:r>
+              <a:rPr dirty="0" err="1"/>
+              <a:t>chiamate</a:t>
+            </a:r>
+            <a:r>
+              <a:rPr dirty="0"/>
+              <a:t> al database</a:t>
             </a:r>
           </a:p>
           <a:p>
@@ -30566,8 +31735,22 @@
               </a:defRPr>
             </a:pPr>
             <a:r>
-              <a:t>  Costo: latenza di rete N volte + N transazioni</a:t>
-            </a:r>
+              <a:rPr dirty="0"/>
+              <a:t>  Costo: </a:t>
+            </a:r>
+            <a:r>
+              <a:rPr dirty="0" err="1"/>
+              <a:t>latenza</a:t>
+            </a:r>
+            <a:r>
+              <a:rPr dirty="0"/>
+              <a:t> di rete N volte + N </a:t>
+            </a:r>
+            <a:r>
+              <a:rPr dirty="0" err="1"/>
+              <a:t>transazioni</a:t>
+            </a:r>
+            <a:endParaRPr dirty="0"/>
           </a:p>
           <a:p>
             <a:pPr algn="l">
@@ -30582,8 +31765,62 @@
               </a:defRPr>
             </a:pPr>
             <a:r>
-              <a:t>•  UNWIND batch: colleziona i dati in lista, invia in un’unica transazione</a:t>
-            </a:r>
+              <a:rPr dirty="0"/>
+              <a:t>•  UNWIND batch: </a:t>
+            </a:r>
+            <a:r>
+              <a:rPr dirty="0" err="1"/>
+              <a:t>colleziona</a:t>
+            </a:r>
+            <a:r>
+              <a:rPr dirty="0"/>
+              <a:t> </a:t>
+            </a:r>
+            <a:r>
+              <a:rPr dirty="0" err="1"/>
+              <a:t>i</a:t>
+            </a:r>
+            <a:r>
+              <a:rPr dirty="0"/>
+              <a:t> </a:t>
+            </a:r>
+            <a:r>
+              <a:rPr dirty="0" err="1"/>
+              <a:t>dati</a:t>
+            </a:r>
+            <a:r>
+              <a:rPr dirty="0"/>
+              <a:t> in </a:t>
+            </a:r>
+            <a:r>
+              <a:rPr dirty="0" err="1"/>
+              <a:t>lista</a:t>
+            </a:r>
+            <a:r>
+              <a:rPr dirty="0"/>
+              <a:t>, </a:t>
+            </a:r>
+            <a:r>
+              <a:rPr dirty="0" err="1"/>
+              <a:t>invia</a:t>
+            </a:r>
+            <a:r>
+              <a:rPr dirty="0"/>
+              <a:t> in </a:t>
+            </a:r>
+            <a:r>
+              <a:rPr dirty="0" err="1"/>
+              <a:t>un’unica</a:t>
+            </a:r>
+            <a:r>
+              <a:rPr dirty="0"/>
+              <a:t> </a:t>
+            </a:r>
+            <a:r>
+              <a:rPr dirty="0" err="1"/>
+              <a:t>transazione</a:t>
+            </a:r>
+            <a:endParaRPr dirty="0"/>
           </a:p>
           <a:p>
             <a:pPr algn="l">
@@ -30598,7 +31835,40 @@
               </a:defRPr>
             </a:pPr>
             <a:r>
-              <a:t>  Costo: 1 chiamata + 1 transazione + ciclo nel database</a:t>
+              <a:rPr dirty="0"/>
+              <a:t>  Costo: 1 </a:t>
+            </a:r>
+            <a:r>
+              <a:rPr dirty="0" err="1"/>
+              <a:t>chiamata</a:t>
+            </a:r>
+            <a:r>
+              <a:rPr dirty="0"/>
+              <a:t> + 1 </a:t>
+            </a:r>
+            <a:r>
+              <a:rPr dirty="0" err="1"/>
+              <a:t>transazione</a:t>
+            </a:r>
+            <a:r>
+              <a:rPr dirty="0"/>
+              <a:t> + </a:t>
+            </a:r>
+            <a:r>
+              <a:rPr dirty="0" err="1"/>
+              <a:t>ciclo</a:t>
+            </a:r>
+            <a:r>
+              <a:rPr dirty="0"/>
+              <a:t> </a:t>
+            </a:r>
+            <a:r>
+              <a:rPr dirty="0" err="1"/>
+              <a:t>nel</a:t>
+            </a:r>
+            <a:r>
+              <a:rPr dirty="0"/>
+              <a:t> database</a:t>
             </a:r>
           </a:p>
           <a:p>
@@ -30614,8 +31884,46 @@
               </a:defRPr>
             </a:pPr>
             <a:r>
-              <a:t>•  MERGE è idempotente — si può rieseguire senza rischi</a:t>
-            </a:r>
+              <a:rPr dirty="0"/>
+              <a:t>•  MERGE è </a:t>
+            </a:r>
+            <a:r>
+              <a:rPr dirty="0" err="1"/>
+              <a:t>idempotente</a:t>
+            </a:r>
+            <a:r>
+              <a:rPr dirty="0"/>
+              <a:t> — </a:t>
+            </a:r>
+            <a:r>
+              <a:rPr dirty="0" err="1"/>
+              <a:t>si</a:t>
+            </a:r>
+            <a:r>
+              <a:rPr dirty="0"/>
+              <a:t> </a:t>
+            </a:r>
+            <a:r>
+              <a:rPr dirty="0" err="1"/>
+              <a:t>può</a:t>
+            </a:r>
+            <a:r>
+              <a:rPr dirty="0"/>
+              <a:t> </a:t>
+            </a:r>
+            <a:r>
+              <a:rPr dirty="0" err="1"/>
+              <a:t>rieseguire</a:t>
+            </a:r>
+            <a:r>
+              <a:rPr dirty="0"/>
+              <a:t> senza </a:t>
+            </a:r>
+            <a:r>
+              <a:rPr dirty="0" err="1"/>
+              <a:t>rischi</a:t>
+            </a:r>
+            <a:endParaRPr dirty="0"/>
           </a:p>
           <a:p>
             <a:pPr algn="l">
@@ -30630,8 +31938,30 @@
               </a:defRPr>
             </a:pPr>
             <a:r>
-              <a:t>•  CREATE è più veloce ma non tollera duplicati</a:t>
-            </a:r>
+              <a:rPr dirty="0"/>
+              <a:t>•  CREATE è </a:t>
+            </a:r>
+            <a:r>
+              <a:rPr dirty="0" err="1"/>
+              <a:t>più</a:t>
+            </a:r>
+            <a:r>
+              <a:rPr dirty="0"/>
+              <a:t> veloce ma non </a:t>
+            </a:r>
+            <a:r>
+              <a:rPr dirty="0" err="1"/>
+              <a:t>tollera</a:t>
+            </a:r>
+            <a:r>
+              <a:rPr dirty="0"/>
+              <a:t> </a:t>
+            </a:r>
+            <a:r>
+              <a:rPr dirty="0" err="1"/>
+              <a:t>duplicati</a:t>
+            </a:r>
+            <a:endParaRPr dirty="0"/>
           </a:p>
         </p:txBody>
       </p:sp>
@@ -30643,7 +31973,7 @@
         </p:nvSpPr>
         <p:spPr>
           <a:xfrm>
-            <a:off x="5669280" y="1417320"/>
+            <a:off x="6096000" y="1417320"/>
             <a:ext cx="4846320" cy="1828800"/>
           </a:xfrm>
           <a:prstGeom prst="rect">
@@ -30677,6 +32007,7 @@
           <a:lstStyle/>
           <a:p>
             <a:pPr algn="ctr"/>
+            <a:endParaRPr/>
           </a:p>
         </p:txBody>
       </p:sp>
@@ -30688,7 +32019,7 @@
         </p:nvSpPr>
         <p:spPr>
           <a:xfrm>
-            <a:off x="5779008" y="1490472"/>
+            <a:off x="6205728" y="1490472"/>
             <a:ext cx="4626864" cy="1682496"/>
           </a:xfrm>
           <a:prstGeom prst="rect">
@@ -30745,6 +32076,7 @@
                 <a:latin typeface="Consolas"/>
               </a:defRPr>
             </a:pPr>
+            <a:endParaRPr/>
           </a:p>
           <a:p>
             <a:pPr>
@@ -30868,7 +32200,7 @@
         </p:nvSpPr>
         <p:spPr>
           <a:xfrm>
-            <a:off x="731520" y="3474720"/>
+            <a:off x="731520" y="3547872"/>
             <a:ext cx="10698480" cy="36576"/>
           </a:xfrm>
           <a:prstGeom prst="rect">
@@ -30900,6 +32232,7 @@
           <a:lstStyle/>
           <a:p>
             <a:pPr algn="ctr"/>
+            <a:endParaRPr/>
           </a:p>
         </p:txBody>
       </p:sp>
@@ -30911,7 +32244,7 @@
         </p:nvSpPr>
         <p:spPr>
           <a:xfrm>
-            <a:off x="731520" y="3657600"/>
+            <a:off x="731520" y="3730752"/>
             <a:ext cx="10515600" cy="365760"/>
           </a:xfrm>
           <a:prstGeom prst="rect">
@@ -30947,7 +32280,7 @@
         </p:nvSpPr>
         <p:spPr>
           <a:xfrm>
-            <a:off x="731520" y="4023360"/>
+            <a:off x="731520" y="4096512"/>
             <a:ext cx="5029200" cy="1828800"/>
           </a:xfrm>
           <a:prstGeom prst="rect">
@@ -31016,8 +32349,8 @@
         </p:nvSpPr>
         <p:spPr>
           <a:xfrm>
-            <a:off x="5669280" y="4023360"/>
-            <a:ext cx="4846320" cy="1828800"/>
+            <a:off x="6096000" y="4096512"/>
+            <a:ext cx="5443728" cy="1938992"/>
           </a:xfrm>
           <a:prstGeom prst="rect">
             <a:avLst/>
@@ -31039,52 +32372,178 @@
               </a:defRPr>
             </a:pPr>
             <a:r>
-              <a:t>Best practice per il caricamento:</a:t>
-            </a:r>
-            <a:br/>
-            <a:br/>
-            <a:r>
-              <a:t>1. Crea constraint e indici PRIMA</a:t>
-            </a:r>
-            <a:br/>
-            <a:r>
+              <a:rPr dirty="0"/>
+              <a:t>Best practice per il </a:t>
+            </a:r>
+            <a:r>
+              <a:rPr dirty="0" err="1"/>
+              <a:t>caricamento</a:t>
+            </a:r>
+            <a:r>
+              <a:rPr dirty="0"/>
+              <a:t>:</a:t>
+            </a:r>
+            <a:br>
+              <a:rPr dirty="0"/>
+            </a:br>
+            <a:br>
+              <a:rPr dirty="0"/>
+            </a:br>
+            <a:r>
+              <a:rPr dirty="0"/>
+              <a:t>1. Crea constraint e </a:t>
+            </a:r>
+            <a:r>
+              <a:rPr dirty="0" err="1"/>
+              <a:t>indici</a:t>
+            </a:r>
+            <a:r>
+              <a:rPr dirty="0"/>
+              <a:t> PRIMA</a:t>
+            </a:r>
+            <a:br>
+              <a:rPr dirty="0"/>
+            </a:br>
+            <a:r>
+              <a:rPr dirty="0"/>
               <a:t>2. Usa UNWIND + MERGE</a:t>
             </a:r>
-            <a:br/>
-            <a:r>
-              <a:t>3. Batch da 500-5000 righe</a:t>
-            </a:r>
-            <a:br/>
-            <a:r>
-              <a:t>4. Usa ON CREATE SET / ON MATCH SET</a:t>
-            </a:r>
-            <a:br/>
-            <a:r>
-              <a:t>   per separare inserimento da</a:t>
-            </a:r>
-            <a:br/>
-            <a:r>
-              <a:t>   aggiornamento</a:t>
-            </a:r>
-            <a:br/>
-            <a:r>
-              <a:t>5. Verifica con MATCH ... RETURN count()</a:t>
-            </a:r>
-            <a:br/>
-            <a:br/>
-            <a:r>
-              <a:t>Lo script di caricamento del corso</a:t>
-            </a:r>
-            <a:br/>
-            <a:r>
-              <a:t>carica in ~1 secondo tutto l’Org Graph</a:t>
-            </a:r>
-            <a:br/>
-            <a:r>
-              <a:t>(238 persone, 93 progetti, 55 skill,</a:t>
-            </a:r>
-            <a:br/>
-            <a:r>
+            <a:br>
+              <a:rPr dirty="0"/>
+            </a:br>
+            <a:r>
+              <a:rPr dirty="0"/>
+              <a:t>3. Batch da 500-5000 </a:t>
+            </a:r>
+            <a:r>
+              <a:rPr dirty="0" err="1"/>
+              <a:t>righe</a:t>
+            </a:r>
+            <a:br>
+              <a:rPr dirty="0"/>
+            </a:br>
+            <a:r>
+              <a:rPr dirty="0"/>
+              <a:t>4. Usa ON CREATE SET / ON MATCH SET per </a:t>
+            </a:r>
+            <a:r>
+              <a:rPr dirty="0" err="1"/>
+              <a:t>separare</a:t>
+            </a:r>
+            <a:r>
+              <a:rPr dirty="0"/>
+              <a:t> </a:t>
+            </a:r>
+            <a:r>
+              <a:rPr dirty="0" err="1"/>
+              <a:t>inserimento</a:t>
+            </a:r>
+            <a:r>
+              <a:rPr dirty="0"/>
+              <a:t> da</a:t>
+            </a:r>
+            <a:r>
+              <a:rPr lang="en-US" dirty="0"/>
+              <a:t> </a:t>
+            </a:r>
+            <a:r>
+              <a:rPr dirty="0"/>
+              <a:t>aggiornamento</a:t>
+            </a:r>
+            <a:br>
+              <a:rPr dirty="0"/>
+            </a:br>
+            <a:r>
+              <a:rPr dirty="0"/>
+              <a:t>5. </a:t>
+            </a:r>
+            <a:r>
+              <a:rPr dirty="0" err="1"/>
+              <a:t>Verifica</a:t>
+            </a:r>
+            <a:r>
+              <a:rPr dirty="0"/>
+              <a:t> con MATCH ... RETURN count()</a:t>
+            </a:r>
+            <a:br>
+              <a:rPr dirty="0"/>
+            </a:br>
+            <a:br>
+              <a:rPr dirty="0"/>
+            </a:br>
+            <a:r>
+              <a:rPr dirty="0"/>
+              <a:t>Lo script di </a:t>
+            </a:r>
+            <a:r>
+              <a:rPr dirty="0" err="1"/>
+              <a:t>caricamento</a:t>
+            </a:r>
+            <a:r>
+              <a:rPr dirty="0"/>
+              <a:t> del </a:t>
+            </a:r>
+            <a:r>
+              <a:rPr lang="en-US" dirty="0" err="1"/>
+              <a:t>c</a:t>
+            </a:r>
+            <a:r>
+              <a:rPr dirty="0" err="1"/>
+              <a:t>orso</a:t>
+            </a:r>
+            <a:r>
+              <a:rPr lang="en-US" dirty="0"/>
+              <a:t> </a:t>
+            </a:r>
+            <a:r>
+              <a:rPr dirty="0"/>
+              <a:t>carica in ~1 secondo </a:t>
+            </a:r>
+            <a:r>
+              <a:rPr dirty="0" err="1"/>
+              <a:t>tutto</a:t>
+            </a:r>
+            <a:r>
+              <a:rPr dirty="0"/>
+              <a:t> </a:t>
+            </a:r>
+            <a:r>
+              <a:rPr dirty="0" err="1"/>
+              <a:t>l’Org</a:t>
+            </a:r>
+            <a:r>
+              <a:rPr dirty="0"/>
+              <a:t> Graph</a:t>
+            </a:r>
+            <a:br>
+              <a:rPr dirty="0"/>
+            </a:br>
+            <a:r>
+              <a:rPr dirty="0"/>
+              <a:t>(238 </a:t>
+            </a:r>
+            <a:r>
+              <a:rPr dirty="0" err="1"/>
+              <a:t>persone</a:t>
+            </a:r>
+            <a:r>
+              <a:rPr dirty="0"/>
+              <a:t>, 93 </a:t>
+            </a:r>
+            <a:r>
+              <a:rPr dirty="0" err="1"/>
+              <a:t>progetti</a:t>
+            </a:r>
+            <a:r>
+              <a:rPr dirty="0"/>
+              <a:t>, 55 skill,</a:t>
+            </a:r>
+            <a:r>
+              <a:rPr lang="en-US" dirty="0"/>
+              <a:t> </a:t>
+            </a:r>
+            <a:r>
+              <a:rPr dirty="0"/>
               <a:t>2 supervisor) con 7 query UNWIND.</a:t>
             </a:r>
           </a:p>
@@ -31099,7 +32558,7 @@
 </file>
 
 <file path=ppt/slides/slide19.xml><?xml version="1.0" encoding="utf-8"?>
-<p:sld xmlns:a="http://schemas.openxmlformats.org/drawingml/2006/main" xmlns:p="http://schemas.openxmlformats.org/presentationml/2006/main" xmlns:r="http://schemas.openxmlformats.org/officeDocument/2006/relationships">
+<p:sld xmlns:a="http://schemas.openxmlformats.org/drawingml/2006/main" xmlns:r="http://schemas.openxmlformats.org/officeDocument/2006/relationships" xmlns:p="http://schemas.openxmlformats.org/presentationml/2006/main">
   <p:cSld>
     <p:bg>
       <p:bgPr>
@@ -31115,7 +32574,14 @@
         <p:cNvGrpSpPr/>
         <p:nvPr/>
       </p:nvGrpSpPr>
-      <p:grpSpPr/>
+      <p:grpSpPr>
+        <a:xfrm>
+          <a:off x="0" y="0"/>
+          <a:ext cx="0" cy="0"/>
+          <a:chOff x="0" y="0"/>
+          <a:chExt cx="0" cy="0"/>
+        </a:xfrm>
+      </p:grpSpPr>
       <p:sp>
         <p:nvSpPr>
           <p:cNvPr id="2" name="TextBox 1"/>
@@ -31186,8 +32652,22 @@
               </a:defRPr>
             </a:pPr>
             <a:r>
-              <a:t>•  Neo4j Browser — interfaccia web integrata</a:t>
-            </a:r>
+              <a:rPr dirty="0"/>
+              <a:t>•  Neo4j Browser — </a:t>
+            </a:r>
+            <a:r>
+              <a:rPr dirty="0" err="1"/>
+              <a:t>interfaccia</a:t>
+            </a:r>
+            <a:r>
+              <a:rPr dirty="0"/>
+              <a:t> web </a:t>
+            </a:r>
+            <a:r>
+              <a:rPr dirty="0" err="1"/>
+              <a:t>integrata</a:t>
+            </a:r>
+            <a:endParaRPr dirty="0"/>
           </a:p>
           <a:p>
             <a:pPr algn="l">
@@ -31202,8 +32682,14 @@
               </a:defRPr>
             </a:pPr>
             <a:r>
-              <a:t>  • :play movie-graph per tutorial interattivo</a:t>
-            </a:r>
+              <a:rPr dirty="0"/>
+              <a:t>  • :play movie-graph per tutorial </a:t>
+            </a:r>
+            <a:r>
+              <a:rPr dirty="0" err="1"/>
+              <a:t>interattivo</a:t>
+            </a:r>
+            <a:endParaRPr dirty="0"/>
           </a:p>
           <a:p>
             <a:pPr algn="l">
@@ -31218,8 +32704,38 @@
               </a:defRPr>
             </a:pPr>
             <a:r>
-              <a:t>  • Visualizzazione grafica a cerchi e frecce</a:t>
-            </a:r>
+              <a:rPr dirty="0"/>
+              <a:t>  • </a:t>
+            </a:r>
+            <a:r>
+              <a:rPr dirty="0" err="1"/>
+              <a:t>Visualizzazione</a:t>
+            </a:r>
+            <a:r>
+              <a:rPr dirty="0"/>
+              <a:t> </a:t>
+            </a:r>
+            <a:r>
+              <a:rPr dirty="0" err="1"/>
+              <a:t>grafica</a:t>
+            </a:r>
+            <a:r>
+              <a:rPr dirty="0"/>
+              <a:t> a </a:t>
+            </a:r>
+            <a:r>
+              <a:rPr dirty="0" err="1"/>
+              <a:t>cerchi</a:t>
+            </a:r>
+            <a:r>
+              <a:rPr dirty="0"/>
+              <a:t> e </a:t>
+            </a:r>
+            <a:r>
+              <a:rPr dirty="0" err="1"/>
+              <a:t>frecce</a:t>
+            </a:r>
+            <a:endParaRPr dirty="0"/>
           </a:p>
           <a:p>
             <a:pPr algn="l">
@@ -31234,7 +32750,16 @@
               </a:defRPr>
             </a:pPr>
             <a:r>
-              <a:t>  • Esportazione PNG, CSV, JSON</a:t>
+              <a:rPr dirty="0"/>
+              <a:t>  • </a:t>
+            </a:r>
+            <a:r>
+              <a:rPr dirty="0" err="1"/>
+              <a:t>Esportazione</a:t>
+            </a:r>
+            <a:r>
+              <a:rPr dirty="0"/>
+              <a:t> PNG, CSV, JSON</a:t>
             </a:r>
           </a:p>
           <a:p>
@@ -31250,8 +32775,14 @@
               </a:defRPr>
             </a:pPr>
             <a:r>
-              <a:t>•  Neo4j Bloom — drag &amp; drop, storytelling visuale</a:t>
-            </a:r>
+              <a:rPr dirty="0"/>
+              <a:t>•  Neo4j Bloom — drag &amp; drop, storytelling </a:t>
+            </a:r>
+            <a:r>
+              <a:rPr dirty="0" err="1"/>
+              <a:t>visuale</a:t>
+            </a:r>
+            <a:endParaRPr dirty="0"/>
           </a:p>
           <a:p>
             <a:pPr algn="l">
@@ -31266,8 +32797,30 @@
               </a:defRPr>
             </a:pPr>
             <a:r>
-              <a:t>  • Ricerca in linguaggio naturale</a:t>
-            </a:r>
+              <a:rPr dirty="0"/>
+              <a:t>  • </a:t>
+            </a:r>
+            <a:r>
+              <a:rPr dirty="0" err="1"/>
+              <a:t>Ricerca</a:t>
+            </a:r>
+            <a:r>
+              <a:rPr dirty="0"/>
+              <a:t> in </a:t>
+            </a:r>
+            <a:r>
+              <a:rPr dirty="0" err="1"/>
+              <a:t>linguaggio</a:t>
+            </a:r>
+            <a:r>
+              <a:rPr dirty="0"/>
+              <a:t> </a:t>
+            </a:r>
+            <a:r>
+              <a:rPr dirty="0" err="1"/>
+              <a:t>naturale</a:t>
+            </a:r>
+            <a:endParaRPr dirty="0"/>
           </a:p>
           <a:p>
             <a:pPr algn="l">
@@ -31282,8 +32835,30 @@
               </a:defRPr>
             </a:pPr>
             <a:r>
-              <a:t>  • Grafi animati, filtri visuali</a:t>
-            </a:r>
+              <a:rPr dirty="0"/>
+              <a:t>  • Grafi </a:t>
+            </a:r>
+            <a:r>
+              <a:rPr dirty="0" err="1"/>
+              <a:t>animati</a:t>
+            </a:r>
+            <a:r>
+              <a:rPr dirty="0"/>
+              <a:t>, </a:t>
+            </a:r>
+            <a:r>
+              <a:rPr dirty="0" err="1"/>
+              <a:t>filtri</a:t>
+            </a:r>
+            <a:r>
+              <a:rPr dirty="0"/>
+              <a:t> </a:t>
+            </a:r>
+            <a:r>
+              <a:rPr dirty="0" err="1"/>
+              <a:t>visuali</a:t>
+            </a:r>
+            <a:endParaRPr dirty="0"/>
           </a:p>
           <a:p>
             <a:pPr algn="l">
@@ -31298,8 +32873,30 @@
               </a:defRPr>
             </a:pPr>
             <a:r>
-              <a:t>•  Neo4j Workspace — modellazione grafica collaborativa</a:t>
-            </a:r>
+              <a:rPr dirty="0"/>
+              <a:t>•  Neo4j Workspace — </a:t>
+            </a:r>
+            <a:r>
+              <a:rPr dirty="0" err="1"/>
+              <a:t>modellazione</a:t>
+            </a:r>
+            <a:r>
+              <a:rPr dirty="0"/>
+              <a:t> </a:t>
+            </a:r>
+            <a:r>
+              <a:rPr dirty="0" err="1"/>
+              <a:t>grafica</a:t>
+            </a:r>
+            <a:r>
+              <a:rPr dirty="0"/>
+              <a:t> </a:t>
+            </a:r>
+            <a:r>
+              <a:rPr dirty="0" err="1"/>
+              <a:t>collaborativa</a:t>
+            </a:r>
+            <a:endParaRPr dirty="0"/>
           </a:p>
         </p:txBody>
       </p:sp>
@@ -31311,7 +32908,7 @@
         </p:nvSpPr>
         <p:spPr>
           <a:xfrm>
-            <a:off x="5669280" y="1051560"/>
+            <a:off x="6096000" y="1051560"/>
             <a:ext cx="4846320" cy="411480"/>
           </a:xfrm>
           <a:prstGeom prst="rect">
@@ -31347,7 +32944,7 @@
         </p:nvSpPr>
         <p:spPr>
           <a:xfrm>
-            <a:off x="5669280" y="1508760"/>
+            <a:off x="6096000" y="1508760"/>
             <a:ext cx="4846320" cy="2194560"/>
           </a:xfrm>
           <a:prstGeom prst="rect">
@@ -31490,6 +33087,7 @@
           <a:lstStyle/>
           <a:p>
             <a:pPr algn="ctr"/>
+            <a:endParaRPr/>
           </a:p>
         </p:txBody>
       </p:sp>
@@ -31606,6 +33204,7 @@
                 <a:latin typeface="Consolas"/>
               </a:defRPr>
             </a:pPr>
+            <a:endParaRPr/>
           </a:p>
           <a:p>
             <a:pPr>
@@ -31667,6 +33266,7 @@
                 <a:latin typeface="Consolas"/>
               </a:defRPr>
             </a:pPr>
+            <a:endParaRPr/>
           </a:p>
           <a:p>
             <a:pPr>
@@ -31726,7 +33326,7 @@
         </p:nvSpPr>
         <p:spPr>
           <a:xfrm>
-            <a:off x="5669280" y="3566160"/>
+            <a:off x="6096000" y="3566160"/>
             <a:ext cx="4846320" cy="1371600"/>
           </a:xfrm>
           <a:prstGeom prst="rect">
@@ -31767,7 +33367,7 @@
 </file>
 
 <file path=ppt/slides/slide2.xml><?xml version="1.0" encoding="utf-8"?>
-<p:sld xmlns:a="http://schemas.openxmlformats.org/drawingml/2006/main" xmlns:p="http://schemas.openxmlformats.org/presentationml/2006/main" xmlns:r="http://schemas.openxmlformats.org/officeDocument/2006/relationships">
+<p:sld xmlns:a="http://schemas.openxmlformats.org/drawingml/2006/main" xmlns:r="http://schemas.openxmlformats.org/officeDocument/2006/relationships" xmlns:p="http://schemas.openxmlformats.org/presentationml/2006/main">
   <p:cSld>
     <p:bg>
       <p:bgPr>
@@ -31783,7 +33383,14 @@
         <p:cNvGrpSpPr/>
         <p:nvPr/>
       </p:nvGrpSpPr>
-      <p:grpSpPr/>
+      <p:grpSpPr>
+        <a:xfrm>
+          <a:off x="0" y="0"/>
+          <a:ext cx="0" cy="0"/>
+          <a:chOff x="0" y="0"/>
+          <a:chExt cx="0" cy="0"/>
+        </a:xfrm>
+      </p:grpSpPr>
       <p:sp>
         <p:nvSpPr>
           <p:cNvPr id="2" name="TextBox 1"/>
@@ -32139,7 +33746,7 @@
 </file>
 
 <file path=ppt/slides/slide20.xml><?xml version="1.0" encoding="utf-8"?>
-<p:sld xmlns:a="http://schemas.openxmlformats.org/drawingml/2006/main" xmlns:p="http://schemas.openxmlformats.org/presentationml/2006/main" xmlns:r="http://schemas.openxmlformats.org/officeDocument/2006/relationships">
+<p:sld xmlns:a="http://schemas.openxmlformats.org/drawingml/2006/main" xmlns:r="http://schemas.openxmlformats.org/officeDocument/2006/relationships" xmlns:p="http://schemas.openxmlformats.org/presentationml/2006/main">
   <p:cSld>
     <p:bg>
       <p:bgPr>
@@ -32155,7 +33762,14 @@
         <p:cNvGrpSpPr/>
         <p:nvPr/>
       </p:nvGrpSpPr>
-      <p:grpSpPr/>
+      <p:grpSpPr>
+        <a:xfrm>
+          <a:off x="0" y="0"/>
+          <a:ext cx="0" cy="0"/>
+          <a:chOff x="0" y="0"/>
+          <a:chExt cx="0" cy="0"/>
+        </a:xfrm>
+      </p:grpSpPr>
       <p:sp>
         <p:nvSpPr>
           <p:cNvPr id="2" name="TextBox 1"/>
@@ -32271,7 +33885,7 @@
         </p:nvSpPr>
         <p:spPr>
           <a:xfrm>
-            <a:off x="731520" y="2560320"/>
+            <a:off x="731520" y="2350008"/>
             <a:ext cx="5029200" cy="3017520"/>
           </a:xfrm>
           <a:prstGeom prst="rect">
@@ -32305,6 +33919,7 @@
           <a:lstStyle/>
           <a:p>
             <a:pPr algn="ctr"/>
+            <a:endParaRPr/>
           </a:p>
         </p:txBody>
       </p:sp>
@@ -32316,7 +33931,7 @@
         </p:nvSpPr>
         <p:spPr>
           <a:xfrm>
-            <a:off x="841248" y="2633472"/>
+            <a:off x="841248" y="2423160"/>
             <a:ext cx="4809744" cy="2871216"/>
           </a:xfrm>
           <a:prstGeom prst="rect">
@@ -32389,6 +34004,7 @@
                 <a:latin typeface="Consolas"/>
               </a:defRPr>
             </a:pPr>
+            <a:endParaRPr/>
           </a:p>
           <a:p>
             <a:pPr>
@@ -32514,6 +34130,7 @@
                 <a:latin typeface="Consolas"/>
               </a:defRPr>
             </a:pPr>
+            <a:endParaRPr/>
           </a:p>
           <a:p>
             <a:pPr>
@@ -32605,7 +34222,7 @@
         </p:nvSpPr>
         <p:spPr>
           <a:xfrm>
-            <a:off x="5669280" y="2560320"/>
+            <a:off x="6096000" y="2350008"/>
             <a:ext cx="4846320" cy="3017520"/>
           </a:xfrm>
           <a:prstGeom prst="rect">
@@ -32639,6 +34256,7 @@
           <a:lstStyle/>
           <a:p>
             <a:pPr algn="ctr"/>
+            <a:endParaRPr/>
           </a:p>
         </p:txBody>
       </p:sp>
@@ -32650,7 +34268,7 @@
         </p:nvSpPr>
         <p:spPr>
           <a:xfrm>
-            <a:off x="5779008" y="2633472"/>
+            <a:off x="6205728" y="2423160"/>
             <a:ext cx="4626864" cy="2871216"/>
           </a:xfrm>
           <a:prstGeom prst="rect">
@@ -32707,6 +34325,7 @@
                 <a:latin typeface="Consolas"/>
               </a:defRPr>
             </a:pPr>
+            <a:endParaRPr/>
           </a:p>
           <a:p>
             <a:pPr>
@@ -32736,6 +34355,7 @@
                 <a:latin typeface="Consolas"/>
               </a:defRPr>
             </a:pPr>
+            <a:endParaRPr/>
           </a:p>
           <a:p>
             <a:pPr>
@@ -32813,6 +34433,7 @@
                 <a:latin typeface="Consolas"/>
               </a:defRPr>
             </a:pPr>
+            <a:endParaRPr/>
           </a:p>
           <a:p>
             <a:pPr>
@@ -32874,6 +34495,7 @@
                 <a:latin typeface="Consolas"/>
               </a:defRPr>
             </a:pPr>
+            <a:endParaRPr/>
           </a:p>
           <a:p>
             <a:pPr>
@@ -32949,6 +34571,7 @@
           <a:lstStyle/>
           <a:p>
             <a:pPr algn="ctr"/>
+            <a:endParaRPr/>
           </a:p>
         </p:txBody>
       </p:sp>
@@ -32997,7 +34620,7 @@
 </file>
 
 <file path=ppt/slides/slide21.xml><?xml version="1.0" encoding="utf-8"?>
-<p:sld xmlns:a="http://schemas.openxmlformats.org/drawingml/2006/main" xmlns:p="http://schemas.openxmlformats.org/presentationml/2006/main" xmlns:r="http://schemas.openxmlformats.org/officeDocument/2006/relationships">
+<p:sld xmlns:a="http://schemas.openxmlformats.org/drawingml/2006/main" xmlns:r="http://schemas.openxmlformats.org/officeDocument/2006/relationships" xmlns:p="http://schemas.openxmlformats.org/presentationml/2006/main">
   <p:cSld>
     <p:bg>
       <p:bgPr>
@@ -33013,7 +34636,14 @@
         <p:cNvGrpSpPr/>
         <p:nvPr/>
       </p:nvGrpSpPr>
-      <p:grpSpPr/>
+      <p:grpSpPr>
+        <a:xfrm>
+          <a:off x="0" y="0"/>
+          <a:ext cx="0" cy="0"/>
+          <a:chOff x="0" y="0"/>
+          <a:chExt cx="0" cy="0"/>
+        </a:xfrm>
+      </p:grpSpPr>
       <p:sp>
         <p:nvSpPr>
           <p:cNvPr id="2" name="TextBox 1"/>
@@ -33095,7 +34725,7 @@
         <p:spPr>
           <a:xfrm>
             <a:off x="731520" y="1463040"/>
-            <a:ext cx="5029200" cy="3200400"/>
+            <a:ext cx="5029200" cy="2308324"/>
           </a:xfrm>
           <a:prstGeom prst="rect">
             <a:avLst/>
@@ -33120,7 +34750,32 @@
               </a:defRPr>
             </a:pPr>
             <a:r>
-              <a:t>•  238 persone (consulenti, manager, tecnici)</a:t>
+              <a:rPr dirty="0"/>
+              <a:t>238 </a:t>
+            </a:r>
+            <a:r>
+              <a:rPr dirty="0" err="1"/>
+              <a:t>persone</a:t>
+            </a:r>
+            <a:r>
+              <a:rPr dirty="0"/>
+              <a:t> (</a:t>
+            </a:r>
+            <a:r>
+              <a:rPr dirty="0" err="1"/>
+              <a:t>consulenti</a:t>
+            </a:r>
+            <a:r>
+              <a:rPr dirty="0"/>
+              <a:t>, manager, </a:t>
+            </a:r>
+            <a:r>
+              <a:rPr dirty="0" err="1"/>
+              <a:t>tecnici</a:t>
+            </a:r>
+            <a:r>
+              <a:rPr dirty="0"/>
+              <a:t>)</a:t>
             </a:r>
           </a:p>
           <a:p>
@@ -33136,8 +34791,38 @@
               </a:defRPr>
             </a:pPr>
             <a:r>
-              <a:t>•  93 progetti seguiti dalle persone</a:t>
-            </a:r>
+              <a:rPr dirty="0"/>
+              <a:t>93 </a:t>
+            </a:r>
+            <a:r>
+              <a:rPr dirty="0" err="1"/>
+              <a:t>progetti</a:t>
+            </a:r>
+            <a:r>
+              <a:rPr dirty="0"/>
+              <a:t> </a:t>
+            </a:r>
+            <a:r>
+              <a:rPr dirty="0" err="1"/>
+              <a:t>seguiti</a:t>
+            </a:r>
+            <a:r>
+              <a:rPr dirty="0"/>
+              <a:t> </a:t>
+            </a:r>
+            <a:r>
+              <a:rPr dirty="0" err="1"/>
+              <a:t>dalle</a:t>
+            </a:r>
+            <a:r>
+              <a:rPr dirty="0"/>
+              <a:t> </a:t>
+            </a:r>
+            <a:r>
+              <a:rPr dirty="0" err="1"/>
+              <a:t>persone</a:t>
+            </a:r>
+            <a:endParaRPr dirty="0"/>
           </a:p>
           <a:p>
             <a:pPr algn="l">
@@ -33152,7 +34837,24 @@
               </a:defRPr>
             </a:pPr>
             <a:r>
-              <a:t>•  55 skill certificate (tecnologiche e trasversali)</a:t>
+              <a:rPr dirty="0"/>
+              <a:t>55 skill certificate (</a:t>
+            </a:r>
+            <a:r>
+              <a:rPr dirty="0" err="1"/>
+              <a:t>tecnologiche</a:t>
+            </a:r>
+            <a:r>
+              <a:rPr dirty="0"/>
+              <a:t> e </a:t>
+            </a:r>
+            <a:r>
+              <a:rPr dirty="0" err="1"/>
+              <a:t>trasversali</a:t>
+            </a:r>
+            <a:r>
+              <a:rPr dirty="0"/>
+              <a:t>)</a:t>
             </a:r>
           </a:p>
           <a:p>
@@ -33168,7 +34870,16 @@
               </a:defRPr>
             </a:pPr>
             <a:r>
-              <a:t>•  2 supervisor (direttori di area)</a:t>
+              <a:rPr dirty="0"/>
+              <a:t>2 supervisor (</a:t>
+            </a:r>
+            <a:r>
+              <a:rPr dirty="0" err="1"/>
+              <a:t>direttori</a:t>
+            </a:r>
+            <a:r>
+              <a:rPr dirty="0"/>
+              <a:t> di area)</a:t>
             </a:r>
           </a:p>
           <a:p>
@@ -33183,9 +34894,7 @@
                 <a:latin typeface="Calibri"/>
               </a:defRPr>
             </a:pPr>
-            <a:r>
-              <a:t>•  Relazioni:</a:t>
-            </a:r>
+            <a:endParaRPr lang="en-US" dirty="0"/>
           </a:p>
           <a:p>
             <a:pPr algn="l">
@@ -33200,6 +34909,28 @@
               </a:defRPr>
             </a:pPr>
             <a:r>
+              <a:rPr dirty="0" err="1"/>
+              <a:t>Relazioni</a:t>
+            </a:r>
+            <a:r>
+              <a:rPr dirty="0"/>
+              <a:t>:</a:t>
+            </a:r>
+          </a:p>
+          <a:p>
+            <a:pPr algn="l">
+              <a:spcAft>
+                <a:spcPts val="0"/>
+              </a:spcAft>
+              <a:defRPr sz="1200">
+                <a:solidFill>
+                  <a:srgbClr val="FFFFFF"/>
+                </a:solidFill>
+                <a:latin typeface="Calibri"/>
+              </a:defRPr>
+            </a:pPr>
+            <a:r>
+              <a:rPr dirty="0"/>
               <a:t>  • HAS_SKILL {proficiency: 1-5}</a:t>
             </a:r>
           </a:p>
@@ -33216,6 +34947,7 @@
               </a:defRPr>
             </a:pPr>
             <a:r>
+              <a:rPr dirty="0"/>
               <a:t>  • WORKED_ON {role: Developer/Architect/etc.}</a:t>
             </a:r>
           </a:p>
@@ -33232,8 +34964,10 @@
               </a:defRPr>
             </a:pPr>
             <a:r>
+              <a:rPr dirty="0"/>
               <a:t>  • REPORTS_TO (Person → Supervisor)</a:t>
             </a:r>
+            <a:endParaRPr lang="en-US" dirty="0"/>
           </a:p>
           <a:p>
             <a:pPr algn="l">
@@ -33247,9 +34981,7 @@
                 <a:latin typeface="Calibri"/>
               </a:defRPr>
             </a:pPr>
-            <a:r>
-              <a:t>•  Dati anonimizzati da foglio Excel aziendale reale</a:t>
-            </a:r>
+            <a:endParaRPr dirty="0"/>
           </a:p>
           <a:p>
             <a:pPr algn="l">
@@ -33264,7 +34996,74 @@
               </a:defRPr>
             </a:pPr>
             <a:r>
-              <a:t>•  Ospitato su AuraDB Free Tier</a:t>
+              <a:rPr dirty="0"/>
+              <a:t>Dati </a:t>
+            </a:r>
+            <a:r>
+              <a:rPr dirty="0" err="1"/>
+              <a:t>anonimizzati</a:t>
+            </a:r>
+            <a:r>
+              <a:rPr dirty="0"/>
+              <a:t> da </a:t>
+            </a:r>
+            <a:r>
+              <a:rPr dirty="0" err="1"/>
+              <a:t>foglio</a:t>
+            </a:r>
+            <a:r>
+              <a:rPr dirty="0"/>
+              <a:t> Excel </a:t>
+            </a:r>
+            <a:r>
+              <a:rPr dirty="0" err="1"/>
+              <a:t>aziendale</a:t>
+            </a:r>
+            <a:r>
+              <a:rPr dirty="0"/>
+              <a:t> </a:t>
+            </a:r>
+            <a:r>
+              <a:rPr dirty="0" err="1"/>
+              <a:t>reale</a:t>
+            </a:r>
+            <a:endParaRPr dirty="0"/>
+          </a:p>
+          <a:p>
+            <a:pPr algn="l">
+              <a:spcAft>
+                <a:spcPts val="0"/>
+              </a:spcAft>
+              <a:defRPr sz="1200">
+                <a:solidFill>
+                  <a:srgbClr val="FFFFFF"/>
+                </a:solidFill>
+                <a:latin typeface="Calibri"/>
+              </a:defRPr>
+            </a:pPr>
+            <a:r>
+              <a:rPr dirty="0" err="1"/>
+              <a:t>Ospitato</a:t>
+            </a:r>
+            <a:r>
+              <a:rPr dirty="0"/>
+              <a:t> </a:t>
+            </a:r>
+            <a:r>
+              <a:rPr dirty="0" err="1"/>
+              <a:t>su</a:t>
+            </a:r>
+            <a:r>
+              <a:rPr dirty="0"/>
+              <a:t> </a:t>
+            </a:r>
+            <a:r>
+              <a:rPr dirty="0" err="1"/>
+              <a:t>AuraDB</a:t>
+            </a:r>
+            <a:r>
+              <a:rPr dirty="0"/>
+              <a:t> Free Tier</a:t>
             </a:r>
           </a:p>
         </p:txBody>
@@ -33277,7 +35076,7 @@
         </p:nvSpPr>
         <p:spPr>
           <a:xfrm>
-            <a:off x="5669280" y="1463040"/>
+            <a:off x="6096000" y="1463040"/>
             <a:ext cx="4846320" cy="2377440"/>
           </a:xfrm>
           <a:prstGeom prst="rect">
@@ -33366,8 +35165,8 @@
         </p:nvSpPr>
         <p:spPr>
           <a:xfrm>
-            <a:off x="5669280" y="3931920"/>
-            <a:ext cx="4846320" cy="1645920"/>
+            <a:off x="6096000" y="4142232"/>
+            <a:ext cx="4846320" cy="1384995"/>
           </a:xfrm>
           <a:prstGeom prst="rect">
             <a:avLst/>
@@ -33389,36 +35188,150 @@
               </a:defRPr>
             </a:pPr>
             <a:r>
-              <a:t>Struttura dati:</a:t>
-            </a:r>
-            <a:br/>
-            <a:br/>
-            <a:r>
-              <a:t>Ogni riga CSV = una persona</a:t>
-            </a:r>
-            <a:br/>
-            <a:r>
-              <a:t>con le skill in colonne separate.</a:t>
-            </a:r>
-            <a:br/>
-            <a:r>
-              <a:t>Il caricamento UNWIND trasforma</a:t>
-            </a:r>
-            <a:br/>
-            <a:r>
-              <a:t>le righe in nodi e relazioni.</a:t>
-            </a:r>
-            <a:br/>
-            <a:br/>
-            <a:r>
-              <a:t>Nei prossimi esercizi esploreremo</a:t>
-            </a:r>
-            <a:br/>
-            <a:r>
+              <a:rPr dirty="0" err="1"/>
+              <a:t>Struttura</a:t>
+            </a:r>
+            <a:r>
+              <a:rPr dirty="0"/>
+              <a:t> </a:t>
+            </a:r>
+            <a:r>
+              <a:rPr dirty="0" err="1"/>
+              <a:t>dati</a:t>
+            </a:r>
+            <a:r>
+              <a:rPr dirty="0"/>
+              <a:t>:</a:t>
+            </a:r>
+            <a:br>
+              <a:rPr dirty="0"/>
+            </a:br>
+            <a:br>
+              <a:rPr dirty="0"/>
+            </a:br>
+            <a:r>
+              <a:rPr dirty="0"/>
+              <a:t>Ogni </a:t>
+            </a:r>
+            <a:r>
+              <a:rPr dirty="0" err="1"/>
+              <a:t>riga</a:t>
+            </a:r>
+            <a:r>
+              <a:rPr dirty="0"/>
+              <a:t> CSV = </a:t>
+            </a:r>
+            <a:r>
+              <a:rPr dirty="0" err="1"/>
+              <a:t>una</a:t>
+            </a:r>
+            <a:r>
+              <a:rPr dirty="0"/>
+              <a:t> persona</a:t>
+            </a:r>
+            <a:r>
+              <a:rPr lang="en-US" dirty="0"/>
+              <a:t> </a:t>
+            </a:r>
+            <a:r>
+              <a:rPr dirty="0"/>
+              <a:t>con le skill in </a:t>
+            </a:r>
+            <a:r>
+              <a:rPr dirty="0" err="1"/>
+              <a:t>colonne</a:t>
+            </a:r>
+            <a:r>
+              <a:rPr dirty="0"/>
+              <a:t> separate.</a:t>
+            </a:r>
+            <a:br>
+              <a:rPr dirty="0"/>
+            </a:br>
+            <a:r>
+              <a:rPr dirty="0"/>
+              <a:t>Il </a:t>
+            </a:r>
+            <a:r>
+              <a:rPr dirty="0" err="1"/>
+              <a:t>caricamento</a:t>
+            </a:r>
+            <a:r>
+              <a:rPr dirty="0"/>
+              <a:t> UNWIND </a:t>
+            </a:r>
+            <a:r>
+              <a:rPr dirty="0" err="1"/>
+              <a:t>trasforma</a:t>
+            </a:r>
+            <a:r>
+              <a:rPr lang="en-US" dirty="0"/>
+              <a:t> </a:t>
+            </a:r>
+            <a:r>
+              <a:rPr dirty="0"/>
+              <a:t>le </a:t>
+            </a:r>
+            <a:r>
+              <a:rPr dirty="0" err="1"/>
+              <a:t>righe</a:t>
+            </a:r>
+            <a:r>
+              <a:rPr dirty="0"/>
+              <a:t> in nodi e </a:t>
+            </a:r>
+            <a:r>
+              <a:rPr dirty="0" err="1"/>
+              <a:t>relazioni</a:t>
+            </a:r>
+            <a:r>
+              <a:rPr dirty="0"/>
+              <a:t>.</a:t>
+            </a:r>
+            <a:br>
+              <a:rPr dirty="0"/>
+            </a:br>
+            <a:br>
+              <a:rPr dirty="0"/>
+            </a:br>
+            <a:r>
+              <a:rPr dirty="0"/>
+              <a:t>Nei </a:t>
+            </a:r>
+            <a:r>
+              <a:rPr dirty="0" err="1"/>
+              <a:t>prossimi</a:t>
+            </a:r>
+            <a:r>
+              <a:rPr dirty="0"/>
+              <a:t> </a:t>
+            </a:r>
+            <a:r>
+              <a:rPr dirty="0" err="1"/>
+              <a:t>esercizi</a:t>
+            </a:r>
+            <a:r>
+              <a:rPr dirty="0"/>
+              <a:t> </a:t>
+            </a:r>
+            <a:r>
+              <a:rPr dirty="0" err="1"/>
+              <a:t>esploreremo</a:t>
+            </a:r>
+            <a:r>
+              <a:rPr lang="en-US" dirty="0"/>
+              <a:t> </a:t>
+            </a:r>
+            <a:r>
+              <a:rPr dirty="0"/>
               <a:t>il dataset con Cypher dal Browser</a:t>
             </a:r>
-            <a:br/>
-            <a:r>
+            <a:r>
+              <a:rPr lang="en-US" dirty="0"/>
+              <a:t> </a:t>
+            </a:r>
+            <a:r>
+              <a:rPr dirty="0"/>
               <a:t>e dal notebook Python.</a:t>
             </a:r>
           </a:p>
@@ -33433,7 +35346,7 @@
 </file>
 
 <file path=ppt/slides/slide22.xml><?xml version="1.0" encoding="utf-8"?>
-<p:sld xmlns:a="http://schemas.openxmlformats.org/drawingml/2006/main" xmlns:p="http://schemas.openxmlformats.org/presentationml/2006/main" xmlns:r="http://schemas.openxmlformats.org/officeDocument/2006/relationships">
+<p:sld xmlns:a="http://schemas.openxmlformats.org/drawingml/2006/main" xmlns:r="http://schemas.openxmlformats.org/officeDocument/2006/relationships" xmlns:p="http://schemas.openxmlformats.org/presentationml/2006/main">
   <p:cSld>
     <p:bg>
       <p:bgPr>
@@ -33449,7 +35362,14 @@
         <p:cNvGrpSpPr/>
         <p:nvPr/>
       </p:nvGrpSpPr>
-      <p:grpSpPr/>
+      <p:grpSpPr>
+        <a:xfrm>
+          <a:off x="0" y="0"/>
+          <a:ext cx="0" cy="0"/>
+          <a:chOff x="0" y="0"/>
+          <a:chExt cx="0" cy="0"/>
+        </a:xfrm>
+      </p:grpSpPr>
       <p:sp>
         <p:nvSpPr>
           <p:cNvPr id="2" name="TextBox 1"/>
@@ -33589,7 +35509,12 @@
               </a:defRPr>
             </a:pPr>
             <a:r>
-              <a:t>employee_id  name  gender  discipline</a:t>
+              <a:rPr dirty="0" err="1"/>
+              <a:t>employee_id</a:t>
+            </a:r>
+            <a:r>
+              <a:rPr dirty="0"/>
+              <a:t>  name  gender  discipline</a:t>
             </a:r>
           </a:p>
         </p:txBody>
@@ -33814,6 +35739,7 @@
           <a:lstStyle/>
           <a:p>
             <a:pPr algn="ctr"/>
+            <a:endParaRPr/>
           </a:p>
         </p:txBody>
       </p:sp>
@@ -33895,6 +35821,7 @@
           <a:lstStyle/>
           <a:p>
             <a:pPr algn="ctr"/>
+            <a:endParaRPr/>
           </a:p>
         </p:txBody>
       </p:sp>
@@ -33963,6 +35890,7 @@
                 <a:latin typeface="Consolas"/>
               </a:defRPr>
             </a:pPr>
+            <a:endParaRPr/>
           </a:p>
           <a:p>
             <a:pPr>
@@ -34008,6 +35936,7 @@
                 <a:latin typeface="Consolas"/>
               </a:defRPr>
             </a:pPr>
+            <a:endParaRPr/>
           </a:p>
           <a:p>
             <a:pPr>
@@ -34088,7 +36017,7 @@
 </file>
 
 <file path=ppt/slides/slide23.xml><?xml version="1.0" encoding="utf-8"?>
-<p:sld xmlns:a="http://schemas.openxmlformats.org/drawingml/2006/main" xmlns:p="http://schemas.openxmlformats.org/presentationml/2006/main" xmlns:r="http://schemas.openxmlformats.org/officeDocument/2006/relationships">
+<p:sld xmlns:a="http://schemas.openxmlformats.org/drawingml/2006/main" xmlns:r="http://schemas.openxmlformats.org/officeDocument/2006/relationships" xmlns:p="http://schemas.openxmlformats.org/presentationml/2006/main">
   <p:cSld>
     <p:bg>
       <p:bgPr>
@@ -34104,7 +36033,14 @@
         <p:cNvGrpSpPr/>
         <p:nvPr/>
       </p:nvGrpSpPr>
-      <p:grpSpPr/>
+      <p:grpSpPr>
+        <a:xfrm>
+          <a:off x="0" y="0"/>
+          <a:ext cx="0" cy="0"/>
+          <a:chOff x="0" y="0"/>
+          <a:chExt cx="0" cy="0"/>
+        </a:xfrm>
+      </p:grpSpPr>
       <p:sp>
         <p:nvSpPr>
           <p:cNvPr id="2" name="TextBox 1"/>
@@ -34219,6 +36155,7 @@
           <a:lstStyle/>
           <a:p>
             <a:pPr algn="ctr"/>
+            <a:endParaRPr/>
           </a:p>
         </p:txBody>
       </p:sp>
@@ -34335,6 +36272,7 @@
                 <a:latin typeface="Consolas"/>
               </a:defRPr>
             </a:pPr>
+            <a:endParaRPr/>
           </a:p>
           <a:p>
             <a:pPr>
@@ -34412,6 +36350,7 @@
                 <a:latin typeface="Consolas"/>
               </a:defRPr>
             </a:pPr>
+            <a:endParaRPr/>
           </a:p>
           <a:p>
             <a:pPr>
@@ -34455,7 +36394,7 @@
         </p:nvSpPr>
         <p:spPr>
           <a:xfrm>
-            <a:off x="5669280" y="1371600"/>
+            <a:off x="6096000" y="1371600"/>
             <a:ext cx="4846320" cy="2651760"/>
           </a:xfrm>
           <a:prstGeom prst="rect">
@@ -34489,6 +36428,7 @@
           <a:lstStyle/>
           <a:p>
             <a:pPr algn="ctr"/>
+            <a:endParaRPr/>
           </a:p>
         </p:txBody>
       </p:sp>
@@ -34500,7 +36440,7 @@
         </p:nvSpPr>
         <p:spPr>
           <a:xfrm>
-            <a:off x="5779008" y="1444752"/>
+            <a:off x="6205728" y="1444752"/>
             <a:ext cx="4626864" cy="2505456"/>
           </a:xfrm>
           <a:prstGeom prst="rect">
@@ -34589,6 +36529,7 @@
                 <a:latin typeface="Consolas"/>
               </a:defRPr>
             </a:pPr>
+            <a:endParaRPr/>
           </a:p>
           <a:p>
             <a:pPr>
@@ -34712,7 +36653,7 @@
         </p:nvSpPr>
         <p:spPr>
           <a:xfrm>
-            <a:off x="731520" y="4023360"/>
+            <a:off x="731520" y="4160520"/>
             <a:ext cx="10698480" cy="36576"/>
           </a:xfrm>
           <a:prstGeom prst="rect">
@@ -34744,6 +36685,7 @@
           <a:lstStyle/>
           <a:p>
             <a:pPr algn="ctr"/>
+            <a:endParaRPr/>
           </a:p>
         </p:txBody>
       </p:sp>
@@ -34755,7 +36697,7 @@
         </p:nvSpPr>
         <p:spPr>
           <a:xfrm>
-            <a:off x="731520" y="4206240"/>
+            <a:off x="731520" y="4343400"/>
             <a:ext cx="10515600" cy="365760"/>
           </a:xfrm>
           <a:prstGeom prst="rect">
@@ -34791,7 +36733,7 @@
         </p:nvSpPr>
         <p:spPr>
           <a:xfrm>
-            <a:off x="731520" y="4663440"/>
+            <a:off x="731520" y="4800600"/>
             <a:ext cx="10515600" cy="1371600"/>
           </a:xfrm>
           <a:prstGeom prst="rect">
@@ -34879,7 +36821,7 @@
 </file>
 
 <file path=ppt/slides/slide24.xml><?xml version="1.0" encoding="utf-8"?>
-<p:sld xmlns:a="http://schemas.openxmlformats.org/drawingml/2006/main" xmlns:p="http://schemas.openxmlformats.org/presentationml/2006/main" xmlns:r="http://schemas.openxmlformats.org/officeDocument/2006/relationships">
+<p:sld xmlns:a="http://schemas.openxmlformats.org/drawingml/2006/main" xmlns:r="http://schemas.openxmlformats.org/officeDocument/2006/relationships" xmlns:p="http://schemas.openxmlformats.org/presentationml/2006/main">
   <p:cSld>
     <p:bg>
       <p:bgPr>
@@ -34895,7 +36837,14 @@
         <p:cNvGrpSpPr/>
         <p:nvPr/>
       </p:nvGrpSpPr>
-      <p:grpSpPr/>
+      <p:grpSpPr>
+        <a:xfrm>
+          <a:off x="0" y="0"/>
+          <a:ext cx="0" cy="0"/>
+          <a:chOff x="0" y="0"/>
+          <a:chExt cx="0" cy="0"/>
+        </a:xfrm>
+      </p:grpSpPr>
       <p:sp>
         <p:nvSpPr>
           <p:cNvPr id="2" name="TextBox 1"/>
@@ -34977,7 +36926,7 @@
         <p:spPr>
           <a:xfrm>
             <a:off x="731520" y="1371600"/>
-            <a:ext cx="5029200" cy="4114800"/>
+            <a:ext cx="5029200" cy="4847481"/>
           </a:xfrm>
           <a:prstGeom prst="rect">
             <a:avLst/>
@@ -35002,7 +36951,16 @@
               </a:defRPr>
             </a:pPr>
             <a:r>
-              <a:t>•  1. Connettiti a Neo4j via Python driver</a:t>
+              <a:rPr sz="1100" b="1" dirty="0"/>
+              <a:t>1. </a:t>
+            </a:r>
+            <a:r>
+              <a:rPr sz="1100" b="1" u="sng" dirty="0" err="1"/>
+              <a:t>Connettiti</a:t>
+            </a:r>
+            <a:r>
+              <a:rPr sz="1100" b="1" u="sng" dirty="0"/>
+              <a:t> a Neo4j via Python driver</a:t>
             </a:r>
           </a:p>
           <a:p>
@@ -35017,9 +36975,7 @@
                 <a:latin typeface="Calibri"/>
               </a:defRPr>
             </a:pPr>
-            <a:r>
-              <a:t>  driver = GraphDatabase.driver(URI, auth=(USER, PASS))</a:t>
-            </a:r>
+            <a:endParaRPr lang="en-US" sz="1100" dirty="0"/>
           </a:p>
           <a:p>
             <a:pPr algn="l">
@@ -35034,7 +36990,16 @@
               </a:defRPr>
             </a:pPr>
             <a:r>
-              <a:t>  Esegui: MATCH (n) RETURN n LIMIT 25</a:t>
+              <a:rPr sz="1100" dirty="0"/>
+              <a:t>  driver = </a:t>
+            </a:r>
+            <a:r>
+              <a:rPr sz="1100" dirty="0" err="1"/>
+              <a:t>GraphDatabase.driver</a:t>
+            </a:r>
+            <a:r>
+              <a:rPr sz="1100" dirty="0"/>
+              <a:t>(URI, auth=(USER, PASS))</a:t>
             </a:r>
           </a:p>
           <a:p>
@@ -35050,7 +37015,16 @@
               </a:defRPr>
             </a:pPr>
             <a:r>
-              <a:t>•  </a:t>
+              <a:rPr sz="1100" dirty="0"/>
+              <a:t>  </a:t>
+            </a:r>
+            <a:r>
+              <a:rPr sz="1100" dirty="0" err="1"/>
+              <a:t>Esegui</a:t>
+            </a:r>
+            <a:r>
+              <a:rPr sz="1100" dirty="0"/>
+              <a:t>: MATCH (n) RETURN n LIMIT 25</a:t>
             </a:r>
           </a:p>
           <a:p>
@@ -35065,9 +37039,7 @@
                 <a:latin typeface="Calibri"/>
               </a:defRPr>
             </a:pPr>
-            <a:r>
-              <a:t>•  2. Trova tutte le persone di Roma</a:t>
-            </a:r>
+            <a:endParaRPr lang="en-US" sz="1100" dirty="0"/>
           </a:p>
           <a:p>
             <a:pPr algn="l">
@@ -35081,9 +37053,7 @@
                 <a:latin typeface="Calibri"/>
               </a:defRPr>
             </a:pPr>
-            <a:r>
-              <a:t>  MATCH (p:Person) WHERE p.location = "Roma"</a:t>
-            </a:r>
+            <a:endParaRPr sz="1100" dirty="0"/>
           </a:p>
           <a:p>
             <a:pPr algn="l">
@@ -35098,7 +37068,20 @@
               </a:defRPr>
             </a:pPr>
             <a:r>
-              <a:t>  RETURN p.name, p.title</a:t>
+              <a:rPr sz="1100" b="1" dirty="0"/>
+              <a:t>2. </a:t>
+            </a:r>
+            <a:r>
+              <a:rPr sz="1100" b="1" u="sng" dirty="0"/>
+              <a:t>Trova tutte le </a:t>
+            </a:r>
+            <a:r>
+              <a:rPr sz="1100" b="1" u="sng" dirty="0" err="1"/>
+              <a:t>persone</a:t>
+            </a:r>
+            <a:r>
+              <a:rPr sz="1100" b="1" u="sng" dirty="0"/>
+              <a:t> di Roma</a:t>
             </a:r>
           </a:p>
           <a:p>
@@ -35113,9 +37096,7 @@
                 <a:latin typeface="Calibri"/>
               </a:defRPr>
             </a:pPr>
-            <a:r>
-              <a:t>•  </a:t>
-            </a:r>
+            <a:endParaRPr lang="en-US" sz="1100" dirty="0"/>
           </a:p>
           <a:p>
             <a:pPr algn="l">
@@ -35130,7 +37111,24 @@
               </a:defRPr>
             </a:pPr>
             <a:r>
-              <a:t>•  3. Quante persone per ogni location?</a:t>
+              <a:rPr sz="1100" dirty="0"/>
+              <a:t>  MATCH (</a:t>
+            </a:r>
+            <a:r>
+              <a:rPr sz="1100" dirty="0" err="1"/>
+              <a:t>p:Person</a:t>
+            </a:r>
+            <a:r>
+              <a:rPr sz="1100" dirty="0"/>
+              <a:t>) WHERE </a:t>
+            </a:r>
+            <a:r>
+              <a:rPr sz="1100" dirty="0" err="1"/>
+              <a:t>p.location</a:t>
+            </a:r>
+            <a:r>
+              <a:rPr sz="1100" dirty="0"/>
+              <a:t> = "Roma"</a:t>
             </a:r>
           </a:p>
           <a:p>
@@ -35146,8 +37144,14 @@
               </a:defRPr>
             </a:pPr>
             <a:r>
-              <a:t>  MATCH (p:Person) RETURN p.location, count(*)</a:t>
-            </a:r>
+              <a:rPr sz="1100" dirty="0"/>
+              <a:t>  RETURN p.name, </a:t>
+            </a:r>
+            <a:r>
+              <a:rPr sz="1100" dirty="0" err="1"/>
+              <a:t>p.title</a:t>
+            </a:r>
+            <a:endParaRPr sz="1100" dirty="0"/>
           </a:p>
           <a:p>
             <a:pPr algn="l">
@@ -35161,7 +37165,115 @@
                 <a:latin typeface="Calibri"/>
               </a:defRPr>
             </a:pPr>
-            <a:r>
+            <a:endParaRPr lang="en-US" sz="1100" dirty="0"/>
+          </a:p>
+          <a:p>
+            <a:pPr algn="l">
+              <a:spcAft>
+                <a:spcPts val="0"/>
+              </a:spcAft>
+              <a:defRPr sz="1200">
+                <a:solidFill>
+                  <a:srgbClr val="FFFFFF"/>
+                </a:solidFill>
+                <a:latin typeface="Calibri"/>
+              </a:defRPr>
+            </a:pPr>
+            <a:r>
+              <a:rPr sz="1100" dirty="0"/>
+              <a:t> </a:t>
+            </a:r>
+          </a:p>
+          <a:p>
+            <a:pPr algn="l">
+              <a:spcAft>
+                <a:spcPts val="0"/>
+              </a:spcAft>
+              <a:defRPr sz="1200">
+                <a:solidFill>
+                  <a:srgbClr val="FFFFFF"/>
+                </a:solidFill>
+                <a:latin typeface="Calibri"/>
+              </a:defRPr>
+            </a:pPr>
+            <a:r>
+              <a:rPr sz="1100" b="1" dirty="0"/>
+              <a:t>3. </a:t>
+            </a:r>
+            <a:r>
+              <a:rPr sz="1100" b="1" u="sng" dirty="0"/>
+              <a:t>Quante </a:t>
+            </a:r>
+            <a:r>
+              <a:rPr sz="1100" b="1" u="sng" dirty="0" err="1"/>
+              <a:t>persone</a:t>
+            </a:r>
+            <a:r>
+              <a:rPr sz="1100" b="1" u="sng" dirty="0"/>
+              <a:t> per ogni location?</a:t>
+            </a:r>
+          </a:p>
+          <a:p>
+            <a:pPr algn="l">
+              <a:spcAft>
+                <a:spcPts val="0"/>
+              </a:spcAft>
+              <a:defRPr sz="1200">
+                <a:solidFill>
+                  <a:srgbClr val="FFFFFF"/>
+                </a:solidFill>
+                <a:latin typeface="Calibri"/>
+              </a:defRPr>
+            </a:pPr>
+            <a:endParaRPr lang="en-US" sz="1100" dirty="0"/>
+          </a:p>
+          <a:p>
+            <a:pPr algn="l">
+              <a:spcAft>
+                <a:spcPts val="0"/>
+              </a:spcAft>
+              <a:defRPr sz="1200">
+                <a:solidFill>
+                  <a:srgbClr val="FFFFFF"/>
+                </a:solidFill>
+                <a:latin typeface="Calibri"/>
+              </a:defRPr>
+            </a:pPr>
+            <a:r>
+              <a:rPr sz="1100" dirty="0"/>
+              <a:t>  MATCH (</a:t>
+            </a:r>
+            <a:r>
+              <a:rPr sz="1100" dirty="0" err="1"/>
+              <a:t>p:Person</a:t>
+            </a:r>
+            <a:r>
+              <a:rPr sz="1100" dirty="0"/>
+              <a:t>) RETURN </a:t>
+            </a:r>
+            <a:r>
+              <a:rPr sz="1100" dirty="0" err="1"/>
+              <a:t>p.location</a:t>
+            </a:r>
+            <a:r>
+              <a:rPr sz="1100" dirty="0"/>
+              <a:t>, count(*)</a:t>
+            </a:r>
+          </a:p>
+          <a:p>
+            <a:pPr algn="l">
+              <a:spcAft>
+                <a:spcPts val="0"/>
+              </a:spcAft>
+              <a:defRPr sz="1200">
+                <a:solidFill>
+                  <a:srgbClr val="FFFFFF"/>
+                </a:solidFill>
+                <a:latin typeface="Calibri"/>
+              </a:defRPr>
+            </a:pPr>
+            <a:r>
+              <a:rPr sz="1100" dirty="0"/>
               <a:t>  ORDER BY count(*) DESC</a:t>
             </a:r>
           </a:p>
@@ -35177,9 +37289,7 @@
                 <a:latin typeface="Calibri"/>
               </a:defRPr>
             </a:pPr>
-            <a:r>
-              <a:t>•  </a:t>
-            </a:r>
+            <a:endParaRPr lang="en-US" sz="1100" dirty="0"/>
           </a:p>
           <a:p>
             <a:pPr algn="l">
@@ -35194,7 +37304,8 @@
               </a:defRPr>
             </a:pPr>
             <a:r>
-              <a:t>•  4. Trova tutte le skill di una persona specifica</a:t>
+              <a:rPr sz="1100" dirty="0"/>
+              <a:t>  </a:t>
             </a:r>
           </a:p>
           <a:p>
@@ -35210,8 +37321,26 @@
               </a:defRPr>
             </a:pPr>
             <a:r>
-              <a:t>  MATCH (p:Person {name: 'Mario Rossi'})</a:t>
-            </a:r>
+              <a:rPr sz="1100" b="1" dirty="0"/>
+              <a:t>4. </a:t>
+            </a:r>
+            <a:r>
+              <a:rPr sz="1100" b="1" u="sng" dirty="0"/>
+              <a:t>Trova tutte le skill di </a:t>
+            </a:r>
+            <a:r>
+              <a:rPr sz="1100" b="1" u="sng" dirty="0" err="1"/>
+              <a:t>una</a:t>
+            </a:r>
+            <a:r>
+              <a:rPr sz="1100" b="1" u="sng" dirty="0"/>
+              <a:t> persona </a:t>
+            </a:r>
+            <a:r>
+              <a:rPr sz="1100" b="1" u="sng" dirty="0" err="1"/>
+              <a:t>specifica</a:t>
+            </a:r>
+            <a:endParaRPr sz="1100" b="1" u="sng" dirty="0"/>
           </a:p>
           <a:p>
             <a:pPr algn="l">
@@ -35225,9 +37354,7 @@
                 <a:latin typeface="Calibri"/>
               </a:defRPr>
             </a:pPr>
-            <a:r>
-              <a:t>  -[:HAS_SKILL]-&gt;(s:Skill) RETURN s.name</a:t>
-            </a:r>
+            <a:endParaRPr lang="en-US" sz="1100" dirty="0"/>
           </a:p>
           <a:p>
             <a:pPr algn="l">
@@ -35242,7 +37369,16 @@
               </a:defRPr>
             </a:pPr>
             <a:r>
-              <a:t>•  </a:t>
+              <a:rPr sz="1100" dirty="0"/>
+              <a:t>  MATCH (</a:t>
+            </a:r>
+            <a:r>
+              <a:rPr sz="1100" dirty="0" err="1"/>
+              <a:t>p:Person</a:t>
+            </a:r>
+            <a:r>
+              <a:rPr sz="1100" dirty="0"/>
+              <a:t> {name: 'Mario Rossi'})</a:t>
             </a:r>
           </a:p>
           <a:p>
@@ -35258,7 +37394,16 @@
               </a:defRPr>
             </a:pPr>
             <a:r>
-              <a:t>•  5. Persone che hanno Python come skill</a:t>
+              <a:rPr sz="1100" dirty="0"/>
+              <a:t>  -[:HAS_SKILL]-&gt;(</a:t>
+            </a:r>
+            <a:r>
+              <a:rPr sz="1100" dirty="0" err="1"/>
+              <a:t>s:Skill</a:t>
+            </a:r>
+            <a:r>
+              <a:rPr sz="1100" dirty="0"/>
+              <a:t>) RETURN s.name</a:t>
             </a:r>
           </a:p>
           <a:p>
@@ -35273,9 +37418,7 @@
                 <a:latin typeface="Calibri"/>
               </a:defRPr>
             </a:pPr>
-            <a:r>
-              <a:t>  MATCH (p:Person)-[:HAS_SKILL]-&gt;(s:Skill {name: 'Python'})</a:t>
-            </a:r>
+            <a:endParaRPr lang="en-US" sz="1100" dirty="0"/>
           </a:p>
           <a:p>
             <a:pPr algn="l">
@@ -35290,6 +37433,112 @@
               </a:defRPr>
             </a:pPr>
             <a:r>
+              <a:rPr sz="1100" dirty="0"/>
+              <a:t>  </a:t>
+            </a:r>
+          </a:p>
+          <a:p>
+            <a:pPr algn="l">
+              <a:spcAft>
+                <a:spcPts val="0"/>
+              </a:spcAft>
+              <a:defRPr sz="1200">
+                <a:solidFill>
+                  <a:srgbClr val="FFFFFF"/>
+                </a:solidFill>
+                <a:latin typeface="Calibri"/>
+              </a:defRPr>
+            </a:pPr>
+            <a:r>
+              <a:rPr sz="1100" b="1" dirty="0"/>
+              <a:t>5. </a:t>
+            </a:r>
+            <a:r>
+              <a:rPr sz="1100" b="1" u="sng" dirty="0" err="1"/>
+              <a:t>Persone</a:t>
+            </a:r>
+            <a:r>
+              <a:rPr sz="1100" b="1" u="sng" dirty="0"/>
+              <a:t> </a:t>
+            </a:r>
+            <a:r>
+              <a:rPr sz="1100" b="1" u="sng" dirty="0" err="1"/>
+              <a:t>che</a:t>
+            </a:r>
+            <a:r>
+              <a:rPr sz="1100" b="1" u="sng" dirty="0"/>
+              <a:t> </a:t>
+            </a:r>
+            <a:r>
+              <a:rPr sz="1100" b="1" u="sng" dirty="0" err="1"/>
+              <a:t>hanno</a:t>
+            </a:r>
+            <a:r>
+              <a:rPr sz="1100" b="1" u="sng" dirty="0"/>
+              <a:t> Python come skill</a:t>
+            </a:r>
+          </a:p>
+          <a:p>
+            <a:pPr algn="l">
+              <a:spcAft>
+                <a:spcPts val="0"/>
+              </a:spcAft>
+              <a:defRPr sz="1200">
+                <a:solidFill>
+                  <a:srgbClr val="FFFFFF"/>
+                </a:solidFill>
+                <a:latin typeface="Calibri"/>
+              </a:defRPr>
+            </a:pPr>
+            <a:endParaRPr lang="en-US" sz="1100" dirty="0"/>
+          </a:p>
+          <a:p>
+            <a:pPr algn="l">
+              <a:spcAft>
+                <a:spcPts val="0"/>
+              </a:spcAft>
+              <a:defRPr sz="1200">
+                <a:solidFill>
+                  <a:srgbClr val="FFFFFF"/>
+                </a:solidFill>
+                <a:latin typeface="Calibri"/>
+              </a:defRPr>
+            </a:pPr>
+            <a:r>
+              <a:rPr sz="1100" dirty="0"/>
+              <a:t>  MATCH (</a:t>
+            </a:r>
+            <a:r>
+              <a:rPr sz="1100" dirty="0" err="1"/>
+              <a:t>p:Person</a:t>
+            </a:r>
+            <a:r>
+              <a:rPr sz="1100" dirty="0"/>
+              <a:t>)-[:HAS_SKILL]-&gt;(</a:t>
+            </a:r>
+            <a:r>
+              <a:rPr sz="1100" dirty="0" err="1"/>
+              <a:t>s:Skill</a:t>
+            </a:r>
+            <a:r>
+              <a:rPr sz="1100" dirty="0"/>
+              <a:t> {name: 'Python'})</a:t>
+            </a:r>
+          </a:p>
+          <a:p>
+            <a:pPr algn="l">
+              <a:spcAft>
+                <a:spcPts val="0"/>
+              </a:spcAft>
+              <a:defRPr sz="1200">
+                <a:solidFill>
+                  <a:srgbClr val="FFFFFF"/>
+                </a:solidFill>
+                <a:latin typeface="Calibri"/>
+              </a:defRPr>
+            </a:pPr>
+            <a:r>
+              <a:rPr sz="1100" dirty="0"/>
               <a:t>  RETURN p.name ORDER BY p.name</a:t>
             </a:r>
           </a:p>
@@ -35304,7 +37553,7 @@
         <p:spPr>
           <a:xfrm>
             <a:off x="5669280" y="1371600"/>
-            <a:ext cx="4846320" cy="4114800"/>
+            <a:ext cx="4846320" cy="2462213"/>
           </a:xfrm>
           <a:prstGeom prst="rect">
             <a:avLst/>
@@ -35326,51 +37575,164 @@
               </a:defRPr>
             </a:pPr>
             <a:r>
-              <a:t>Suggerimenti:</a:t>
-            </a:r>
-            <a:br/>
-            <a:br/>
-            <a:r>
-              <a:t>Usa il notebook per eseguire le</a:t>
-            </a:r>
-            <a:br/>
-            <a:r>
-              <a:t>query con driver.execute_query()</a:t>
-            </a:r>
-            <a:br/>
-            <a:br/>
-            <a:r>
-              <a:t>Oppure apri Neo4j Browser e incolla</a:t>
-            </a:r>
-            <a:br/>
-            <a:r>
-              <a:t>direttamente il Cypher.</a:t>
-            </a:r>
-            <a:br/>
-            <a:br/>
-            <a:r>
-              <a:t>Tutte le proprietà sono in inglese:</a:t>
-            </a:r>
-            <a:br/>
-            <a:r>
-              <a:t>  name, employee_id, location,</a:t>
-            </a:r>
-            <a:br/>
-            <a:r>
+              <a:rPr dirty="0" err="1"/>
+              <a:t>Suggerimenti</a:t>
+            </a:r>
+            <a:r>
+              <a:rPr dirty="0"/>
+              <a:t>:</a:t>
+            </a:r>
+            <a:br>
+              <a:rPr dirty="0"/>
+            </a:br>
+            <a:br>
+              <a:rPr dirty="0"/>
+            </a:br>
+            <a:r>
+              <a:rPr dirty="0"/>
+              <a:t>Usa il notebook per </a:t>
+            </a:r>
+            <a:r>
+              <a:rPr dirty="0" err="1"/>
+              <a:t>eseguire</a:t>
+            </a:r>
+            <a:r>
+              <a:rPr dirty="0"/>
+              <a:t> le</a:t>
+            </a:r>
+            <a:r>
+              <a:rPr lang="en-US" dirty="0"/>
+              <a:t> </a:t>
+            </a:r>
+            <a:r>
+              <a:rPr dirty="0"/>
+              <a:t>query con </a:t>
+            </a:r>
+            <a:r>
+              <a:rPr dirty="0" err="1"/>
+              <a:t>driver.execute_query</a:t>
+            </a:r>
+            <a:r>
+              <a:rPr dirty="0"/>
+              <a:t>()</a:t>
+            </a:r>
+            <a:br>
+              <a:rPr dirty="0"/>
+            </a:br>
+            <a:br>
+              <a:rPr dirty="0"/>
+            </a:br>
+            <a:r>
+              <a:rPr dirty="0" err="1"/>
+              <a:t>Oppure</a:t>
+            </a:r>
+            <a:r>
+              <a:rPr dirty="0"/>
+              <a:t> </a:t>
+            </a:r>
+            <a:r>
+              <a:rPr dirty="0" err="1"/>
+              <a:t>apri</a:t>
+            </a:r>
+            <a:r>
+              <a:rPr dirty="0"/>
+              <a:t> Neo4j Browser e </a:t>
+            </a:r>
+            <a:r>
+              <a:rPr dirty="0" err="1"/>
+              <a:t>incolla</a:t>
+            </a:r>
+            <a:r>
+              <a:rPr lang="en-US" dirty="0"/>
+              <a:t> </a:t>
+            </a:r>
+            <a:r>
+              <a:rPr dirty="0" err="1"/>
+              <a:t>direttamente</a:t>
+            </a:r>
+            <a:r>
+              <a:rPr dirty="0"/>
+              <a:t> il Cypher.</a:t>
+            </a:r>
+            <a:br>
+              <a:rPr dirty="0"/>
+            </a:br>
+            <a:br>
+              <a:rPr dirty="0"/>
+            </a:br>
+            <a:r>
+              <a:rPr dirty="0"/>
+              <a:t>Tutte le </a:t>
+            </a:r>
+            <a:r>
+              <a:rPr dirty="0" err="1"/>
+              <a:t>proprietà</a:t>
+            </a:r>
+            <a:r>
+              <a:rPr dirty="0"/>
+              <a:t> </a:t>
+            </a:r>
+            <a:r>
+              <a:rPr dirty="0" err="1"/>
+              <a:t>sono</a:t>
+            </a:r>
+            <a:r>
+              <a:rPr dirty="0"/>
+              <a:t> in inglese:</a:t>
+            </a:r>
+            <a:br>
+              <a:rPr dirty="0"/>
+            </a:br>
+            <a:r>
+              <a:rPr dirty="0"/>
+              <a:t>  name, </a:t>
+            </a:r>
+            <a:r>
+              <a:rPr dirty="0" err="1"/>
+              <a:t>employee_id</a:t>
+            </a:r>
+            <a:r>
+              <a:rPr dirty="0"/>
+              <a:t>, location,</a:t>
+            </a:r>
+            <a:br>
+              <a:rPr dirty="0"/>
+            </a:br>
+            <a:r>
+              <a:rPr dirty="0"/>
               <a:t>  title, department, gender.</a:t>
             </a:r>
-            <a:br/>
-            <a:br/>
-            <a:r>
+            <a:br>
+              <a:rPr dirty="0"/>
+            </a:br>
+            <a:br>
+              <a:rPr dirty="0"/>
+            </a:br>
+            <a:r>
+              <a:rPr dirty="0"/>
               <a:t>Skill: HAS_SKILL {proficiency}</a:t>
             </a:r>
-            <a:br/>
-            <a:r>
-              <a:t>Progetti: WORKED_ON {role}</a:t>
-            </a:r>
-            <a:br/>
-            <a:r>
-              <a:t>Riporti: REPORTS_TO</a:t>
+            <a:br>
+              <a:rPr dirty="0"/>
+            </a:br>
+            <a:r>
+              <a:rPr dirty="0" err="1"/>
+              <a:t>Progetti</a:t>
+            </a:r>
+            <a:r>
+              <a:rPr dirty="0"/>
+              <a:t>: WORKED_ON {role}</a:t>
+            </a:r>
+            <a:br>
+              <a:rPr dirty="0"/>
+            </a:br>
+            <a:r>
+              <a:rPr dirty="0" err="1"/>
+              <a:t>Riporti</a:t>
+            </a:r>
+            <a:r>
+              <a:rPr dirty="0"/>
+              <a:t>: REPORTS_TO</a:t>
             </a:r>
           </a:p>
         </p:txBody>
@@ -35384,7 +37746,7 @@
 </file>
 
 <file path=ppt/slides/slide25.xml><?xml version="1.0" encoding="utf-8"?>
-<p:sld xmlns:a="http://schemas.openxmlformats.org/drawingml/2006/main" xmlns:p="http://schemas.openxmlformats.org/presentationml/2006/main" xmlns:r="http://schemas.openxmlformats.org/officeDocument/2006/relationships">
+<p:sld xmlns:a="http://schemas.openxmlformats.org/drawingml/2006/main" xmlns:r="http://schemas.openxmlformats.org/officeDocument/2006/relationships" xmlns:p="http://schemas.openxmlformats.org/presentationml/2006/main">
   <p:cSld>
     <p:bg>
       <p:bgPr>
@@ -35400,7 +37762,14 @@
         <p:cNvGrpSpPr/>
         <p:nvPr/>
       </p:nvGrpSpPr>
-      <p:grpSpPr/>
+      <p:grpSpPr>
+        <a:xfrm>
+          <a:off x="0" y="0"/>
+          <a:ext cx="0" cy="0"/>
+          <a:chOff x="0" y="0"/>
+          <a:chExt cx="0" cy="0"/>
+        </a:xfrm>
+      </p:grpSpPr>
       <p:sp>
         <p:nvSpPr>
           <p:cNvPr id="2" name="TextBox 1"/>
@@ -35446,7 +37815,7 @@
         <p:spPr>
           <a:xfrm>
             <a:off x="731520" y="1097280"/>
-            <a:ext cx="5029200" cy="4572000"/>
+            <a:ext cx="5029200" cy="4493538"/>
           </a:xfrm>
           <a:prstGeom prst="rect">
             <a:avLst/>
@@ -35471,7 +37840,20 @@
               </a:defRPr>
             </a:pPr>
             <a:r>
-              <a:t>•  6. Skill più diffuse (top 5)</a:t>
+              <a:rPr b="1" dirty="0"/>
+              <a:t>6. </a:t>
+            </a:r>
+            <a:r>
+              <a:rPr b="1" u="sng" dirty="0"/>
+              <a:t>Skill </a:t>
+            </a:r>
+            <a:r>
+              <a:rPr b="1" u="sng" dirty="0" err="1"/>
+              <a:t>più</a:t>
+            </a:r>
+            <a:r>
+              <a:rPr b="1" u="sng" dirty="0"/>
+              <a:t> diffuse (top 5)</a:t>
             </a:r>
           </a:p>
           <a:p>
@@ -35486,9 +37868,7 @@
                 <a:latin typeface="Calibri"/>
               </a:defRPr>
             </a:pPr>
-            <a:r>
-              <a:t>  MATCH (p:Person)-[:HAS_SKILL]-&gt;(s:Skill)</a:t>
-            </a:r>
+            <a:endParaRPr lang="en-US" dirty="0"/>
           </a:p>
           <a:p>
             <a:pPr algn="l">
@@ -35503,7 +37883,24 @@
               </a:defRPr>
             </a:pPr>
             <a:r>
-              <a:t>  RETURN s.name, count(*) AS persone</a:t>
+              <a:rPr dirty="0"/>
+              <a:t>  MATCH (</a:t>
+            </a:r>
+            <a:r>
+              <a:rPr dirty="0" err="1"/>
+              <a:t>p:Person</a:t>
+            </a:r>
+            <a:r>
+              <a:rPr dirty="0"/>
+              <a:t>)-[:HAS_SKILL]-&gt;(</a:t>
+            </a:r>
+            <a:r>
+              <a:rPr dirty="0" err="1"/>
+              <a:t>s:Skill</a:t>
+            </a:r>
+            <a:r>
+              <a:rPr dirty="0"/>
+              <a:t>)</a:t>
             </a:r>
           </a:p>
           <a:p>
@@ -35519,8 +37916,14 @@
               </a:defRPr>
             </a:pPr>
             <a:r>
-              <a:t>  ORDER BY persone DESC LIMIT 5</a:t>
-            </a:r>
+              <a:rPr dirty="0"/>
+              <a:t>  RETURN s.name, count(*) AS </a:t>
+            </a:r>
+            <a:r>
+              <a:rPr dirty="0" err="1"/>
+              <a:t>persone</a:t>
+            </a:r>
+            <a:endParaRPr dirty="0"/>
           </a:p>
           <a:p>
             <a:pPr algn="l">
@@ -35535,7 +37938,16 @@
               </a:defRPr>
             </a:pPr>
             <a:r>
-              <a:t>•  </a:t>
+              <a:rPr dirty="0"/>
+              <a:t>  ORDER BY </a:t>
+            </a:r>
+            <a:r>
+              <a:rPr dirty="0" err="1"/>
+              <a:t>persone</a:t>
+            </a:r>
+            <a:r>
+              <a:rPr dirty="0"/>
+              <a:t> DESC LIMIT 5</a:t>
             </a:r>
           </a:p>
           <a:p>
@@ -35550,9 +37962,7 @@
                 <a:latin typeface="Calibri"/>
               </a:defRPr>
             </a:pPr>
-            <a:r>
-              <a:t>•  7. Media proficiency per skill</a:t>
-            </a:r>
+            <a:endParaRPr lang="en-US" dirty="0"/>
           </a:p>
           <a:p>
             <a:pPr algn="l">
@@ -35566,9 +37976,7 @@
                 <a:latin typeface="Calibri"/>
               </a:defRPr>
             </a:pPr>
-            <a:r>
-              <a:t>  MATCH (p:Person)-[h:HAS_SKILL]-&gt;(s:Skill)</a:t>
-            </a:r>
+            <a:endParaRPr dirty="0"/>
           </a:p>
           <a:p>
             <a:pPr algn="l">
@@ -35583,7 +37991,12 @@
               </a:defRPr>
             </a:pPr>
             <a:r>
-              <a:t>  RETURN s.name, avg(h.proficiency), count(p)</a:t>
+              <a:rPr b="1" dirty="0"/>
+              <a:t>7. </a:t>
+            </a:r>
+            <a:r>
+              <a:rPr b="1" u="sng" dirty="0"/>
+              <a:t>Media proficiency per skill</a:t>
             </a:r>
           </a:p>
           <a:p>
@@ -35598,9 +38011,7 @@
                 <a:latin typeface="Calibri"/>
               </a:defRPr>
             </a:pPr>
-            <a:r>
-              <a:t>  ORDER BY avg(h.proficiency) DESC LIMIT 10</a:t>
-            </a:r>
+            <a:endParaRPr lang="en-US" dirty="0"/>
           </a:p>
           <a:p>
             <a:pPr algn="l">
@@ -35615,7 +38026,32 @@
               </a:defRPr>
             </a:pPr>
             <a:r>
-              <a:t>•  </a:t>
+              <a:rPr dirty="0"/>
+              <a:t>  MATCH (</a:t>
+            </a:r>
+            <a:r>
+              <a:rPr dirty="0" err="1"/>
+              <a:t>p:Person</a:t>
+            </a:r>
+            <a:r>
+              <a:rPr dirty="0"/>
+              <a:t>)-[</a:t>
+            </a:r>
+            <a:r>
+              <a:rPr dirty="0" err="1"/>
+              <a:t>h:HAS_SKILL</a:t>
+            </a:r>
+            <a:r>
+              <a:rPr dirty="0"/>
+              <a:t>]-&gt;(</a:t>
+            </a:r>
+            <a:r>
+              <a:rPr dirty="0" err="1"/>
+              <a:t>s:Skill</a:t>
+            </a:r>
+            <a:r>
+              <a:rPr dirty="0"/>
+              <a:t>)</a:t>
             </a:r>
           </a:p>
           <a:p>
@@ -35631,7 +38067,16 @@
               </a:defRPr>
             </a:pPr>
             <a:r>
-              <a:t>•  8. Persone che condividono un progetto</a:t>
+              <a:rPr dirty="0"/>
+              <a:t>  RETURN s.name, avg(</a:t>
+            </a:r>
+            <a:r>
+              <a:rPr dirty="0" err="1"/>
+              <a:t>h.proficiency</a:t>
+            </a:r>
+            <a:r>
+              <a:rPr dirty="0"/>
+              <a:t>), count(p)</a:t>
             </a:r>
           </a:p>
           <a:p>
@@ -35647,7 +38092,16 @@
               </a:defRPr>
             </a:pPr>
             <a:r>
-              <a:t>  MATCH (p1:Person)-[:WORKED_ON]-&gt;(proj:Project)</a:t>
+              <a:rPr dirty="0"/>
+              <a:t>  ORDER BY avg(</a:t>
+            </a:r>
+            <a:r>
+              <a:rPr dirty="0" err="1"/>
+              <a:t>h.proficiency</a:t>
+            </a:r>
+            <a:r>
+              <a:rPr dirty="0"/>
+              <a:t>) DESC LIMIT 10</a:t>
             </a:r>
           </a:p>
           <a:p>
@@ -35663,6 +38117,109 @@
               </a:defRPr>
             </a:pPr>
             <a:r>
+              <a:rPr dirty="0"/>
+              <a:t>  </a:t>
+            </a:r>
+          </a:p>
+          <a:p>
+            <a:pPr algn="l">
+              <a:spcAft>
+                <a:spcPts val="0"/>
+              </a:spcAft>
+              <a:defRPr sz="1100">
+                <a:solidFill>
+                  <a:srgbClr val="FFFFFF"/>
+                </a:solidFill>
+                <a:latin typeface="Calibri"/>
+              </a:defRPr>
+            </a:pPr>
+            <a:r>
+              <a:rPr b="1" dirty="0"/>
+              <a:t>8. </a:t>
+            </a:r>
+            <a:r>
+              <a:rPr b="1" u="sng" dirty="0" err="1"/>
+              <a:t>Persone</a:t>
+            </a:r>
+            <a:r>
+              <a:rPr b="1" u="sng" dirty="0"/>
+              <a:t> </a:t>
+            </a:r>
+            <a:r>
+              <a:rPr b="1" u="sng" dirty="0" err="1"/>
+              <a:t>che</a:t>
+            </a:r>
+            <a:r>
+              <a:rPr b="1" u="sng" dirty="0"/>
+              <a:t> </a:t>
+            </a:r>
+            <a:r>
+              <a:rPr b="1" u="sng" dirty="0" err="1"/>
+              <a:t>condividono</a:t>
+            </a:r>
+            <a:r>
+              <a:rPr b="1" u="sng" dirty="0"/>
+              <a:t> un </a:t>
+            </a:r>
+            <a:r>
+              <a:rPr b="1" u="sng" dirty="0" err="1"/>
+              <a:t>progetto</a:t>
+            </a:r>
+            <a:endParaRPr b="1" u="sng" dirty="0"/>
+          </a:p>
+          <a:p>
+            <a:pPr algn="l">
+              <a:spcAft>
+                <a:spcPts val="0"/>
+              </a:spcAft>
+              <a:defRPr sz="1100">
+                <a:solidFill>
+                  <a:srgbClr val="FFFFFF"/>
+                </a:solidFill>
+                <a:latin typeface="Calibri"/>
+              </a:defRPr>
+            </a:pPr>
+            <a:endParaRPr lang="en-US" dirty="0"/>
+          </a:p>
+          <a:p>
+            <a:pPr algn="l">
+              <a:spcAft>
+                <a:spcPts val="0"/>
+              </a:spcAft>
+              <a:defRPr sz="1100">
+                <a:solidFill>
+                  <a:srgbClr val="FFFFFF"/>
+                </a:solidFill>
+                <a:latin typeface="Calibri"/>
+              </a:defRPr>
+            </a:pPr>
+            <a:r>
+              <a:rPr dirty="0"/>
+              <a:t>  MATCH (p1:Person)-[:WORKED_ON]-&gt;(</a:t>
+            </a:r>
+            <a:r>
+              <a:rPr dirty="0" err="1"/>
+              <a:t>proj:Project</a:t>
+            </a:r>
+            <a:r>
+              <a:rPr dirty="0"/>
+              <a:t>)</a:t>
+            </a:r>
+          </a:p>
+          <a:p>
+            <a:pPr algn="l">
+              <a:spcAft>
+                <a:spcPts val="0"/>
+              </a:spcAft>
+              <a:defRPr sz="1100">
+                <a:solidFill>
+                  <a:srgbClr val="FFFFFF"/>
+                </a:solidFill>
+                <a:latin typeface="Calibri"/>
+              </a:defRPr>
+            </a:pPr>
+            <a:r>
+              <a:rPr dirty="0"/>
               <a:t>    &lt;-[:WORKED_ON]-(p2:Person)</a:t>
             </a:r>
           </a:p>
@@ -35679,6 +38236,7 @@
               </a:defRPr>
             </a:pPr>
             <a:r>
+              <a:rPr dirty="0"/>
               <a:t>  RETURN p1.name, p2.name, proj.name LIMIT 10</a:t>
             </a:r>
           </a:p>
@@ -35694,9 +38252,7 @@
                 <a:latin typeface="Calibri"/>
               </a:defRPr>
             </a:pPr>
-            <a:r>
-              <a:t>•  </a:t>
-            </a:r>
+            <a:endParaRPr lang="en-US" dirty="0"/>
           </a:p>
           <a:p>
             <a:pPr algn="l">
@@ -35711,7 +38267,8 @@
               </a:defRPr>
             </a:pPr>
             <a:r>
-              <a:t>•  9. Crea un nuovo nodo Person e dagli una skill</a:t>
+              <a:rPr dirty="0"/>
+              <a:t>  </a:t>
             </a:r>
           </a:p>
           <a:p>
@@ -35727,7 +38284,40 @@
               </a:defRPr>
             </a:pPr>
             <a:r>
-              <a:t>  MERGE (p:Person {employee_id: 999})</a:t>
+              <a:rPr lang="en-US" b="1" dirty="0"/>
+              <a:t>9</a:t>
+            </a:r>
+            <a:r>
+              <a:rPr b="1" dirty="0"/>
+              <a:t>. </a:t>
+            </a:r>
+            <a:r>
+              <a:rPr b="1" u="sng" dirty="0"/>
+              <a:t>Crea un nuovo </a:t>
+            </a:r>
+            <a:r>
+              <a:rPr b="1" u="sng" dirty="0" err="1"/>
+              <a:t>nodo</a:t>
+            </a:r>
+            <a:r>
+              <a:rPr b="1" u="sng" dirty="0"/>
+              <a:t> Person e </a:t>
+            </a:r>
+            <a:r>
+              <a:rPr b="1" u="sng" dirty="0" err="1"/>
+              <a:t>dagli</a:t>
+            </a:r>
+            <a:r>
+              <a:rPr b="1" u="sng" dirty="0"/>
+              <a:t> </a:t>
+            </a:r>
+            <a:r>
+              <a:rPr b="1" u="sng" dirty="0" err="1"/>
+              <a:t>una</a:t>
+            </a:r>
+            <a:r>
+              <a:rPr b="1" u="sng" dirty="0"/>
+              <a:t> skill</a:t>
             </a:r>
           </a:p>
           <a:p>
@@ -35742,7 +38332,55 @@
                 <a:latin typeface="Calibri"/>
               </a:defRPr>
             </a:pPr>
-            <a:r>
+            <a:endParaRPr lang="en-US" dirty="0"/>
+          </a:p>
+          <a:p>
+            <a:pPr algn="l">
+              <a:spcAft>
+                <a:spcPts val="0"/>
+              </a:spcAft>
+              <a:defRPr sz="1100">
+                <a:solidFill>
+                  <a:srgbClr val="FFFFFF"/>
+                </a:solidFill>
+                <a:latin typeface="Calibri"/>
+              </a:defRPr>
+            </a:pPr>
+            <a:r>
+              <a:rPr dirty="0"/>
+              <a:t>  MERGE (</a:t>
+            </a:r>
+            <a:r>
+              <a:rPr dirty="0" err="1"/>
+              <a:t>p:Person</a:t>
+            </a:r>
+            <a:r>
+              <a:rPr dirty="0"/>
+              <a:t> {</a:t>
+            </a:r>
+            <a:r>
+              <a:rPr dirty="0" err="1"/>
+              <a:t>employee_id</a:t>
+            </a:r>
+            <a:r>
+              <a:rPr dirty="0"/>
+              <a:t>: 999})</a:t>
+            </a:r>
+          </a:p>
+          <a:p>
+            <a:pPr algn="l">
+              <a:spcAft>
+                <a:spcPts val="0"/>
+              </a:spcAft>
+              <a:defRPr sz="1100">
+                <a:solidFill>
+                  <a:srgbClr val="FFFFFF"/>
+                </a:solidFill>
+                <a:latin typeface="Calibri"/>
+              </a:defRPr>
+            </a:pPr>
+            <a:r>
+              <a:rPr dirty="0"/>
               <a:t>  SET p.name = "Test"</a:t>
             </a:r>
           </a:p>
@@ -35759,7 +38397,16 @@
               </a:defRPr>
             </a:pPr>
             <a:r>
-              <a:t>  MATCH (s:Skill {name: 'Python'})</a:t>
+              <a:rPr dirty="0"/>
+              <a:t>  MATCH (</a:t>
+            </a:r>
+            <a:r>
+              <a:rPr dirty="0" err="1"/>
+              <a:t>s:Skill</a:t>
+            </a:r>
+            <a:r>
+              <a:rPr dirty="0"/>
+              <a:t> {name: 'Python'})</a:t>
             </a:r>
           </a:p>
           <a:p>
@@ -35775,6 +38422,7 @@
               </a:defRPr>
             </a:pPr>
             <a:r>
+              <a:rPr dirty="0"/>
               <a:t>  MERGE (p)-[:HAS_SKILL {proficiency: 3}]-&gt;(s)</a:t>
             </a:r>
           </a:p>
@@ -35789,7 +38437,7 @@
         <p:spPr>
           <a:xfrm>
             <a:off x="5669280" y="1097280"/>
-            <a:ext cx="4846320" cy="4572000"/>
+            <a:ext cx="4846320" cy="2677656"/>
           </a:xfrm>
           <a:prstGeom prst="rect">
             <a:avLst/>
@@ -35811,61 +38459,279 @@
               </a:defRPr>
             </a:pPr>
             <a:r>
-              <a:t>Obiettivi degli esercizi:</a:t>
-            </a:r>
-            <a:br/>
-            <a:br/>
-            <a:r>
-              <a:t>1. Verificare la connessione al DB</a:t>
-            </a:r>
-            <a:br/>
-            <a:r>
-              <a:t>2. Filtrare con WHERE =, IN</a:t>
-            </a:r>
-            <a:br/>
-            <a:r>
-              <a:t>3. Raggruppare con count()</a:t>
-            </a:r>
-            <a:br/>
-            <a:r>
-              <a:t>4. Navigare relazioni HAS_SKILL</a:t>
-            </a:r>
-            <a:br/>
-            <a:r>
-              <a:t>5. Filtrare su nodi specifici</a:t>
-            </a:r>
-            <a:br/>
-            <a:r>
-              <a:t>6. Aggregare con ORDER BY + LIMIT</a:t>
-            </a:r>
-            <a:br/>
-            <a:r>
-              <a:t>7. Media su proprietà relazione</a:t>
-            </a:r>
-            <a:br/>
-            <a:r>
-              <a:t>8. Pattern multi-hop con progetto</a:t>
-            </a:r>
-            <a:br/>
-            <a:r>
-              <a:t>   condiviso</a:t>
-            </a:r>
-            <a:br/>
-            <a:r>
-              <a:t>9. Scrivere dati con MERGE</a:t>
-            </a:r>
-            <a:br/>
-            <a:br/>
-            <a:r>
-              <a:t>Tempo stimato: 20-30 minuti.</a:t>
-            </a:r>
-            <a:br/>
-            <a:r>
-              <a:t>Le soluzioni complete sono nel</a:t>
-            </a:r>
-            <a:br/>
-            <a:r>
-              <a:t>notebook della Sessione 1.</a:t>
+              <a:rPr dirty="0" err="1"/>
+              <a:t>Obiettivi</a:t>
+            </a:r>
+            <a:r>
+              <a:rPr dirty="0"/>
+              <a:t> degli </a:t>
+            </a:r>
+            <a:r>
+              <a:rPr dirty="0" err="1"/>
+              <a:t>esercizi</a:t>
+            </a:r>
+            <a:r>
+              <a:rPr dirty="0"/>
+              <a:t>:</a:t>
+            </a:r>
+            <a:br>
+              <a:rPr dirty="0"/>
+            </a:br>
+            <a:br>
+              <a:rPr dirty="0"/>
+            </a:br>
+            <a:r>
+              <a:rPr dirty="0"/>
+              <a:t>1. </a:t>
+            </a:r>
+            <a:r>
+              <a:rPr dirty="0" err="1"/>
+              <a:t>Verificare</a:t>
+            </a:r>
+            <a:r>
+              <a:rPr dirty="0"/>
+              <a:t> la </a:t>
+            </a:r>
+            <a:r>
+              <a:rPr dirty="0" err="1"/>
+              <a:t>connessione</a:t>
+            </a:r>
+            <a:r>
+              <a:rPr dirty="0"/>
+              <a:t> al DB</a:t>
+            </a:r>
+            <a:br>
+              <a:rPr dirty="0"/>
+            </a:br>
+            <a:r>
+              <a:rPr dirty="0"/>
+              <a:t>2. </a:t>
+            </a:r>
+            <a:r>
+              <a:rPr dirty="0" err="1"/>
+              <a:t>Filtrare</a:t>
+            </a:r>
+            <a:r>
+              <a:rPr dirty="0"/>
+              <a:t> con WHERE =, IN</a:t>
+            </a:r>
+            <a:br>
+              <a:rPr dirty="0"/>
+            </a:br>
+            <a:r>
+              <a:rPr dirty="0"/>
+              <a:t>3. </a:t>
+            </a:r>
+            <a:r>
+              <a:rPr dirty="0" err="1"/>
+              <a:t>Raggruppare</a:t>
+            </a:r>
+            <a:r>
+              <a:rPr dirty="0"/>
+              <a:t> con count()</a:t>
+            </a:r>
+            <a:br>
+              <a:rPr dirty="0"/>
+            </a:br>
+            <a:r>
+              <a:rPr dirty="0"/>
+              <a:t>4. </a:t>
+            </a:r>
+            <a:r>
+              <a:rPr dirty="0" err="1"/>
+              <a:t>Navigare</a:t>
+            </a:r>
+            <a:r>
+              <a:rPr dirty="0"/>
+              <a:t> </a:t>
+            </a:r>
+            <a:r>
+              <a:rPr dirty="0" err="1"/>
+              <a:t>relazioni</a:t>
+            </a:r>
+            <a:r>
+              <a:rPr dirty="0"/>
+              <a:t> HAS_SKILL</a:t>
+            </a:r>
+            <a:br>
+              <a:rPr dirty="0"/>
+            </a:br>
+            <a:r>
+              <a:rPr dirty="0"/>
+              <a:t>5. </a:t>
+            </a:r>
+            <a:r>
+              <a:rPr dirty="0" err="1"/>
+              <a:t>Filtrare</a:t>
+            </a:r>
+            <a:r>
+              <a:rPr dirty="0"/>
+              <a:t> </a:t>
+            </a:r>
+            <a:r>
+              <a:rPr dirty="0" err="1"/>
+              <a:t>su</a:t>
+            </a:r>
+            <a:r>
+              <a:rPr dirty="0"/>
+              <a:t> nodi </a:t>
+            </a:r>
+            <a:r>
+              <a:rPr dirty="0" err="1"/>
+              <a:t>specifici</a:t>
+            </a:r>
+            <a:br>
+              <a:rPr dirty="0"/>
+            </a:br>
+            <a:r>
+              <a:rPr dirty="0"/>
+              <a:t>6. </a:t>
+            </a:r>
+            <a:r>
+              <a:rPr dirty="0" err="1"/>
+              <a:t>Aggregare</a:t>
+            </a:r>
+            <a:r>
+              <a:rPr dirty="0"/>
+              <a:t> con ORDER BY + LIMIT</a:t>
+            </a:r>
+            <a:br>
+              <a:rPr dirty="0"/>
+            </a:br>
+            <a:r>
+              <a:rPr dirty="0"/>
+              <a:t>7. Media </a:t>
+            </a:r>
+            <a:r>
+              <a:rPr dirty="0" err="1"/>
+              <a:t>su</a:t>
+            </a:r>
+            <a:r>
+              <a:rPr dirty="0"/>
+              <a:t> </a:t>
+            </a:r>
+            <a:r>
+              <a:rPr dirty="0" err="1"/>
+              <a:t>proprietà</a:t>
+            </a:r>
+            <a:r>
+              <a:rPr dirty="0"/>
+              <a:t> </a:t>
+            </a:r>
+            <a:r>
+              <a:rPr dirty="0" err="1"/>
+              <a:t>relazione</a:t>
+            </a:r>
+            <a:br>
+              <a:rPr dirty="0"/>
+            </a:br>
+            <a:r>
+              <a:rPr dirty="0"/>
+              <a:t>8. Pattern multi-hop con </a:t>
+            </a:r>
+            <a:r>
+              <a:rPr dirty="0" err="1"/>
+              <a:t>progetto</a:t>
+            </a:r>
+            <a:r>
+              <a:rPr dirty="0"/>
+              <a:t> </a:t>
+            </a:r>
+            <a:r>
+              <a:rPr dirty="0" err="1"/>
+              <a:t>condiviso</a:t>
+            </a:r>
+            <a:br>
+              <a:rPr dirty="0"/>
+            </a:br>
+            <a:r>
+              <a:rPr dirty="0"/>
+              <a:t>9. </a:t>
+            </a:r>
+            <a:r>
+              <a:rPr dirty="0" err="1"/>
+              <a:t>Scrivere</a:t>
+            </a:r>
+            <a:r>
+              <a:rPr dirty="0"/>
+              <a:t> </a:t>
+            </a:r>
+            <a:r>
+              <a:rPr dirty="0" err="1"/>
+              <a:t>dati</a:t>
+            </a:r>
+            <a:r>
+              <a:rPr dirty="0"/>
+              <a:t> con MERGE</a:t>
+            </a:r>
+            <a:br>
+              <a:rPr dirty="0"/>
+            </a:br>
+            <a:br>
+              <a:rPr dirty="0"/>
+            </a:br>
+            <a:r>
+              <a:rPr dirty="0"/>
+              <a:t>Tempo </a:t>
+            </a:r>
+            <a:r>
+              <a:rPr dirty="0" err="1"/>
+              <a:t>stimato</a:t>
+            </a:r>
+            <a:r>
+              <a:rPr dirty="0"/>
+              <a:t>: 20-30 </a:t>
+            </a:r>
+            <a:r>
+              <a:rPr dirty="0" err="1"/>
+              <a:t>minuti</a:t>
+            </a:r>
+            <a:r>
+              <a:rPr dirty="0"/>
+              <a:t>.</a:t>
+            </a:r>
+            <a:br>
+              <a:rPr dirty="0"/>
+            </a:br>
+            <a:r>
+              <a:rPr dirty="0"/>
+              <a:t>Le </a:t>
+            </a:r>
+            <a:r>
+              <a:rPr dirty="0" err="1"/>
+              <a:t>soluzioni</a:t>
+            </a:r>
+            <a:r>
+              <a:rPr dirty="0"/>
+              <a:t> complete </a:t>
+            </a:r>
+            <a:r>
+              <a:rPr dirty="0" err="1"/>
+              <a:t>sono</a:t>
+            </a:r>
+            <a:r>
+              <a:rPr dirty="0"/>
+              <a:t> </a:t>
+            </a:r>
+            <a:r>
+              <a:rPr dirty="0" err="1"/>
+              <a:t>nel</a:t>
+            </a:r>
+            <a:r>
+              <a:rPr lang="en-US" dirty="0"/>
+              <a:t> </a:t>
+            </a:r>
+            <a:r>
+              <a:rPr dirty="0"/>
+              <a:t>notebook della </a:t>
+            </a:r>
+            <a:r>
+              <a:rPr dirty="0" err="1"/>
+              <a:t>Sessione</a:t>
+            </a:r>
+            <a:r>
+              <a:rPr dirty="0"/>
+              <a:t> 1.</a:t>
             </a:r>
           </a:p>
         </p:txBody>
@@ -35879,7 +38745,7 @@
 </file>
 
 <file path=ppt/slides/slide26.xml><?xml version="1.0" encoding="utf-8"?>
-<p:sld xmlns:a="http://schemas.openxmlformats.org/drawingml/2006/main" xmlns:p="http://schemas.openxmlformats.org/presentationml/2006/main" xmlns:r="http://schemas.openxmlformats.org/officeDocument/2006/relationships">
+<p:sld xmlns:a="http://schemas.openxmlformats.org/drawingml/2006/main" xmlns:r="http://schemas.openxmlformats.org/officeDocument/2006/relationships" xmlns:p="http://schemas.openxmlformats.org/presentationml/2006/main">
   <p:cSld>
     <p:bg>
       <p:bgPr>
@@ -35895,7 +38761,14 @@
         <p:cNvGrpSpPr/>
         <p:nvPr/>
       </p:nvGrpSpPr>
-      <p:grpSpPr/>
+      <p:grpSpPr>
+        <a:xfrm>
+          <a:off x="0" y="0"/>
+          <a:ext cx="0" cy="0"/>
+          <a:chOff x="0" y="0"/>
+          <a:chExt cx="0" cy="0"/>
+        </a:xfrm>
+      </p:grpSpPr>
       <p:sp>
         <p:nvSpPr>
           <p:cNvPr id="2" name="TextBox 1"/>
@@ -35966,7 +38839,40 @@
               </a:defRPr>
             </a:pPr>
             <a:r>
-              <a:t>•  DB a grafo eccellono con DATI CONNESSI — nessun JOIN costoso, traversal O(1) per hop</a:t>
+              <a:rPr dirty="0"/>
+              <a:t>•  DB a </a:t>
+            </a:r>
+            <a:r>
+              <a:rPr dirty="0" err="1"/>
+              <a:t>grafo</a:t>
+            </a:r>
+            <a:r>
+              <a:rPr dirty="0"/>
+              <a:t> </a:t>
+            </a:r>
+            <a:r>
+              <a:rPr dirty="0" err="1"/>
+              <a:t>eccellono</a:t>
+            </a:r>
+            <a:r>
+              <a:rPr dirty="0"/>
+              <a:t> con DATI CONNESSI — </a:t>
+            </a:r>
+            <a:r>
+              <a:rPr dirty="0" err="1"/>
+              <a:t>nessun</a:t>
+            </a:r>
+            <a:r>
+              <a:rPr dirty="0"/>
+              <a:t> JOIN </a:t>
+            </a:r>
+            <a:r>
+              <a:rPr dirty="0" err="1"/>
+              <a:t>costoso</a:t>
+            </a:r>
+            <a:r>
+              <a:rPr dirty="0"/>
+              <a:t>, traversal O(1) per hop</a:t>
             </a:r>
           </a:p>
           <a:p>
@@ -35982,8 +38888,38 @@
               </a:defRPr>
             </a:pPr>
             <a:r>
-              <a:t>•  Neo4j è un Property Graph: nodi + labels + relazioni + proprietà = tutto è dati</a:t>
-            </a:r>
+              <a:rPr dirty="0"/>
+              <a:t>•  Neo4j è un Property Graph: nodi + labels + </a:t>
+            </a:r>
+            <a:r>
+              <a:rPr dirty="0" err="1"/>
+              <a:t>relazioni</a:t>
+            </a:r>
+            <a:r>
+              <a:rPr dirty="0"/>
+              <a:t> + </a:t>
+            </a:r>
+            <a:r>
+              <a:rPr dirty="0" err="1"/>
+              <a:t>proprietà</a:t>
+            </a:r>
+            <a:r>
+              <a:rPr dirty="0"/>
+              <a:t> = </a:t>
+            </a:r>
+            <a:r>
+              <a:rPr dirty="0" err="1"/>
+              <a:t>tutto</a:t>
+            </a:r>
+            <a:r>
+              <a:rPr dirty="0"/>
+              <a:t> è </a:t>
+            </a:r>
+            <a:r>
+              <a:rPr dirty="0" err="1"/>
+              <a:t>dati</a:t>
+            </a:r>
+            <a:endParaRPr dirty="0"/>
           </a:p>
           <a:p>
             <a:pPr algn="l">
@@ -35998,8 +38934,62 @@
               </a:defRPr>
             </a:pPr>
             <a:r>
-              <a:t>•  Le relazioni sono cittadini di prima classe — memorizzate fisicamente, non calcolate</a:t>
-            </a:r>
+              <a:rPr dirty="0"/>
+              <a:t>•  Le </a:t>
+            </a:r>
+            <a:r>
+              <a:rPr dirty="0" err="1"/>
+              <a:t>relazioni</a:t>
+            </a:r>
+            <a:r>
+              <a:rPr dirty="0"/>
+              <a:t> </a:t>
+            </a:r>
+            <a:r>
+              <a:rPr dirty="0" err="1"/>
+              <a:t>sono</a:t>
+            </a:r>
+            <a:r>
+              <a:rPr dirty="0"/>
+              <a:t> </a:t>
+            </a:r>
+            <a:r>
+              <a:rPr dirty="0" err="1"/>
+              <a:t>cittadini</a:t>
+            </a:r>
+            <a:r>
+              <a:rPr dirty="0"/>
+              <a:t> di prima </a:t>
+            </a:r>
+            <a:r>
+              <a:rPr dirty="0" err="1"/>
+              <a:t>classe</a:t>
+            </a:r>
+            <a:r>
+              <a:rPr dirty="0"/>
+              <a:t> — </a:t>
+            </a:r>
+            <a:r>
+              <a:rPr dirty="0" err="1"/>
+              <a:t>memorizzate</a:t>
+            </a:r>
+            <a:r>
+              <a:rPr dirty="0"/>
+              <a:t> </a:t>
+            </a:r>
+            <a:r>
+              <a:rPr dirty="0" err="1"/>
+              <a:t>fisicamente</a:t>
+            </a:r>
+            <a:r>
+              <a:rPr dirty="0"/>
+              <a:t>, non </a:t>
+            </a:r>
+            <a:r>
+              <a:rPr dirty="0" err="1"/>
+              <a:t>calcolate</a:t>
+            </a:r>
+            <a:endParaRPr dirty="0"/>
           </a:p>
           <a:p>
             <a:pPr algn="l">
@@ -36014,7 +39004,24 @@
               </a:defRPr>
             </a:pPr>
             <a:r>
-              <a:t>•  Cypher è dichiarativo: descrivi il PATTERN, non il PERCORSO (MATCH (a)-[:R]-&gt;(b))</a:t>
+              <a:rPr dirty="0"/>
+              <a:t>•  Cypher è </a:t>
+            </a:r>
+            <a:r>
+              <a:rPr dirty="0" err="1"/>
+              <a:t>dichiarativo</a:t>
+            </a:r>
+            <a:r>
+              <a:rPr dirty="0"/>
+              <a:t>: </a:t>
+            </a:r>
+            <a:r>
+              <a:rPr dirty="0" err="1"/>
+              <a:t>descrivi</a:t>
+            </a:r>
+            <a:r>
+              <a:rPr dirty="0"/>
+              <a:t> il PATTERN, non il PERCORSO (MATCH (a)-[:R]-&gt;(b))</a:t>
             </a:r>
           </a:p>
           <a:p>
@@ -36030,8 +39037,38 @@
               </a:defRPr>
             </a:pPr>
             <a:r>
-              <a:t>•  MERGE è idempotente — preferiscilo a CREATE per caricamenti ripetuti</a:t>
-            </a:r>
+              <a:rPr dirty="0"/>
+              <a:t>•  MERGE è </a:t>
+            </a:r>
+            <a:r>
+              <a:rPr dirty="0" err="1"/>
+              <a:t>idempotente</a:t>
+            </a:r>
+            <a:r>
+              <a:rPr dirty="0"/>
+              <a:t> — </a:t>
+            </a:r>
+            <a:r>
+              <a:rPr dirty="0" err="1"/>
+              <a:t>preferiscilo</a:t>
+            </a:r>
+            <a:r>
+              <a:rPr dirty="0"/>
+              <a:t> a CREATE per </a:t>
+            </a:r>
+            <a:r>
+              <a:rPr dirty="0" err="1"/>
+              <a:t>caricamenti</a:t>
+            </a:r>
+            <a:r>
+              <a:rPr dirty="0"/>
+              <a:t> </a:t>
+            </a:r>
+            <a:r>
+              <a:rPr dirty="0" err="1"/>
+              <a:t>ripetuti</a:t>
+            </a:r>
+            <a:endParaRPr dirty="0"/>
           </a:p>
           <a:p>
             <a:pPr algn="l">
@@ -36046,8 +39083,38 @@
               </a:defRPr>
             </a:pPr>
             <a:r>
-              <a:t>•  Constraint UNIQUE = indice automatico + protezione da duplicati</a:t>
-            </a:r>
+              <a:rPr dirty="0"/>
+              <a:t>•  Constraint UNIQUE = </a:t>
+            </a:r>
+            <a:r>
+              <a:rPr dirty="0" err="1"/>
+              <a:t>indice</a:t>
+            </a:r>
+            <a:r>
+              <a:rPr dirty="0"/>
+              <a:t> </a:t>
+            </a:r>
+            <a:r>
+              <a:rPr dirty="0" err="1"/>
+              <a:t>automatico</a:t>
+            </a:r>
+            <a:r>
+              <a:rPr dirty="0"/>
+              <a:t> + </a:t>
+            </a:r>
+            <a:r>
+              <a:rPr dirty="0" err="1"/>
+              <a:t>protezione</a:t>
+            </a:r>
+            <a:r>
+              <a:rPr dirty="0"/>
+              <a:t> da </a:t>
+            </a:r>
+            <a:r>
+              <a:rPr dirty="0" err="1"/>
+              <a:t>duplicati</a:t>
+            </a:r>
+            <a:endParaRPr dirty="0"/>
           </a:p>
           <a:p>
             <a:pPr algn="l">
@@ -36062,7 +39129,16 @@
               </a:defRPr>
             </a:pPr>
             <a:r>
-              <a:t>•  UNWIND batching = 300× più veloce del row-by-row (1.4s vs 440s)</a:t>
+              <a:rPr dirty="0"/>
+              <a:t>•  UNWIND batching = 300× </a:t>
+            </a:r>
+            <a:r>
+              <a:rPr dirty="0" err="1"/>
+              <a:t>più</a:t>
+            </a:r>
+            <a:r>
+              <a:rPr dirty="0"/>
+              <a:t> veloce del row-by-row (1.4s vs 440s)</a:t>
             </a:r>
           </a:p>
           <a:p>
@@ -36078,7 +39154,40 @@
               </a:defRPr>
             </a:pPr>
             <a:r>
-              <a:t>•  Neo4j Browser: esplorazione rapida, visualizzazione grafica, :play tutorial</a:t>
+              <a:rPr dirty="0"/>
+              <a:t>•  Neo4j Browser: </a:t>
+            </a:r>
+            <a:r>
+              <a:rPr dirty="0" err="1"/>
+              <a:t>esplorazione</a:t>
+            </a:r>
+            <a:r>
+              <a:rPr dirty="0"/>
+              <a:t> </a:t>
+            </a:r>
+            <a:r>
+              <a:rPr dirty="0" err="1"/>
+              <a:t>rapida</a:t>
+            </a:r>
+            <a:r>
+              <a:rPr dirty="0"/>
+              <a:t>, </a:t>
+            </a:r>
+            <a:r>
+              <a:rPr dirty="0" err="1"/>
+              <a:t>visualizzazione</a:t>
+            </a:r>
+            <a:r>
+              <a:rPr dirty="0"/>
+              <a:t> </a:t>
+            </a:r>
+            <a:r>
+              <a:rPr dirty="0" err="1"/>
+              <a:t>grafica</a:t>
+            </a:r>
+            <a:r>
+              <a:rPr dirty="0"/>
+              <a:t>, :play tutorial</a:t>
             </a:r>
           </a:p>
           <a:p>
@@ -36094,7 +39203,56 @@
               </a:defRPr>
             </a:pPr>
             <a:r>
-              <a:t>•  Il progetto Org Graph ci accompagnerà per tutto il corso — 238 persone, 93 progetti, 55 skill</a:t>
+              <a:rPr dirty="0"/>
+              <a:t>•  Il </a:t>
+            </a:r>
+            <a:r>
+              <a:rPr dirty="0" err="1"/>
+              <a:t>progetto</a:t>
+            </a:r>
+            <a:r>
+              <a:rPr dirty="0"/>
+              <a:t> Org Graph ci </a:t>
+            </a:r>
+            <a:r>
+              <a:rPr dirty="0" err="1"/>
+              <a:t>accompagnerà</a:t>
+            </a:r>
+            <a:r>
+              <a:rPr dirty="0"/>
+              <a:t> per </a:t>
+            </a:r>
+            <a:r>
+              <a:rPr dirty="0" err="1"/>
+              <a:t>tutto</a:t>
+            </a:r>
+            <a:r>
+              <a:rPr dirty="0"/>
+              <a:t> il </a:t>
+            </a:r>
+            <a:r>
+              <a:rPr dirty="0" err="1"/>
+              <a:t>corso</a:t>
+            </a:r>
+            <a:r>
+              <a:rPr dirty="0"/>
+              <a:t> — 238 </a:t>
+            </a:r>
+            <a:r>
+              <a:rPr dirty="0" err="1"/>
+              <a:t>persone</a:t>
+            </a:r>
+            <a:r>
+              <a:rPr dirty="0"/>
+              <a:t>, 93 </a:t>
+            </a:r>
+            <a:r>
+              <a:rPr dirty="0" err="1"/>
+              <a:t>progetti</a:t>
+            </a:r>
+            <a:r>
+              <a:rPr dirty="0"/>
+              <a:t>, 55 skill</a:t>
             </a:r>
           </a:p>
           <a:p>
@@ -36110,7 +39268,32 @@
               </a:defRPr>
             </a:pPr>
             <a:r>
-              <a:t>•  Tutte le proprietà sono in inglese (name, employee_id, location, title, proficiency)</a:t>
+              <a:rPr dirty="0"/>
+              <a:t>•  Tutte le </a:t>
+            </a:r>
+            <a:r>
+              <a:rPr dirty="0" err="1"/>
+              <a:t>proprietà</a:t>
+            </a:r>
+            <a:r>
+              <a:rPr dirty="0"/>
+              <a:t> </a:t>
+            </a:r>
+            <a:r>
+              <a:rPr dirty="0" err="1"/>
+              <a:t>sono</a:t>
+            </a:r>
+            <a:r>
+              <a:rPr dirty="0"/>
+              <a:t> in inglese (name, </a:t>
+            </a:r>
+            <a:r>
+              <a:rPr dirty="0" err="1"/>
+              <a:t>employee_id</a:t>
+            </a:r>
+            <a:r>
+              <a:rPr dirty="0"/>
+              <a:t>, location, title, proficiency)</a:t>
             </a:r>
           </a:p>
         </p:txBody>
@@ -36124,7 +39307,7 @@
 </file>
 
 <file path=ppt/slides/slide27.xml><?xml version="1.0" encoding="utf-8"?>
-<p:sld xmlns:a="http://schemas.openxmlformats.org/drawingml/2006/main" xmlns:p="http://schemas.openxmlformats.org/presentationml/2006/main" xmlns:r="http://schemas.openxmlformats.org/officeDocument/2006/relationships">
+<p:sld xmlns:a="http://schemas.openxmlformats.org/drawingml/2006/main" xmlns:r="http://schemas.openxmlformats.org/officeDocument/2006/relationships" xmlns:p="http://schemas.openxmlformats.org/presentationml/2006/main">
   <p:cSld>
     <p:bg>
       <p:bgPr>
@@ -36140,7 +39323,14 @@
         <p:cNvGrpSpPr/>
         <p:nvPr/>
       </p:nvGrpSpPr>
-      <p:grpSpPr/>
+      <p:grpSpPr>
+        <a:xfrm>
+          <a:off x="0" y="0"/>
+          <a:ext cx="0" cy="0"/>
+          <a:chOff x="0" y="0"/>
+          <a:chExt cx="0" cy="0"/>
+        </a:xfrm>
+      </p:grpSpPr>
       <p:sp>
         <p:nvSpPr>
           <p:cNvPr id="2" name="Rectangle 1"/>
@@ -36181,6 +39371,7 @@
           <a:lstStyle/>
           <a:p>
             <a:pPr algn="ctr"/>
+            <a:endParaRPr/>
           </a:p>
         </p:txBody>
       </p:sp>
@@ -36368,7 +39559,7 @@
 </file>
 
 <file path=ppt/slides/slide3.xml><?xml version="1.0" encoding="utf-8"?>
-<p:sld xmlns:a="http://schemas.openxmlformats.org/drawingml/2006/main" xmlns:p="http://schemas.openxmlformats.org/presentationml/2006/main" xmlns:r="http://schemas.openxmlformats.org/officeDocument/2006/relationships">
+<p:sld xmlns:a="http://schemas.openxmlformats.org/drawingml/2006/main" xmlns:r="http://schemas.openxmlformats.org/officeDocument/2006/relationships" xmlns:p="http://schemas.openxmlformats.org/presentationml/2006/main">
   <p:cSld>
     <p:bg>
       <p:bgPr>
@@ -36384,7 +39575,14 @@
         <p:cNvGrpSpPr/>
         <p:nvPr/>
       </p:nvGrpSpPr>
-      <p:grpSpPr/>
+      <p:grpSpPr>
+        <a:xfrm>
+          <a:off x="0" y="0"/>
+          <a:ext cx="0" cy="0"/>
+          <a:chOff x="0" y="0"/>
+          <a:chExt cx="0" cy="0"/>
+        </a:xfrm>
+      </p:grpSpPr>
       <p:sp>
         <p:nvSpPr>
           <p:cNvPr id="2" name="TextBox 1"/>
@@ -36646,6 +39844,7 @@
           <a:lstStyle/>
           <a:p>
             <a:pPr algn="ctr"/>
+            <a:endParaRPr/>
           </a:p>
         </p:txBody>
       </p:sp>
@@ -36781,7 +39980,7 @@
 </file>
 
 <file path=ppt/slides/slide4.xml><?xml version="1.0" encoding="utf-8"?>
-<p:sld xmlns:a="http://schemas.openxmlformats.org/drawingml/2006/main" xmlns:p="http://schemas.openxmlformats.org/presentationml/2006/main" xmlns:r="http://schemas.openxmlformats.org/officeDocument/2006/relationships">
+<p:sld xmlns:a="http://schemas.openxmlformats.org/drawingml/2006/main" xmlns:r="http://schemas.openxmlformats.org/officeDocument/2006/relationships" xmlns:p="http://schemas.openxmlformats.org/presentationml/2006/main">
   <p:cSld>
     <p:bg>
       <p:bgPr>
@@ -36797,7 +39996,14 @@
         <p:cNvGrpSpPr/>
         <p:nvPr/>
       </p:nvGrpSpPr>
-      <p:grpSpPr/>
+      <p:grpSpPr>
+        <a:xfrm>
+          <a:off x="0" y="0"/>
+          <a:ext cx="0" cy="0"/>
+          <a:chOff x="0" y="0"/>
+          <a:chExt cx="0" cy="0"/>
+        </a:xfrm>
+      </p:grpSpPr>
       <p:sp>
         <p:nvSpPr>
           <p:cNvPr id="2" name="TextBox 1"/>
@@ -37062,6 +40268,7 @@
           <a:lstStyle/>
           <a:p>
             <a:pPr algn="ctr"/>
+            <a:endParaRPr/>
           </a:p>
         </p:txBody>
       </p:sp>
@@ -37199,7 +40406,7 @@
 </file>
 
 <file path=ppt/slides/slide5.xml><?xml version="1.0" encoding="utf-8"?>
-<p:sld xmlns:a="http://schemas.openxmlformats.org/drawingml/2006/main" xmlns:p="http://schemas.openxmlformats.org/presentationml/2006/main" xmlns:r="http://schemas.openxmlformats.org/officeDocument/2006/relationships">
+<p:sld xmlns:a="http://schemas.openxmlformats.org/drawingml/2006/main" xmlns:r="http://schemas.openxmlformats.org/officeDocument/2006/relationships" xmlns:p="http://schemas.openxmlformats.org/presentationml/2006/main">
   <p:cSld>
     <p:bg>
       <p:bgPr>
@@ -37215,7 +40422,14 @@
         <p:cNvGrpSpPr/>
         <p:nvPr/>
       </p:nvGrpSpPr>
-      <p:grpSpPr/>
+      <p:grpSpPr>
+        <a:xfrm>
+          <a:off x="0" y="0"/>
+          <a:ext cx="0" cy="0"/>
+          <a:chOff x="0" y="0"/>
+          <a:chExt cx="0" cy="0"/>
+        </a:xfrm>
+      </p:grpSpPr>
       <p:sp>
         <p:nvSpPr>
           <p:cNvPr id="2" name="TextBox 1"/>
@@ -37484,6 +40698,7 @@
           <a:lstStyle/>
           <a:p>
             <a:pPr algn="ctr"/>
+            <a:endParaRPr/>
           </a:p>
         </p:txBody>
       </p:sp>
@@ -37577,7 +40792,7 @@
 </file>
 
 <file path=ppt/slides/slide6.xml><?xml version="1.0" encoding="utf-8"?>
-<p:sld xmlns:a="http://schemas.openxmlformats.org/drawingml/2006/main" xmlns:p="http://schemas.openxmlformats.org/presentationml/2006/main" xmlns:r="http://schemas.openxmlformats.org/officeDocument/2006/relationships">
+<p:sld xmlns:a="http://schemas.openxmlformats.org/drawingml/2006/main" xmlns:r="http://schemas.openxmlformats.org/officeDocument/2006/relationships" xmlns:p="http://schemas.openxmlformats.org/presentationml/2006/main">
   <p:cSld>
     <p:bg>
       <p:bgPr>
@@ -37593,7 +40808,14 @@
         <p:cNvGrpSpPr/>
         <p:nvPr/>
       </p:nvGrpSpPr>
-      <p:grpSpPr/>
+      <p:grpSpPr>
+        <a:xfrm>
+          <a:off x="0" y="0"/>
+          <a:ext cx="0" cy="0"/>
+          <a:chOff x="0" y="0"/>
+          <a:chExt cx="0" cy="0"/>
+        </a:xfrm>
+      </p:grpSpPr>
       <p:sp>
         <p:nvSpPr>
           <p:cNvPr id="2" name="TextBox 1"/>
@@ -37948,6 +41170,7 @@
           <a:lstStyle/>
           <a:p>
             <a:pPr algn="ctr"/>
+            <a:endParaRPr/>
           </a:p>
         </p:txBody>
       </p:sp>
@@ -38029,6 +41252,7 @@
           <a:lstStyle/>
           <a:p>
             <a:pPr algn="ctr"/>
+            <a:endParaRPr/>
           </a:p>
         </p:txBody>
       </p:sp>
@@ -38143,7 +41367,7 @@
         </p:nvSpPr>
         <p:spPr>
           <a:xfrm>
-            <a:off x="5669280" y="4297680"/>
+            <a:off x="6096000" y="4297680"/>
             <a:ext cx="4846320" cy="1645920"/>
           </a:xfrm>
           <a:prstGeom prst="rect">
@@ -38177,6 +41401,7 @@
           <a:lstStyle/>
           <a:p>
             <a:pPr algn="ctr"/>
+            <a:endParaRPr/>
           </a:p>
         </p:txBody>
       </p:sp>
@@ -38188,7 +41413,7 @@
         </p:nvSpPr>
         <p:spPr>
           <a:xfrm>
-            <a:off x="5779008" y="4370832"/>
+            <a:off x="6205728" y="4370832"/>
             <a:ext cx="4626864" cy="1499616"/>
           </a:xfrm>
           <a:prstGeom prst="rect">
@@ -38229,6 +41454,7 @@
                 <a:latin typeface="Consolas"/>
               </a:defRPr>
             </a:pPr>
+            <a:endParaRPr/>
           </a:p>
           <a:p>
             <a:pPr>
@@ -38274,6 +41500,7 @@
                 <a:latin typeface="Consolas"/>
               </a:defRPr>
             </a:pPr>
+            <a:endParaRPr/>
           </a:p>
           <a:p>
             <a:pPr>
@@ -38318,7 +41545,7 @@
 </file>
 
 <file path=ppt/slides/slide7.xml><?xml version="1.0" encoding="utf-8"?>
-<p:sld xmlns:a="http://schemas.openxmlformats.org/drawingml/2006/main" xmlns:p="http://schemas.openxmlformats.org/presentationml/2006/main" xmlns:r="http://schemas.openxmlformats.org/officeDocument/2006/relationships">
+<p:sld xmlns:a="http://schemas.openxmlformats.org/drawingml/2006/main" xmlns:r="http://schemas.openxmlformats.org/officeDocument/2006/relationships" xmlns:p="http://schemas.openxmlformats.org/presentationml/2006/main">
   <p:cSld>
     <p:bg>
       <p:bgPr>
@@ -38334,7 +41561,14 @@
         <p:cNvGrpSpPr/>
         <p:nvPr/>
       </p:nvGrpSpPr>
-      <p:grpSpPr/>
+      <p:grpSpPr>
+        <a:xfrm>
+          <a:off x="0" y="0"/>
+          <a:ext cx="0" cy="0"/>
+          <a:chOff x="0" y="0"/>
+          <a:chExt cx="0" cy="0"/>
+        </a:xfrm>
+      </p:grpSpPr>
       <p:sp>
         <p:nvSpPr>
           <p:cNvPr id="2" name="TextBox 1"/>
@@ -38643,6 +41877,7 @@
           <a:lstStyle/>
           <a:p>
             <a:pPr algn="ctr"/>
+            <a:endParaRPr/>
           </a:p>
         </p:txBody>
       </p:sp>
@@ -38850,7 +42085,7 @@
 </file>
 
 <file path=ppt/slides/slide8.xml><?xml version="1.0" encoding="utf-8"?>
-<p:sld xmlns:a="http://schemas.openxmlformats.org/drawingml/2006/main" xmlns:p="http://schemas.openxmlformats.org/presentationml/2006/main" xmlns:r="http://schemas.openxmlformats.org/officeDocument/2006/relationships">
+<p:sld xmlns:a="http://schemas.openxmlformats.org/drawingml/2006/main" xmlns:r="http://schemas.openxmlformats.org/officeDocument/2006/relationships" xmlns:p="http://schemas.openxmlformats.org/presentationml/2006/main">
   <p:cSld>
     <p:bg>
       <p:bgPr>
@@ -38866,7 +42101,14 @@
         <p:cNvGrpSpPr/>
         <p:nvPr/>
       </p:nvGrpSpPr>
-      <p:grpSpPr/>
+      <p:grpSpPr>
+        <a:xfrm>
+          <a:off x="0" y="0"/>
+          <a:ext cx="0" cy="0"/>
+          <a:chOff x="0" y="0"/>
+          <a:chExt cx="0" cy="0"/>
+        </a:xfrm>
+      </p:grpSpPr>
       <p:sp>
         <p:nvSpPr>
           <p:cNvPr id="2" name="TextBox 1"/>
@@ -39144,6 +42386,7 @@
           <a:lstStyle/>
           <a:p>
             <a:pPr algn="ctr"/>
+            <a:endParaRPr/>
           </a:p>
         </p:txBody>
       </p:sp>
@@ -39192,7 +42435,7 @@
 </file>
 
 <file path=ppt/slides/slide9.xml><?xml version="1.0" encoding="utf-8"?>
-<p:sld xmlns:a="http://schemas.openxmlformats.org/drawingml/2006/main" xmlns:p="http://schemas.openxmlformats.org/presentationml/2006/main" xmlns:r="http://schemas.openxmlformats.org/officeDocument/2006/relationships">
+<p:sld xmlns:a="http://schemas.openxmlformats.org/drawingml/2006/main" xmlns:r="http://schemas.openxmlformats.org/officeDocument/2006/relationships" xmlns:p="http://schemas.openxmlformats.org/presentationml/2006/main">
   <p:cSld>
     <p:bg>
       <p:bgPr>
@@ -39208,7 +42451,14 @@
         <p:cNvGrpSpPr/>
         <p:nvPr/>
       </p:nvGrpSpPr>
-      <p:grpSpPr/>
+      <p:grpSpPr>
+        <a:xfrm>
+          <a:off x="0" y="0"/>
+          <a:ext cx="0" cy="0"/>
+          <a:chOff x="0" y="0"/>
+          <a:chExt cx="0" cy="0"/>
+        </a:xfrm>
+      </p:grpSpPr>
       <p:sp>
         <p:nvSpPr>
           <p:cNvPr id="2" name="TextBox 1"/>
